--- a/slides/2026-10-02_研究進捗報告.pptx
+++ b/slides/2026-10-02_研究進捗報告.pptx
@@ -18,6 +18,9 @@
     <p:sldId id="266" r:id="rId17"/>
     <p:sldId id="267" r:id="rId18"/>
     <p:sldId id="268" r:id="rId19"/>
+    <p:sldId id="269" r:id="rId20"/>
+    <p:sldId id="270" r:id="rId21"/>
+    <p:sldId id="271" r:id="rId22"/>
   </p:sldIdLst>
   <p:sldSz cx="12192000" cy="6858000"/>
   <p:notesSz cx="6858000" cy="9144000"/>
@@ -530,7 +533,7 @@
           <a:lstStyle/>
           <a:p>
             <a:r>
-              <a:t>今日は、前回までの再現の結果、そこで起きた問題、その原因を調べた結果、矮小銀河への適用の順に話します。</a:t>
+              <a:t>今日の流れ: 今の研究 → 起きた問題 3 つ → 調べて分かったこと → 矮小銀河への適用 (7 月に実施済み) と結果 → 矮小銀河の J ファクターの誤差を論じた論文 (Bertólez-Martínez+ 2026) の解説 → その誤差を自分の結果に当てはめた結果 → まとめ。</a:t>
             </a:r>
           </a:p>
         </p:txBody>
@@ -600,22 +603,17 @@
           <a:lstStyle/>
           <a:p>
             <a:r>
-              <a:t>矮小銀河 54 個は Local Volume Database (Pace 2025) の確認済み銀河 (LMC/SMC を含む)。対照領域は |b|&gt;20°、互いに 20° 以上離した何も無い場所。</a:t>
-            </a:r>
-          </a:p>
-          <a:p>
-            <a:r>
-              <a:t>成分は等方・ガス・ICS・点源・ハロー (バブルと Loop I は銀河中心の構造なので入れない)。</a:t>
-            </a:r>
-          </a:p>
-          <a:p>
-            <a:r>
-              <a:t>たとえ: 天の川のハローは部屋全体を照らす光なので電球と見分けにくかった。矮小銀河は遠くの豆電球 (0.2〜0.4°) なので、半径 10° の範囲では電球はほぼ平らな背景にしか見えず、混ざらない。</a:t>
-            </a:r>
-          </a:p>
-          <a:p>
-            <a:r>
-              <a:t>矮小銀河は望遠鏡のぼやけ (PSF) より小さいので、この手法では点源と区別できない点には注意。</a:t>
+              <a:t>左: 有意度の分布。期待される正規分布 (点線) より少し広い。真ん中: 天体ごとの最大の σ。右: 解析した位置。</a:t>
+            </a:r>
+          </a:p>
+          <a:p>
+            <a:r>
+              <a:t>矮小銀河・M31/M33 のどこにも検出は無い。何も無い対照領域 23 か所の 250 個の有意度は平均 −0.021、標準偏差 1.362、最大 +4.50σ。</a:t>
+            </a:r>
+          </a:p>
+          <a:p>
+            <a:r>
+              <a:t>では、天の川の超過が暗黒物質だとしたら、矮小銀河でどれくらい見えるはずだったのか? → この問いに、次の論文が関わる。</a:t>
             </a:r>
           </a:p>
         </p:txBody>
@@ -685,17 +683,17 @@
           <a:lstStyle/>
           <a:p>
             <a:r>
-              <a:t>左: 有意度の分布。期待される正規分布 (点線) より少し広い。真ん中: 天体ごとの最大の σ。右: 解析した位置。</a:t>
-            </a:r>
-          </a:p>
-          <a:p>
-            <a:r>
-              <a:t>矮小銀河・M31/M33 のどこにも検出は無い (833 個の有意度のうち最大 +3.46σ)。</a:t>
-            </a:r>
-          </a:p>
-          <a:p>
-            <a:r>
-              <a:t>何も無い対照領域 23 か所の 250 個の有意度: 平均 −0.021、標準偏差 1.362 (期待は 1)、最大 +4.50σ、|σ|&gt;3 が 2.4% (期待 0.27%)。この手法の名目 σ は過大評価になっている。</a:t>
+              <a:t>arXiv:2609.20944。J ファクター = 暗黒物質の密度を 2 乗して視線方向に足し合わせた量。矮小銀河では星の動きから推定する (Jeans 解析)。</a:t>
+            </a:r>
+          </a:p>
+          <a:p>
+            <a:r>
+              <a:t>Section II の 8 つの原因: (1) 広がりを無視して点源扱い (重ねた解析で上限が 1.5〜1.8 倍きつくなる) (2) ハローの形 (コアがあると制限が数倍ゆるむ) (3) 星の分布の形 (Plummer 分布の仮定) (4) 球対称からのずれ (log₁₀J が最大 0.4 ずれる) (5) 平衡からのずれ (0.1 程度) (6) 見分けられない連星 (Reticulum II で 0.3) (7) 手前の星の混入 (8) J の誤差が正規分布でない (すそが重い)。</a:t>
+            </a:r>
+          </a:p>
+          <a:p>
+            <a:r>
+              <a:t>Fig.1: 同じ矮小銀河の J を測った複数の文献が、書かれた誤差より大きくばらついている。</a:t>
             </a:r>
           </a:p>
         </p:txBody>
@@ -765,17 +763,22 @@
           <a:lstStyle/>
           <a:p>
             <a:r>
-              <a:t>期待信号の出し方: 天の川のハローの明るさ × (矮小銀河の J ファクター / 天の川の J ファクター)。J ファクター = 暗黒物質の密度の 2 乗を視線方向に足した量。粒子の性質は比をとると消える。</a:t>
-            </a:r>
-          </a:p>
-          <a:p>
-            <a:r>
-              <a:t>幅が 1.35〜5.4σ と広いのは、天の川の暗黒物質の密度の仮定 (局所密度 0.2〜0.6 GeV/cm³) が 2 乗で効くため。</a:t>
-            </a:r>
-          </a:p>
-          <a:p>
-            <a:r>
-              <a:t>さらに、矮小銀河の J の誤差をゼロとして扱っている。Bertólez-Martínez+ (2026) は約 3 倍 (Δlog₁₀J ≈ 0.5) の誤差を見込むべきとしているので、実際の幅はもっと広い。</a:t>
+              <a:t>Section III: FermiTools と fermipy で 10°×10° の ROI を 0.08° の画素で解析。背景は Fermi 標準の拡散モデル (gll_iem_v07) と等方背景。</a:t>
+            </a:r>
+          </a:p>
+          <a:p>
+            <a:r>
+              <a:t>信号は bb̄ に消滅する 42 GeV の WIMP (GCE を説明する値)。古典的な矮小銀河は核のある NFW、超暗い矮小銀河は NFW。</a:t>
+            </a:r>
+          </a:p>
+          <a:p>
+            <a:r>
+              <a:t>注入した本物の信号を、95% 上限が誤って除外してしまう割合 (本来 5% 以下であるべき) を数える。</a:t>
+            </a:r>
+          </a:p>
+          <a:p>
+            <a:r>
+              <a:t>σ_L を σ より小さくすると「ソフトが自信満々」の状態。</a:t>
             </a:r>
           </a:p>
         </p:txBody>
@@ -845,17 +848,272 @@
           <a:lstStyle/>
           <a:p>
             <a:r>
-              <a:t>矮小銀河の格上げの中心は J の誤差。Bertólez-Martínez+ (2026, arXiv:2609.20944) が、J の誤差を小さく見積もると本物の信号を見落としやすくなると示している。</a:t>
-            </a:r>
-          </a:p>
-          <a:p>
-            <a:r>
-              <a:t>天の川: ICS の明るさはエネルギーに対してなめらかに変わるはず。ハローは 20 GeV 付近だけ強い。全エネルギーをまとめて当てはめれば、形が似ていても色で見分けられる可能性がある。</a:t>
-            </a:r>
-          </a:p>
-          <a:p>
-            <a:r>
-              <a:t>大がかりな新しい解析は増やさず、卒論の執筆を優先する。</a:t>
+              <a:t>Section IV (Ursa Minor): 本当のばらつき σ を 0.3 / 0.5 / 1.0 増やして σ_L は据え置くと、本物を除外する割合が 1.7% / 8.0% / 22%。σ_L を σ に合わせれば 5% 以下に戻る。σ_L を広げると上限は 1.5 / 2.5 / 11 倍ゆるむ。形の誤り: 核のある NFW を球対称 NFW で当てると 2.4 倍、点源扱いで 1.4 倍、上限がきつく出すぎる。</a:t>
+            </a:r>
+          </a:p>
+          <a:p>
+            <a:r>
+              <a:t>Section V (27 個): 基準のままでも 21% (95% のはずが)。σ を 0.3 / 0.5 / 1.0 増やすと 31% / 49% / 88%。σ_L を σ に合わせても 23% / 28% / 38%。理由: J は対数正規分布で上に長いすそがあり、27 個あれば 1.5σ 以上上振れする天体がどれか 1 つある確率が 0.85。</a:t>
+            </a:r>
+          </a:p>
+          <a:p>
+            <a:r>
+              <a:t>結論: シミュレーションや blank field で較正すべき。J の誤差をもっと良く抑えることが必要。</a:t>
+            </a:r>
+          </a:p>
+        </p:txBody>
+      </p:sp>
+      <p:sp>
+        <p:nvSpPr>
+          <p:cNvPr id="4" name="Slide Number Placeholder 3"/>
+          <p:cNvSpPr>
+            <a:spLocks noGrp="1"/>
+          </p:cNvSpPr>
+          <p:nvPr>
+            <p:ph type="sldNum" idx="5" sz="quarter"/>
+          </p:nvPr>
+        </p:nvSpPr>
+        <p:spPr/>
+      </p:sp>
+    </p:spTree>
+  </p:cSld>
+  <p:clrMapOvr>
+    <a:masterClrMapping/>
+  </p:clrMapOvr>
+</p:notes>
+</file>
+
+<file path=ppt/notesSlides/notesSlide14.xml><?xml version="1.0" encoding="utf-8"?>
+<p:notes xmlns:a="http://schemas.openxmlformats.org/drawingml/2006/main" xmlns:p="http://schemas.openxmlformats.org/presentationml/2006/main" xmlns:r="http://schemas.openxmlformats.org/officeDocument/2006/relationships">
+  <p:cSld>
+    <p:spTree>
+      <p:nvGrpSpPr>
+        <p:cNvPr id="1" name=""/>
+        <p:cNvGrpSpPr/>
+        <p:nvPr/>
+      </p:nvGrpSpPr>
+      <p:grpSpPr>
+        <a:xfrm>
+          <a:off x="0" y="0"/>
+          <a:ext cx="0" cy="0"/>
+          <a:chOff x="0" y="0"/>
+          <a:chExt cx="0" cy="0"/>
+        </a:xfrm>
+      </p:grpSpPr>
+      <p:sp>
+        <p:nvSpPr>
+          <p:cNvPr id="2" name="Slide Image Placeholder 1"/>
+          <p:cNvSpPr>
+            <a:spLocks noGrp="1"/>
+          </p:cNvSpPr>
+          <p:nvPr>
+            <p:ph type="sldImg" idx="2"/>
+          </p:nvPr>
+        </p:nvSpPr>
+        <p:spPr/>
+      </p:sp>
+      <p:sp>
+        <p:nvSpPr>
+          <p:cNvPr id="3" name="Notes Placeholder 2"/>
+          <p:cNvSpPr>
+            <a:spLocks noGrp="1"/>
+          </p:cNvSpPr>
+          <p:nvPr>
+            <p:ph type="body" idx="3" sz="quarter"/>
+          </p:nvPr>
+        </p:nvSpPr>
+        <p:spPr/>
+        <p:txBody>
+          <a:bodyPr/>
+          <a:lstStyle/>
+          <a:p>
+            <a:r>
+              <a:t>方法: 各天体の「DM なら何σで見えたはずか」(pred_i) に、J のずれ 10^δ (δ は平均 0、幅 0.5 の正規分布) を掛ける。天体ごとの重み付き和 T = Σ pred_i·meas_i / √Σpred_i² で、予測と実測を同じまとめ方で比べる。</a:t>
+            </a:r>
+          </a:p>
+          <a:p>
+            <a:r>
+              <a:t>SMC・LMC: それ自体が広がったガンマ線源なので、解析で中心がマスクされ、ハローの形の 1〜2% しか残っていなかった (結果ファイルに usable=false)。9/28 の計算はこれを見落とし、SMC 1 天体が予測 2.69σ のうち 2.06σ 分を占めていた。修正案は cloud_reports/2026-10-02_dwarf_consistency_usable.patch。</a:t>
+            </a:r>
+          </a:p>
+          <a:p>
+            <a:r>
+              <a:t>天の川側の密度の仮定 (局所密度 0.3〜0.6 GeV/cm³) も別に動かした。</a:t>
+            </a:r>
+          </a:p>
+        </p:txBody>
+      </p:sp>
+      <p:sp>
+        <p:nvSpPr>
+          <p:cNvPr id="4" name="Slide Number Placeholder 3"/>
+          <p:cNvSpPr>
+            <a:spLocks noGrp="1"/>
+          </p:cNvSpPr>
+          <p:nvPr>
+            <p:ph type="sldNum" idx="5" sz="quarter"/>
+          </p:nvPr>
+        </p:nvSpPr>
+        <p:spPr/>
+      </p:sp>
+    </p:spTree>
+  </p:cSld>
+  <p:clrMapOvr>
+    <a:masterClrMapping/>
+  </p:clrMapOvr>
+</p:notes>
+</file>
+
+<file path=ppt/notesSlides/notesSlide15.xml><?xml version="1.0" encoding="utf-8"?>
+<p:notes xmlns:a="http://schemas.openxmlformats.org/drawingml/2006/main" xmlns:p="http://schemas.openxmlformats.org/presentationml/2006/main" xmlns:r="http://schemas.openxmlformats.org/officeDocument/2006/relationships">
+  <p:cSld>
+    <p:spTree>
+      <p:nvGrpSpPr>
+        <p:cNvPr id="1" name=""/>
+        <p:cNvGrpSpPr/>
+        <p:nvPr/>
+      </p:nvGrpSpPr>
+      <p:grpSpPr>
+        <a:xfrm>
+          <a:off x="0" y="0"/>
+          <a:ext cx="0" cy="0"/>
+          <a:chOff x="0" y="0"/>
+          <a:chExt cx="0" cy="0"/>
+        </a:xfrm>
+      </p:grpSpPr>
+      <p:sp>
+        <p:nvSpPr>
+          <p:cNvPr id="2" name="Slide Image Placeholder 1"/>
+          <p:cNvSpPr>
+            <a:spLocks noGrp="1"/>
+          </p:cNvSpPr>
+          <p:nvPr>
+            <p:ph type="sldImg" idx="2"/>
+          </p:nvPr>
+        </p:nvSpPr>
+        <p:spPr/>
+      </p:sp>
+      <p:sp>
+        <p:nvSpPr>
+          <p:cNvPr id="3" name="Notes Placeholder 2"/>
+          <p:cNvSpPr>
+            <a:spLocks noGrp="1"/>
+          </p:cNvSpPr>
+          <p:nvPr>
+            <p:ph type="body" idx="3" sz="quarter"/>
+          </p:nvPr>
+        </p:nvSpPr>
+        <p:spPr/>
+        <p:txBody>
+          <a:bodyPr/>
+          <a:lstStyle/>
+          <a:p>
+            <a:r>
+              <a:t>使える 43 天体、20 GeV、天の川側の局所密度 0.42 GeV/cm³。</a:t>
+            </a:r>
+          </a:p>
+          <a:p>
+            <a:r>
+              <a:t>J の誤差なし: 期待 1.73σ、実測 0.39σ、ずれ 1.3σ (空の領域の σ のばらつき 1.362 で補正すると 1.0σ)。</a:t>
+            </a:r>
+          </a:p>
+          <a:p>
+            <a:r>
+              <a:t>J の誤差 (約 3 倍) あり: 期待の中央値 2.4σ、68% の範囲 1.3〜5.0σ。ずれ 1.5σ (補正後 1.2σ)。</a:t>
+            </a:r>
+          </a:p>
+          <a:p>
+            <a:r>
+              <a:t>天の川側の密度を 0.3〜0.6 GeV/cm³ で動かすと、期待は 0.6〜9.7σ まで広がる (密度が低いほど期待は大きい)。どの組み合わせでもずれは補正後 2.2σ 以下。</a:t>
+            </a:r>
+          </a:p>
+          <a:p>
+            <a:r>
+              <a:t>→ 暗黒物質と矛盾はしないが、確認もできない。誤差を正直に入れるほど「判定できない」が強くなる。教授の「矮小銀河では粗すぎる」を数字で裏付けた形。</a:t>
+            </a:r>
+          </a:p>
+          <a:p>
+            <a:r>
+              <a:t>注意: 9/28 の「期待 1.35〜5.4σ」は使えない天体 (SMC・LMC) 込みの値。使える 43 天体では 0.9〜3.4σ (J の誤差なし)。</a:t>
+            </a:r>
+          </a:p>
+        </p:txBody>
+      </p:sp>
+      <p:sp>
+        <p:nvSpPr>
+          <p:cNvPr id="4" name="Slide Number Placeholder 3"/>
+          <p:cNvSpPr>
+            <a:spLocks noGrp="1"/>
+          </p:cNvSpPr>
+          <p:nvPr>
+            <p:ph type="sldNum" idx="5" sz="quarter"/>
+          </p:nvPr>
+        </p:nvSpPr>
+        <p:spPr/>
+      </p:sp>
+    </p:spTree>
+  </p:cSld>
+  <p:clrMapOvr>
+    <a:masterClrMapping/>
+  </p:clrMapOvr>
+</p:notes>
+</file>
+
+<file path=ppt/notesSlides/notesSlide16.xml><?xml version="1.0" encoding="utf-8"?>
+<p:notes xmlns:a="http://schemas.openxmlformats.org/drawingml/2006/main" xmlns:p="http://schemas.openxmlformats.org/presentationml/2006/main" xmlns:r="http://schemas.openxmlformats.org/officeDocument/2006/relationships">
+  <p:cSld>
+    <p:spTree>
+      <p:nvGrpSpPr>
+        <p:cNvPr id="1" name=""/>
+        <p:cNvGrpSpPr/>
+        <p:nvPr/>
+      </p:nvGrpSpPr>
+      <p:grpSpPr>
+        <a:xfrm>
+          <a:off x="0" y="0"/>
+          <a:ext cx="0" cy="0"/>
+          <a:chOff x="0" y="0"/>
+          <a:chExt cx="0" cy="0"/>
+        </a:xfrm>
+      </p:grpSpPr>
+      <p:sp>
+        <p:nvSpPr>
+          <p:cNvPr id="2" name="Slide Image Placeholder 1"/>
+          <p:cNvSpPr>
+            <a:spLocks noGrp="1"/>
+          </p:cNvSpPr>
+          <p:nvPr>
+            <p:ph type="sldImg" idx="2"/>
+          </p:nvPr>
+        </p:nvSpPr>
+        <p:spPr/>
+      </p:sp>
+      <p:sp>
+        <p:nvSpPr>
+          <p:cNvPr id="3" name="Notes Placeholder 2"/>
+          <p:cNvSpPr>
+            <a:spLocks noGrp="1"/>
+          </p:cNvSpPr>
+          <p:nvPr>
+            <p:ph type="body" idx="3" sz="quarter"/>
+          </p:nvPr>
+        </p:nvSpPr>
+        <p:spPr/>
+        <p:txBody>
+          <a:bodyPr/>
+          <a:lstStyle/>
+          <a:p>
+            <a:r>
+              <a:t>まとめ: 再現 → 3 つの問題 → 原因を調べて背景の間違い説を 3 つ否定 → 矮小銀河は非検出だが判定できない (J の誤差込みで定量化)。</a:t>
+            </a:r>
+          </a:p>
+          <a:p>
+            <a:r>
+              <a:t>今後の案: ICS の明るさはエネルギーに対してなめらかなはず、ハローは 20 GeV 付近だけ強い。全エネルギーをまとめて当てはめれば形が似ていても見分けられる可能性がある。ただし卒論までに入れるには大きいので、今後の課題として述べる程度にする。</a:t>
+            </a:r>
+          </a:p>
+          <a:p>
+            <a:r>
+              <a:t>矮小銀河の解析は広げない。J の誤差の扱いを卒論に一言入れる。</a:t>
             </a:r>
           </a:p>
         </p:txBody>
@@ -925,17 +1183,17 @@
           <a:lstStyle/>
           <a:p>
             <a:r>
-              <a:t>Totani (2025, arXiv:2507.07209) は、天の川を包む暗黒物質のハローから 20 GeV 付近に余分なガンマ線があると報告した (13–19σ)。WIMP の質量 0.5–0.8 TeV。</a:t>
-            </a:r>
-          </a:p>
-          <a:p>
-            <a:r>
-              <a:t>これは銀河中心の GeV 超過 (GCE、35–65 GeV の WIMP) とは別の信号。</a:t>
-            </a:r>
-          </a:p>
-          <a:p>
-            <a:r>
-              <a:t>方法: Fermi-LAT の 15 年分のデータ。13 のエネルギーごとに、9 種類の成分 (等方背景、GALPROP のガスと ICS、点源、Loop I、フェルミバブル正負、NFW ハロー) の明るさを同時に決める。ハロー有り・無しの当てはまりの差から有意度を出す。</a:t>
+              <a:t>Totani (2025, arXiv:2507.07209): 天の川を包む暗黒物質ハローから 20 GeV 付近に超過、13–19σ。WIMP なら 0.5–0.8 TeV。銀河中心 GeV 超過 (GCE、35–65 GeV) とは別の信号。</a:t>
+            </a:r>
+          </a:p>
+          <a:p>
+            <a:r>
+              <a:t>Fermi-LAT 15 年分、13 エネルギービン、9 成分を同時に当てはめ、ハロー有り・無しの差から有意度を出す。</a:t>
+            </a:r>
+          </a:p>
+          <a:p>
+            <a:r>
+              <a:t>図: 青が本研究 (v20r、10/1 に記録付きで再計算)、赤が Totani Fig.9。山・谷の位置も一致。Bin6 (20.76 GeV) で 19.0σ。</a:t>
             </a:r>
           </a:p>
         </p:txBody>
@@ -1005,27 +1263,17 @@
           <a:lstStyle/>
           <a:p>
             <a:r>
-              <a:t>青が本研究、赤が Totani の Fig.9 を読み取ったもの。</a:t>
-            </a:r>
-          </a:p>
-          <a:p>
-            <a:r>
-              <a:t>Bin6 (20.76 GeV) で 19.0σ、Bin5 (12.3 GeV) で 19.7σ。1.5 GeV で負になる・2.5 GeV で谷・12–21 GeV で頂点・200 GeV 以上でほぼ 0、という形も Totani と同じ。</a:t>
-            </a:r>
-          </a:p>
-          <a:p>
-            <a:r>
-              <a:t>本研究のほうが 1.3〜1.6 倍大きく出ている。</a:t>
-            </a:r>
-          </a:p>
-          <a:p>
-            <a:r>
-              <a:t>7/23 の値 (19.1σ) は計算時の記録が無く再現できなかったので、10/1 に記録付きで再計算した v20r に差し替えた。同じ計算を 2 回して最後の桁まで一致することも確認した。</a:t>
-            </a:r>
-          </a:p>
-          <a:p>
-            <a:r>
-              <a:t>注意: σ は名目値。空の領域で試すと過大評価になっている (後で説明)。</a:t>
+              <a:t>(a) 何も無い対照領域 23 か所 (250 個の有意度) で同じ解析をすると、σ の分布の標準偏差は 1 ではなく 1.362、最大 +4.50σ、|σ|&gt;3 が 2.4% (期待 0.27%)。19σ という数字そのものは過大評価になっている。</a:t>
+            </a:r>
+          </a:p>
+          <a:p>
+            <a:r>
+              <a:t>(b) フェルミバブルの矩形 |l|&lt;22°, 10°&lt;|b|&lt;55° を当てはめから外すと 19.0σ → 4.96σ。</a:t>
+            </a:r>
+          </a:p>
+          <a:p>
+            <a:r>
+              <a:t>(c) 7/23 に出した v20 (19.1σ) を同じ設定で計算し直しても一致しなかった。</a:t>
             </a:r>
           </a:p>
         </p:txBody>
@@ -1095,22 +1343,17 @@
           <a:lstStyle/>
           <a:p>
             <a:r>
-              <a:t>たとえ: 部屋に電球 (ICS) がついていて、もう 1 つの光 (ハロー) を探している。写真で見ると 2 つの光の形がほとんど同じなので、余った明るさが本当にもう 1 つの光なのか、電球が少し明るいだけなのか見分けにくい。これが縮退。</a:t>
-            </a:r>
-          </a:p>
-          <a:p>
-            <a:r>
-              <a:t>図: ICS の明るさ (GALPROP の予測の何倍か)。ハロー無しだと全エネルギーで約 1.6 倍で平ら。ハローを入れると、ハローが効く 7〜170 GeV でだけ大きくへこむ (59 GeV で 0.18)。</a:t>
-            </a:r>
-          </a:p>
-          <a:p>
-            <a:r>
-              <a:t>ハローを入れたときに ICS から減った光は、ハローの光とほぼ同じ量 (0.8〜1.0 倍)。</a:t>
-            </a:r>
-          </a:p>
-          <a:p>
-            <a:r>
-              <a:t>緯度方向の暗くなり方も、ハローと ICS (星の光) でほぼ同じ (|b| 25°→55° で 2.74 倍と 2.75 倍)。</a:t>
+              <a:t>たとえ: 部屋に電球 (ICS) がついていて、もう 1 つの光 (ハロー) を探している。写真では 2 つの光の形がほとんど同じなので、余った明るさが本当にもう 1 つの光なのか、電球が少し明るいだけなのか見分けにくい。これが縮退。</a:t>
+            </a:r>
+          </a:p>
+          <a:p>
+            <a:r>
+              <a:t>図: ICS の明るさ (GALPROP の予測の何倍か)。ハロー無しでは全エネルギーで約 1.6 倍で平ら。ハローを入れると、ハローが効くビンでだけへこむ。ハローの光の 8〜10 割は ICS から移ったもの。</a:t>
+            </a:r>
+          </a:p>
+          <a:p>
+            <a:r>
+              <a:t>緯度方向の暗くなり方もハローと ICS でほぼ同じ (|b| 25°→55° で 2.74 倍と 2.75 倍)。違いは「銀河中心の方向に集まっているか」だけ。</a:t>
             </a:r>
           </a:p>
         </p:txBody>
@@ -1180,17 +1423,22 @@
           <a:lstStyle/>
           <a:p>
             <a:r>
-              <a:t>フェルミバブル = 銀河中心から上下に伸びる巨大なガンマ線の泡。矩形 |l|&lt;22°, 10°&lt;|b|&lt;55° を当てはめから外した。</a:t>
-            </a:r>
-          </a:p>
-          <a:p>
-            <a:r>
-              <a:t>同じ形の矩形を経度方向に ±20°, ±30°, ±38° ずらして外すと 13.4〜16.3σ までしか下がらない。バブルの位置だけで大きく下がる。</a:t>
-            </a:r>
-          </a:p>
-          <a:p>
-            <a:r>
-              <a:t>ここから 2 つの疑いが出た: バブル領域の何かがハローのふりをしているのか、ICS のモデルが間違っているのか。これを順番に調べた。</a:t>
+              <a:t>ハローと他の成分の違いは「銀河中心の方向に光が集まっているか」だけ。その手がかり (フィッシャー情報) の 54% がバブル矩形 (面積は ROI の 34%) にある。</a:t>
+            </a:r>
+          </a:p>
+          <a:p>
+            <a:r>
+              <a:t>手がかりの量の減り方だけで有意度を予測すると 6.4σ、実測 4.96σ。残りの差は、バブル外でハローの明るさが 23% 低いことで説明でき、その差は有意ではない (約 1.5σ)。</a:t>
+            </a:r>
+          </a:p>
+          <a:p>
+            <a:r>
+              <a:t>同じ形の矩形を経度方向に ±20°, ±30°, ±38° ずらして外すと 13.4〜16.3σ。こちらも予測と実測が合う。</a:t>
+            </a:r>
+          </a:p>
+          <a:p>
+            <a:r>
+              <a:t>たとえ: 写真の真ん中を隠すと自信が下がるが、それは見分けるヒントが真ん中に集まっていたから。</a:t>
             </a:r>
           </a:p>
         </p:txBody>
@@ -1260,22 +1508,17 @@
           <a:lstStyle/>
           <a:p>
             <a:r>
-              <a:t>ハローと他の成分の違いは「銀河中心の方向に光が集まっているか」だけ。その手がかり (統計でいうフィッシャー情報) の 54% がバブル矩形の中にある。矩形の面積は 34% しかない。</a:t>
-            </a:r>
-          </a:p>
-          <a:p>
-            <a:r>
-              <a:t>手がかりの量の減り方だけで有意度を予測すると 6.4σ。実測 5.0σ とほぼ合う。経度をずらした対照の矩形でも予測と実測は合う (比 0.9〜1.2)。</a:t>
-            </a:r>
-          </a:p>
-          <a:p>
-            <a:r>
-              <a:t>バブルの外だけで当てはめたハローの明るさは 1.14 ± 0.23 倍、全体では 1.48 倍。差は 1.5σ で意味のある差ではない。</a:t>
-            </a:r>
-          </a:p>
-          <a:p>
-            <a:r>
-              <a:t>たとえ: 写真の真ん中を隠すと自信が下がるが、それは見分けるヒントが真ん中に集まっていたから。ズルではない。</a:t>
+              <a:t>2.3 倍: ICS をバブル矩形の内と外で別々の明るさにすると、内側が 2.3 倍のときハローの当てはまりの改善の 92% を ICS が説明してしまう。全体の明るさのずれ (f_ics が 1.6 倍など) は倍率が吸収するのでハローにならない。必要なのは内と外の比のずれ。</a:t>
+            </a:r>
+          </a:p>
+          <a:p>
+            <a:r>
+              <a:t>等方近似: GALPROP の設定が IC_anisotropic = 0。Moskalenko &amp; Strong (2000) の Fig.6 では、非等方の補正は 10 GeV 付近で 1.1〜1.3 倍、銀河中心の上より外側のほうが大きい。</a:t>
+            </a:r>
+          </a:p>
+          <a:p>
+            <a:r>
+              <a:t>3 分割: 星の光・ちり・宇宙背景の光に分けて明るさを自由にすると、20 GeV のハローは 19.5σ → 18.4σ。この 2 つはクラウドの計算機で同じ条件で比べた値で、基準が 19.0σ (本人 PC) と少し違うので「約 1σ 下がる」と差で言う。Totani §3.4.4 の同種の確認とも同じ結論。</a:t>
             </a:r>
           </a:p>
         </p:txBody>
@@ -1345,17 +1588,17 @@
           <a:lstStyle/>
           <a:p>
             <a:r>
-              <a:t>GALPROP の設定で IC_anisotropic = 0 (等方近似) になっていた。実際の星の光は銀河面から来るので向きに偏りがあり、Fermi チームはその補正 (非等方) をかけている。</a:t>
-            </a:r>
-          </a:p>
-          <a:p>
-            <a:r>
-              <a:t>Moskalenko &amp; Strong (2000, ApJ 528, 357) の Fig.6: 10 GeV 付近で、銀河中心の上 (0°, 45°) は約 1.13〜1.2 倍、外側 (90°, 45°) は約 1.18〜1.3 倍。</a:t>
-            </a:r>
-          </a:p>
-          <a:p>
-            <a:r>
-              <a:t>ハローの代わりになるには、バブル領域の中だけ約 2.3 倍明るい必要がある (次のスライド)。大きさも向きも足りない。</a:t>
+              <a:t>結果ファイルに「どの状態のコードで計算したか」の記録が無かった (ローカルの調査)。</a:t>
+            </a:r>
+          </a:p>
+          <a:p>
+            <a:r>
+              <a:t>10/1 に同じ計算を 2 回して、テンプレート・尤度・全パラメータが最後の桁まで一致することを確認。今後の結果ファイルにはコミット番号と設定を自動で記録する。</a:t>
+            </a:r>
+          </a:p>
+          <a:p>
+            <a:r>
+              <a:t>有意度は 19.1σ → 19.0σ でほぼ同じ。全 13 ビンで差は 1σ 未満。ガスと ICS の分け方は少し変わった (成分比: ガス 0.91 / ICS 1.15)。</a:t>
             </a:r>
           </a:p>
         </p:txBody>
@@ -1425,17 +1668,17 @@
           <a:lstStyle/>
           <a:p>
             <a:r>
-              <a:t>Totani も §3.4.4 で同じ種類の確認 (gas rings &amp; 3 ICS) をしていて、ハローは残ったと報告している。</a:t>
-            </a:r>
-          </a:p>
-          <a:p>
-            <a:r>
-              <a:t>19.5σ → 18.4σ は、同じ計算機・同じ条件で ICS 1 枚と 3 枚を比べた値 (クラウドで計算)。</a:t>
-            </a:r>
-          </a:p>
-          <a:p>
-            <a:r>
-              <a:t>2.3 倍の条件: ICS をバブル矩形の内と外で別々の明るさにすると、内側が 2.3 倍のとき、ハローの当てはまりの改善の 92% を ICS が説明してしまう (ハローは 6.6σ まで下がる)。</a:t>
+              <a:t>言えるのは「既知の背景では説明できない超過がある」まで。それが暗黒物質かどうかは別の主張。</a:t>
+            </a:r>
+          </a:p>
+          <a:p>
+            <a:r>
+              <a:t>残る可能性: ICS の空間分布が銀河中心寄りで 2.3 倍もずれている場合。今の道具では確かめられない。</a:t>
+            </a:r>
+          </a:p>
+          <a:p>
+            <a:r>
+              <a:t>→ 独立な確認として、矮小銀河を見る。</a:t>
             </a:r>
           </a:p>
         </p:txBody>
@@ -1505,17 +1748,22 @@
           <a:lstStyle/>
           <a:p>
             <a:r>
-              <a:t>まとめ: 電球の勘違い説は 3 回ためして 3 回とも外れた。</a:t>
-            </a:r>
-          </a:p>
-          <a:p>
-            <a:r>
-              <a:t>σ の較正: 何も無い対照領域 23 か所 (250 個の有意度) で同じ解析をすると、σ の分布の標準偏差は 1 ではなく 1.362、最大 4.50σ。19σ という数字そのものは過大評価になっている。</a:t>
-            </a:r>
-          </a:p>
-          <a:p>
-            <a:r>
-              <a:t>言えるのは「既知の背景では説明できない超過がある」まで。それが暗黒物質かどうかは別の主張。</a:t>
+              <a:t>矮小銀河 54 個は Local Volume Database (Pace 2025) の確認済み銀河。対照領域は |b|&gt;20° で互いに 20° 以上離した何も無い場所。</a:t>
+            </a:r>
+          </a:p>
+          <a:p>
+            <a:r>
+              <a:t>成分は等方・ガス・ICS・点源・ハロー。バブルと Loop I は銀河中心の構造なので入れない。</a:t>
+            </a:r>
+          </a:p>
+          <a:p>
+            <a:r>
+              <a:t>たとえ: 天の川のハローは部屋全体を照らす光なので電球と見分けにくかった。矮小銀河は遠くの豆電球 (0.2〜0.4°) なので、半径 10° の中では電球は平らな背景にしか見えない。</a:t>
+            </a:r>
+          </a:p>
+          <a:p>
+            <a:r>
+              <a:t>注意: 矮小銀河は望遠鏡のぼやけ (PSF) より小さいので、この手法では点源と区別できない。</a:t>
             </a:r>
           </a:p>
         </p:txBody>
@@ -4770,7 +5018,7 @@
           <a:p>
             <a:r>
               <a:rPr sz="3400"/>
-              <a:t>矮小銀河への適用</a:t>
+              <a:t>矮小銀河による確認</a:t>
             </a:r>
           </a:p>
         </p:txBody>
@@ -4832,105 +5080,7 @@
           <a:p>
             <a:r>
               <a:rPr sz="3800"/>
-              <a:t>矮小銀河への適用</a:t>
-            </a:r>
-          </a:p>
-        </p:txBody>
-      </p:sp>
-      <p:sp>
-        <p:nvSpPr>
-          <p:cNvPr id="3" name="Content Placeholder 2"/>
-          <p:cNvSpPr>
-            <a:spLocks noGrp="1"/>
-          </p:cNvSpPr>
-          <p:nvPr>
-            <p:ph idx="1"/>
-          </p:nvPr>
-        </p:nvSpPr>
-        <p:spPr/>
-        <p:txBody>
-          <a:bodyPr/>
-          <a:lstStyle/>
-          <a:p>
-            <a:pPr/>
-            <a:r>
-              <a:rPr sz="2600"/>
-              <a:t>本当に暗黒物質なら、矮小銀河からも同じ光が来るはず</a:t>
-            </a:r>
-          </a:p>
-          <a:p>
-            <a:pPr lvl="1"/>
-            <a:r>
-              <a:rPr sz="2000"/>
-              <a:t>信号は弱いが、雑音（ガス・星形成）が少ない</a:t>
-            </a:r>
-          </a:p>
-          <a:p>
-            <a:pPr/>
-            <a:r>
-              <a:rPr sz="2600"/>
-              <a:t>同じ手法を、各天体のまわり半径 10° に当てはめる</a:t>
-            </a:r>
-          </a:p>
-          <a:p>
-            <a:pPr/>
-            <a:r>
-              <a:rPr sz="2600"/>
-              <a:t>対象：矮小銀河 54 ＋ M31・M33 ＋ 何も無い対照領域 23</a:t>
-            </a:r>
-          </a:p>
-          <a:p>
-            <a:pPr/>
-            <a:r>
-              <a:rPr sz="2600"/>
-              <a:t>天の川の縮退はほぼ起きない</a:t>
-            </a:r>
-          </a:p>
-          <a:p>
-            <a:pPr lvl="1"/>
-            <a:r>
-              <a:rPr sz="2000"/>
-              <a:t>矮小銀河は小さな点、ICS は広がった平らな光</a:t>
-            </a:r>
-          </a:p>
-        </p:txBody>
-      </p:sp>
-    </p:spTree>
-  </p:cSld>
-  <p:clrMapOvr>
-    <a:masterClrMapping/>
-  </p:clrMapOvr>
-</p:sld>
-</file>
-
-<file path=ppt/slides/slide11.xml><?xml version="1.0" encoding="utf-8"?>
-<p:sld xmlns:a="http://schemas.openxmlformats.org/drawingml/2006/main" xmlns:p="http://schemas.openxmlformats.org/presentationml/2006/main" xmlns:r="http://schemas.openxmlformats.org/officeDocument/2006/relationships">
-  <p:cSld>
-    <p:spTree>
-      <p:nvGrpSpPr>
-        <p:cNvPr id="1" name=""/>
-        <p:cNvGrpSpPr/>
-        <p:nvPr/>
-      </p:nvGrpSpPr>
-      <p:grpSpPr/>
-      <p:sp>
-        <p:nvSpPr>
-          <p:cNvPr id="2" name="Title 1"/>
-          <p:cNvSpPr>
-            <a:spLocks noGrp="1"/>
-          </p:cNvSpPr>
-          <p:nvPr>
-            <p:ph type="title"/>
-          </p:nvPr>
-        </p:nvSpPr>
-        <p:spPr/>
-        <p:txBody>
-          <a:bodyPr/>
-          <a:lstStyle/>
-          <a:p>
-            <a:r>
-              <a:rPr sz="3800"/>
-              <a:t>結果①：どこにも信号は見えなかった</a:t>
+              <a:t>結果：どこにも信号は見えなかった</a:t>
             </a:r>
           </a:p>
         </p:txBody>
@@ -4967,8 +5117,8 @@
         </p:nvSpPr>
         <p:spPr>
           <a:xfrm>
-            <a:off x="548640" y="5486400"/>
-            <a:ext cx="11064240" cy="914400"/>
+            <a:off x="548640" y="5806440"/>
+            <a:ext cx="11064240" cy="822960"/>
           </a:xfrm>
           <a:prstGeom prst="rect">
             <a:avLst/>
@@ -4983,7 +5133,103 @@
           <a:p>
             <a:r>
               <a:rPr sz="2200"/>
-              <a:t>77 天体 × 13 ビンの有意度のうち最大 +3.46σ。何も無い対照領域でも最大 +4.50σ が出る</a:t>
+              <a:t>77 天体 × 13 ビンの有意度のうち最大 +3.46σ。何も無い対照領域でも最大 +4.50σ</a:t>
+            </a:r>
+          </a:p>
+        </p:txBody>
+      </p:sp>
+    </p:spTree>
+  </p:cSld>
+  <p:clrMapOvr>
+    <a:masterClrMapping/>
+  </p:clrMapOvr>
+</p:sld>
+</file>
+
+<file path=ppt/slides/slide11.xml><?xml version="1.0" encoding="utf-8"?>
+<p:sld xmlns:a="http://schemas.openxmlformats.org/drawingml/2006/main" xmlns:p="http://schemas.openxmlformats.org/presentationml/2006/main" xmlns:r="http://schemas.openxmlformats.org/officeDocument/2006/relationships">
+  <p:cSld>
+    <p:spTree>
+      <p:nvGrpSpPr>
+        <p:cNvPr id="1" name=""/>
+        <p:cNvGrpSpPr/>
+        <p:nvPr/>
+      </p:nvGrpSpPr>
+      <p:grpSpPr/>
+      <p:sp>
+        <p:nvSpPr>
+          <p:cNvPr id="2" name="Title 1"/>
+          <p:cNvSpPr>
+            <a:spLocks noGrp="1"/>
+          </p:cNvSpPr>
+          <p:nvPr>
+            <p:ph type="title"/>
+          </p:nvPr>
+        </p:nvSpPr>
+        <p:spPr/>
+        <p:txBody>
+          <a:bodyPr/>
+          <a:lstStyle/>
+          <a:p>
+            <a:r>
+              <a:rPr sz="3800"/>
+              <a:t>論文：Bertólez-Martínez ら (2026)</a:t>
+            </a:r>
+          </a:p>
+        </p:txBody>
+      </p:sp>
+      <p:sp>
+        <p:nvSpPr>
+          <p:cNvPr id="3" name="Content Placeholder 2"/>
+          <p:cNvSpPr>
+            <a:spLocks noGrp="1"/>
+          </p:cNvSpPr>
+          <p:nvPr>
+            <p:ph idx="1"/>
+          </p:nvPr>
+        </p:nvSpPr>
+        <p:spPr/>
+        <p:txBody>
+          <a:bodyPr/>
+          <a:lstStyle/>
+          <a:p>
+            <a:pPr/>
+            <a:r>
+              <a:rPr sz="2400"/>
+              <a:t>矮小銀河の J ファクター（暗黒物質の量の指標）の</a:t>
+            </a:r>
+            <a:br/>
+            <a:r>
+              <a:rPr sz="2400"/>
+              <a:t>誤差は小さく見積もられている</a:t>
+            </a:r>
+          </a:p>
+          <a:p>
+            <a:pPr/>
+            <a:r>
+              <a:rPr sz="2400"/>
+              <a:t>見落とされがちな原因の例</a:t>
+            </a:r>
+          </a:p>
+          <a:p>
+            <a:pPr lvl="1"/>
+            <a:r>
+              <a:rPr sz="1800"/>
+              <a:t>点として扱う・ハローや星の分布の形の仮定・球対称からのずれ</a:t>
+            </a:r>
+          </a:p>
+          <a:p>
+            <a:pPr lvl="1"/>
+            <a:r>
+              <a:rPr sz="1800"/>
+              <a:t>力学的な釣り合いからのずれ・連星・手前の星の混入</a:t>
+            </a:r>
+          </a:p>
+          <a:p>
+            <a:pPr/>
+            <a:r>
+              <a:rPr sz="2400"/>
+              <a:t>文献ごとの J のばらつきから、約 3 倍（Δlog₁₀J ≈ 0.5）は見込むべき</a:t>
             </a:r>
           </a:p>
         </p:txBody>
@@ -5023,7 +5269,7 @@
           <a:p>
             <a:r>
               <a:rPr sz="3800"/>
-              <a:t>結果②：矮小銀河では白黒つけられない</a:t>
+              <a:t>論文：何をしたか</a:t>
             </a:r>
           </a:p>
         </p:txBody>
@@ -5046,28 +5292,35 @@
             <a:pPr/>
             <a:r>
               <a:rPr sz="2800"/>
-              <a:t>天の川の超過が暗黒物質なら、矮小銀河で期待される信号は 1.35〜5.4σ</a:t>
+              <a:t>暗黒物質の信号を入れた疑似データを何度も作る</a:t>
+            </a:r>
+          </a:p>
+          <a:p>
+            <a:pPr lvl="1"/>
+            <a:r>
+              <a:rPr sz="2200"/>
+              <a:t>Fermi-LAT 17.4 年分、銀河中心超過と同じ 42 GeV の WIMP</a:t>
             </a:r>
           </a:p>
           <a:p>
             <a:pPr/>
             <a:r>
               <a:rPr sz="2800"/>
-              <a:t>実際は −0.18σ（45 天体の合計、20 GeV）</a:t>
+              <a:t>J の誤差を 2 つに分けて動かす</a:t>
+            </a:r>
+          </a:p>
+          <a:p>
+            <a:pPr lvl="1"/>
+            <a:r>
+              <a:rPr sz="2200"/>
+              <a:t>σ：J の本当のばらつき　σ_L：解析で仮定する幅</a:t>
             </a:r>
           </a:p>
           <a:p>
             <a:pPr/>
             <a:r>
               <a:rPr sz="2800"/>
-              <a:t>→ 矛盾はしないが、確認もできない</a:t>
-            </a:r>
-          </a:p>
-          <a:p>
-            <a:pPr lvl="1"/>
-            <a:r>
-              <a:rPr sz="2200"/>
-              <a:t>期待される信号が小さすぎる</a:t>
+              <a:t>対象：Ursa Minor 1 個、27 個をまとめた解析</a:t>
             </a:r>
           </a:p>
         </p:txBody>
@@ -5107,7 +5360,7 @@
           <a:p>
             <a:r>
               <a:rPr sz="3800"/>
-              <a:t>今後</a:t>
+              <a:t>論文：分かったこと</a:t>
             </a:r>
           </a:p>
         </p:txBody>
@@ -5129,42 +5382,318 @@
           <a:p>
             <a:pPr/>
             <a:r>
-              <a:rPr sz="2800"/>
-              <a:t>矮小銀河の手法を格上げする</a:t>
+              <a:rPr sz="2400"/>
+              <a:t>Ursa Minor：J の誤差を小さく見積もると、</a:t>
+            </a:r>
+            <a:br/>
+            <a:r>
+              <a:rPr sz="2400"/>
+              <a:t>本物を誤って除外する割合が 1.7% → 8% → 22%</a:t>
+            </a:r>
+          </a:p>
+          <a:p>
+            <a:pPr/>
+            <a:r>
+              <a:rPr sz="2400"/>
+              <a:t>27 個まとめると、ふつうの設定でも 21%</a:t>
             </a:r>
           </a:p>
           <a:p>
             <a:pPr lvl="1"/>
             <a:r>
+              <a:rPr sz="1800"/>
+              <a:t>誤差を小さく見積もると 31% → 49% → 88%</a:t>
+            </a:r>
+          </a:p>
+          <a:p>
+            <a:pPr/>
+            <a:r>
+              <a:rPr sz="2400"/>
+              <a:t>ハローを点として扱うと、上限が 1.4 倍きつく出すぎる</a:t>
+            </a:r>
+          </a:p>
+          <a:p>
+            <a:pPr/>
+            <a:r>
+              <a:rPr sz="2400"/>
+              <a:t>→ 銀河中心と矮小銀河の「矛盾」は誇張されうる</a:t>
+            </a:r>
+          </a:p>
+        </p:txBody>
+      </p:sp>
+    </p:spTree>
+  </p:cSld>
+  <p:clrMapOvr>
+    <a:masterClrMapping/>
+  </p:clrMapOvr>
+</p:sld>
+</file>
+
+<file path=ppt/slides/slide14.xml><?xml version="1.0" encoding="utf-8"?>
+<p:sld xmlns:a="http://schemas.openxmlformats.org/drawingml/2006/main" xmlns:p="http://schemas.openxmlformats.org/presentationml/2006/main" xmlns:r="http://schemas.openxmlformats.org/officeDocument/2006/relationships">
+  <p:cSld>
+    <p:spTree>
+      <p:nvGrpSpPr>
+        <p:cNvPr id="1" name=""/>
+        <p:cNvGrpSpPr/>
+        <p:nvPr/>
+      </p:nvGrpSpPr>
+      <p:grpSpPr/>
+      <p:sp>
+        <p:nvSpPr>
+          <p:cNvPr id="2" name="Title 1"/>
+          <p:cNvSpPr>
+            <a:spLocks noGrp="1"/>
+          </p:cNvSpPr>
+          <p:nvPr>
+            <p:ph type="title"/>
+          </p:nvPr>
+        </p:nvSpPr>
+        <p:spPr/>
+        <p:txBody>
+          <a:bodyPr/>
+          <a:lstStyle/>
+          <a:p>
+            <a:r>
+              <a:rPr sz="3800"/>
+              <a:t>論文の誤差を、僕の結果に当てはめる</a:t>
+            </a:r>
+          </a:p>
+        </p:txBody>
+      </p:sp>
+      <p:sp>
+        <p:nvSpPr>
+          <p:cNvPr id="3" name="Content Placeholder 2"/>
+          <p:cNvSpPr>
+            <a:spLocks noGrp="1"/>
+          </p:cNvSpPr>
+          <p:nvPr>
+            <p:ph idx="1"/>
+          </p:nvPr>
+        </p:nvSpPr>
+        <p:spPr/>
+        <p:txBody>
+          <a:bodyPr/>
+          <a:lstStyle/>
+          <a:p>
+            <a:pPr/>
+            <a:r>
+              <a:rPr sz="2600"/>
+              <a:t>これまで：矮小銀河の J の誤差をゼロとして扱っていた</a:t>
+            </a:r>
+          </a:p>
+          <a:p>
+            <a:pPr/>
+            <a:r>
+              <a:rPr sz="2600"/>
+              <a:t>各天体の J を「約 3 倍の範囲」でランダムにずらし、</a:t>
+            </a:r>
+            <a:br/>
+            <a:r>
+              <a:rPr sz="2600"/>
+              <a:t>暗黒物質なら何σ見えたはずかを 20 万回計算</a:t>
+            </a:r>
+          </a:p>
+          <a:p>
+            <a:pPr/>
+            <a:r>
+              <a:rPr sz="2600"/>
+              <a:t>ついでに見つけた誤り：使えない天体 2 つ（SMC・LMC）が</a:t>
+            </a:r>
+            <a:br/>
+            <a:r>
+              <a:rPr sz="2600"/>
+              <a:t>予測に混ざっていた → 除いて 43 天体で計算</a:t>
+            </a:r>
+          </a:p>
+        </p:txBody>
+      </p:sp>
+    </p:spTree>
+  </p:cSld>
+  <p:clrMapOvr>
+    <a:masterClrMapping/>
+  </p:clrMapOvr>
+</p:sld>
+</file>
+
+<file path=ppt/slides/slide15.xml><?xml version="1.0" encoding="utf-8"?>
+<p:sld xmlns:a="http://schemas.openxmlformats.org/drawingml/2006/main" xmlns:p="http://schemas.openxmlformats.org/presentationml/2006/main" xmlns:r="http://schemas.openxmlformats.org/officeDocument/2006/relationships">
+  <p:cSld>
+    <p:spTree>
+      <p:nvGrpSpPr>
+        <p:cNvPr id="1" name=""/>
+        <p:cNvGrpSpPr/>
+        <p:nvPr/>
+      </p:nvGrpSpPr>
+      <p:grpSpPr/>
+      <p:sp>
+        <p:nvSpPr>
+          <p:cNvPr id="2" name="Title 1"/>
+          <p:cNvSpPr>
+            <a:spLocks noGrp="1"/>
+          </p:cNvSpPr>
+          <p:nvPr>
+            <p:ph type="title"/>
+          </p:nvPr>
+        </p:nvSpPr>
+        <p:spPr/>
+        <p:txBody>
+          <a:bodyPr/>
+          <a:lstStyle/>
+          <a:p>
+            <a:r>
+              <a:rPr sz="3800"/>
+              <a:t>結果：「判定できない」がはっきりした</a:t>
+            </a:r>
+          </a:p>
+        </p:txBody>
+      </p:sp>
+      <p:pic>
+        <p:nvPicPr>
+          <p:cNvPr id="3" name="Picture 2" descr="fig_J.png"/>
+          <p:cNvPicPr>
+            <a:picLocks noChangeAspect="1"/>
+          </p:cNvPicPr>
+          <p:nvPr/>
+        </p:nvPicPr>
+        <p:blipFill>
+          <a:blip r:embed="rId2"/>
+          <a:stretch>
+            <a:fillRect/>
+          </a:stretch>
+        </p:blipFill>
+        <p:spPr>
+          <a:xfrm>
+            <a:off x="1828800" y="1371600"/>
+            <a:ext cx="6847367" cy="4206240"/>
+          </a:xfrm>
+          <a:prstGeom prst="rect">
+            <a:avLst/>
+          </a:prstGeom>
+        </p:spPr>
+      </p:pic>
+      <p:sp>
+        <p:nvSpPr>
+          <p:cNvPr id="4" name="TextBox 3"/>
+          <p:cNvSpPr txBox="1"/>
+          <p:nvPr/>
+        </p:nvSpPr>
+        <p:spPr>
+          <a:xfrm>
+            <a:off x="548640" y="5806440"/>
+            <a:ext cx="11064240" cy="822960"/>
+          </a:xfrm>
+          <a:prstGeom prst="rect">
+            <a:avLst/>
+          </a:prstGeom>
+          <a:noFill/>
+        </p:spPr>
+        <p:txBody>
+          <a:bodyPr wrap="square">
+            <a:spAutoFit/>
+          </a:bodyPr>
+          <a:lstStyle/>
+          <a:p>
+            <a:r>
               <a:rPr sz="2200"/>
-              <a:t>J ファクターの誤差（約 3 倍）を入れる</a:t>
+              <a:t>期待 1.7σ → 1.3〜5.0σ（J の誤差あり）　実測 0.4σ　ずれ約 1.2σ</a:t>
+            </a:r>
+          </a:p>
+        </p:txBody>
+      </p:sp>
+    </p:spTree>
+  </p:cSld>
+  <p:clrMapOvr>
+    <a:masterClrMapping/>
+  </p:clrMapOvr>
+</p:sld>
+</file>
+
+<file path=ppt/slides/slide16.xml><?xml version="1.0" encoding="utf-8"?>
+<p:sld xmlns:a="http://schemas.openxmlformats.org/drawingml/2006/main" xmlns:p="http://schemas.openxmlformats.org/presentationml/2006/main" xmlns:r="http://schemas.openxmlformats.org/officeDocument/2006/relationships">
+  <p:cSld>
+    <p:spTree>
+      <p:nvGrpSpPr>
+        <p:cNvPr id="1" name=""/>
+        <p:cNvGrpSpPr/>
+        <p:nvPr/>
+      </p:nvGrpSpPr>
+      <p:grpSpPr/>
+      <p:sp>
+        <p:nvSpPr>
+          <p:cNvPr id="2" name="Title 1"/>
+          <p:cNvSpPr>
+            <a:spLocks noGrp="1"/>
+          </p:cNvSpPr>
+          <p:nvPr>
+            <p:ph type="title"/>
+          </p:nvPr>
+        </p:nvSpPr>
+        <p:spPr/>
+        <p:txBody>
+          <a:bodyPr/>
+          <a:lstStyle/>
+          <a:p>
+            <a:r>
+              <a:rPr sz="3800"/>
+              <a:t>まとめと今後</a:t>
+            </a:r>
+          </a:p>
+        </p:txBody>
+      </p:sp>
+      <p:sp>
+        <p:nvSpPr>
+          <p:cNvPr id="3" name="Content Placeholder 2"/>
+          <p:cNvSpPr>
+            <a:spLocks noGrp="1"/>
+          </p:cNvSpPr>
+          <p:nvPr>
+            <p:ph idx="1"/>
+          </p:nvPr>
+        </p:nvSpPr>
+        <p:spPr/>
+        <p:txBody>
+          <a:bodyPr/>
+          <a:lstStyle/>
+          <a:p>
+            <a:pPr/>
+            <a:r>
+              <a:rPr sz="2600"/>
+              <a:t>Totani の超過は再現できた（19.0σ、ただし過大評価）</a:t>
+            </a:r>
+          </a:p>
+          <a:p>
+            <a:pPr/>
+            <a:r>
+              <a:rPr sz="2600"/>
+              <a:t>背景（ICS・バブル）の間違いでは説明できない、が増えた</a:t>
             </a:r>
           </a:p>
           <a:p>
             <a:pPr lvl="1"/>
             <a:r>
-              <a:rPr sz="2200"/>
-              <a:t>近くの点源との取り違えを確かめる</a:t>
-            </a:r>
-          </a:p>
-          <a:p>
-            <a:pPr lvl="1"/>
-            <a:r>
-              <a:rPr sz="2200"/>
-              <a:t>たくさんまとめたときの統計の注意（見落とし）</a:t>
+              <a:rPr sz="2000"/>
+              <a:t>暗黒物質の証拠ではない</a:t>
             </a:r>
           </a:p>
           <a:p>
             <a:pPr/>
             <a:r>
-              <a:rPr sz="2800"/>
-              <a:t>天の川：光の「色」（エネルギーごとの明るさ）で ICS と見分ける</a:t>
+              <a:rPr sz="2600"/>
+              <a:t>矮小銀河では判定できない（J の誤差を入れるとさらに）</a:t>
             </a:r>
           </a:p>
           <a:p>
             <a:pPr/>
             <a:r>
-              <a:rPr sz="2800"/>
+              <a:rPr sz="2600"/>
+              <a:t>今後：光の「色」（エネルギーごとの明るさ）で ICS と見分ける</a:t>
+            </a:r>
+          </a:p>
+          <a:p>
+            <a:pPr/>
+            <a:r>
+              <a:rPr sz="2600"/>
               <a:t>卒論：12 月に執筆、1 月に発表</a:t>
             </a:r>
           </a:p>
@@ -5205,7 +5734,7 @@
           <a:p>
             <a:r>
               <a:rPr sz="3800"/>
-              <a:t>今の研究</a:t>
+              <a:t>今の研究：Totani (2025) の再現</a:t>
             </a:r>
           </a:p>
         </p:txBody>
@@ -5220,45 +5749,73 @@
             <p:ph idx="1"/>
           </p:nvPr>
         </p:nvSpPr>
-        <p:spPr/>
+        <p:spPr>
+          <a:xfrm>
+            <a:ext cx="4206240" cy="0"/>
+          </a:xfrm>
+        </p:spPr>
         <p:txBody>
           <a:bodyPr/>
           <a:lstStyle/>
           <a:p>
             <a:pPr/>
             <a:r>
-              <a:rPr sz="2800"/>
-              <a:t>Totani (2025)：天の川のハローから 20 GeV のガンマ線超過（13–19σ）</a:t>
+              <a:rPr sz="2400"/>
+              <a:t>天の川のハローから 20 GeV のガンマ線超過（13–19σ）</a:t>
+            </a:r>
+          </a:p>
+          <a:p>
+            <a:pPr/>
+            <a:r>
+              <a:rPr sz="2400"/>
+              <a:t>同じ手法で独立に再現</a:t>
             </a:r>
           </a:p>
           <a:p>
             <a:pPr lvl="1"/>
             <a:r>
-              <a:rPr sz="2200"/>
-              <a:t>暗黒物質（WIMP）の対消滅なら説明できる</a:t>
+              <a:rPr sz="1800"/>
+              <a:t>既知の光（ガス・ICS・点源・バブルなど）と</a:t>
+            </a:r>
+            <a:br/>
+            <a:r>
+              <a:rPr sz="1800"/>
+              <a:t>ハローを同時に当てはめる</a:t>
             </a:r>
           </a:p>
           <a:p>
             <a:pPr/>
             <a:r>
-              <a:rPr sz="2800"/>
-              <a:t>目的：同じ手法で独立に再現し、どこまで信じてよいかを確かめる</a:t>
-            </a:r>
-          </a:p>
-          <a:p>
-            <a:pPr/>
-            <a:r>
-              <a:rPr sz="2800"/>
-              <a:t>方法：既知の光（ガス・ICS・点源・バブルなど）と</a:t>
-            </a:r>
-            <a:br/>
-            <a:r>
-              <a:rPr sz="2800"/>
-              <a:t>ハローを同時に当てはめる</a:t>
-            </a:r>
-          </a:p>
-        </p:txBody>
-      </p:sp>
+              <a:rPr sz="2400"/>
+              <a:t>結果：20 GeV で 19.0σ</a:t>
+            </a:r>
+          </a:p>
+        </p:txBody>
+      </p:sp>
+      <p:pic>
+        <p:nvPicPr>
+          <p:cNvPr id="4" name="Picture 3" descr="significance_spectrum.png"/>
+          <p:cNvPicPr>
+            <a:picLocks noChangeAspect="1"/>
+          </p:cNvPicPr>
+          <p:nvPr/>
+        </p:nvPicPr>
+        <p:blipFill>
+          <a:blip r:embed="rId3"/>
+          <a:stretch>
+            <a:fillRect/>
+          </a:stretch>
+        </p:blipFill>
+        <p:spPr>
+          <a:xfrm>
+            <a:off x="4846320" y="1463040"/>
+            <a:ext cx="6213231" cy="4846320"/>
+          </a:xfrm>
+          <a:prstGeom prst="rect">
+            <a:avLst/>
+          </a:prstGeom>
+        </p:spPr>
+      </p:pic>
     </p:spTree>
   </p:cSld>
   <p:clrMapOvr>
@@ -5294,7 +5851,7 @@
           <a:p>
             <a:r>
               <a:rPr sz="3800"/>
-              <a:t>再現できた：20 GeV で 19.0σ</a:t>
+              <a:t>起きた問題（3 つ）</a:t>
             </a:r>
           </a:p>
         </p:txBody>
@@ -5309,66 +5866,47 @@
             <p:ph idx="1"/>
           </p:nvPr>
         </p:nvSpPr>
-        <p:spPr>
-          <a:xfrm>
-            <a:ext cx="3931920" cy="0"/>
-          </a:xfrm>
-        </p:spPr>
+        <p:spPr/>
         <p:txBody>
           <a:bodyPr/>
           <a:lstStyle/>
           <a:p>
             <a:pPr/>
             <a:r>
-              <a:rPr sz="2400"/>
-              <a:t>Totani の 13–19σ とほぼ一致</a:t>
+              <a:rPr sz="2800"/>
+              <a:t>(a) 何も無い空でも最大 4.5σ が出る</a:t>
+            </a:r>
+          </a:p>
+          <a:p>
+            <a:pPr lvl="1"/>
+            <a:r>
+              <a:rPr sz="2200"/>
+              <a:t>→ σ は過大評価になっている</a:t>
             </a:r>
           </a:p>
           <a:p>
             <a:pPr/>
             <a:r>
-              <a:rPr sz="2400"/>
-              <a:t>山・谷の位置も一致</a:t>
+              <a:rPr sz="2800"/>
+              <a:t>(b) バブル領域を外すと 19.0σ → 5.0σ に落ちる</a:t>
+            </a:r>
+          </a:p>
+          <a:p>
+            <a:pPr lvl="1"/>
+            <a:r>
+              <a:rPr sz="2200"/>
+              <a:t>→ バブルの汚染を疑った</a:t>
             </a:r>
           </a:p>
           <a:p>
             <a:pPr/>
             <a:r>
-              <a:rPr sz="2400"/>
-              <a:t>10/1 に再計算し、</a:t>
-            </a:r>
-            <a:br/>
-            <a:r>
-              <a:rPr sz="2400"/>
-              <a:t>コードと設定の記録付きで確定</a:t>
-            </a:r>
-          </a:p>
-        </p:txBody>
-      </p:sp>
-      <p:pic>
-        <p:nvPicPr>
-          <p:cNvPr id="4" name="Picture 3" descr="significance_spectrum.png"/>
-          <p:cNvPicPr>
-            <a:picLocks noChangeAspect="1"/>
-          </p:cNvPicPr>
-          <p:nvPr/>
-        </p:nvPicPr>
-        <p:blipFill>
-          <a:blip r:embed="rId3"/>
-          <a:stretch>
-            <a:fillRect/>
-          </a:stretch>
-        </p:blipFill>
-        <p:spPr>
-          <a:xfrm>
-            <a:off x="4663440" y="1463040"/>
-            <a:ext cx="6213231" cy="4846320"/>
-          </a:xfrm>
-          <a:prstGeom prst="rect">
-            <a:avLst/>
-          </a:prstGeom>
-        </p:spPr>
-      </p:pic>
+              <a:rPr sz="2800"/>
+              <a:t>(c) 7/23 の 19.1σ が再現できなかった</a:t>
+            </a:r>
+          </a:p>
+        </p:txBody>
+      </p:sp>
     </p:spTree>
   </p:cSld>
   <p:clrMapOvr>
@@ -5404,7 +5942,7 @@
           <a:p>
             <a:r>
               <a:rPr sz="3800"/>
-              <a:t>問題①：ハローと ICS が見分けにくい</a:t>
+              <a:t>(b) の背景：ハローと ICS は見分けにくい</a:t>
             </a:r>
           </a:p>
         </p:txBody>
@@ -5446,13 +5984,6 @@
             <a:r>
               <a:rPr sz="2400"/>
               <a:t>ハローを入れると、その分 ICS が暗くなる</a:t>
-            </a:r>
-          </a:p>
-          <a:p>
-            <a:pPr lvl="1"/>
-            <a:r>
-              <a:rPr sz="1800"/>
-              <a:t>ハローの光の 8〜10 割は ICS から移ったもの</a:t>
             </a:r>
           </a:p>
         </p:txBody>
@@ -5516,7 +6047,7 @@
           <a:p>
             <a:r>
               <a:rPr sz="3800"/>
-              <a:t>問題②：バブルを外すとハローが弱まる</a:t>
+              <a:t>分かったこと①：(b) は汚染ではない</a:t>
             </a:r>
           </a:p>
         </p:txBody>
@@ -5539,7 +6070,14 @@
             <a:pPr/>
             <a:r>
               <a:rPr sz="2800"/>
-              <a:t>フェルミバブルの領域を外すと 19.0σ → 5.0σ</a:t>
+              <a:t>ハローを見分ける手がかりの 54% がバブル領域にある</a:t>
+            </a:r>
+          </a:p>
+          <a:p>
+            <a:pPr lvl="1"/>
+            <a:r>
+              <a:rPr sz="2200"/>
+              <a:t>手がかりの量だけで予測すると 6.4σ（実測 5.0σ）</a:t>
             </a:r>
           </a:p>
           <a:p>
@@ -5553,14 +6091,7 @@
             <a:pPr/>
             <a:r>
               <a:rPr sz="2800"/>
-              <a:t>→「バブルが偽のハローを作っているのでは？」</a:t>
-            </a:r>
-          </a:p>
-          <a:p>
-            <a:pPr/>
-            <a:r>
-              <a:rPr sz="2800"/>
-              <a:t>→「ICS の計算が間違っているのでは？」</a:t>
+              <a:t>バブルの内と外で、ハローの明るさに意味のある差は無い</a:t>
             </a:r>
           </a:p>
         </p:txBody>
@@ -5600,7 +6131,7 @@
           <a:p>
             <a:r>
               <a:rPr sz="3800"/>
-              <a:t>調べたこと①：バブルの汚染？ → 違う</a:t>
+              <a:t>分かったこと②：ICS が犯人とは言いにくい</a:t>
             </a:r>
           </a:p>
         </p:txBody>
@@ -5623,28 +6154,28 @@
             <a:pPr/>
             <a:r>
               <a:rPr sz="2800"/>
-              <a:t>ハローを見分ける手がかりの半分以上がバブル領域にある</a:t>
+              <a:t>ICS が犯人なら、銀河中心寄りで約 2.3 倍の「形のずれ」が必要</a:t>
+            </a:r>
+          </a:p>
+          <a:p>
+            <a:pPr/>
+            <a:r>
+              <a:rPr sz="2800"/>
+              <a:t>ICS の計算の近似（等方近似）を直しても 1.1〜1.3 倍</a:t>
             </a:r>
           </a:p>
           <a:p>
             <a:pPr lvl="1"/>
             <a:r>
               <a:rPr sz="2200"/>
-              <a:t>手がかりの量だけで予測すると 6.4σ（実測 5.0σ）</a:t>
+              <a:t>しかも外側のほうが明るくなる → 届かない</a:t>
             </a:r>
           </a:p>
           <a:p>
             <a:pPr/>
             <a:r>
               <a:rPr sz="2800"/>
-              <a:t>バブルの内と外で、ハローの明るさの差は 1.5σ</a:t>
-            </a:r>
-          </a:p>
-          <a:p>
-            <a:pPr/>
-            <a:r>
-              <a:rPr sz="2800"/>
-              <a:t>→ 汚染ではなく、手がかりの置き場所のせい</a:t>
+              <a:t>ICS を 3 種類に分けて自由にしても、約 1σ しか下がらない</a:t>
             </a:r>
           </a:p>
         </p:txBody>
@@ -5684,7 +6215,7 @@
           <a:p>
             <a:r>
               <a:rPr sz="3800"/>
-              <a:t>調べたこと②：ICS の計算の近似？ → 違う</a:t>
+              <a:t>分かったこと③：(c) は記録の問題</a:t>
             </a:r>
           </a:p>
         </p:txBody>
@@ -5707,28 +6238,26 @@
             <a:pPr/>
             <a:r>
               <a:rPr sz="2800"/>
-              <a:t>ICS は「等方近似」という簡単な方法で計算していた</a:t>
+              <a:t>7/23 の計算の直後にコードを直していたため、</a:t>
+            </a:r>
+            <a:br/>
+            <a:r>
+              <a:rPr sz="2800"/>
+              <a:t>当時の状態が残っていなかった</a:t>
             </a:r>
           </a:p>
           <a:p>
             <a:pPr/>
             <a:r>
               <a:rPr sz="2800"/>
-              <a:t>正確な計算（非等方）にしても 1.1〜1.3 倍</a:t>
-            </a:r>
-          </a:p>
-          <a:p>
-            <a:pPr lvl="1"/>
-            <a:r>
-              <a:rPr sz="2200"/>
-              <a:t>しかも銀河中心寄りより外側のほうが明るくなる</a:t>
+              <a:t>今のコードは、何度計算しても同じ答え</a:t>
             </a:r>
           </a:p>
           <a:p>
             <a:pPr/>
             <a:r>
               <a:rPr sz="2800"/>
-              <a:t>→ ハローの代わりにはなれない</a:t>
+              <a:t>→ 主結果を 19.0σ（10/1 再計算、記録付き）に統一</a:t>
             </a:r>
           </a:p>
         </p:txBody>
@@ -5768,7 +6297,7 @@
           <a:p>
             <a:r>
               <a:rPr sz="3800"/>
-              <a:t>調べたこと③：ICS の形を自由に → 残る</a:t>
+              <a:t>ここまでのまとめ</a:t>
             </a:r>
           </a:p>
         </p:txBody>
@@ -5791,33 +6320,28 @@
             <a:pPr/>
             <a:r>
               <a:rPr sz="2800"/>
-              <a:t>ICS を 3 種類（星の光・ちりの光・宇宙背景の光）に分け、</a:t>
-            </a:r>
-            <a:br/>
+              <a:t>Totani の 20 GeV 超過は再現できた（19.0σ）</a:t>
+            </a:r>
+          </a:p>
+          <a:p>
+            <a:pPr/>
             <a:r>
               <a:rPr sz="2800"/>
-              <a:t>明るさをそれぞれ自由にした</a:t>
+              <a:t>「背景（ICS・バブル）の間違いでは説明できない」が増えた</a:t>
+            </a:r>
+          </a:p>
+          <a:p>
+            <a:pPr lvl="1"/>
+            <a:r>
+              <a:rPr sz="2200"/>
+              <a:t>バブルの汚染・計算の近似・ICS の形、の 3 つを否定</a:t>
             </a:r>
           </a:p>
           <a:p>
             <a:pPr/>
             <a:r>
               <a:rPr sz="2800"/>
-              <a:t>20 GeV のハロー：19.5σ → 18.4σ（ほぼ残る）</a:t>
-            </a:r>
-          </a:p>
-          <a:p>
-            <a:pPr/>
-            <a:r>
-              <a:rPr sz="2800"/>
-              <a:t>ハローが偽物なら、ICS がバブル領域で約 2.3 倍明るい必要がある</a:t>
-            </a:r>
-          </a:p>
-          <a:p>
-            <a:pPr lvl="1"/>
-            <a:r>
-              <a:rPr sz="2200"/>
-              <a:t>3 種類の混ぜ方では、そんな形は作れない</a:t>
+              <a:t>ただし σ は過大評価で、暗黒物質の証拠とまでは言えない</a:t>
             </a:r>
           </a:p>
         </p:txBody>
@@ -5857,7 +6381,7 @@
           <a:p>
             <a:r>
               <a:rPr sz="3800"/>
-              <a:t>ここまででわかったこと</a:t>
+              <a:t>矮小銀河への適用（7 月に実施済み）</a:t>
             </a:r>
           </a:p>
         </p:txBody>
@@ -5880,42 +6404,35 @@
             <a:pPr/>
             <a:r>
               <a:rPr sz="2600"/>
-              <a:t>ハローは「ICS の勘違い」では説明しにくい</a:t>
+              <a:t>暗黒物質なら、矮小銀河からも同じ光が来るはず</a:t>
+            </a:r>
+          </a:p>
+          <a:p>
+            <a:pPr/>
+            <a:r>
+              <a:rPr sz="2600"/>
+              <a:t>同じ手法を各天体のまわり半径 10° に</a:t>
+            </a:r>
+          </a:p>
+          <a:p>
+            <a:pPr/>
+            <a:r>
+              <a:rPr sz="2600"/>
+              <a:t>対象：矮小銀河 54 ＋ M31・M33 ＋ 何も無い対照領域 23</a:t>
+            </a:r>
+          </a:p>
+          <a:p>
+            <a:pPr/>
+            <a:r>
+              <a:rPr sz="2600"/>
+              <a:t>天の川のような縮退は起きない</a:t>
             </a:r>
           </a:p>
           <a:p>
             <a:pPr lvl="1"/>
             <a:r>
               <a:rPr sz="2000"/>
-              <a:t>バブルの汚染・計算の近似・ICS の形、の 3 つを否定</a:t>
-            </a:r>
-          </a:p>
-          <a:p>
-            <a:pPr/>
-            <a:r>
-              <a:rPr sz="2600"/>
-              <a:t>勘違いなら、ICS がバブル領域で約 2.3 倍ずれている必要がある</a:t>
-            </a:r>
-          </a:p>
-          <a:p>
-            <a:pPr/>
-            <a:r>
-              <a:rPr sz="2600"/>
-              <a:t>ただし σ は名目値で、過大評価になっている</a:t>
-            </a:r>
-          </a:p>
-          <a:p>
-            <a:pPr lvl="1"/>
-            <a:r>
-              <a:rPr sz="2000"/>
-              <a:t>何も無い空の領域で試すと、ばらつきが 1.36 倍</a:t>
-            </a:r>
-          </a:p>
-          <a:p>
-            <a:pPr/>
-            <a:r>
-              <a:rPr sz="2600"/>
-              <a:t>「暗黒物質だ」とまでは言えない</a:t>
+              <a:t>矮小銀河は点に近く、ICS は広がった平らな光</a:t>
             </a:r>
           </a:p>
         </p:txBody>

--- a/slides/2026-10-02_研究進捗報告.pptx
+++ b/slides/2026-10-02_研究進捗報告.pptx
@@ -533,7 +533,7 @@
           <a:lstStyle/>
           <a:p>
             <a:r>
-              <a:t>今日の流れ: 今の研究 → 起きた問題 3 つ → 調べて分かったこと → 矮小銀河への適用 (7 月に実施済み) と結果 → 矮小銀河の J ファクターの誤差を論じた論文 (Bertólez-Martínez+ 2026) の解説 → その誤差を自分の結果に当てはめた結果 → まとめ。</a:t>
+              <a:t>今日の流れ: 今の研究 → 起きた問題 3 つ → 調べて分かったこと → 矮小銀河への適用 (7 月に実施済み) と結果 → 矮小銀河の J ファクターの誤差を論じた論文 (Bertólez-Martínez+ 2026) の解説 → その誤差を自分の結果に当てはめた結果 → 結論。</a:t>
             </a:r>
           </a:p>
         </p:txBody>
@@ -1103,17 +1103,17 @@
           <a:lstStyle/>
           <a:p>
             <a:r>
-              <a:t>まとめ: 再現 → 3 つの問題 → 原因を調べて背景の間違い説を 3 つ否定 → 矮小銀河は非検出だが判定できない (J の誤差込みで定量化)。</a:t>
-            </a:r>
-          </a:p>
-          <a:p>
-            <a:r>
-              <a:t>今後の案: ICS の明るさはエネルギーに対してなめらかなはず、ハローは 20 GeV 付近だけ強い。全エネルギーをまとめて当てはめれば形が似ていても見分けられる可能性がある。ただし卒論までに入れるには大きいので、今後の課題として述べる程度にする。</a:t>
-            </a:r>
-          </a:p>
-          <a:p>
-            <a:r>
-              <a:t>矮小銀河の解析は広げない。J の誤差の扱いを卒論に一言入れる。</a:t>
+              <a:t>流れ: 再現 → 3 つの問題 → 原因を調べて背景の間違い説を 3 つ否定 → 矮小銀河は非検出だが判定できない (J の誤差込みで定量化)。</a:t>
+            </a:r>
+          </a:p>
+          <a:p>
+            <a:r>
+              <a:t>19.0σ は名目値。何も無い対照領域 23 か所での σ のばらつきは 1.362 なので、過大評価になっている。</a:t>
+            </a:r>
+          </a:p>
+          <a:p>
+            <a:r>
+              <a:t>矮小銀河: 使える 43 天体で期待 1.7σ (J の誤差込みで 68% 1.3〜5.0σ)、実測 0.4σ。ずれは補正後 1.2σ。</a:t>
             </a:r>
           </a:p>
         </p:txBody>
@@ -5636,7 +5636,7 @@
           <a:p>
             <a:r>
               <a:rPr sz="3800"/>
-              <a:t>まとめと今後</a:t>
+              <a:t>結論</a:t>
             </a:r>
           </a:p>
         </p:txBody>
@@ -5658,43 +5658,29 @@
           <a:p>
             <a:pPr/>
             <a:r>
-              <a:rPr sz="2600"/>
+              <a:rPr sz="2800"/>
               <a:t>Totani の超過は再現できた（19.0σ、ただし過大評価）</a:t>
             </a:r>
           </a:p>
           <a:p>
             <a:pPr/>
             <a:r>
-              <a:rPr sz="2600"/>
+              <a:rPr sz="2800"/>
               <a:t>背景（ICS・バブル）の間違いでは説明できない、が増えた</a:t>
             </a:r>
           </a:p>
           <a:p>
             <a:pPr lvl="1"/>
             <a:r>
-              <a:rPr sz="2000"/>
+              <a:rPr sz="2200"/>
               <a:t>暗黒物質の証拠ではない</a:t>
             </a:r>
           </a:p>
           <a:p>
             <a:pPr/>
             <a:r>
-              <a:rPr sz="2600"/>
+              <a:rPr sz="2800"/>
               <a:t>矮小銀河では判定できない（J の誤差を入れるとさらに）</a:t>
-            </a:r>
-          </a:p>
-          <a:p>
-            <a:pPr/>
-            <a:r>
-              <a:rPr sz="2600"/>
-              <a:t>今後：光の「色」（エネルギーごとの明るさ）で ICS と見分ける</a:t>
-            </a:r>
-          </a:p>
-          <a:p>
-            <a:pPr/>
-            <a:r>
-              <a:rPr sz="2600"/>
-              <a:t>卒論：12 月に執筆、1 月に発表</a:t>
             </a:r>
           </a:p>
         </p:txBody>

--- a/slides/2026-10-02_研究進捗報告.pptx
+++ b/slides/2026-10-02_研究進捗報告.pptx
@@ -21,6 +21,8 @@
     <p:sldId id="269" r:id="rId20"/>
     <p:sldId id="270" r:id="rId21"/>
     <p:sldId id="271" r:id="rId22"/>
+    <p:sldId id="272" r:id="rId23"/>
+    <p:sldId id="273" r:id="rId24"/>
   </p:sldIdLst>
   <p:sldSz cx="12192000" cy="6858000"/>
   <p:notesSz cx="6858000" cy="9144000"/>
@@ -603,17 +605,22 @@
           <a:lstStyle/>
           <a:p>
             <a:r>
-              <a:t>左: 有意度の分布。期待される正規分布 (点線) より少し広い。真ん中: 天体ごとの最大の σ。右: 解析した位置。</a:t>
-            </a:r>
-          </a:p>
-          <a:p>
-            <a:r>
-              <a:t>矮小銀河・M31/M33 のどこにも検出は無い。何も無い対照領域 23 か所の 250 個の有意度は平均 −0.021、標準偏差 1.362、最大 +4.50σ。</a:t>
-            </a:r>
-          </a:p>
-          <a:p>
-            <a:r>
-              <a:t>では、天の川の超過が暗黒物質だとしたら、矮小銀河でどれくらい見えるはずだったのか? → この問いに、次の論文が関わる。</a:t>
+              <a:t>矮小銀河 54 個は Local Volume Database (Pace 2025) の確認済み銀河。対照領域は |b|&gt;20° で互いに 20° 以上離した何も無い場所。</a:t>
+            </a:r>
+          </a:p>
+          <a:p>
+            <a:r>
+              <a:t>成分は等方・ガス・ICS・点源・ハロー。バブルと Loop I は銀河中心の構造なので入れない。</a:t>
+            </a:r>
+          </a:p>
+          <a:p>
+            <a:r>
+              <a:t>たとえ: 天の川のハローは部屋全体を照らす光なので電球と見分けにくかった。矮小銀河は遠くの豆電球 (0.2〜0.4°) なので、半径 10° の中では電球は平らな背景にしか見えない。</a:t>
+            </a:r>
+          </a:p>
+          <a:p>
+            <a:r>
+              <a:t>注意: 矮小銀河は望遠鏡のぼやけ (PSF) より小さいので、この手法では点源と区別できない。</a:t>
             </a:r>
           </a:p>
         </p:txBody>
@@ -683,17 +690,17 @@
           <a:lstStyle/>
           <a:p>
             <a:r>
-              <a:t>arXiv:2609.20944。J ファクター = 暗黒物質の密度を 2 乗して視線方向に足し合わせた量。矮小銀河では星の動きから推定する (Jeans 解析)。</a:t>
-            </a:r>
-          </a:p>
-          <a:p>
-            <a:r>
-              <a:t>Section II の 8 つの原因: (1) 広がりを無視して点源扱い (重ねた解析で上限が 1.5〜1.8 倍きつくなる) (2) ハローの形 (コアがあると制限が数倍ゆるむ) (3) 星の分布の形 (Plummer 分布の仮定) (4) 球対称からのずれ (log₁₀J が最大 0.4 ずれる) (5) 平衡からのずれ (0.1 程度) (6) 見分けられない連星 (Reticulum II で 0.3) (7) 手前の星の混入 (8) J の誤差が正規分布でない (すそが重い)。</a:t>
-            </a:r>
-          </a:p>
-          <a:p>
-            <a:r>
-              <a:t>Fig.1: 同じ矮小銀河の J を測った複数の文献が、書かれた誤差より大きくばらついている。</a:t>
+              <a:t>左: 有意度の分布。期待される正規分布 (点線) より少し広い。真ん中: 天体ごとの最大の σ。右: 解析した位置。</a:t>
+            </a:r>
+          </a:p>
+          <a:p>
+            <a:r>
+              <a:t>矮小銀河・M31/M33 のどこにも検出は無い。何も無い対照領域 23 か所の 有意度は平均ほぼ 0、ばらつき 1.26 (ビン 2–10)、最大 +4.50σ (1.5 GeV)。</a:t>
+            </a:r>
+          </a:p>
+          <a:p>
+            <a:r>
+              <a:t>では、天の川の超過が暗黒物質だとしたら、矮小銀河でどれくらい見えるはずだったのか? → この問いに、次の論文が関わる。</a:t>
             </a:r>
           </a:p>
         </p:txBody>
@@ -763,22 +770,17 @@
           <a:lstStyle/>
           <a:p>
             <a:r>
-              <a:t>Section III: FermiTools と fermipy で 10°×10° の ROI を 0.08° の画素で解析。背景は Fermi 標準の拡散モデル (gll_iem_v07) と等方背景。</a:t>
-            </a:r>
-          </a:p>
-          <a:p>
-            <a:r>
-              <a:t>信号は bb̄ に消滅する 42 GeV の WIMP (GCE を説明する値)。古典的な矮小銀河は核のある NFW、超暗い矮小銀河は NFW。</a:t>
-            </a:r>
-          </a:p>
-          <a:p>
-            <a:r>
-              <a:t>注入した本物の信号を、95% 上限が誤って除外してしまう割合 (本来 5% 以下であるべき) を数える。</a:t>
-            </a:r>
-          </a:p>
-          <a:p>
-            <a:r>
-              <a:t>σ_L を σ より小さくすると「ソフトが自信満々」の状態。</a:t>
+              <a:t>arXiv:2609.20944。J ファクター = 暗黒物質の密度を 2 乗して視線方向に足し合わせた量。矮小銀河では星の動きから推定する (Jeans 解析)。</a:t>
+            </a:r>
+          </a:p>
+          <a:p>
+            <a:r>
+              <a:t>Section II の 8 つの原因: (1) 広がりを無視して点源扱い (重ねた解析で上限が 1.5〜1.8 倍きつくなる) (2) ハローの形 (コアがあると制限が数倍ゆるむ) (3) 星の分布の形 (Plummer 分布の仮定) (4) 球対称からのずれ (log₁₀J が最大 0.4 ずれる) (5) 平衡からのずれ (0.1 程度) (6) 見分けられない連星 (Reticulum II で 0.3) (7) 手前の星の混入 (8) J の誤差が正規分布でない (すそが重い)。</a:t>
+            </a:r>
+          </a:p>
+          <a:p>
+            <a:r>
+              <a:t>Fig.1: 同じ矮小銀河の J を測った複数の文献が、書かれた誤差より大きくばらついている。</a:t>
             </a:r>
           </a:p>
         </p:txBody>
@@ -848,17 +850,22 @@
           <a:lstStyle/>
           <a:p>
             <a:r>
-              <a:t>Section IV (Ursa Minor): 本当のばらつき σ を 0.3 / 0.5 / 1.0 増やして σ_L は据え置くと、本物を除外する割合が 1.7% / 8.0% / 22%。σ_L を σ に合わせれば 5% 以下に戻る。σ_L を広げると上限は 1.5 / 2.5 / 11 倍ゆるむ。形の誤り: 核のある NFW を球対称 NFW で当てると 2.4 倍、点源扱いで 1.4 倍、上限がきつく出すぎる。</a:t>
-            </a:r>
-          </a:p>
-          <a:p>
-            <a:r>
-              <a:t>Section V (27 個): 基準のままでも 21% (95% のはずが)。σ を 0.3 / 0.5 / 1.0 増やすと 31% / 49% / 88%。σ_L を σ に合わせても 23% / 28% / 38%。理由: J は対数正規分布で上に長いすそがあり、27 個あれば 1.5σ 以上上振れする天体がどれか 1 つある確率が 0.85。</a:t>
-            </a:r>
-          </a:p>
-          <a:p>
-            <a:r>
-              <a:t>結論: シミュレーションや blank field で較正すべき。J の誤差をもっと良く抑えることが必要。</a:t>
+              <a:t>Section III: FermiTools と fermipy で 10°×10° の ROI を 0.08° の画素で解析。背景は Fermi 標準の拡散モデル (gll_iem_v07) と等方背景。</a:t>
+            </a:r>
+          </a:p>
+          <a:p>
+            <a:r>
+              <a:t>信号は bb̄ に消滅する 42 GeV の WIMP (GCE を説明する値)。古典的な矮小銀河は核のある NFW、超暗い矮小銀河は NFW。</a:t>
+            </a:r>
+          </a:p>
+          <a:p>
+            <a:r>
+              <a:t>注入した本物の信号を、95% 上限が誤って除外してしまう割合 (本来 5% 以下であるべき) を数える。</a:t>
+            </a:r>
+          </a:p>
+          <a:p>
+            <a:r>
+              <a:t>σ_L を σ より小さくすると「ソフトが自信満々」の状態。</a:t>
             </a:r>
           </a:p>
         </p:txBody>
@@ -928,17 +935,17 @@
           <a:lstStyle/>
           <a:p>
             <a:r>
-              <a:t>方法: 各天体の「DM なら何σで見えたはずか」(pred_i) に、J のずれ 10^δ (δ は平均 0、幅 0.5 の正規分布) を掛ける。天体ごとの重み付き和 T = Σ pred_i·meas_i / √Σpred_i² で、予測と実測を同じまとめ方で比べる。</a:t>
-            </a:r>
-          </a:p>
-          <a:p>
-            <a:r>
-              <a:t>SMC・LMC: それ自体が広がったガンマ線源なので、解析で中心がマスクされ、ハローの形の 1〜2% しか残っていなかった (結果ファイルに usable=false)。9/28 の計算はこれを見落とし、SMC 1 天体が予測 2.69σ のうち 2.06σ 分を占めていた。修正案は cloud_reports/2026-10-02_dwarf_consistency_usable.patch。</a:t>
-            </a:r>
-          </a:p>
-          <a:p>
-            <a:r>
-              <a:t>天の川側の密度の仮定 (局所密度 0.3〜0.6 GeV/cm³) も別に動かした。</a:t>
+              <a:t>Section IV (Ursa Minor): 本当のばらつき σ を 0.3 / 0.5 / 1.0 増やして σ_L は据え置くと、本物を除外する割合が 1.7% / 8.0% / 22%。σ_L を σ に合わせれば 5% 以下に戻る。σ_L を広げると上限は 1.5 / 2.5 / 11 倍ゆるむ。形の誤り: 核のある NFW を球対称 NFW で当てると 2.4 倍、点源扱いで 1.4 倍、上限がきつく出すぎる。</a:t>
+            </a:r>
+          </a:p>
+          <a:p>
+            <a:r>
+              <a:t>Section V (27 個): 基準のままでも 21% (95% のはずが)。σ を 0.3 / 0.5 / 1.0 増やすと 31% / 49% / 88%。σ_L を σ に合わせても 23% / 28% / 38%。理由: J は対数正規分布で上に長いすそがあり、27 個あれば 1.5σ 以上上振れする天体がどれか 1 つある確率が 0.85。</a:t>
+            </a:r>
+          </a:p>
+          <a:p>
+            <a:r>
+              <a:t>結論: シミュレーションや blank field で較正すべき。J の誤差をもっと良く抑えることが必要。</a:t>
             </a:r>
           </a:p>
         </p:txBody>
@@ -1008,32 +1015,17 @@
           <a:lstStyle/>
           <a:p>
             <a:r>
-              <a:t>使える 43 天体、20 GeV、天の川側の局所密度 0.42 GeV/cm³。</a:t>
-            </a:r>
-          </a:p>
-          <a:p>
-            <a:r>
-              <a:t>J の誤差なし: 期待 1.73σ、実測 0.39σ、ずれ 1.3σ (空の領域の σ のばらつき 1.362 で補正すると 1.0σ)。</a:t>
-            </a:r>
-          </a:p>
-          <a:p>
-            <a:r>
-              <a:t>J の誤差 (約 3 倍) あり: 期待の中央値 2.4σ、68% の範囲 1.3〜5.0σ。ずれ 1.5σ (補正後 1.2σ)。</a:t>
-            </a:r>
-          </a:p>
-          <a:p>
-            <a:r>
-              <a:t>天の川側の密度を 0.3〜0.6 GeV/cm³ で動かすと、期待は 0.6〜9.7σ まで広がる (密度が低いほど期待は大きい)。どの組み合わせでもずれは補正後 2.2σ 以下。</a:t>
-            </a:r>
-          </a:p>
-          <a:p>
-            <a:r>
-              <a:t>→ 暗黒物質と矛盾はしないが、確認もできない。誤差を正直に入れるほど「判定できない」が強くなる。教授の「矮小銀河では粗すぎる」を数字で裏付けた形。</a:t>
-            </a:r>
-          </a:p>
-          <a:p>
-            <a:r>
-              <a:t>注意: 9/28 の「期待 1.35〜5.4σ」は使えない天体 (SMC・LMC) 込みの値。使える 43 天体では 0.9〜3.4σ (J の誤差なし)。</a:t>
+              <a:t>方法: 各天体の「DM なら何σで見えたはずか」(pred_i) に、J のずれ 10^δ (δ は平均 0、幅 0.5 の正規分布) を掛ける。天体ごとの重み付き和 T = Σ pred_i·meas_i / √Σpred_i² で、予測と実測を同じまとめ方で比べる。</a:t>
+            </a:r>
+          </a:p>
+          <a:p>
+            <a:r>
+              <a:t>SMC・LMC: それ自体が広がったガンマ線源なので、解析で中心がマスクされ、ハローの形の 1〜2% しか残っていなかった (結果ファイルに usable=false)。9/28 の計算はこれを見落とし、SMC 1 天体が予測 2.69σ のうち 2.06σ 分を占めていた。修正案は cloud_reports/2026-10-02_dwarf_consistency_usable.patch。</a:t>
+            </a:r>
+          </a:p>
+          <a:p>
+            <a:r>
+              <a:t>天の川側の密度の仮定 (局所密度 0.3〜0.6 GeV/cm³) も別に動かした。</a:t>
             </a:r>
           </a:p>
         </p:txBody>
@@ -1103,17 +1095,187 @@
           <a:lstStyle/>
           <a:p>
             <a:r>
+              <a:t>使える 43 天体、20 GeV、天の川側の局所密度 0.42 GeV/cm³。</a:t>
+            </a:r>
+          </a:p>
+          <a:p>
+            <a:r>
+              <a:t>J の誤差なし: 期待 1.73σ、実測 0.39σ、ずれ 1.3σ (空の領域の σ のばらつき 1.26 で補正すると 1.1σ)。</a:t>
+            </a:r>
+          </a:p>
+          <a:p>
+            <a:r>
+              <a:t>J の誤差 (約 3 倍) あり: 期待の中央値 2.4σ、68% の範囲 1.3〜5.0σ。ずれ 1.5σ (補正後 1.3σ)。</a:t>
+            </a:r>
+          </a:p>
+          <a:p>
+            <a:r>
+              <a:t>天の川側の密度を 0.3〜0.6 GeV/cm³ で動かすと、期待は 0.6〜9.7σ まで広がる (密度が低いほど期待は大きい)。どの組み合わせでもずれは補正後 2.4σ 以下。</a:t>
+            </a:r>
+          </a:p>
+          <a:p>
+            <a:r>
+              <a:t>→ 暗黒物質と矛盾はしないが、確認もできない。誤差を正直に入れるほど「判定できない」が強くなる。教授の「矮小銀河では粗すぎる」を数字で裏付けた形。</a:t>
+            </a:r>
+          </a:p>
+          <a:p>
+            <a:r>
+              <a:t>注意: 9/28 の「期待 1.35〜5.4σ」は使えない天体 (SMC・LMC) 込みの値。使える 43 天体では 0.9〜3.4σ (J の誤差なし)。</a:t>
+            </a:r>
+          </a:p>
+        </p:txBody>
+      </p:sp>
+      <p:sp>
+        <p:nvSpPr>
+          <p:cNvPr id="4" name="Slide Number Placeholder 3"/>
+          <p:cNvSpPr>
+            <a:spLocks noGrp="1"/>
+          </p:cNvSpPr>
+          <p:nvPr>
+            <p:ph type="sldNum" idx="5" sz="quarter"/>
+          </p:nvPr>
+        </p:nvSpPr>
+        <p:spPr/>
+      </p:sp>
+    </p:spTree>
+  </p:cSld>
+  <p:clrMapOvr>
+    <a:masterClrMapping/>
+  </p:clrMapOvr>
+</p:notes>
+</file>
+
+<file path=ppt/notesSlides/notesSlide17.xml><?xml version="1.0" encoding="utf-8"?>
+<p:notes xmlns:a="http://schemas.openxmlformats.org/drawingml/2006/main" xmlns:p="http://schemas.openxmlformats.org/presentationml/2006/main" xmlns:r="http://schemas.openxmlformats.org/officeDocument/2006/relationships">
+  <p:cSld>
+    <p:spTree>
+      <p:nvGrpSpPr>
+        <p:cNvPr id="1" name=""/>
+        <p:cNvGrpSpPr/>
+        <p:nvPr/>
+      </p:nvGrpSpPr>
+      <p:grpSpPr>
+        <a:xfrm>
+          <a:off x="0" y="0"/>
+          <a:ext cx="0" cy="0"/>
+          <a:chOff x="0" y="0"/>
+          <a:chExt cx="0" cy="0"/>
+        </a:xfrm>
+      </p:grpSpPr>
+      <p:sp>
+        <p:nvSpPr>
+          <p:cNvPr id="2" name="Slide Image Placeholder 1"/>
+          <p:cNvSpPr>
+            <a:spLocks noGrp="1"/>
+          </p:cNvSpPr>
+          <p:nvPr>
+            <p:ph type="sldImg" idx="2"/>
+          </p:nvPr>
+        </p:nvSpPr>
+        <p:spPr/>
+      </p:sp>
+      <p:sp>
+        <p:nvSpPr>
+          <p:cNvPr id="3" name="Notes Placeholder 2"/>
+          <p:cNvSpPr>
+            <a:spLocks noGrp="1"/>
+          </p:cNvSpPr>
+          <p:nvPr>
+            <p:ph type="body" idx="3" sz="quarter"/>
+          </p:nvPr>
+        </p:nvSpPr>
+        <p:spPr/>
+        <p:txBody>
+          <a:bodyPr/>
+          <a:lstStyle/>
+          <a:p>
+            <a:r>
               <a:t>流れ: 再現 → 3 つの問題 → 原因を調べて背景の間違い説を 3 つ否定 → 矮小銀河は非検出だが判定できない (J の誤差込みで定量化)。</a:t>
             </a:r>
           </a:p>
           <a:p>
             <a:r>
-              <a:t>19.0σ は名目値。何も無い対照領域 23 か所での σ のばらつきは 1.362 なので、過大評価になっている。</a:t>
-            </a:r>
-          </a:p>
-          <a:p>
-            <a:r>
-              <a:t>矮小銀河: 使える 43 天体で期待 1.7σ (J の誤差込みで 68% 1.3〜5.0σ)、実測 0.4σ。ずれは補正後 1.2σ。</a:t>
+              <a:t>19.0σ は名目値。何も無い対照領域 23 か所での σ のばらつきは 1.26 (95%: 1.14–1.39) なので、較正すると約 15σ (13.7–16.6σ)。区間の付け方は Kimura (2019)。</a:t>
+            </a:r>
+          </a:p>
+          <a:p>
+            <a:r>
+              <a:t>矮小銀河: 使える 43 天体で期待 1.7σ (J の誤差込みで 68% 1.3〜5.0σ)、実測 0.4σ。ずれは補正後 1.3σ。</a:t>
+            </a:r>
+          </a:p>
+        </p:txBody>
+      </p:sp>
+      <p:sp>
+        <p:nvSpPr>
+          <p:cNvPr id="4" name="Slide Number Placeholder 3"/>
+          <p:cNvSpPr>
+            <a:spLocks noGrp="1"/>
+          </p:cNvSpPr>
+          <p:nvPr>
+            <p:ph type="sldNum" idx="5" sz="quarter"/>
+          </p:nvPr>
+        </p:nvSpPr>
+        <p:spPr/>
+      </p:sp>
+    </p:spTree>
+  </p:cSld>
+  <p:clrMapOvr>
+    <a:masterClrMapping/>
+  </p:clrMapOvr>
+</p:notes>
+</file>
+
+<file path=ppt/notesSlides/notesSlide18.xml><?xml version="1.0" encoding="utf-8"?>
+<p:notes xmlns:a="http://schemas.openxmlformats.org/drawingml/2006/main" xmlns:p="http://schemas.openxmlformats.org/presentationml/2006/main" xmlns:r="http://schemas.openxmlformats.org/officeDocument/2006/relationships">
+  <p:cSld>
+    <p:spTree>
+      <p:nvGrpSpPr>
+        <p:cNvPr id="1" name=""/>
+        <p:cNvGrpSpPr/>
+        <p:nvPr/>
+      </p:nvGrpSpPr>
+      <p:grpSpPr>
+        <a:xfrm>
+          <a:off x="0" y="0"/>
+          <a:ext cx="0" cy="0"/>
+          <a:chOff x="0" y="0"/>
+          <a:chExt cx="0" cy="0"/>
+        </a:xfrm>
+      </p:grpSpPr>
+      <p:sp>
+        <p:nvSpPr>
+          <p:cNvPr id="2" name="Slide Image Placeholder 1"/>
+          <p:cNvSpPr>
+            <a:spLocks noGrp="1"/>
+          </p:cNvSpPr>
+          <p:nvPr>
+            <p:ph type="sldImg" idx="2"/>
+          </p:nvPr>
+        </p:nvSpPr>
+        <p:spPr/>
+      </p:sp>
+      <p:sp>
+        <p:nvSpPr>
+          <p:cNvPr id="3" name="Notes Placeholder 2"/>
+          <p:cNvSpPr>
+            <a:spLocks noGrp="1"/>
+          </p:cNvSpPr>
+          <p:nvPr>
+            <p:ph type="body" idx="3" sz="quarter"/>
+          </p:nvPr>
+        </p:nvSpPr>
+        <p:spPr/>
+        <p:txBody>
+          <a:bodyPr/>
+          <a:lstStyle/>
+          <a:p>
+            <a:r>
+              <a:t>Kimura (2019): 隠れた過程どうしの相関の推定量に信頼区間を付けるため、漸近分散の推定量を 2 種類提案し、二重確率 Poisson 過程のシミュレーションで比べた論文。本発表では「σ のばらつきの推定値に区間を付ける」部分の考え方を借りた。</a:t>
+            </a:r>
+          </a:p>
+          <a:p>
+            <a:r>
+              <a:t>Kimura &amp; Yoshida (2016): その元になった、隠れた過程どうしの相関の推定。</a:t>
             </a:r>
           </a:p>
         </p:txBody>
@@ -1263,7 +1425,7 @@
           <a:lstStyle/>
           <a:p>
             <a:r>
-              <a:t>(a) 何も無い対照領域 23 か所 (250 個の有意度) で同じ解析をすると、σ の分布の標準偏差は 1 ではなく 1.362、最大 +4.50σ、|σ|&gt;3 が 2.4% (期待 0.27%)。19σ という数字そのものは過大評価になっている。</a:t>
+              <a:t>(a) 何も無い対照領域 23 か所 (250 個の有意度) で同じ解析をすると、σ の分布の標準偏差は 1 より大きい (記録では 1.362、測り直すと 1.26)、最大 +4.50σ、|σ|&gt;3 が 2.4% (期待 0.27%)。19σ という数字そのものは過大評価になっている。</a:t>
             </a:r>
           </a:p>
           <a:p>
@@ -1668,17 +1830,42 @@
           <a:lstStyle/>
           <a:p>
             <a:r>
-              <a:t>言えるのは「既知の背景では説明できない超過がある」まで。それが暗黒物質かどうかは別の主張。</a:t>
-            </a:r>
-          </a:p>
-          <a:p>
-            <a:r>
-              <a:t>残る可能性: ICS の空間分布が銀河中心寄りで 2.3 倍もずれている場合。今の道具では確かめられない。</a:t>
-            </a:r>
-          </a:p>
-          <a:p>
-            <a:r>
-              <a:t>→ 独立な確認として、矮小銀河を見る。</a:t>
+              <a:t>95% 区間: ばらつき 1.14–1.39、較正後 13.7–16.6σ。</a:t>
+            </a:r>
+          </a:p>
+          <a:p>
+            <a:r>
+              <a:t>何をしたか: 何も無い空 23 か所で、天の川と同じ解析をしたときの σ のばらつき (0 からのずれの 2 乗平均の平方根) をエネルギーごとに測り直し、その推定値に信頼区間を付けた。</a:t>
+            </a:r>
+          </a:p>
+          <a:p>
+            <a:r>
+              <a:t>区間の付け方は Kimura (2019, Japanese Journal of Statistics and Data Science; arXiv:1710.06683) を参考にした。この論文は、推定値のばらつき (漸近分散) の見積もり方を 2 種類作り、シミュレーションで比べている。ここでも (A) 299 個を全部独立とみなす方法と、(B) 場所ごとにまとめて引き直す方法 (クラスターブートストラップ) を比べた。</a:t>
+            </a:r>
+          </a:p>
+          <a:p>
+            <a:r>
+              <a:t>同じ場所のエネルギービン同士は相関する (隣どうし +0.31、分散のうち場所共通の割合 0.22)。この相関がある仮想データでは、95% 区間が本当に当たる割合が (A) 90.5%、(B) 92.1%。相関が強いほど (A) は区間が狭すぎて外れやすく、(B) のほうが安全。実データでは 2 つの区間はほぼ同じだった。</a:t>
+            </a:r>
+          </a:p>
+          <a:p>
+            <a:r>
+              <a:t>使ったのは光子が十分あるビン 2–10 (2.6–169 GeV)。最低エネルギー (1.5 GeV) はばらつき 2.2 で外れ (空での最大 4.50σ もここ)。ビン 11–13 は光子が数個〜数十個で、理論の前提 (光子が多い) が崩れる。</a:t>
+            </a:r>
+          </a:p>
+          <a:p>
+            <a:r>
+              <a:t>較正の仮定: 背景モデルの誤りで、σ の分散が一様に 1.26² 倍に膨らむ (統計でいう過分散)。そのとき較正後の σ = 名目 σ ÷ 1.26。</a:t>
+            </a:r>
+          </a:p>
+          <a:p>
+            <a:r>
+              <a:t>記録の 1.362 (250 個) は、今の結果ファイルからは再現できなかった (同じ 23 か所の全 299 個で 1.259)。どの 250 個を選んだのかが不明。</a:t>
+            </a:r>
+          </a:p>
+          <a:p>
+            <a:r>
+              <a:t>スクリプト: cloud_reports/2026-10-02_null_variance_ci.py、図: slides/figs/plot_null_variance.py。</a:t>
             </a:r>
           </a:p>
         </p:txBody>
@@ -1748,22 +1935,17 @@
           <a:lstStyle/>
           <a:p>
             <a:r>
-              <a:t>矮小銀河 54 個は Local Volume Database (Pace 2025) の確認済み銀河。対照領域は |b|&gt;20° で互いに 20° 以上離した何も無い場所。</a:t>
-            </a:r>
-          </a:p>
-          <a:p>
-            <a:r>
-              <a:t>成分は等方・ガス・ICS・点源・ハロー。バブルと Loop I は銀河中心の構造なので入れない。</a:t>
-            </a:r>
-          </a:p>
-          <a:p>
-            <a:r>
-              <a:t>たとえ: 天の川のハローは部屋全体を照らす光なので電球と見分けにくかった。矮小銀河は遠くの豆電球 (0.2〜0.4°) なので、半径 10° の中では電球は平らな背景にしか見えない。</a:t>
-            </a:r>
-          </a:p>
-          <a:p>
-            <a:r>
-              <a:t>注意: 矮小銀河は望遠鏡のぼやけ (PSF) より小さいので、この手法では点源と区別できない。</a:t>
+              <a:t>言えるのは「既知の背景では説明できない超過がある」まで。それが暗黒物質かどうかは別の主張。</a:t>
+            </a:r>
+          </a:p>
+          <a:p>
+            <a:r>
+              <a:t>残る可能性: ICS の空間分布が銀河中心寄りで 2.3 倍もずれている場合。今の道具では確かめられない。</a:t>
+            </a:r>
+          </a:p>
+          <a:p>
+            <a:r>
+              <a:t>→ 独立な確認として、矮小銀河を見る。</a:t>
             </a:r>
           </a:p>
         </p:txBody>
@@ -5080,6 +5262,97 @@
           <a:p>
             <a:r>
               <a:rPr sz="3800"/>
+              <a:t>矮小銀河への適用（7 月に実施済み）</a:t>
+            </a:r>
+          </a:p>
+        </p:txBody>
+      </p:sp>
+      <p:sp>
+        <p:nvSpPr>
+          <p:cNvPr id="3" name="Content Placeholder 2"/>
+          <p:cNvSpPr>
+            <a:spLocks noGrp="1"/>
+          </p:cNvSpPr>
+          <p:nvPr>
+            <p:ph idx="1"/>
+          </p:nvPr>
+        </p:nvSpPr>
+        <p:spPr/>
+        <p:txBody>
+          <a:bodyPr/>
+          <a:lstStyle/>
+          <a:p>
+            <a:pPr/>
+            <a:r>
+              <a:rPr sz="2600"/>
+              <a:t>暗黒物質なら、矮小銀河からも同じ光が来るはず</a:t>
+            </a:r>
+          </a:p>
+          <a:p>
+            <a:pPr/>
+            <a:r>
+              <a:rPr sz="2600"/>
+              <a:t>同じ手法を各天体のまわり半径 10° に</a:t>
+            </a:r>
+          </a:p>
+          <a:p>
+            <a:pPr/>
+            <a:r>
+              <a:rPr sz="2600"/>
+              <a:t>対象：矮小銀河 54 ＋ M31・M33 ＋ 何も無い対照領域 23</a:t>
+            </a:r>
+          </a:p>
+          <a:p>
+            <a:pPr/>
+            <a:r>
+              <a:rPr sz="2600"/>
+              <a:t>天の川のような縮退は起きない</a:t>
+            </a:r>
+          </a:p>
+          <a:p>
+            <a:pPr lvl="1"/>
+            <a:r>
+              <a:rPr sz="2000"/>
+              <a:t>矮小銀河は点に近く、ICS は広がった平らな光</a:t>
+            </a:r>
+          </a:p>
+        </p:txBody>
+      </p:sp>
+    </p:spTree>
+  </p:cSld>
+  <p:clrMapOvr>
+    <a:masterClrMapping/>
+  </p:clrMapOvr>
+</p:sld>
+</file>
+
+<file path=ppt/slides/slide11.xml><?xml version="1.0" encoding="utf-8"?>
+<p:sld xmlns:a="http://schemas.openxmlformats.org/drawingml/2006/main" xmlns:p="http://schemas.openxmlformats.org/presentationml/2006/main" xmlns:r="http://schemas.openxmlformats.org/officeDocument/2006/relationships">
+  <p:cSld>
+    <p:spTree>
+      <p:nvGrpSpPr>
+        <p:cNvPr id="1" name=""/>
+        <p:cNvGrpSpPr/>
+        <p:nvPr/>
+      </p:nvGrpSpPr>
+      <p:grpSpPr/>
+      <p:sp>
+        <p:nvSpPr>
+          <p:cNvPr id="2" name="Title 1"/>
+          <p:cNvSpPr>
+            <a:spLocks noGrp="1"/>
+          </p:cNvSpPr>
+          <p:nvPr>
+            <p:ph type="title"/>
+          </p:nvPr>
+        </p:nvSpPr>
+        <p:spPr/>
+        <p:txBody>
+          <a:bodyPr/>
+          <a:lstStyle/>
+          <a:p>
+            <a:r>
+              <a:rPr sz="3800"/>
               <a:t>結果：どこにも信号は見えなかった</a:t>
             </a:r>
           </a:p>
@@ -5146,102 +5419,6 @@
 </p:sld>
 </file>
 
-<file path=ppt/slides/slide11.xml><?xml version="1.0" encoding="utf-8"?>
-<p:sld xmlns:a="http://schemas.openxmlformats.org/drawingml/2006/main" xmlns:p="http://schemas.openxmlformats.org/presentationml/2006/main" xmlns:r="http://schemas.openxmlformats.org/officeDocument/2006/relationships">
-  <p:cSld>
-    <p:spTree>
-      <p:nvGrpSpPr>
-        <p:cNvPr id="1" name=""/>
-        <p:cNvGrpSpPr/>
-        <p:nvPr/>
-      </p:nvGrpSpPr>
-      <p:grpSpPr/>
-      <p:sp>
-        <p:nvSpPr>
-          <p:cNvPr id="2" name="Title 1"/>
-          <p:cNvSpPr>
-            <a:spLocks noGrp="1"/>
-          </p:cNvSpPr>
-          <p:nvPr>
-            <p:ph type="title"/>
-          </p:nvPr>
-        </p:nvSpPr>
-        <p:spPr/>
-        <p:txBody>
-          <a:bodyPr/>
-          <a:lstStyle/>
-          <a:p>
-            <a:r>
-              <a:rPr sz="3800"/>
-              <a:t>論文：Bertólez-Martínez ら (2026)</a:t>
-            </a:r>
-          </a:p>
-        </p:txBody>
-      </p:sp>
-      <p:sp>
-        <p:nvSpPr>
-          <p:cNvPr id="3" name="Content Placeholder 2"/>
-          <p:cNvSpPr>
-            <a:spLocks noGrp="1"/>
-          </p:cNvSpPr>
-          <p:nvPr>
-            <p:ph idx="1"/>
-          </p:nvPr>
-        </p:nvSpPr>
-        <p:spPr/>
-        <p:txBody>
-          <a:bodyPr/>
-          <a:lstStyle/>
-          <a:p>
-            <a:pPr/>
-            <a:r>
-              <a:rPr sz="2400"/>
-              <a:t>矮小銀河の J ファクター（暗黒物質の量の指標）の</a:t>
-            </a:r>
-            <a:br/>
-            <a:r>
-              <a:rPr sz="2400"/>
-              <a:t>誤差は小さく見積もられている</a:t>
-            </a:r>
-          </a:p>
-          <a:p>
-            <a:pPr/>
-            <a:r>
-              <a:rPr sz="2400"/>
-              <a:t>見落とされがちな原因の例</a:t>
-            </a:r>
-          </a:p>
-          <a:p>
-            <a:pPr lvl="1"/>
-            <a:r>
-              <a:rPr sz="1800"/>
-              <a:t>点として扱う・ハローや星の分布の形の仮定・球対称からのずれ</a:t>
-            </a:r>
-          </a:p>
-          <a:p>
-            <a:pPr lvl="1"/>
-            <a:r>
-              <a:rPr sz="1800"/>
-              <a:t>力学的な釣り合いからのずれ・連星・手前の星の混入</a:t>
-            </a:r>
-          </a:p>
-          <a:p>
-            <a:pPr/>
-            <a:r>
-              <a:rPr sz="2400"/>
-              <a:t>文献ごとの J のばらつきから、約 3 倍（Δlog₁₀J ≈ 0.5）は見込むべき</a:t>
-            </a:r>
-          </a:p>
-        </p:txBody>
-      </p:sp>
-    </p:spTree>
-  </p:cSld>
-  <p:clrMapOvr>
-    <a:masterClrMapping/>
-  </p:clrMapOvr>
-</p:sld>
-</file>
-
 <file path=ppt/slides/slide12.xml><?xml version="1.0" encoding="utf-8"?>
 <p:sld xmlns:a="http://schemas.openxmlformats.org/drawingml/2006/main" xmlns:p="http://schemas.openxmlformats.org/presentationml/2006/main" xmlns:r="http://schemas.openxmlformats.org/officeDocument/2006/relationships">
   <p:cSld>
@@ -5269,7 +5446,7 @@
           <a:p>
             <a:r>
               <a:rPr sz="3800"/>
-              <a:t>論文：何をしたか</a:t>
+              <a:t>論文：Bertólez-Martínez ら (2026)</a:t>
             </a:r>
           </a:p>
         </p:txBody>
@@ -5291,36 +5468,41 @@
           <a:p>
             <a:pPr/>
             <a:r>
-              <a:rPr sz="2800"/>
-              <a:t>暗黒物質の信号を入れた疑似データを何度も作る</a:t>
+              <a:rPr sz="2400"/>
+              <a:t>矮小銀河の J ファクター（暗黒物質の量の指標）の</a:t>
+            </a:r>
+            <a:br/>
+            <a:r>
+              <a:rPr sz="2400"/>
+              <a:t>誤差は小さく見積もられている</a:t>
+            </a:r>
+          </a:p>
+          <a:p>
+            <a:pPr/>
+            <a:r>
+              <a:rPr sz="2400"/>
+              <a:t>見落とされがちな原因の例</a:t>
             </a:r>
           </a:p>
           <a:p>
             <a:pPr lvl="1"/>
             <a:r>
-              <a:rPr sz="2200"/>
-              <a:t>Fermi-LAT 17.4 年分、銀河中心超過と同じ 42 GeV の WIMP</a:t>
+              <a:rPr sz="1800"/>
+              <a:t>点として扱う・ハローや星の分布の形の仮定・球対称からのずれ</a:t>
+            </a:r>
+          </a:p>
+          <a:p>
+            <a:pPr lvl="1"/>
+            <a:r>
+              <a:rPr sz="1800"/>
+              <a:t>力学的な釣り合いからのずれ・連星・手前の星の混入</a:t>
             </a:r>
           </a:p>
           <a:p>
             <a:pPr/>
             <a:r>
-              <a:rPr sz="2800"/>
-              <a:t>J の誤差を 2 つに分けて動かす</a:t>
-            </a:r>
-          </a:p>
-          <a:p>
-            <a:pPr lvl="1"/>
-            <a:r>
-              <a:rPr sz="2200"/>
-              <a:t>σ：J の本当のばらつき　σ_L：解析で仮定する幅</a:t>
-            </a:r>
-          </a:p>
-          <a:p>
-            <a:pPr/>
-            <a:r>
-              <a:rPr sz="2800"/>
-              <a:t>対象：Ursa Minor 1 個、27 個をまとめた解析</a:t>
+              <a:rPr sz="2400"/>
+              <a:t>文献ごとの J のばらつきから、約 3 倍（Δlog₁₀J ≈ 0.5）は見込むべき</a:t>
             </a:r>
           </a:p>
         </p:txBody>
@@ -5360,7 +5542,7 @@
           <a:p>
             <a:r>
               <a:rPr sz="3800"/>
-              <a:t>論文：分かったこと</a:t>
+              <a:t>論文：何をしたか</a:t>
             </a:r>
           </a:p>
         </p:txBody>
@@ -5382,41 +5564,36 @@
           <a:p>
             <a:pPr/>
             <a:r>
-              <a:rPr sz="2400"/>
-              <a:t>Ursa Minor：J の誤差を小さく見積もると、</a:t>
-            </a:r>
-            <a:br/>
-            <a:r>
-              <a:rPr sz="2400"/>
-              <a:t>本物を誤って除外する割合が 1.7% → 8% → 22%</a:t>
+              <a:rPr sz="2800"/>
+              <a:t>暗黒物質の信号を入れた疑似データを何度も作る</a:t>
+            </a:r>
+          </a:p>
+          <a:p>
+            <a:pPr lvl="1"/>
+            <a:r>
+              <a:rPr sz="2200"/>
+              <a:t>Fermi-LAT 17.4 年分、銀河中心超過と同じ 42 GeV の WIMP</a:t>
             </a:r>
           </a:p>
           <a:p>
             <a:pPr/>
             <a:r>
-              <a:rPr sz="2400"/>
-              <a:t>27 個まとめると、ふつうの設定でも 21%</a:t>
+              <a:rPr sz="2800"/>
+              <a:t>J の誤差を 2 つに分けて動かす</a:t>
             </a:r>
           </a:p>
           <a:p>
             <a:pPr lvl="1"/>
             <a:r>
-              <a:rPr sz="1800"/>
-              <a:t>誤差を小さく見積もると 31% → 49% → 88%</a:t>
+              <a:rPr sz="2200"/>
+              <a:t>σ：J の本当のばらつき　σ_L：解析で仮定する幅</a:t>
             </a:r>
           </a:p>
           <a:p>
             <a:pPr/>
             <a:r>
-              <a:rPr sz="2400"/>
-              <a:t>ハローを点として扱うと、上限が 1.4 倍きつく出すぎる</a:t>
-            </a:r>
-          </a:p>
-          <a:p>
-            <a:pPr/>
-            <a:r>
-              <a:rPr sz="2400"/>
-              <a:t>→ 銀河中心と矮小銀河の「矛盾」は誇張されうる</a:t>
+              <a:rPr sz="2800"/>
+              <a:t>対象：Ursa Minor 1 個、27 個をまとめた解析</a:t>
             </a:r>
           </a:p>
         </p:txBody>
@@ -5456,7 +5633,7 @@
           <a:p>
             <a:r>
               <a:rPr sz="3800"/>
-              <a:t>論文の誤差を、僕の結果に当てはめる</a:t>
+              <a:t>論文：分かったこと</a:t>
             </a:r>
           </a:p>
         </p:txBody>
@@ -5478,32 +5655,41 @@
           <a:p>
             <a:pPr/>
             <a:r>
-              <a:rPr sz="2600"/>
-              <a:t>これまで：矮小銀河の J の誤差をゼロとして扱っていた</a:t>
+              <a:rPr sz="2400"/>
+              <a:t>Ursa Minor：J の誤差を小さく見積もると、</a:t>
+            </a:r>
+            <a:br/>
+            <a:r>
+              <a:rPr sz="2400"/>
+              <a:t>本物を誤って除外する割合が 1.7% → 8% → 22%</a:t>
             </a:r>
           </a:p>
           <a:p>
             <a:pPr/>
             <a:r>
-              <a:rPr sz="2600"/>
-              <a:t>各天体の J を「約 3 倍の範囲」でランダムにずらし、</a:t>
-            </a:r>
-            <a:br/>
-            <a:r>
-              <a:rPr sz="2600"/>
-              <a:t>暗黒物質なら何σ見えたはずかを 20 万回計算</a:t>
+              <a:rPr sz="2400"/>
+              <a:t>27 個まとめると、ふつうの設定でも 21%</a:t>
+            </a:r>
+          </a:p>
+          <a:p>
+            <a:pPr lvl="1"/>
+            <a:r>
+              <a:rPr sz="1800"/>
+              <a:t>誤差を小さく見積もると 31% → 49% → 88%</a:t>
             </a:r>
           </a:p>
           <a:p>
             <a:pPr/>
             <a:r>
-              <a:rPr sz="2600"/>
-              <a:t>ついでに見つけた誤り：使えない天体 2 つ（SMC・LMC）が</a:t>
-            </a:r>
-            <a:br/>
-            <a:r>
-              <a:rPr sz="2600"/>
-              <a:t>予測に混ざっていた → 除いて 43 天体で計算</a:t>
+              <a:rPr sz="2400"/>
+              <a:t>ハローを点として扱うと、上限が 1.4 倍きつく出すぎる</a:t>
+            </a:r>
+          </a:p>
+          <a:p>
+            <a:pPr/>
+            <a:r>
+              <a:rPr sz="2400"/>
+              <a:t>→ 銀河中心と矮小銀河の「矛盾」は誇張されうる</a:t>
             </a:r>
           </a:p>
         </p:txBody>
@@ -5517,6 +5703,93 @@
 </file>
 
 <file path=ppt/slides/slide15.xml><?xml version="1.0" encoding="utf-8"?>
+<p:sld xmlns:a="http://schemas.openxmlformats.org/drawingml/2006/main" xmlns:p="http://schemas.openxmlformats.org/presentationml/2006/main" xmlns:r="http://schemas.openxmlformats.org/officeDocument/2006/relationships">
+  <p:cSld>
+    <p:spTree>
+      <p:nvGrpSpPr>
+        <p:cNvPr id="1" name=""/>
+        <p:cNvGrpSpPr/>
+        <p:nvPr/>
+      </p:nvGrpSpPr>
+      <p:grpSpPr/>
+      <p:sp>
+        <p:nvSpPr>
+          <p:cNvPr id="2" name="Title 1"/>
+          <p:cNvSpPr>
+            <a:spLocks noGrp="1"/>
+          </p:cNvSpPr>
+          <p:nvPr>
+            <p:ph type="title"/>
+          </p:nvPr>
+        </p:nvSpPr>
+        <p:spPr/>
+        <p:txBody>
+          <a:bodyPr/>
+          <a:lstStyle/>
+          <a:p>
+            <a:r>
+              <a:rPr sz="3800"/>
+              <a:t>論文の誤差を、僕の結果に当てはめる</a:t>
+            </a:r>
+          </a:p>
+        </p:txBody>
+      </p:sp>
+      <p:sp>
+        <p:nvSpPr>
+          <p:cNvPr id="3" name="Content Placeholder 2"/>
+          <p:cNvSpPr>
+            <a:spLocks noGrp="1"/>
+          </p:cNvSpPr>
+          <p:nvPr>
+            <p:ph idx="1"/>
+          </p:nvPr>
+        </p:nvSpPr>
+        <p:spPr/>
+        <p:txBody>
+          <a:bodyPr/>
+          <a:lstStyle/>
+          <a:p>
+            <a:pPr/>
+            <a:r>
+              <a:rPr sz="2600"/>
+              <a:t>これまで：矮小銀河の J の誤差をゼロとして扱っていた</a:t>
+            </a:r>
+          </a:p>
+          <a:p>
+            <a:pPr/>
+            <a:r>
+              <a:rPr sz="2600"/>
+              <a:t>各天体の J を「約 3 倍の範囲」でランダムにずらし、</a:t>
+            </a:r>
+            <a:br/>
+            <a:r>
+              <a:rPr sz="2600"/>
+              <a:t>暗黒物質なら何σ見えたはずかを 20 万回計算</a:t>
+            </a:r>
+          </a:p>
+          <a:p>
+            <a:pPr/>
+            <a:r>
+              <a:rPr sz="2600"/>
+              <a:t>ついでに見つけた誤り：使えない天体 2 つ（SMC・LMC）が</a:t>
+            </a:r>
+            <a:br/>
+            <a:r>
+              <a:rPr sz="2600"/>
+              <a:t>予測に混ざっていた → 除いて 43 天体で計算</a:t>
+            </a:r>
+          </a:p>
+        </p:txBody>
+      </p:sp>
+    </p:spTree>
+  </p:cSld>
+  <p:clrMapOvr>
+    <a:masterClrMapping/>
+  </p:clrMapOvr>
+</p:sld>
+</file>
+
+<file path=ppt/slides/slide16.xml><?xml version="1.0" encoding="utf-8"?>
 <p:sld xmlns:a="http://schemas.openxmlformats.org/drawingml/2006/main" xmlns:p="http://schemas.openxmlformats.org/presentationml/2006/main" xmlns:r="http://schemas.openxmlformats.org/officeDocument/2006/relationships">
   <p:cSld>
     <p:spTree>
@@ -5596,7 +5869,7 @@
           <a:p>
             <a:r>
               <a:rPr sz="2200"/>
-              <a:t>期待 1.7σ → 1.3〜5.0σ（J の誤差あり）　実測 0.4σ　ずれ約 1.2σ</a:t>
+              <a:t>期待 1.7σ → 1.3〜5.0σ（J の誤差あり）　実測 0.4σ　ずれ約 1.3σ</a:t>
             </a:r>
           </a:p>
         </p:txBody>
@@ -5609,7 +5882,7 @@
 </p:sld>
 </file>
 
-<file path=ppt/slides/slide16.xml><?xml version="1.0" encoding="utf-8"?>
+<file path=ppt/slides/slide17.xml><?xml version="1.0" encoding="utf-8"?>
 <p:sld xmlns:a="http://schemas.openxmlformats.org/drawingml/2006/main" xmlns:p="http://schemas.openxmlformats.org/presentationml/2006/main" xmlns:r="http://schemas.openxmlformats.org/officeDocument/2006/relationships">
   <p:cSld>
     <p:spTree>
@@ -5659,7 +5932,7 @@
             <a:pPr/>
             <a:r>
               <a:rPr sz="2800"/>
-              <a:t>Totani の超過は再現できた（19.0σ、ただし過大評価）</a:t>
+              <a:t>Totani の超過を再現（名目 19.0σ、較正後 約 15σ）</a:t>
             </a:r>
           </a:p>
           <a:p>
@@ -5681,6 +5954,104 @@
             <a:r>
               <a:rPr sz="2800"/>
               <a:t>矮小銀河では判定できない（J の誤差を入れるとさらに）</a:t>
+            </a:r>
+          </a:p>
+        </p:txBody>
+      </p:sp>
+    </p:spTree>
+  </p:cSld>
+  <p:clrMapOvr>
+    <a:masterClrMapping/>
+  </p:clrMapOvr>
+</p:sld>
+</file>
+
+<file path=ppt/slides/slide18.xml><?xml version="1.0" encoding="utf-8"?>
+<p:sld xmlns:a="http://schemas.openxmlformats.org/drawingml/2006/main" xmlns:p="http://schemas.openxmlformats.org/presentationml/2006/main" xmlns:r="http://schemas.openxmlformats.org/officeDocument/2006/relationships">
+  <p:cSld>
+    <p:spTree>
+      <p:nvGrpSpPr>
+        <p:cNvPr id="1" name=""/>
+        <p:cNvGrpSpPr/>
+        <p:nvPr/>
+      </p:nvGrpSpPr>
+      <p:grpSpPr/>
+      <p:sp>
+        <p:nvSpPr>
+          <p:cNvPr id="2" name="Title 1"/>
+          <p:cNvSpPr>
+            <a:spLocks noGrp="1"/>
+          </p:cNvSpPr>
+          <p:nvPr>
+            <p:ph type="title"/>
+          </p:nvPr>
+        </p:nvSpPr>
+        <p:spPr/>
+        <p:txBody>
+          <a:bodyPr/>
+          <a:lstStyle/>
+          <a:p>
+            <a:r>
+              <a:rPr sz="3800"/>
+              <a:t>参考文献</a:t>
+            </a:r>
+          </a:p>
+        </p:txBody>
+      </p:sp>
+      <p:sp>
+        <p:nvSpPr>
+          <p:cNvPr id="3" name="Content Placeholder 2"/>
+          <p:cNvSpPr>
+            <a:spLocks noGrp="1"/>
+          </p:cNvSpPr>
+          <p:nvPr>
+            <p:ph idx="1"/>
+          </p:nvPr>
+        </p:nvSpPr>
+        <p:spPr/>
+        <p:txBody>
+          <a:bodyPr/>
+          <a:lstStyle/>
+          <a:p>
+            <a:pPr/>
+            <a:r>
+              <a:rPr sz="2000"/>
+              <a:t>T. Totani (2025), arXiv:2507.07209</a:t>
+            </a:r>
+          </a:p>
+          <a:p>
+            <a:pPr/>
+            <a:r>
+              <a:rPr sz="2000"/>
+              <a:t>Bertólez-Martínez, Hooper &amp; Khatee Zathul (2026), arXiv:2609.20944</a:t>
+            </a:r>
+          </a:p>
+          <a:p>
+            <a:pPr/>
+            <a:r>
+              <a:rPr sz="2000"/>
+              <a:t>A. Kimura (2019), Japanese J. Statistics and Data Science, arXiv:1710.06683</a:t>
+            </a:r>
+          </a:p>
+          <a:p>
+            <a:pPr/>
+            <a:r>
+              <a:rPr sz="2000"/>
+              <a:t>A. Kimura, N. Yoshida (2016), Springer Proc. Math. Stat. 189, 131–146</a:t>
+            </a:r>
+          </a:p>
+          <a:p>
+            <a:pPr/>
+            <a:r>
+              <a:rPr sz="2000"/>
+              <a:t>I. V. Moskalenko, A. W. Strong (2000), ApJ 528, 357</a:t>
+            </a:r>
+          </a:p>
+          <a:p>
+            <a:pPr/>
+            <a:r>
+              <a:rPr sz="2000"/>
+              <a:t>A. B. Pace (2025), Open J. Astrophys. 8, 142</a:t>
             </a:r>
           </a:p>
         </p:txBody>
@@ -6283,51 +6654,60 @@
           <a:p>
             <a:r>
               <a:rPr sz="3800"/>
-              <a:t>ここまでのまとめ</a:t>
-            </a:r>
-          </a:p>
-        </p:txBody>
-      </p:sp>
-      <p:sp>
-        <p:nvSpPr>
-          <p:cNvPr id="3" name="Content Placeholder 2"/>
-          <p:cNvSpPr>
-            <a:spLocks noGrp="1"/>
-          </p:cNvSpPr>
-          <p:nvPr>
-            <p:ph idx="1"/>
-          </p:nvPr>
-        </p:nvSpPr>
-        <p:spPr/>
-        <p:txBody>
-          <a:bodyPr/>
-          <a:lstStyle/>
-          <a:p>
-            <a:pPr/>
-            <a:r>
-              <a:rPr sz="2800"/>
-              <a:t>Totani の 20 GeV 超過は再現できた（19.0σ）</a:t>
-            </a:r>
-          </a:p>
-          <a:p>
-            <a:pPr/>
-            <a:r>
-              <a:rPr sz="2800"/>
-              <a:t>「背景（ICS・バブル）の間違いでは説明できない」が増えた</a:t>
-            </a:r>
-          </a:p>
-          <a:p>
-            <a:pPr lvl="1"/>
+              <a:t>分かったこと④：(a) どれくらい過大評価か</a:t>
+            </a:r>
+          </a:p>
+        </p:txBody>
+      </p:sp>
+      <p:pic>
+        <p:nvPicPr>
+          <p:cNvPr id="3" name="Picture 2" descr="fig_null_variance.png"/>
+          <p:cNvPicPr>
+            <a:picLocks noChangeAspect="1"/>
+          </p:cNvPicPr>
+          <p:nvPr/>
+        </p:nvPicPr>
+        <p:blipFill>
+          <a:blip r:embed="rId2"/>
+          <a:stretch>
+            <a:fillRect/>
+          </a:stretch>
+        </p:blipFill>
+        <p:spPr>
+          <a:xfrm>
+            <a:off x="1280160" y="1325880"/>
+            <a:ext cx="7633252" cy="4389120"/>
+          </a:xfrm>
+          <a:prstGeom prst="rect">
+            <a:avLst/>
+          </a:prstGeom>
+        </p:spPr>
+      </p:pic>
+      <p:sp>
+        <p:nvSpPr>
+          <p:cNvPr id="4" name="TextBox 3"/>
+          <p:cNvSpPr txBox="1"/>
+          <p:nvPr/>
+        </p:nvSpPr>
+        <p:spPr>
+          <a:xfrm>
+            <a:off x="548640" y="5806440"/>
+            <a:ext cx="11064240" cy="822960"/>
+          </a:xfrm>
+          <a:prstGeom prst="rect">
+            <a:avLst/>
+          </a:prstGeom>
+          <a:noFill/>
+        </p:spPr>
+        <p:txBody>
+          <a:bodyPr wrap="square">
+            <a:spAutoFit/>
+          </a:bodyPr>
+          <a:lstStyle/>
+          <a:p>
             <a:r>
               <a:rPr sz="2200"/>
-              <a:t>バブルの汚染・計算の近似・ICS の形、の 3 つを否定</a:t>
-            </a:r>
-          </a:p>
-          <a:p>
-            <a:pPr/>
-            <a:r>
-              <a:rPr sz="2800"/>
-              <a:t>ただし σ は過大評価で、暗黒物質の証拠とまでは言えない</a:t>
+              <a:t>ばらつきは 1 ではなく 1.26 → 19.0σ は較正すると約 15σ</a:t>
             </a:r>
           </a:p>
         </p:txBody>
@@ -6367,7 +6747,7 @@
           <a:p>
             <a:r>
               <a:rPr sz="3800"/>
-              <a:t>矮小銀河への適用（7 月に実施済み）</a:t>
+              <a:t>ここまでのまとめ</a:t>
             </a:r>
           </a:p>
         </p:txBody>
@@ -6389,36 +6769,29 @@
           <a:p>
             <a:pPr/>
             <a:r>
-              <a:rPr sz="2600"/>
-              <a:t>暗黒物質なら、矮小銀河からも同じ光が来るはず</a:t>
+              <a:rPr sz="2800"/>
+              <a:t>Totani の 20 GeV 超過は再現できた（19.0σ）</a:t>
             </a:r>
           </a:p>
           <a:p>
             <a:pPr/>
             <a:r>
-              <a:rPr sz="2600"/>
-              <a:t>同じ手法を各天体のまわり半径 10° に</a:t>
+              <a:rPr sz="2800"/>
+              <a:t>「背景（ICS・バブル）の間違いでは説明できない」が増えた</a:t>
+            </a:r>
+          </a:p>
+          <a:p>
+            <a:pPr lvl="1"/>
+            <a:r>
+              <a:rPr sz="2200"/>
+              <a:t>バブルの汚染・計算の近似・ICS の形、の 3 つを否定</a:t>
             </a:r>
           </a:p>
           <a:p>
             <a:pPr/>
             <a:r>
-              <a:rPr sz="2600"/>
-              <a:t>対象：矮小銀河 54 ＋ M31・M33 ＋ 何も無い対照領域 23</a:t>
-            </a:r>
-          </a:p>
-          <a:p>
-            <a:pPr/>
-            <a:r>
-              <a:rPr sz="2600"/>
-              <a:t>天の川のような縮退は起きない</a:t>
-            </a:r>
-          </a:p>
-          <a:p>
-            <a:pPr lvl="1"/>
-            <a:r>
-              <a:rPr sz="2000"/>
-              <a:t>矮小銀河は点に近く、ICS は広がった平らな光</a:t>
+              <a:rPr sz="2800"/>
+              <a:t>σ は較正すると約 15σ。暗黒物質の証拠とまでは言えない</a:t>
             </a:r>
           </a:p>
         </p:txBody>

--- a/slides/2026-10-02_研究進捗報告.pptx
+++ b/slides/2026-10-02_研究進捗報告.pptx
@@ -1195,7 +1195,7 @@
           </a:p>
           <a:p>
             <a:r>
-              <a:t>19.0σ は名目値。何も無い対照領域 23 か所での σ のばらつきは 1.26 (95%: 1.14–1.39) なので、較正すると約 15σ (13.7–16.6σ)。区間の付け方は Kimura (2019)。</a:t>
+              <a:t>19.0σ は名目値。何も無い対照領域 23 か所での σ のばらつきは 1.26 (95%: 1.14–1.39) なので、較正すると約 15σ (13.7–16.6σ)。区間はクラスターブートストラップ。</a:t>
             </a:r>
           </a:p>
           <a:p>
@@ -1270,12 +1270,12 @@
           <a:lstStyle/>
           <a:p>
             <a:r>
-              <a:t>Kimura (2019): 隠れた過程どうしの相関の推定量に信頼区間を付けるため、漸近分散の推定量を 2 種類提案し、二重確率 Poisson 過程のシミュレーションで比べた論文。本発表では「σ のばらつきの推定値に区間を付ける」部分の考え方を借りた。</a:t>
-            </a:r>
-          </a:p>
-          <a:p>
-            <a:r>
-              <a:t>Kimura &amp; Yoshida (2016): その元になった、隠れた過程どうしの相関の推定。</a:t>
+              <a:t>中村 (2017): データ同化の解説。シミュレーションの誤差 (システムノイズ) と観測の誤差を区別して扱う枠組み。8 枚目で σ が膨らむ原因の説明に使った。</a:t>
+            </a:r>
+          </a:p>
+          <a:p>
+            <a:r>
+              <a:t>Efron &amp; Tibshirani (1993): ブートストラップの標準的な教科書。8 枚目の信頼区間に使った。</a:t>
             </a:r>
           </a:p>
         </p:txBody>
@@ -1840,7 +1840,7 @@
           </a:p>
           <a:p>
             <a:r>
-              <a:t>区間の付け方は Kimura (2019, Japanese Journal of Statistics and Data Science; arXiv:1710.06683) を参考にした。この論文は、推定値のばらつき (漸近分散) の見積もり方を 2 種類作り、シミュレーションで比べている。ここでも (A) 299 個を全部独立とみなす方法と、(B) 場所ごとにまとめて引き直す方法 (クラスターブートストラップ) を比べた。</a:t>
+              <a:t>区間の付け方: (A) 299 個を全部独立とみなす方法と、(B) 場所ごとにまとめて引き直す方法 (クラスターブートストラップ、Efron &amp; Tibshirani 1993) を比べた。</a:t>
             </a:r>
           </a:p>
           <a:p>
@@ -1856,6 +1856,11 @@
           <a:p>
             <a:r>
               <a:t>較正の仮定: 背景モデルの誤りで、σ の分散が一様に 1.26² 倍に膨らむ (統計でいう過分散)。そのとき較正後の σ = 名目 σ ÷ 1.26。</a:t>
+            </a:r>
+          </a:p>
+          <a:p>
+            <a:r>
+              <a:t>なぜ膨らむか (解釈): 今の尤度は「GALPROP の型紙は完璧で、誤差は光子の数のばらつきだけ」と仮定している。型紙そのものの誤差 (モデル化誤差) が入っていないので、何も無い空でも σ がばらつく。シミュレーションの誤差 (システムノイズ) と観測の誤差を区別して統計モデルに入れる枠組みとしてデータ同化がある (中村 2017, 数理解析研究所講究録 2057, §3.3)。</a:t>
             </a:r>
           </a:p>
           <a:p>
@@ -6030,14 +6035,14 @@
             <a:pPr/>
             <a:r>
               <a:rPr sz="2000"/>
-              <a:t>A. Kimura (2019), Japanese J. Statistics and Data Science, arXiv:1710.06683</a:t>
+              <a:t>B. Efron, R. J. Tibshirani (1993), An Introduction to the Bootstrap</a:t>
             </a:r>
           </a:p>
           <a:p>
             <a:pPr/>
             <a:r>
               <a:rPr sz="2000"/>
-              <a:t>A. Kimura, N. Yoshida (2016), Springer Proc. Math. Stat. 189, 131–146</a:t>
+              <a:t>中村和幸 (2017), 数理解析研究所講究録 2057, 59–66</a:t>
             </a:r>
           </a:p>
           <a:p>

--- a/slides/2026-10-02_研究進捗報告.pptx
+++ b/slides/2026-10-02_研究進捗報告.pptx
@@ -1015,6 +1015,11 @@
           <a:lstStyle/>
           <a:p>
             <a:r>
+              <a:t>言い方: J がどれくらいずれているか分からないので、サイコロを振って J をずらして予測を出す、を 20 万回繰り返した。そうすると「予測はだいたいこの範囲」という幅が分かる。論文が仮想の宇宙を何度も作ったのと同じ考え方。</a:t>
+            </a:r>
+          </a:p>
+          <a:p>
+            <a:r>
               <a:t>方法: 各天体の「DM なら何σで見えたはずか」(pred_i) に、J のずれ 10^δ (δ は平均 0、幅 0.5 の正規分布) を掛ける。天体ごとの重み付き和 T = Σ pred_i·meas_i / √Σpred_i² で、予測と実測を同じまとめ方で比べる。</a:t>
             </a:r>
           </a:p>
@@ -1095,6 +1100,11 @@
           <a:lstStyle/>
           <a:p>
             <a:r>
+              <a:t>図の見方: 灰色の山は予測の幅 (J の誤差による)。黒い点が実測で、横棒は測定の揺れ (何も無い空で測った ±1.26)。点は山の左にあるが、横棒が山に届いているので、ずれは約 1.3σ で「たまたま」で起きる範囲。図は slides/figs/plot_dwarf_J.py で作った。</a:t>
+            </a:r>
+          </a:p>
+          <a:p>
+            <a:r>
               <a:t>使える 43 天体、20 GeV、天の川側の局所密度 0.42 GeV/cm³。</a:t>
             </a:r>
           </a:p>
@@ -1270,11 +1280,6 @@
           <a:lstStyle/>
           <a:p>
             <a:r>
-              <a:t>中村 (2017): データ同化の解説。シミュレーションの誤差 (システムノイズ) と観測の誤差を区別して扱う枠組み。8 枚目で σ が膨らむ原因の説明に使った。</a:t>
-            </a:r>
-          </a:p>
-          <a:p>
-            <a:r>
               <a:t>Efron &amp; Tibshirani (1993): ブートストラップの標準的な教科書。8 枚目の信頼区間に使った。</a:t>
             </a:r>
           </a:p>
@@ -1860,7 +1865,7 @@
           </a:p>
           <a:p>
             <a:r>
-              <a:t>なぜ膨らむか (解釈): 今の尤度は「GALPROP の型紙は完璧で、誤差は光子の数のばらつきだけ」と仮定している。型紙そのものの誤差 (モデル化誤差) が入っていないので、何も無い空でも σ がばらつく。シミュレーションの誤差 (システムノイズ) と観測の誤差を区別して統計モデルに入れる枠組みとしてデータ同化がある (中村 2017, 数理解析研究所講究録 2057, §3.3)。</a:t>
+              <a:t>なぜ膨らむか (解釈): 今の尤度は「GALPROP の型紙は完璧で、誤差は光子の数のばらつきだけ」と仮定している。型紙そのものの誤差 (モデル化誤差) が入っていないので、何も無い空でも σ がばらつく。</a:t>
             </a:r>
           </a:p>
           <a:p>
@@ -5764,12 +5769,12 @@
             <a:pPr/>
             <a:r>
               <a:rPr sz="2600"/>
-              <a:t>各天体の J を「約 3 倍の範囲」でランダムにずらし、</a:t>
+              <a:t>論文と同じ考え方で、各天体の J を「約 3 倍の範囲」で</a:t>
             </a:r>
             <a:br/>
             <a:r>
               <a:rPr sz="2600"/>
-              <a:t>暗黒物質なら何σ見えたはずかを 20 万回計算</a:t>
+              <a:t>ランダムにずらし、暗黒物質なら何σ見えたはずかを何度も計算</a:t>
             </a:r>
           </a:p>
           <a:p>
@@ -5828,7 +5833,7 @@
       </p:sp>
       <p:pic>
         <p:nvPicPr>
-          <p:cNvPr id="3" name="Picture 2" descr="fig_J.png"/>
+          <p:cNvPr id="3" name="Picture 2" descr="fig_dwarf_J_uncertainty.png"/>
           <p:cNvPicPr>
             <a:picLocks noChangeAspect="1"/>
           </p:cNvPicPr>
@@ -5843,7 +5848,7 @@
         <p:spPr>
           <a:xfrm>
             <a:off x="1828800" y="1371600"/>
-            <a:ext cx="6847367" cy="4206240"/>
+            <a:ext cx="7010400" cy="4206240"/>
           </a:xfrm>
           <a:prstGeom prst="rect">
             <a:avLst/>
@@ -5874,7 +5879,7 @@
           <a:p>
             <a:r>
               <a:rPr sz="2200"/>
-              <a:t>期待 1.7σ → 1.3〜5.0σ（J の誤差あり）　実測 0.4σ　ずれ約 1.3σ</a:t>
+              <a:t>期待 1.7σ → 1.3〜5.0σ（J の誤差あり）　実測 0.4σ ± 1.26　ずれ約 1.3σ</a:t>
             </a:r>
           </a:p>
         </p:txBody>
@@ -6036,13 +6041,6 @@
             <a:r>
               <a:rPr sz="2000"/>
               <a:t>B. Efron, R. J. Tibshirani (1993), An Introduction to the Bootstrap</a:t>
-            </a:r>
-          </a:p>
-          <a:p>
-            <a:pPr/>
-            <a:r>
-              <a:rPr sz="2000"/>
-              <a:t>中村和幸 (2017), 数理解析研究所講究録 2057, 59–66</a:t>
             </a:r>
           </a:p>
           <a:p>

--- a/slides/2026-10-02_研究進捗報告.pptx
+++ b/slides/2026-10-02_研究進捗報告.pptx
@@ -5,9 +5,9 @@
     <p:sldMasterId id="2147483648" r:id="rId1"/>
   </p:sldMasterIdLst>
   <p:sldIdLst>
-    <p:sldId id="256" r:id="rId5"/>
-    <p:sldId id="257" r:id="rId3"/>
-    <p:sldId id="258" r:id="rId2"/>
+    <p:sldId id="256" r:id="rId2"/>
+    <p:sldId id="257" r:id="rId5"/>
+    <p:sldId id="258" r:id="rId3"/>
     <p:sldId id="259" r:id="rId10"/>
     <p:sldId id="260" r:id="rId11"/>
     <p:sldId id="261" r:id="rId12"/>
@@ -23,6 +23,23 @@
     <p:sldId id="271" r:id="rId22"/>
     <p:sldId id="272" r:id="rId23"/>
     <p:sldId id="273" r:id="rId24"/>
+    <p:sldId id="274" r:id="rId25"/>
+    <p:sldId id="275" r:id="rId26"/>
+    <p:sldId id="276" r:id="rId27"/>
+    <p:sldId id="277" r:id="rId28"/>
+    <p:sldId id="278" r:id="rId29"/>
+    <p:sldId id="279" r:id="rId30"/>
+    <p:sldId id="280" r:id="rId31"/>
+    <p:sldId id="281" r:id="rId32"/>
+    <p:sldId id="282" r:id="rId33"/>
+    <p:sldId id="283" r:id="rId34"/>
+    <p:sldId id="284" r:id="rId35"/>
+    <p:sldId id="285" r:id="rId36"/>
+    <p:sldId id="286" r:id="rId37"/>
+    <p:sldId id="287" r:id="rId38"/>
+    <p:sldId id="288" r:id="rId39"/>
+    <p:sldId id="289" r:id="rId40"/>
+    <p:sldId id="290" r:id="rId41"/>
   </p:sldIdLst>
   <p:sldSz cx="12192000" cy="6858000"/>
   <p:notesSz cx="6858000" cy="9144000"/>
@@ -535,7 +552,17 @@
           <a:lstStyle/>
           <a:p>
             <a:r>
-              <a:t>今日の流れ: 今の研究 → 起きた問題 3 つ → 調べて分かったこと → 矮小銀河への適用 (7 月に実施済み) と結果 → 矮小銀河の J ファクターの誤差を論じた論文 (Bertólez-Martínez+ 2026) の解説 → その誤差を自分の結果に当てはめた結果 → 結論。</a:t>
+              <a:t>対消滅: 暗黒物質の粒子 2 個がぶつかって消え、そのエネルギーがガンマ線などになる。粒子が 2 個要るので、明るさは密度の 2 乗に比例する。</a:t>
+            </a:r>
+          </a:p>
+          <a:p>
+            <a:r>
+              <a:t>Totani (2025) の信号は、WIMP なら質量 0.5–0.8 TeV に相当する。銀河中心 GeV 超過 (GCE、35–65 GeV の WIMP) とは別の信号。</a:t>
+            </a:r>
+          </a:p>
+          <a:p>
+            <a:r>
+              <a:t>σ (シグマ) は「偶然ではこれくらい起きにくい」という目安。5σ で約 350 万分の 1。</a:t>
             </a:r>
           </a:p>
         </p:txBody>
@@ -605,22 +632,27 @@
           <a:lstStyle/>
           <a:p>
             <a:r>
-              <a:t>矮小銀河 54 個は Local Volume Database (Pace 2025) の確認済み銀河。対照領域は |b|&gt;20° で互いに 20° 以上離した何も無い場所。</a:t>
-            </a:r>
-          </a:p>
-          <a:p>
-            <a:r>
-              <a:t>成分は等方・ガス・ICS・点源・ハロー。バブルと Loop I は銀河中心の構造なので入れない。</a:t>
-            </a:r>
-          </a:p>
-          <a:p>
-            <a:r>
-              <a:t>たとえ: 天の川のハローは部屋全体を照らす光なので電球と見分けにくかった。矮小銀河は遠くの豆電球 (0.2〜0.4°) なので、半径 10° の中では電球は平らな背景にしか見えない。</a:t>
-            </a:r>
-          </a:p>
-          <a:p>
-            <a:r>
-              <a:t>注意: 矮小銀河は望遠鏡のぼやけ (PSF) より小さいので、この手法では点源と区別できない。</a:t>
+              <a:t>フィッシャー情報: 尤度の山の鋭さ (2 階微分)。山が鋭いほどパラメータがよく決まる。</a:t>
+            </a:r>
+          </a:p>
+          <a:p>
+            <a:r>
+              <a:t>「ハローだけの手がかり」= 他の成分と区別できる部分の情報 (フィッシャー行列のシューア補行列)。有意度は、おおよそ「倍率の推定値 ÷ その誤差」で、誤差は情報の平方根に反比例する。</a:t>
+            </a:r>
+          </a:p>
+          <a:p>
+            <a:r>
+              <a:t>予測 6.4σ と実測 5.0σ の残りの差は、バブル外でハローの倍率が 0.77 倍と低いことで説明できる。この内外の差は約 1.5σ で、意味のある差ではない。</a:t>
+            </a:r>
+          </a:p>
+          <a:p>
+            <a:r>
+              <a:t>対照: 同じ形の矩形を経度方向に ±20°, ±30°, ±38° ずらして外すと 13.4〜16.3σ。</a:t>
+            </a:r>
+          </a:p>
+          <a:p>
+            <a:r>
+              <a:t>たとえ: 写真の真ん中を隠すと自信が下がるが、それは見分けるヒントが真ん中に集まっていたから。</a:t>
             </a:r>
           </a:p>
         </p:txBody>
@@ -690,17 +722,22 @@
           <a:lstStyle/>
           <a:p>
             <a:r>
-              <a:t>左: 有意度の分布。期待される正規分布 (点線) より少し広い。真ん中: 天体ごとの最大の σ。右: 解析した位置。</a:t>
-            </a:r>
-          </a:p>
-          <a:p>
-            <a:r>
-              <a:t>矮小銀河・M31/M33 のどこにも検出は無い。何も無い対照領域 23 か所の 有意度は平均ほぼ 0、ばらつき 1.26 (ビン 2–10)、最大 +4.50σ (1.5 GeV)。</a:t>
-            </a:r>
-          </a:p>
-          <a:p>
-            <a:r>
-              <a:t>では、天の川の超過が暗黒物質だとしたら、矮小銀河でどれくらい見えるはずだったのか? → この問いに、次の論文が関わる。</a:t>
+              <a:t>全体の明るさのずれ (ICS が GALPROP の 1.6 倍、など) は倍率が吸収するのでハローにはならない。ハローに化けるには「銀河中心寄りだけ明るい」という形のずれが必要。</a:t>
+            </a:r>
+          </a:p>
+          <a:p>
+            <a:r>
+              <a:t>等方近似: GALPROP の設定が IC_anisotropic = 0。Moskalenko &amp; Strong (2000) Fig. 6 では、非等方にすると 10 GeV 付近で 1.1〜1.3 倍、銀河中心の上より外側のほうが大きい。</a:t>
+            </a:r>
+          </a:p>
+          <a:p>
+            <a:r>
+              <a:t>3 分割 = 星の光・ちり・宇宙背景の光、の 3 種類の光を電子がはね上げたもの。19.5σ と 18.4σ はクラウドの計算機で同じ条件で比べた値 (本人 PC の基準は 19.0σ なので、差で言う)。Totani §3.4.4 の同種の確認とも同じ結論。</a:t>
+            </a:r>
+          </a:p>
+          <a:p>
+            <a:r>
+              <a:t>残る可能性: GALPROP の ICS の「空間の形」が、銀河中心寄りで 2.3 倍ずれている場合。今の道具では確かめられない。</a:t>
             </a:r>
           </a:p>
         </p:txBody>
@@ -770,17 +807,22 @@
           <a:lstStyle/>
           <a:p>
             <a:r>
-              <a:t>arXiv:2609.20944。J ファクター = 暗黒物質の密度を 2 乗して視線方向に足し合わせた量。矮小銀河では星の動きから推定する (Jeans 解析)。</a:t>
-            </a:r>
-          </a:p>
-          <a:p>
-            <a:r>
-              <a:t>Section II の 8 つの原因: (1) 広がりを無視して点源扱い (重ねた解析で上限が 1.5〜1.8 倍きつくなる) (2) ハローの形 (コアがあると制限が数倍ゆるむ) (3) 星の分布の形 (Plummer 分布の仮定) (4) 球対称からのずれ (log₁₀J が最大 0.4 ずれる) (5) 平衡からのずれ (0.1 程度) (6) 見分けられない連星 (Reticulum II で 0.3) (7) 手前の星の混入 (8) J の誤差が正規分布でない (すそが重い)。</a:t>
-            </a:r>
-          </a:p>
-          <a:p>
-            <a:r>
-              <a:t>Fig.1: 同じ矮小銀河の J を測った複数の文献が、書かれた誤差より大きくばらついている。</a:t>
+              <a:t>ばらつき = 0 からのずれの 2 乗平均の平方根。光子が十分あるビン 2–10 (2.6–169 GeV) の 207 個から計算。</a:t>
+            </a:r>
+          </a:p>
+          <a:p>
+            <a:r>
+              <a:t>95% 区間はブートストラップ (データを復元抽出し直して何度も計算) で付けた。同じ場所のビン同士は相関する (隣どうし +0.31) ので、場所ごとにまとめて引き直した。</a:t>
+            </a:r>
+          </a:p>
+          <a:p>
+            <a:r>
+              <a:t>較正の仮定: 背景モデル (型紙) の誤りで、σ の分散が一様に 1.26² 倍に膨らむ (統計でいう過分散)。19σ のような大きな値でも同じ倍率かは確かめていない。天の川は背景がもっと複雑なので、本当の倍率はもっと大きいかもしれない (15σ は楽観寄り)。</a:t>
+            </a:r>
+          </a:p>
+          <a:p>
+            <a:r>
+              <a:t>記録の「1.362 (250 個)」は今の結果ファイルからは再現できなかった。最大 4.50σ は最低エネルギー (1.5 GeV) のビン。</a:t>
             </a:r>
           </a:p>
         </p:txBody>
@@ -850,22 +892,17 @@
           <a:lstStyle/>
           <a:p>
             <a:r>
-              <a:t>Section III: FermiTools と fermipy で 10°×10° の ROI を 0.08° の画素で解析。背景は Fermi 標準の拡散モデル (gll_iem_v07) と等方背景。</a:t>
-            </a:r>
-          </a:p>
-          <a:p>
-            <a:r>
-              <a:t>信号は bb̄ に消滅する 42 GeV の WIMP (GCE を説明する値)。古典的な矮小銀河は核のある NFW、超暗い矮小銀河は NFW。</a:t>
-            </a:r>
-          </a:p>
-          <a:p>
-            <a:r>
-              <a:t>注入した本物の信号を、95% 上限が誤って除外してしまう割合 (本来 5% 以下であるべき) を数える。</a:t>
-            </a:r>
-          </a:p>
-          <a:p>
-            <a:r>
-              <a:t>σ_L を σ より小さくすると「ソフトが自信満々」の状態。</a:t>
+              <a:t>黒の点: 各エネルギービンで 23 か所から測ったばらつきと 95% 区間。灰色の帯: ビン 2–10 をまとめた値 1.26 とその 95% 区間。</a:t>
+            </a:r>
+          </a:p>
+          <a:p>
+            <a:r>
+              <a:t>灰色の点: 1.5 GeV はばらつき 2.2 の外れ (望遠鏡のぼやけが大きく、背景モデルの誤りが効きやすい)。285 GeV 以上は光子が数個〜数十個で、Wilks の定理の前提 (データが多い) が崩れる。</a:t>
+            </a:r>
+          </a:p>
+          <a:p>
+            <a:r>
+              <a:t>図は slides/figs/plot_null_variance.py で作った。</a:t>
             </a:r>
           </a:p>
         </p:txBody>
@@ -935,17 +972,17 @@
           <a:lstStyle/>
           <a:p>
             <a:r>
-              <a:t>Section IV (Ursa Minor): 本当のばらつき σ を 0.3 / 0.5 / 1.0 増やして σ_L は据え置くと、本物を除外する割合が 1.7% / 8.0% / 22%。σ_L を σ に合わせれば 5% 以下に戻る。σ_L を広げると上限は 1.5 / 2.5 / 11 倍ゆるむ。形の誤り: 核のある NFW を球対称 NFW で当てると 2.4 倍、点源扱いで 1.4 倍、上限がきつく出すぎる。</a:t>
-            </a:r>
-          </a:p>
-          <a:p>
-            <a:r>
-              <a:t>Section V (27 個): 基準のままでも 21% (95% のはずが)。σ を 0.3 / 0.5 / 1.0 増やすと 31% / 49% / 88%。σ_L を σ に合わせても 23% / 28% / 38%。理由: J は対数正規分布で上に長いすそがあり、27 個あれば 1.5σ 以上上振れする天体がどれか 1 つある確率が 0.85。</a:t>
-            </a:r>
-          </a:p>
-          <a:p>
-            <a:r>
-              <a:t>結論: シミュレーションや blank field で較正すべき。J の誤差をもっと良く抑えることが必要。</a:t>
+              <a:t>結果ファイルに「どの状態のコードで計算したか」の記録が無かった。</a:t>
+            </a:r>
+          </a:p>
+          <a:p>
+            <a:r>
+              <a:t>10/1 に同じ計算を 2 回して、テンプレート・尤度・全パラメータが一致することを確認。</a:t>
+            </a:r>
+          </a:p>
+          <a:p>
+            <a:r>
+              <a:t>有意度は 19.1σ → 19.0σ でほぼ同じ。全 13 ビンで差は 1σ 未満。</a:t>
             </a:r>
           </a:p>
         </p:txBody>
@@ -1015,22 +1052,7 @@
           <a:lstStyle/>
           <a:p>
             <a:r>
-              <a:t>言い方: J がどれくらいずれているか分からないので、サイコロを振って J をずらして予測を出す、を 20 万回繰り返した。そうすると「予測はだいたいこの範囲」という幅が分かる。論文が仮想の宇宙を何度も作ったのと同じ考え方。</a:t>
-            </a:r>
-          </a:p>
-          <a:p>
-            <a:r>
-              <a:t>方法: 各天体の「DM なら何σで見えたはずか」(pred_i) に、J のずれ 10^δ (δ は平均 0、幅 0.5 の正規分布) を掛ける。天体ごとの重み付き和 T = Σ pred_i·meas_i / √Σpred_i² で、予測と実測を同じまとめ方で比べる。</a:t>
-            </a:r>
-          </a:p>
-          <a:p>
-            <a:r>
-              <a:t>SMC・LMC: それ自体が広がったガンマ線源なので、解析で中心がマスクされ、ハローの形の 1〜2% しか残っていなかった (結果ファイルに usable=false)。9/28 の計算はこれを見落とし、SMC 1 天体が予測 2.69σ のうち 2.06σ 分を占めていた。修正案は cloud_reports/2026-10-02_dwarf_consistency_usable.patch。</a:t>
-            </a:r>
-          </a:p>
-          <a:p>
-            <a:r>
-              <a:t>天の川側の密度の仮定 (局所密度 0.3〜0.6 GeV/cm³) も別に動かした。</a:t>
+              <a:t>言えるのは「既知の背景では説明しにくい超過がある」まで。それが暗黒物質かどうかは別の主張。</a:t>
             </a:r>
           </a:p>
         </p:txBody>
@@ -1100,37 +1122,17 @@
           <a:lstStyle/>
           <a:p>
             <a:r>
-              <a:t>図の見方: 灰色の山は予測の幅 (J の誤差による)。黒い点が実測で、横棒は測定の揺れ (何も無い空で測った ±1.26)。点は山の左にあるが、横棒が山に届いているので、ずれは約 1.3σ で「たまたま」で起きる範囲。図は slides/figs/plot_dwarf_J.py で作った。</a:t>
-            </a:r>
-          </a:p>
-          <a:p>
-            <a:r>
-              <a:t>使える 43 天体、20 GeV、天の川側の局所密度 0.42 GeV/cm³。</a:t>
-            </a:r>
-          </a:p>
-          <a:p>
-            <a:r>
-              <a:t>J の誤差なし: 期待 1.73σ、実測 0.39σ、ずれ 1.3σ (空の領域の σ のばらつき 1.26 で補正すると 1.1σ)。</a:t>
-            </a:r>
-          </a:p>
-          <a:p>
-            <a:r>
-              <a:t>J の誤差 (約 3 倍) あり: 期待の中央値 2.4σ、68% の範囲 1.3〜5.0σ。ずれ 1.5σ (補正後 1.3σ)。</a:t>
-            </a:r>
-          </a:p>
-          <a:p>
-            <a:r>
-              <a:t>天の川側の密度を 0.3〜0.6 GeV/cm³ で動かすと、期待は 0.6〜9.7σ まで広がる (密度が低いほど期待は大きい)。どの組み合わせでもずれは補正後 2.4σ 以下。</a:t>
-            </a:r>
-          </a:p>
-          <a:p>
-            <a:r>
-              <a:t>→ 暗黒物質と矛盾はしないが、確認もできない。誤差を正直に入れるほど「判定できない」が強くなる。教授の「矮小銀河では粗すぎる」を数字で裏付けた形。</a:t>
-            </a:r>
-          </a:p>
-          <a:p>
-            <a:r>
-              <a:t>注意: 9/28 の「期待 1.35〜5.4σ」は使えない天体 (SMC・LMC) 込みの値。使える 43 天体では 0.9〜3.4σ (J の誤差なし)。</a:t>
+              <a:t>矮小銀河 54 個は Local Volume Database (Pace 2025) の確認済みの銀河。何も無い空は |b| &gt; 20° で互いに 20° 以上離した場所。</a:t>
+            </a:r>
+          </a:p>
+          <a:p>
+            <a:r>
+              <a:t>成分は等方・ガス・ICS・点源・ハロー。バブルと Loop I は銀河中心の構造なので入れない。</a:t>
+            </a:r>
+          </a:p>
+          <a:p>
+            <a:r>
+              <a:t>たとえ: 天の川のハローは部屋全体を照らす光なので電球と見分けにくかった。矮小銀河は遠くの豆電球なので、半径 10° の中では電球 (ICS) は平らな背景にしか見えない。</a:t>
             </a:r>
           </a:p>
         </p:txBody>
@@ -1200,17 +1202,17 @@
           <a:lstStyle/>
           <a:p>
             <a:r>
-              <a:t>流れ: 再現 → 3 つの問題 → 原因を調べて背景の間違い説を 3 つ否定 → 矮小銀河は非検出だが判定できない (J の誤差込みで定量化)。</a:t>
-            </a:r>
-          </a:p>
-          <a:p>
-            <a:r>
-              <a:t>19.0σ は名目値。何も無い対照領域 23 か所での σ のばらつきは 1.26 (95%: 1.14–1.39) なので、較正すると約 15σ (13.7–16.6σ)。区間はクラスターブートストラップ。</a:t>
-            </a:r>
-          </a:p>
-          <a:p>
-            <a:r>
-              <a:t>矮小銀河: 使える 43 天体で期待 1.7σ (J の誤差込みで 68% 1.3〜5.0σ)、実測 0.4σ。ずれは補正後 1.3σ。</a:t>
+              <a:t>⟨σv⟩: 対消滅の起きやすさ、m: 粒子の質量、dN/dE: 1 回の対消滅で出る光のスペクトル。天の川と矮小銀河で同じエネルギービンを見るので、これらは全部共通。</a:t>
+            </a:r>
+          </a:p>
+          <a:p>
+            <a:r>
+              <a:t>矮小銀河の J は Pace &amp; Strigari (2019) の式: J(0.5°) = 10^17.72 (σ_los / 5 km/s)⁴ (d / 100 kpc)⁻² (r_1/2 / 100 pc)⁻¹ GeV² cm⁻⁵。σ_los は星の速度のばらつき。</a:t>
+            </a:r>
+          </a:p>
+          <a:p>
+            <a:r>
+              <a:t>「何σ見えるはずか」= 予測フラックス ÷ 各天体の測定誤差。</a:t>
             </a:r>
           </a:p>
         </p:txBody>
@@ -1280,7 +1282,107 @@
           <a:lstStyle/>
           <a:p>
             <a:r>
-              <a:t>Efron &amp; Tibshirani (1993): ブートストラップの標準的な教科書。8 枚目の信頼区間に使った。</a:t>
+              <a:t>黒: 矮小銀河 52 + M31・M33 の全 13 ビンの有意度 (702 個)。灰色: 何も無い空 23 か所 (299 個)。点線: 理論の分布。</a:t>
+            </a:r>
+          </a:p>
+          <a:p>
+            <a:r>
+              <a:t>2 つの分布はほぼ同じ形 = 矮小銀河は「何も無い空」と区別できない。0 付近が高いのは、光子が数個しか無い高エネルギーのビンで σ がほぼ 0 になるため。</a:t>
+            </a:r>
+          </a:p>
+          <a:p>
+            <a:r>
+              <a:t>SMC・LMC はそれ自体が広がったガンマ線源で、解析で中心がマスクされるため使えない (54 − 2 = 52)。</a:t>
+            </a:r>
+          </a:p>
+          <a:p>
+            <a:r>
+              <a:t>図は slides/figs/plot_dwarf_results.py で作った。</a:t>
+            </a:r>
+          </a:p>
+        </p:txBody>
+      </p:sp>
+      <p:sp>
+        <p:nvSpPr>
+          <p:cNvPr id="4" name="Slide Number Placeholder 3"/>
+          <p:cNvSpPr>
+            <a:spLocks noGrp="1"/>
+          </p:cNvSpPr>
+          <p:nvPr>
+            <p:ph type="sldNum" idx="5" sz="quarter"/>
+          </p:nvPr>
+        </p:nvSpPr>
+        <p:spPr/>
+      </p:sp>
+    </p:spTree>
+  </p:cSld>
+  <p:clrMapOvr>
+    <a:masterClrMapping/>
+  </p:clrMapOvr>
+</p:notes>
+</file>
+
+<file path=ppt/notesSlides/notesSlide19.xml><?xml version="1.0" encoding="utf-8"?>
+<p:notes xmlns:a="http://schemas.openxmlformats.org/drawingml/2006/main" xmlns:p="http://schemas.openxmlformats.org/presentationml/2006/main" xmlns:r="http://schemas.openxmlformats.org/officeDocument/2006/relationships">
+  <p:cSld>
+    <p:spTree>
+      <p:nvGrpSpPr>
+        <p:cNvPr id="1" name=""/>
+        <p:cNvGrpSpPr/>
+        <p:nvPr/>
+      </p:nvGrpSpPr>
+      <p:grpSpPr>
+        <a:xfrm>
+          <a:off x="0" y="0"/>
+          <a:ext cx="0" cy="0"/>
+          <a:chOff x="0" y="0"/>
+          <a:chExt cx="0" cy="0"/>
+        </a:xfrm>
+      </p:grpSpPr>
+      <p:sp>
+        <p:nvSpPr>
+          <p:cNvPr id="2" name="Slide Image Placeholder 1"/>
+          <p:cNvSpPr>
+            <a:spLocks noGrp="1"/>
+          </p:cNvSpPr>
+          <p:nvPr>
+            <p:ph type="sldImg" idx="2"/>
+          </p:nvPr>
+        </p:nvSpPr>
+        <p:spPr/>
+      </p:sp>
+      <p:sp>
+        <p:nvSpPr>
+          <p:cNvPr id="3" name="Notes Placeholder 2"/>
+          <p:cNvSpPr>
+            <a:spLocks noGrp="1"/>
+          </p:cNvSpPr>
+          <p:nvPr>
+            <p:ph type="body" idx="3" sz="quarter"/>
+          </p:nvPr>
+        </p:nvSpPr>
+        <p:spPr/>
+        <p:txBody>
+          <a:bodyPr/>
+          <a:lstStyle/>
+          <a:p>
+            <a:r>
+              <a:t>予測が大きい天体ほど重く数える重み付き和。予測のパターンが分かっているときに、いちばん検出しやすいまとめ方。</a:t>
+            </a:r>
+          </a:p>
+          <a:p>
+            <a:r>
+              <a:t>43 天体 = 星の速度のばらつき σ_los が測られていて J が出せる矮小銀河 (SMC・LMC は除く)。</a:t>
+            </a:r>
+          </a:p>
+          <a:p>
+            <a:r>
+              <a:t>ずれ = (1.73 − 0.39) ÷ 1 = 1.3σ。天の川側の局所密度 0.42 GeV/cm³ の場合。</a:t>
+            </a:r>
+          </a:p>
+          <a:p>
+            <a:r>
+              <a:t>注意: 9/28 の計算は SMC・LMC を誤って含めていた (予測 2.69σ のうち 2.06σ が SMC 1 天体)。</a:t>
             </a:r>
           </a:p>
         </p:txBody>
@@ -1350,17 +1452,837 @@
           <a:lstStyle/>
           <a:p>
             <a:r>
-              <a:t>Totani (2025, arXiv:2507.07209): 天の川を包む暗黒物質ハローから 20 GeV 付近に超過、13–19σ。WIMP なら 0.5–0.8 TeV。銀河中心 GeV 超過 (GCE、35–65 GeV) とは別の信号。</a:t>
-            </a:r>
-          </a:p>
-          <a:p>
-            <a:r>
-              <a:t>Fermi-LAT 15 年分、13 エネルギービン、9 成分を同時に当てはめ、ハロー有り・無しの差から有意度を出す。</a:t>
-            </a:r>
-          </a:p>
-          <a:p>
-            <a:r>
-              <a:t>図: 青が本研究 (v20r、10/1 に記録付きで再計算)、赤が Totani Fig.9。山・谷の位置も一致。Bin6 (20.76 GeV) で 19.0σ。</a:t>
+              <a:t>Totani (2025) §2.1 と同じ選び方。画素は 0.125°。</a:t>
+            </a:r>
+          </a:p>
+          <a:p>
+            <a:r>
+              <a:t>本研究のデータは 780 週のうち 778 週 (2 週分が欠けている)。</a:t>
+            </a:r>
+          </a:p>
+          <a:p>
+            <a:r>
+              <a:t>銀河面を除くのは、ガスや点源が多すぎて背景の誤差が大きいため。</a:t>
+            </a:r>
+          </a:p>
+        </p:txBody>
+      </p:sp>
+      <p:sp>
+        <p:nvSpPr>
+          <p:cNvPr id="4" name="Slide Number Placeholder 3"/>
+          <p:cNvSpPr>
+            <a:spLocks noGrp="1"/>
+          </p:cNvSpPr>
+          <p:nvPr>
+            <p:ph type="sldNum" idx="5" sz="quarter"/>
+          </p:nvPr>
+        </p:nvSpPr>
+        <p:spPr/>
+      </p:sp>
+    </p:spTree>
+  </p:cSld>
+  <p:clrMapOvr>
+    <a:masterClrMapping/>
+  </p:clrMapOvr>
+</p:notes>
+</file>
+
+<file path=ppt/notesSlides/notesSlide20.xml><?xml version="1.0" encoding="utf-8"?>
+<p:notes xmlns:a="http://schemas.openxmlformats.org/drawingml/2006/main" xmlns:p="http://schemas.openxmlformats.org/presentationml/2006/main" xmlns:r="http://schemas.openxmlformats.org/officeDocument/2006/relationships">
+  <p:cSld>
+    <p:spTree>
+      <p:nvGrpSpPr>
+        <p:cNvPr id="1" name=""/>
+        <p:cNvGrpSpPr/>
+        <p:nvPr/>
+      </p:nvGrpSpPr>
+      <p:grpSpPr>
+        <a:xfrm>
+          <a:off x="0" y="0"/>
+          <a:ext cx="0" cy="0"/>
+          <a:chOff x="0" y="0"/>
+          <a:chExt cx="0" cy="0"/>
+        </a:xfrm>
+      </p:grpSpPr>
+      <p:sp>
+        <p:nvSpPr>
+          <p:cNvPr id="2" name="Slide Image Placeholder 1"/>
+          <p:cNvSpPr>
+            <a:spLocks noGrp="1"/>
+          </p:cNvSpPr>
+          <p:nvPr>
+            <p:ph type="sldImg" idx="2"/>
+          </p:nvPr>
+        </p:nvSpPr>
+        <p:spPr/>
+      </p:sp>
+      <p:sp>
+        <p:nvSpPr>
+          <p:cNvPr id="3" name="Notes Placeholder 2"/>
+          <p:cNvSpPr>
+            <a:spLocks noGrp="1"/>
+          </p:cNvSpPr>
+          <p:nvPr>
+            <p:ph type="body" idx="3" sz="quarter"/>
+          </p:nvPr>
+        </p:nvSpPr>
+        <p:spPr/>
+        <p:txBody>
+          <a:bodyPr/>
+          <a:lstStyle/>
+          <a:p>
+            <a:r>
+              <a:t>Section II と Fig. 1 の内容。</a:t>
+            </a:r>
+          </a:p>
+          <a:p>
+            <a:r>
+              <a:t>dex = 対数で 1 桁。0.4 dex は約 2.5 倍、0.1 は約 1.26 倍、0.3 は約 2 倍。</a:t>
+            </a:r>
+          </a:p>
+          <a:p>
+            <a:r>
+              <a:t>非球対称: 楕円体の矮小銀河を球対称の NFW で解析すると、log10 J が最大 0.4 ずれる。</a:t>
+            </a:r>
+          </a:p>
+          <a:p>
+            <a:r>
+              <a:t>連星: 見分けられていない連星があると星の速度のばらつきが大きく見え、J を大きく見積もる (Reticulum II で約 0.3)。</a:t>
+            </a:r>
+          </a:p>
+          <a:p>
+            <a:r>
+              <a:t>誤差の分布: 多くの解析は log J の誤差を正規分布と仮定するが、本当の分布はすそが重い。</a:t>
+            </a:r>
+          </a:p>
+        </p:txBody>
+      </p:sp>
+      <p:sp>
+        <p:nvSpPr>
+          <p:cNvPr id="4" name="Slide Number Placeholder 3"/>
+          <p:cNvSpPr>
+            <a:spLocks noGrp="1"/>
+          </p:cNvSpPr>
+          <p:nvPr>
+            <p:ph type="sldNum" idx="5" sz="quarter"/>
+          </p:nvPr>
+        </p:nvSpPr>
+        <p:spPr/>
+      </p:sp>
+    </p:spTree>
+  </p:cSld>
+  <p:clrMapOvr>
+    <a:masterClrMapping/>
+  </p:clrMapOvr>
+</p:notes>
+</file>
+
+<file path=ppt/notesSlides/notesSlide21.xml><?xml version="1.0" encoding="utf-8"?>
+<p:notes xmlns:a="http://schemas.openxmlformats.org/drawingml/2006/main" xmlns:p="http://schemas.openxmlformats.org/presentationml/2006/main" xmlns:r="http://schemas.openxmlformats.org/officeDocument/2006/relationships">
+  <p:cSld>
+    <p:spTree>
+      <p:nvGrpSpPr>
+        <p:cNvPr id="1" name=""/>
+        <p:cNvGrpSpPr/>
+        <p:nvPr/>
+      </p:nvGrpSpPr>
+      <p:grpSpPr>
+        <a:xfrm>
+          <a:off x="0" y="0"/>
+          <a:ext cx="0" cy="0"/>
+          <a:chOff x="0" y="0"/>
+          <a:chExt cx="0" cy="0"/>
+        </a:xfrm>
+      </p:grpSpPr>
+      <p:sp>
+        <p:nvSpPr>
+          <p:cNvPr id="2" name="Slide Image Placeholder 1"/>
+          <p:cNvSpPr>
+            <a:spLocks noGrp="1"/>
+          </p:cNvSpPr>
+          <p:nvPr>
+            <p:ph type="sldImg" idx="2"/>
+          </p:nvPr>
+        </p:nvSpPr>
+        <p:spPr/>
+      </p:sp>
+      <p:sp>
+        <p:nvSpPr>
+          <p:cNvPr id="3" name="Notes Placeholder 2"/>
+          <p:cNvSpPr>
+            <a:spLocks noGrp="1"/>
+          </p:cNvSpPr>
+          <p:nvPr>
+            <p:ph type="body" idx="3" sz="quarter"/>
+          </p:nvPr>
+        </p:nvSpPr>
+        <p:spPr/>
+        <p:txBody>
+          <a:bodyPr/>
+          <a:lstStyle/>
+          <a:p>
+            <a:r>
+              <a:t>Section III。FermiTools v2.5.1、fermipy v1.4.0。事象は P8R3 SOURCE V3、4 つの PSF クラス、エネルギーは 1 桁あたり 8 ビン。</a:t>
+            </a:r>
+          </a:p>
+          <a:p>
+            <a:r>
+              <a:t>背景の型紙: gll_iem_v07 (銀河拡散) と等方。点源カタログ (4FGL) の天体は簡単のため入れていない。</a:t>
+            </a:r>
+          </a:p>
+          <a:p>
+            <a:r>
+              <a:t>信号の空間の形: 古典的な矮小銀河は芯のある NFW (cNFW)、超微光の矮小銀河は切断した NFW。</a:t>
+            </a:r>
+          </a:p>
+          <a:p>
+            <a:r>
+              <a:t>本当の J (J_true) は Table I の中心値。</a:t>
+            </a:r>
+          </a:p>
+        </p:txBody>
+      </p:sp>
+      <p:sp>
+        <p:nvSpPr>
+          <p:cNvPr id="4" name="Slide Number Placeholder 3"/>
+          <p:cNvSpPr>
+            <a:spLocks noGrp="1"/>
+          </p:cNvSpPr>
+          <p:nvPr>
+            <p:ph type="sldNum" idx="5" sz="quarter"/>
+          </p:nvPr>
+        </p:nvSpPr>
+        <p:spPr/>
+      </p:sp>
+    </p:spTree>
+  </p:cSld>
+  <p:clrMapOvr>
+    <a:masterClrMapping/>
+  </p:clrMapOvr>
+</p:notes>
+</file>
+
+<file path=ppt/notesSlides/notesSlide22.xml><?xml version="1.0" encoding="utf-8"?>
+<p:notes xmlns:a="http://schemas.openxmlformats.org/drawingml/2006/main" xmlns:p="http://schemas.openxmlformats.org/presentationml/2006/main" xmlns:r="http://schemas.openxmlformats.org/officeDocument/2006/relationships">
+  <p:cSld>
+    <p:spTree>
+      <p:nvGrpSpPr>
+        <p:cNvPr id="1" name=""/>
+        <p:cNvGrpSpPr/>
+        <p:nvPr/>
+      </p:nvGrpSpPr>
+      <p:grpSpPr>
+        <a:xfrm>
+          <a:off x="0" y="0"/>
+          <a:ext cx="0" cy="0"/>
+          <a:chOff x="0" y="0"/>
+          <a:chExt cx="0" cy="0"/>
+        </a:xfrm>
+      </p:grpSpPr>
+      <p:sp>
+        <p:nvSpPr>
+          <p:cNvPr id="2" name="Slide Image Placeholder 1"/>
+          <p:cNvSpPr>
+            <a:spLocks noGrp="1"/>
+          </p:cNvSpPr>
+          <p:nvPr>
+            <p:ph type="sldImg" idx="2"/>
+          </p:nvPr>
+        </p:nvSpPr>
+        <p:spPr/>
+      </p:sp>
+      <p:sp>
+        <p:nvSpPr>
+          <p:cNvPr id="3" name="Notes Placeholder 2"/>
+          <p:cNvSpPr>
+            <a:spLocks noGrp="1"/>
+          </p:cNvSpPr>
+          <p:nvPr>
+            <p:ph type="body" idx="3" sz="quarter"/>
+          </p:nvPr>
+        </p:nvSpPr>
+        <p:spPr/>
+        <p:txBody>
+          <a:bodyPr/>
+          <a:lstStyle/>
+          <a:p>
+            <a:r>
+              <a:t>式 (6)〜(10)。J_obs = 星の動きの解析で出た値 (観測値)、J_true = 本当の値。</a:t>
+            </a:r>
+          </a:p>
+          <a:p>
+            <a:r>
+              <a:t>σ_L が小さい = 解析ソフトが「J はほぼ分かっている」と自信を持ちすぎている状態。</a:t>
+            </a:r>
+          </a:p>
+          <a:p>
+            <a:r>
+              <a:t>J は「局外パラメータ」(知りたいのは ⟨σv⟩ だが、決めないといけない他のパラメータ) で、尤度を最大にする値に置き換えて (プロファイル) から ⟨σv⟩ を調べる。</a:t>
+            </a:r>
+          </a:p>
+          <a:p>
+            <a:r>
+              <a:t>TS = 2 ln [ L(⟨σv⟩) / L(0) ]。</a:t>
+            </a:r>
+          </a:p>
+        </p:txBody>
+      </p:sp>
+      <p:sp>
+        <p:nvSpPr>
+          <p:cNvPr id="4" name="Slide Number Placeholder 3"/>
+          <p:cNvSpPr>
+            <a:spLocks noGrp="1"/>
+          </p:cNvSpPr>
+          <p:nvPr>
+            <p:ph type="sldNum" idx="5" sz="quarter"/>
+          </p:nvPr>
+        </p:nvSpPr>
+        <p:spPr/>
+      </p:sp>
+    </p:spTree>
+  </p:cSld>
+  <p:clrMapOvr>
+    <a:masterClrMapping/>
+  </p:clrMapOvr>
+</p:notes>
+</file>
+
+<file path=ppt/notesSlides/notesSlide23.xml><?xml version="1.0" encoding="utf-8"?>
+<p:notes xmlns:a="http://schemas.openxmlformats.org/drawingml/2006/main" xmlns:p="http://schemas.openxmlformats.org/presentationml/2006/main" xmlns:r="http://schemas.openxmlformats.org/officeDocument/2006/relationships">
+  <p:cSld>
+    <p:spTree>
+      <p:nvGrpSpPr>
+        <p:cNvPr id="1" name=""/>
+        <p:cNvGrpSpPr/>
+        <p:nvPr/>
+      </p:nvGrpSpPr>
+      <p:grpSpPr>
+        <a:xfrm>
+          <a:off x="0" y="0"/>
+          <a:ext cx="0" cy="0"/>
+          <a:chOff x="0" y="0"/>
+          <a:chExt cx="0" cy="0"/>
+        </a:xfrm>
+      </p:grpSpPr>
+      <p:sp>
+        <p:nvSpPr>
+          <p:cNvPr id="2" name="Slide Image Placeholder 1"/>
+          <p:cNvSpPr>
+            <a:spLocks noGrp="1"/>
+          </p:cNvSpPr>
+          <p:nvPr>
+            <p:ph type="sldImg" idx="2"/>
+          </p:nvPr>
+        </p:nvSpPr>
+        <p:spPr/>
+      </p:sp>
+      <p:sp>
+        <p:nvSpPr>
+          <p:cNvPr id="3" name="Notes Placeholder 2"/>
+          <p:cNvSpPr>
+            <a:spLocks noGrp="1"/>
+          </p:cNvSpPr>
+          <p:nvPr>
+            <p:ph type="body" idx="3" sz="quarter"/>
+          </p:nvPr>
+        </p:nvSpPr>
+        <p:spPr/>
+        <p:txBody>
+          <a:bodyPr/>
+          <a:lstStyle/>
+          <a:p>
+            <a:r>
+              <a:t>答えが分かっている仮想の宇宙で、解析が正しく答えを出せるかを試している。</a:t>
+            </a:r>
+          </a:p>
+          <a:p>
+            <a:r>
+              <a:t>カバレッジが足りない (アンダーカバレッジ) = 95% と言いながら、本物を 5% より多く除外してしまう。</a:t>
+            </a:r>
+          </a:p>
+        </p:txBody>
+      </p:sp>
+      <p:sp>
+        <p:nvSpPr>
+          <p:cNvPr id="4" name="Slide Number Placeholder 3"/>
+          <p:cNvSpPr>
+            <a:spLocks noGrp="1"/>
+          </p:cNvSpPr>
+          <p:nvPr>
+            <p:ph type="sldNum" idx="5" sz="quarter"/>
+          </p:nvPr>
+        </p:nvSpPr>
+        <p:spPr/>
+      </p:sp>
+    </p:spTree>
+  </p:cSld>
+  <p:clrMapOvr>
+    <a:masterClrMapping/>
+  </p:clrMapOvr>
+</p:notes>
+</file>
+
+<file path=ppt/notesSlides/notesSlide24.xml><?xml version="1.0" encoding="utf-8"?>
+<p:notes xmlns:a="http://schemas.openxmlformats.org/drawingml/2006/main" xmlns:p="http://schemas.openxmlformats.org/presentationml/2006/main" xmlns:r="http://schemas.openxmlformats.org/officeDocument/2006/relationships">
+  <p:cSld>
+    <p:spTree>
+      <p:nvGrpSpPr>
+        <p:cNvPr id="1" name=""/>
+        <p:cNvGrpSpPr/>
+        <p:nvPr/>
+      </p:nvGrpSpPr>
+      <p:grpSpPr>
+        <a:xfrm>
+          <a:off x="0" y="0"/>
+          <a:ext cx="0" cy="0"/>
+          <a:chOff x="0" y="0"/>
+          <a:chExt cx="0" cy="0"/>
+        </a:xfrm>
+      </p:grpSpPr>
+      <p:sp>
+        <p:nvSpPr>
+          <p:cNvPr id="2" name="Slide Image Placeholder 1"/>
+          <p:cNvSpPr>
+            <a:spLocks noGrp="1"/>
+          </p:cNvSpPr>
+          <p:nvPr>
+            <p:ph type="sldImg" idx="2"/>
+          </p:nvPr>
+        </p:nvSpPr>
+        <p:spPr/>
+      </p:sp>
+      <p:sp>
+        <p:nvSpPr>
+          <p:cNvPr id="3" name="Notes Placeholder 2"/>
+          <p:cNvSpPr>
+            <a:spLocks noGrp="1"/>
+          </p:cNvSpPr>
+          <p:nvPr>
+            <p:ph type="body" idx="3" sz="quarter"/>
+          </p:nvPr>
+        </p:nvSpPr>
+        <p:spPr/>
+        <p:txBody>
+          <a:bodyPr/>
+          <a:lstStyle/>
+          <a:p>
+            <a:r>
+              <a:t>誤差を「大きくする」は 2 乗和で足す: σ_L² = σ_cat² + 0.3² など。σ_cat はカタログに書かれた誤差。</a:t>
+            </a:r>
+          </a:p>
+          <a:p>
+            <a:r>
+              <a:t>Ursa Minor: 距離 76 kpc、log10 J_tot = 18.55 ± 0.05、見かけの広がり 0.59° (望遠鏡のぼやけより大きい)。</a:t>
+            </a:r>
+          </a:p>
+          <a:p>
+            <a:r>
+              <a:t>基準 (σ = σ_cat) では 1 万回中 0 回しか本物を除外しない (過大なカバレッジ)。J と ⟨σv⟩ の縮退で Wilks の定理が成り立たないため。</a:t>
+            </a:r>
+          </a:p>
+          <a:p>
+            <a:r>
+              <a:t>形: 本当は楕円の cNFW。楕円かどうかはあまり効かず、中心の尖り方と広がりが効く。</a:t>
+            </a:r>
+          </a:p>
+        </p:txBody>
+      </p:sp>
+      <p:sp>
+        <p:nvSpPr>
+          <p:cNvPr id="4" name="Slide Number Placeholder 3"/>
+          <p:cNvSpPr>
+            <a:spLocks noGrp="1"/>
+          </p:cNvSpPr>
+          <p:nvPr>
+            <p:ph type="sldNum" idx="5" sz="quarter"/>
+          </p:nvPr>
+        </p:nvSpPr>
+        <p:spPr/>
+      </p:sp>
+    </p:spTree>
+  </p:cSld>
+  <p:clrMapOvr>
+    <a:masterClrMapping/>
+  </p:clrMapOvr>
+</p:notes>
+</file>
+
+<file path=ppt/notesSlides/notesSlide25.xml><?xml version="1.0" encoding="utf-8"?>
+<p:notes xmlns:a="http://schemas.openxmlformats.org/drawingml/2006/main" xmlns:p="http://schemas.openxmlformats.org/presentationml/2006/main" xmlns:r="http://schemas.openxmlformats.org/officeDocument/2006/relationships">
+  <p:cSld>
+    <p:spTree>
+      <p:nvGrpSpPr>
+        <p:cNvPr id="1" name=""/>
+        <p:cNvGrpSpPr/>
+        <p:nvPr/>
+      </p:nvGrpSpPr>
+      <p:grpSpPr>
+        <a:xfrm>
+          <a:off x="0" y="0"/>
+          <a:ext cx="0" cy="0"/>
+          <a:chOff x="0" y="0"/>
+          <a:chExt cx="0" cy="0"/>
+        </a:xfrm>
+      </p:grpSpPr>
+      <p:sp>
+        <p:nvSpPr>
+          <p:cNvPr id="2" name="Slide Image Placeholder 1"/>
+          <p:cNvSpPr>
+            <a:spLocks noGrp="1"/>
+          </p:cNvSpPr>
+          <p:nvPr>
+            <p:ph type="sldImg" idx="2"/>
+          </p:nvPr>
+        </p:nvSpPr>
+        <p:spPr/>
+      </p:sp>
+      <p:sp>
+        <p:nvSpPr>
+          <p:cNvPr id="3" name="Notes Placeholder 2"/>
+          <p:cNvSpPr>
+            <a:spLocks noGrp="1"/>
+          </p:cNvSpPr>
+          <p:nvPr>
+            <p:ph type="body" idx="3" sz="quarter"/>
+          </p:nvPr>
+        </p:nvSpPr>
+        <p:spPr/>
+        <p:txBody>
+          <a:bodyPr/>
+          <a:lstStyle/>
+          <a:p>
+            <a:r>
+              <a:t>Section V。上限が 1 個のときよりゆるくなりにくいのは、J が大きい天体ほどカタログの誤差が大きいので、同じ量を足しても割合が小さいため。</a:t>
+            </a:r>
+          </a:p>
+          <a:p>
+            <a:r>
+              <a:t>Wilks の定理は「局外パラメータの数が少ない」ことを前提にする。27 個まとめると J が 27 個あり、前提が崩れる。</a:t>
+            </a:r>
+          </a:p>
+          <a:p>
+            <a:r>
+              <a:t>J_obs は対数で正規分布 → J そのものでは上に長いすそ。上に振れた天体が上限を強く引っ張り、下に振れた天体では打ち消せない。27 個のうち 1 個以上が 1.5σ 以上上に振れる確率は約 0.85。</a:t>
+            </a:r>
+          </a:p>
+          <a:p>
+            <a:r>
+              <a:t>全部を点として扱うと 37%。</a:t>
+            </a:r>
+          </a:p>
+          <a:p>
+            <a:r>
+              <a:t>何も無い領域 (blank field) での較正は Ref. [76] の方法。</a:t>
+            </a:r>
+          </a:p>
+        </p:txBody>
+      </p:sp>
+      <p:sp>
+        <p:nvSpPr>
+          <p:cNvPr id="4" name="Slide Number Placeholder 3"/>
+          <p:cNvSpPr>
+            <a:spLocks noGrp="1"/>
+          </p:cNvSpPr>
+          <p:nvPr>
+            <p:ph type="sldNum" idx="5" sz="quarter"/>
+          </p:nvPr>
+        </p:nvSpPr>
+        <p:spPr/>
+      </p:sp>
+    </p:spTree>
+  </p:cSld>
+  <p:clrMapOvr>
+    <a:masterClrMapping/>
+  </p:clrMapOvr>
+</p:notes>
+</file>
+
+<file path=ppt/notesSlides/notesSlide26.xml><?xml version="1.0" encoding="utf-8"?>
+<p:notes xmlns:a="http://schemas.openxmlformats.org/drawingml/2006/main" xmlns:p="http://schemas.openxmlformats.org/presentationml/2006/main" xmlns:r="http://schemas.openxmlformats.org/officeDocument/2006/relationships">
+  <p:cSld>
+    <p:spTree>
+      <p:nvGrpSpPr>
+        <p:cNvPr id="1" name=""/>
+        <p:cNvGrpSpPr/>
+        <p:nvPr/>
+      </p:nvGrpSpPr>
+      <p:grpSpPr>
+        <a:xfrm>
+          <a:off x="0" y="0"/>
+          <a:ext cx="0" cy="0"/>
+          <a:chOff x="0" y="0"/>
+          <a:chExt cx="0" cy="0"/>
+        </a:xfrm>
+      </p:grpSpPr>
+      <p:sp>
+        <p:nvSpPr>
+          <p:cNvPr id="2" name="Slide Image Placeholder 1"/>
+          <p:cNvSpPr>
+            <a:spLocks noGrp="1"/>
+          </p:cNvSpPr>
+          <p:nvPr>
+            <p:ph type="sldImg" idx="2"/>
+          </p:nvPr>
+        </p:nvSpPr>
+        <p:spPr/>
+      </p:sp>
+      <p:sp>
+        <p:nvSpPr>
+          <p:cNvPr id="3" name="Notes Placeholder 2"/>
+          <p:cNvSpPr>
+            <a:spLocks noGrp="1"/>
+          </p:cNvSpPr>
+          <p:nvPr>
+            <p:ph type="body" idx="3" sz="quarter"/>
+          </p:nvPr>
+        </p:nvSpPr>
+        <p:spPr/>
+        <p:txBody>
+          <a:bodyPr/>
+          <a:lstStyle/>
+          <a:p>
+            <a:r>
+              <a:t>Section VI。「矮小銀河で信号が無くて当然」とまでは言っていない。「無いから暗黒物質ではない」と判断するのが早すぎるかもしれない、という主張。</a:t>
+            </a:r>
+          </a:p>
+        </p:txBody>
+      </p:sp>
+      <p:sp>
+        <p:nvSpPr>
+          <p:cNvPr id="4" name="Slide Number Placeholder 3"/>
+          <p:cNvSpPr>
+            <a:spLocks noGrp="1"/>
+          </p:cNvSpPr>
+          <p:nvPr>
+            <p:ph type="sldNum" idx="5" sz="quarter"/>
+          </p:nvPr>
+        </p:nvSpPr>
+        <p:spPr/>
+      </p:sp>
+    </p:spTree>
+  </p:cSld>
+  <p:clrMapOvr>
+    <a:masterClrMapping/>
+  </p:clrMapOvr>
+</p:notes>
+</file>
+
+<file path=ppt/notesSlides/notesSlide27.xml><?xml version="1.0" encoding="utf-8"?>
+<p:notes xmlns:a="http://schemas.openxmlformats.org/drawingml/2006/main" xmlns:p="http://schemas.openxmlformats.org/presentationml/2006/main" xmlns:r="http://schemas.openxmlformats.org/officeDocument/2006/relationships">
+  <p:cSld>
+    <p:spTree>
+      <p:nvGrpSpPr>
+        <p:cNvPr id="1" name=""/>
+        <p:cNvGrpSpPr/>
+        <p:nvPr/>
+      </p:nvGrpSpPr>
+      <p:grpSpPr>
+        <a:xfrm>
+          <a:off x="0" y="0"/>
+          <a:ext cx="0" cy="0"/>
+          <a:chOff x="0" y="0"/>
+          <a:chExt cx="0" cy="0"/>
+        </a:xfrm>
+      </p:grpSpPr>
+      <p:sp>
+        <p:nvSpPr>
+          <p:cNvPr id="2" name="Slide Image Placeholder 1"/>
+          <p:cNvSpPr>
+            <a:spLocks noGrp="1"/>
+          </p:cNvSpPr>
+          <p:nvPr>
+            <p:ph type="sldImg" idx="2"/>
+          </p:nvPr>
+        </p:nvSpPr>
+        <p:spPr/>
+      </p:sp>
+      <p:sp>
+        <p:nvSpPr>
+          <p:cNvPr id="3" name="Notes Placeholder 2"/>
+          <p:cNvSpPr>
+            <a:spLocks noGrp="1"/>
+          </p:cNvSpPr>
+          <p:nvPr>
+            <p:ph type="body" idx="3" sz="quarter"/>
+          </p:nvPr>
+        </p:nvSpPr>
+        <p:spPr/>
+        <p:txBody>
+          <a:bodyPr/>
+          <a:lstStyle/>
+          <a:p>
+            <a:r>
+              <a:t>論文の Section IV で J_obs を J_true のまわりに対数正規でばらつかせたのと同じ考え方。幅 0.5 は論文の推奨値 (abstract)。</a:t>
+            </a:r>
+          </a:p>
+          <a:p>
+            <a:r>
+              <a:t>言い方: J がどれくらいずれているか分からないので、サイコロを振って J をずらして予測を出す、を 20 万回繰り返した。そうすると「予測はだいたいこの範囲」という幅が分かる。</a:t>
+            </a:r>
+          </a:p>
+          <a:p>
+            <a:r>
+              <a:t>スクリプト: cloud_reports/2026-10-02_dwarf_J_uncertainty.py。</a:t>
+            </a:r>
+          </a:p>
+        </p:txBody>
+      </p:sp>
+      <p:sp>
+        <p:nvSpPr>
+          <p:cNvPr id="4" name="Slide Number Placeholder 3"/>
+          <p:cNvSpPr>
+            <a:spLocks noGrp="1"/>
+          </p:cNvSpPr>
+          <p:nvPr>
+            <p:ph type="sldNum" idx="5" sz="quarter"/>
+          </p:nvPr>
+        </p:nvSpPr>
+        <p:spPr/>
+      </p:sp>
+    </p:spTree>
+  </p:cSld>
+  <p:clrMapOvr>
+    <a:masterClrMapping/>
+  </p:clrMapOvr>
+</p:notes>
+</file>
+
+<file path=ppt/notesSlides/notesSlide28.xml><?xml version="1.0" encoding="utf-8"?>
+<p:notes xmlns:a="http://schemas.openxmlformats.org/drawingml/2006/main" xmlns:p="http://schemas.openxmlformats.org/presentationml/2006/main" xmlns:r="http://schemas.openxmlformats.org/officeDocument/2006/relationships">
+  <p:cSld>
+    <p:spTree>
+      <p:nvGrpSpPr>
+        <p:cNvPr id="1" name=""/>
+        <p:cNvGrpSpPr/>
+        <p:nvPr/>
+      </p:nvGrpSpPr>
+      <p:grpSpPr>
+        <a:xfrm>
+          <a:off x="0" y="0"/>
+          <a:ext cx="0" cy="0"/>
+          <a:chOff x="0" y="0"/>
+          <a:chExt cx="0" cy="0"/>
+        </a:xfrm>
+      </p:grpSpPr>
+      <p:sp>
+        <p:nvSpPr>
+          <p:cNvPr id="2" name="Slide Image Placeholder 1"/>
+          <p:cNvSpPr>
+            <a:spLocks noGrp="1"/>
+          </p:cNvSpPr>
+          <p:nvPr>
+            <p:ph type="sldImg" idx="2"/>
+          </p:nvPr>
+        </p:nvSpPr>
+        <p:spPr/>
+      </p:sp>
+      <p:sp>
+        <p:nvSpPr>
+          <p:cNvPr id="3" name="Notes Placeholder 2"/>
+          <p:cNvSpPr>
+            <a:spLocks noGrp="1"/>
+          </p:cNvSpPr>
+          <p:nvPr>
+            <p:ph type="body" idx="3" sz="quarter"/>
+          </p:nvPr>
+        </p:nvSpPr>
+        <p:spPr/>
+        <p:txBody>
+          <a:bodyPr/>
+          <a:lstStyle/>
+          <a:p>
+            <a:r>
+              <a:t>重み w_i は今まで通り J の推定値から出した予測 pred_i のまま (解析する人は本当の J を知らないため)。</a:t>
+            </a:r>
+          </a:p>
+          <a:p>
+            <a:r>
+              <a:t>Φ = 標準正規分布の累積分布関数。p は片側。ずれ = 標準正規で p に対応する σ。</a:t>
+            </a:r>
+          </a:p>
+          <a:p>
+            <a:r>
+              <a:t>J の誤差は「期待の中央値」を少し上げる。対数正規は上に長いすそを持つので、合計が上に引っ張られる (論文 Section V と同じ現象)。</a:t>
+            </a:r>
+          </a:p>
+        </p:txBody>
+      </p:sp>
+      <p:sp>
+        <p:nvSpPr>
+          <p:cNvPr id="4" name="Slide Number Placeholder 3"/>
+          <p:cNvSpPr>
+            <a:spLocks noGrp="1"/>
+          </p:cNvSpPr>
+          <p:nvPr>
+            <p:ph type="sldNum" idx="5" sz="quarter"/>
+          </p:nvPr>
+        </p:nvSpPr>
+        <p:spPr/>
+      </p:sp>
+    </p:spTree>
+  </p:cSld>
+  <p:clrMapOvr>
+    <a:masterClrMapping/>
+  </p:clrMapOvr>
+</p:notes>
+</file>
+
+<file path=ppt/notesSlides/notesSlide29.xml><?xml version="1.0" encoding="utf-8"?>
+<p:notes xmlns:a="http://schemas.openxmlformats.org/drawingml/2006/main" xmlns:p="http://schemas.openxmlformats.org/presentationml/2006/main" xmlns:r="http://schemas.openxmlformats.org/officeDocument/2006/relationships">
+  <p:cSld>
+    <p:spTree>
+      <p:nvGrpSpPr>
+        <p:cNvPr id="1" name=""/>
+        <p:cNvGrpSpPr/>
+        <p:nvPr/>
+      </p:nvGrpSpPr>
+      <p:grpSpPr>
+        <a:xfrm>
+          <a:off x="0" y="0"/>
+          <a:ext cx="0" cy="0"/>
+          <a:chOff x="0" y="0"/>
+          <a:chExt cx="0" cy="0"/>
+        </a:xfrm>
+      </p:grpSpPr>
+      <p:sp>
+        <p:nvSpPr>
+          <p:cNvPr id="2" name="Slide Image Placeholder 1"/>
+          <p:cNvSpPr>
+            <a:spLocks noGrp="1"/>
+          </p:cNvSpPr>
+          <p:nvPr>
+            <p:ph type="sldImg" idx="2"/>
+          </p:nvPr>
+        </p:nvSpPr>
+        <p:spPr/>
+      </p:sp>
+      <p:sp>
+        <p:nvSpPr>
+          <p:cNvPr id="3" name="Notes Placeholder 2"/>
+          <p:cNvSpPr>
+            <a:spLocks noGrp="1"/>
+          </p:cNvSpPr>
+          <p:nvPr>
+            <p:ph type="body" idx="3" sz="quarter"/>
+          </p:nvPr>
+        </p:nvSpPr>
+        <p:spPr/>
+        <p:txBody>
+          <a:bodyPr/>
+          <a:lstStyle/>
+          <a:p>
+            <a:r>
+              <a:t>灰色の山: J の誤差を入れたときの予測の分布 (20 万回)。点線: J の誤差なしの予測 1.73。黒い点: 実測 0.39、横棒は測定の揺れ ±1.26。</a:t>
+            </a:r>
+          </a:p>
+          <a:p>
+            <a:r>
+              <a:t>点は山の左にあるが、横棒が山に届いているので、ずれは約 1.3σ で「たまたま」で起きる範囲。</a:t>
+            </a:r>
+          </a:p>
+          <a:p>
+            <a:r>
+              <a:t>図は slides/figs/plot_dwarf_J.py で作った。</a:t>
             </a:r>
           </a:p>
         </p:txBody>
@@ -1430,19 +2352,410 @@
           <a:lstStyle/>
           <a:p>
             <a:r>
-              <a:t>(a) 何も無い対照領域 23 か所 (250 個の有意度) で同じ解析をすると、σ の分布の標準偏差は 1 より大きい (記録では 1.362、測り直すと 1.26)、最大 +4.50σ、|σ|&gt;3 が 2.4% (期待 0.27%)。19σ という数字そのものは過大評価になっている。</a:t>
-            </a:r>
-          </a:p>
-          <a:p>
-            <a:r>
-              <a:t>(b) フェルミバブルの矩形 |l|&lt;22°, 10°&lt;|b|&lt;55° を当てはめから外すと 19.0σ → 4.96σ。</a:t>
-            </a:r>
-          </a:p>
-          <a:p>
-            <a:r>
-              <a:t>(c) 7/23 に出した v20 (19.1σ) を同じ設定で計算し直しても一致しなかった。</a:t>
-            </a:r>
-          </a:p>
+              <a:t>型紙 (テンプレート) = その光源だけがあったら、空のどこがどれくらい明るいかの地図。</a:t>
+            </a:r>
+          </a:p>
+          <a:p>
+            <a:r>
+              <a:t>ICS (逆コンプトン散乱) = 宇宙線の電子が、星の光などをはね上げてガンマ線にしたもの。</a:t>
+            </a:r>
+          </a:p>
+          <a:p>
+            <a:r>
+              <a:t>GALPROP は ver.54、設定 SLZ6R30T150C2 (Totani と同じ)。</a:t>
+            </a:r>
+          </a:p>
+          <a:p>
+            <a:r>
+              <a:t>ハローは NFW 型 (Via Lactea II: rs = 21 kpc) の密度の 2 乗の視線積分。</a:t>
+            </a:r>
+          </a:p>
+          <a:p>
+            <a:r>
+              <a:t>ハローの倍率を負にも許すのは、「無いもの」を探すときに偏りを作らないため。</a:t>
+            </a:r>
+          </a:p>
+        </p:txBody>
+      </p:sp>
+      <p:sp>
+        <p:nvSpPr>
+          <p:cNvPr id="4" name="Slide Number Placeholder 3"/>
+          <p:cNvSpPr>
+            <a:spLocks noGrp="1"/>
+          </p:cNvSpPr>
+          <p:nvPr>
+            <p:ph type="sldNum" idx="5" sz="quarter"/>
+          </p:nvPr>
+        </p:nvSpPr>
+        <p:spPr/>
+      </p:sp>
+    </p:spTree>
+  </p:cSld>
+  <p:clrMapOvr>
+    <a:masterClrMapping/>
+  </p:clrMapOvr>
+</p:notes>
+</file>
+
+<file path=ppt/notesSlides/notesSlide30.xml><?xml version="1.0" encoding="utf-8"?>
+<p:notes xmlns:a="http://schemas.openxmlformats.org/drawingml/2006/main" xmlns:p="http://schemas.openxmlformats.org/presentationml/2006/main" xmlns:r="http://schemas.openxmlformats.org/officeDocument/2006/relationships">
+  <p:cSld>
+    <p:spTree>
+      <p:nvGrpSpPr>
+        <p:cNvPr id="1" name=""/>
+        <p:cNvGrpSpPr/>
+        <p:nvPr/>
+      </p:nvGrpSpPr>
+      <p:grpSpPr>
+        <a:xfrm>
+          <a:off x="0" y="0"/>
+          <a:ext cx="0" cy="0"/>
+          <a:chOff x="0" y="0"/>
+          <a:chExt cx="0" cy="0"/>
+        </a:xfrm>
+      </p:grpSpPr>
+      <p:sp>
+        <p:nvSpPr>
+          <p:cNvPr id="2" name="Slide Image Placeholder 1"/>
+          <p:cNvSpPr>
+            <a:spLocks noGrp="1"/>
+          </p:cNvSpPr>
+          <p:nvPr>
+            <p:ph type="sldImg" idx="2"/>
+          </p:nvPr>
+        </p:nvSpPr>
+        <p:spPr/>
+      </p:sp>
+      <p:sp>
+        <p:nvSpPr>
+          <p:cNvPr id="3" name="Notes Placeholder 2"/>
+          <p:cNvSpPr>
+            <a:spLocks noGrp="1"/>
+          </p:cNvSpPr>
+          <p:nvPr>
+            <p:ph type="body" idx="3" sz="quarter"/>
+          </p:nvPr>
+        </p:nvSpPr>
+        <p:spPr/>
+        <p:txBody>
+          <a:bodyPr/>
+          <a:lstStyle/>
+          <a:p>
+            <a:r>
+              <a:t>予測は天の川側の局所密度 ρ☉ の −2 乗に比例する (天の川の J が密度の 2 乗に比例し、天の川の実測の明るさは固定のため)。</a:t>
+            </a:r>
+          </a:p>
+          <a:p>
+            <a:r>
+              <a:t>ρ☉ = 0.3: 期待 3.38 (誤差なし) / 4.74 (誤差あり、68% 2.58–9.72)、ずれ 2.4σ / 2.0σ (s = 1.26)。</a:t>
+            </a:r>
+          </a:p>
+          <a:p>
+            <a:r>
+              <a:t>ρ☉ = 0.6: 期待 0.85 / 1.19 (0.64–2.43)、ずれ 0.4σ / 0.7σ。</a:t>
+            </a:r>
+          </a:p>
+          <a:p>
+            <a:r>
+              <a:t>J の誤差を入れると、期待の幅が大きく広がり、「判定できない」がより強くなる。</a:t>
+            </a:r>
+          </a:p>
+        </p:txBody>
+      </p:sp>
+      <p:sp>
+        <p:nvSpPr>
+          <p:cNvPr id="4" name="Slide Number Placeholder 3"/>
+          <p:cNvSpPr>
+            <a:spLocks noGrp="1"/>
+          </p:cNvSpPr>
+          <p:nvPr>
+            <p:ph type="sldNum" idx="5" sz="quarter"/>
+          </p:nvPr>
+        </p:nvSpPr>
+        <p:spPr/>
+      </p:sp>
+    </p:spTree>
+  </p:cSld>
+  <p:clrMapOvr>
+    <a:masterClrMapping/>
+  </p:clrMapOvr>
+</p:notes>
+</file>
+
+<file path=ppt/notesSlides/notesSlide31.xml><?xml version="1.0" encoding="utf-8"?>
+<p:notes xmlns:a="http://schemas.openxmlformats.org/drawingml/2006/main" xmlns:p="http://schemas.openxmlformats.org/presentationml/2006/main" xmlns:r="http://schemas.openxmlformats.org/officeDocument/2006/relationships">
+  <p:cSld>
+    <p:spTree>
+      <p:nvGrpSpPr>
+        <p:cNvPr id="1" name=""/>
+        <p:cNvGrpSpPr/>
+        <p:nvPr/>
+      </p:nvGrpSpPr>
+      <p:grpSpPr>
+        <a:xfrm>
+          <a:off x="0" y="0"/>
+          <a:ext cx="0" cy="0"/>
+          <a:chOff x="0" y="0"/>
+          <a:chExt cx="0" cy="0"/>
+        </a:xfrm>
+      </p:grpSpPr>
+      <p:sp>
+        <p:nvSpPr>
+          <p:cNvPr id="2" name="Slide Image Placeholder 1"/>
+          <p:cNvSpPr>
+            <a:spLocks noGrp="1"/>
+          </p:cNvSpPr>
+          <p:nvPr>
+            <p:ph type="sldImg" idx="2"/>
+          </p:nvPr>
+        </p:nvSpPr>
+        <p:spPr/>
+      </p:sp>
+      <p:sp>
+        <p:nvSpPr>
+          <p:cNvPr id="3" name="Notes Placeholder 2"/>
+          <p:cNvSpPr>
+            <a:spLocks noGrp="1"/>
+          </p:cNvSpPr>
+          <p:nvPr>
+            <p:ph type="body" idx="3" sz="quarter"/>
+          </p:nvPr>
+        </p:nvSpPr>
+        <p:spPr/>
+        <p:txBody>
+          <a:bodyPr/>
+          <a:lstStyle/>
+          <a:p>
+            <a:r>
+              <a:t>15σ は「ハローがあるか」の強さ、1.3σ は「天の川と矮小銀河が食い違うか」の強さ。</a:t>
+            </a:r>
+          </a:p>
+          <a:p>
+            <a:r>
+              <a:t>どちらも Wilks の定理だけに頼らず、何も無い空で較正した値 (1.26) を使っている。</a:t>
+            </a:r>
+          </a:p>
+        </p:txBody>
+      </p:sp>
+      <p:sp>
+        <p:nvSpPr>
+          <p:cNvPr id="4" name="Slide Number Placeholder 3"/>
+          <p:cNvSpPr>
+            <a:spLocks noGrp="1"/>
+          </p:cNvSpPr>
+          <p:nvPr>
+            <p:ph type="sldNum" idx="5" sz="quarter"/>
+          </p:nvPr>
+        </p:nvSpPr>
+        <p:spPr/>
+      </p:sp>
+    </p:spTree>
+  </p:cSld>
+  <p:clrMapOvr>
+    <a:masterClrMapping/>
+  </p:clrMapOvr>
+</p:notes>
+</file>
+
+<file path=ppt/notesSlides/notesSlide32.xml><?xml version="1.0" encoding="utf-8"?>
+<p:notes xmlns:a="http://schemas.openxmlformats.org/drawingml/2006/main" xmlns:p="http://schemas.openxmlformats.org/presentationml/2006/main" xmlns:r="http://schemas.openxmlformats.org/officeDocument/2006/relationships">
+  <p:cSld>
+    <p:spTree>
+      <p:nvGrpSpPr>
+        <p:cNvPr id="1" name=""/>
+        <p:cNvGrpSpPr/>
+        <p:nvPr/>
+      </p:nvGrpSpPr>
+      <p:grpSpPr>
+        <a:xfrm>
+          <a:off x="0" y="0"/>
+          <a:ext cx="0" cy="0"/>
+          <a:chOff x="0" y="0"/>
+          <a:chExt cx="0" cy="0"/>
+        </a:xfrm>
+      </p:grpSpPr>
+      <p:sp>
+        <p:nvSpPr>
+          <p:cNvPr id="2" name="Slide Image Placeholder 1"/>
+          <p:cNvSpPr>
+            <a:spLocks noGrp="1"/>
+          </p:cNvSpPr>
+          <p:nvPr>
+            <p:ph type="sldImg" idx="2"/>
+          </p:nvPr>
+        </p:nvSpPr>
+        <p:spPr/>
+      </p:sp>
+      <p:sp>
+        <p:nvSpPr>
+          <p:cNvPr id="3" name="Notes Placeholder 2"/>
+          <p:cNvSpPr>
+            <a:spLocks noGrp="1"/>
+          </p:cNvSpPr>
+          <p:nvPr>
+            <p:ph type="body" idx="3" sz="quarter"/>
+          </p:nvPr>
+        </p:nvSpPr>
+        <p:spPr/>
+        <p:txBody>
+          <a:bodyPr/>
+          <a:lstStyle/>
+          <a:p>
+            <a:r>
+              <a:t>流れ: 再現 → 縮退による 3 つの疑問 → 背景の間違い説を否定・σ を較正・記録を整備 → 矮小銀河は非検出 → 論文の J の誤差を入れて「判定できない」を定量化。</a:t>
+            </a:r>
+          </a:p>
+        </p:txBody>
+      </p:sp>
+      <p:sp>
+        <p:nvSpPr>
+          <p:cNvPr id="4" name="Slide Number Placeholder 3"/>
+          <p:cNvSpPr>
+            <a:spLocks noGrp="1"/>
+          </p:cNvSpPr>
+          <p:nvPr>
+            <p:ph type="sldNum" idx="5" sz="quarter"/>
+          </p:nvPr>
+        </p:nvSpPr>
+        <p:spPr/>
+      </p:sp>
+    </p:spTree>
+  </p:cSld>
+  <p:clrMapOvr>
+    <a:masterClrMapping/>
+  </p:clrMapOvr>
+</p:notes>
+</file>
+
+<file path=ppt/notesSlides/notesSlide33.xml><?xml version="1.0" encoding="utf-8"?>
+<p:notes xmlns:a="http://schemas.openxmlformats.org/drawingml/2006/main" xmlns:p="http://schemas.openxmlformats.org/presentationml/2006/main" xmlns:r="http://schemas.openxmlformats.org/officeDocument/2006/relationships">
+  <p:cSld>
+    <p:spTree>
+      <p:nvGrpSpPr>
+        <p:cNvPr id="1" name=""/>
+        <p:cNvGrpSpPr/>
+        <p:nvPr/>
+      </p:nvGrpSpPr>
+      <p:grpSpPr>
+        <a:xfrm>
+          <a:off x="0" y="0"/>
+          <a:ext cx="0" cy="0"/>
+          <a:chOff x="0" y="0"/>
+          <a:chExt cx="0" cy="0"/>
+        </a:xfrm>
+      </p:grpSpPr>
+      <p:sp>
+        <p:nvSpPr>
+          <p:cNvPr id="2" name="Slide Image Placeholder 1"/>
+          <p:cNvSpPr>
+            <a:spLocks noGrp="1"/>
+          </p:cNvSpPr>
+          <p:nvPr>
+            <p:ph type="sldImg" idx="2"/>
+          </p:nvPr>
+        </p:nvSpPr>
+        <p:spPr/>
+      </p:sp>
+      <p:sp>
+        <p:nvSpPr>
+          <p:cNvPr id="3" name="Notes Placeholder 2"/>
+          <p:cNvSpPr>
+            <a:spLocks noGrp="1"/>
+          </p:cNvSpPr>
+          <p:nvPr>
+            <p:ph type="body" idx="3" sz="quarter"/>
+          </p:nvPr>
+        </p:nvSpPr>
+        <p:spPr/>
+        <p:txBody>
+          <a:bodyPr/>
+          <a:lstStyle/>
+          <a:p>
+            <a:r>
+              <a:t>中村 (2017) 講究録 §2: 状態空間モデル。システムノイズ (シミュレーションの誤差) と観測ノイズ (観測の誤差) を分けて書く。</a:t>
+            </a:r>
+          </a:p>
+          <a:p>
+            <a:r>
+              <a:t>§2.3.3–2.3.4: アンサンブルカルマンフィルタ・粒子フィルタは、確率分布をたくさんのサンプル (アンサンブル) で近似する (式 11)。</a:t>
+            </a:r>
+          </a:p>
+          <a:p>
+            <a:r>
+              <a:t>§3.3: モデル化誤差と数値計算の誤差を、システムノイズとして統一的に扱えることがデータ同化の利点。</a:t>
+            </a:r>
+          </a:p>
+          <a:p>
+            <a:r>
+              <a:t>正直な位置づけ: この解析は講究録を読む前に行った。後から読んで、同じ発想だと分かった。データ同化の中心は時間とともに変わる現象で、1 枚の空の地図にそのまま使える手法ではない。</a:t>
+            </a:r>
+          </a:p>
+        </p:txBody>
+      </p:sp>
+      <p:sp>
+        <p:nvSpPr>
+          <p:cNvPr id="4" name="Slide Number Placeholder 3"/>
+          <p:cNvSpPr>
+            <a:spLocks noGrp="1"/>
+          </p:cNvSpPr>
+          <p:nvPr>
+            <p:ph type="sldNum" idx="5" sz="quarter"/>
+          </p:nvPr>
+        </p:nvSpPr>
+        <p:spPr/>
+      </p:sp>
+    </p:spTree>
+  </p:cSld>
+  <p:clrMapOvr>
+    <a:masterClrMapping/>
+  </p:clrMapOvr>
+</p:notes>
+</file>
+
+<file path=ppt/notesSlides/notesSlide34.xml><?xml version="1.0" encoding="utf-8"?>
+<p:notes xmlns:a="http://schemas.openxmlformats.org/drawingml/2006/main" xmlns:p="http://schemas.openxmlformats.org/presentationml/2006/main" xmlns:r="http://schemas.openxmlformats.org/officeDocument/2006/relationships">
+  <p:cSld>
+    <p:spTree>
+      <p:nvGrpSpPr>
+        <p:cNvPr id="1" name=""/>
+        <p:cNvGrpSpPr/>
+        <p:nvPr/>
+      </p:nvGrpSpPr>
+      <p:grpSpPr>
+        <a:xfrm>
+          <a:off x="0" y="0"/>
+          <a:ext cx="0" cy="0"/>
+          <a:chOff x="0" y="0"/>
+          <a:chExt cx="0" cy="0"/>
+        </a:xfrm>
+      </p:grpSpPr>
+      <p:sp>
+        <p:nvSpPr>
+          <p:cNvPr id="2" name="Slide Image Placeholder 1"/>
+          <p:cNvSpPr>
+            <a:spLocks noGrp="1"/>
+          </p:cNvSpPr>
+          <p:nvPr>
+            <p:ph type="sldImg" idx="2"/>
+          </p:nvPr>
+        </p:nvSpPr>
+        <p:spPr/>
+      </p:sp>
+      <p:sp>
+        <p:nvSpPr>
+          <p:cNvPr id="3" name="Notes Placeholder 2"/>
+          <p:cNvSpPr>
+            <a:spLocks noGrp="1"/>
+          </p:cNvSpPr>
+          <p:nvPr>
+            <p:ph type="body" idx="3" sz="quarter"/>
+          </p:nvPr>
+        </p:nvSpPr>
+        <p:spPr/>
+        <p:txBody>
+          <a:bodyPr/>
+          <a:lstStyle/>
+          <a:p/>
         </p:txBody>
       </p:sp>
       <p:sp>
@@ -1510,17 +2823,17 @@
           <a:lstStyle/>
           <a:p>
             <a:r>
-              <a:t>たとえ: 部屋に電球 (ICS) がついていて、もう 1 つの光 (ハロー) を探している。写真では 2 つの光の形がほとんど同じなので、余った明るさが本当にもう 1 つの光なのか、電球が少し明るいだけなのか見分けにくい。これが縮退。</a:t>
-            </a:r>
-          </a:p>
-          <a:p>
-            <a:r>
-              <a:t>図: ICS の明るさ (GALPROP の予測の何倍か)。ハロー無しでは全エネルギーで約 1.6 倍で平ら。ハローを入れると、ハローが効くビンでだけへこむ。ハローの光の 8〜10 割は ICS から移ったもの。</a:t>
-            </a:r>
-          </a:p>
-          <a:p>
-            <a:r>
-              <a:t>緯度方向の暗くなり方もハローと ICS でほぼ同じ (|b| 25°→55° で 2.74 倍と 2.75 倍)。違いは「銀河中心の方向に集まっているか」だけ。</a:t>
+              <a:t>ポアソン分布: 平均 λ のとき、n 個来る確率は λ^n e^(−λ) / n!。その対数を全セルで足したものが ln L (n に依存する定数 ln n! は省略)。</a:t>
+            </a:r>
+          </a:p>
+          <a:p>
+            <a:r>
+              <a:t>銀河面を除いた有効なセルは 120 個。セルを 10° と大きくとるのは、望遠鏡のぼやけ (PSF) よりずっと大きく、PSF の畳み込みを省略できるため (Totani と同じ)。</a:t>
+            </a:r>
+          </a:p>
+          <a:p>
+            <a:r>
+              <a:t>最大化は L-BFGS-B (範囲の制約つきの勾配法) で、出発点を変えて何度か行う。</a:t>
             </a:r>
           </a:p>
         </p:txBody>
@@ -1590,22 +2903,17 @@
           <a:lstStyle/>
           <a:p>
             <a:r>
-              <a:t>ハローと他の成分の違いは「銀河中心の方向に光が集まっているか」だけ。その手がかり (フィッシャー情報) の 54% がバブル矩形 (面積は ROI の 34%) にある。</a:t>
-            </a:r>
-          </a:p>
-          <a:p>
-            <a:r>
-              <a:t>手がかりの量の減り方だけで有意度を予測すると 6.4σ、実測 4.96σ。残りの差は、バブル外でハローの明るさが 23% 低いことで説明でき、その差は有意ではない (約 1.5σ)。</a:t>
-            </a:r>
-          </a:p>
-          <a:p>
-            <a:r>
-              <a:t>同じ形の矩形を経度方向に ±20°, ±30°, ±38° ずらして外すと 13.4〜16.3σ。こちらも予測と実測が合う。</a:t>
-            </a:r>
-          </a:p>
-          <a:p>
-            <a:r>
-              <a:t>たとえ: 写真の真ん中を隠すと自信が下がるが、それは見分けるヒントが真ん中に集まっていたから。</a:t>
+              <a:t>「なし」は「あり」の特別な場合 (ハローの倍率 = 0) なので、入れ子のモデル。入れ子なら Δln L ≥ 0。</a:t>
+            </a:r>
+          </a:p>
+          <a:p>
+            <a:r>
+              <a:t>Wilks の定理: 帰無仮説 (ハローなし) が正しいとき、2Δln L は自由度 1 の χ² 分布。だから √(2Δln L) が「標準正規分布で何σ」に対応する。</a:t>
+            </a:r>
+          </a:p>
+          <a:p>
+            <a:r>
+              <a:t>定理の前提: データが多い (漸近的)、モデルが正しい、など。モデル (型紙) が間違っていると成り立たない。</a:t>
             </a:r>
           </a:p>
         </p:txBody>
@@ -1675,17 +2983,22 @@
           <a:lstStyle/>
           <a:p>
             <a:r>
-              <a:t>2.3 倍: ICS をバブル矩形の内と外で別々の明るさにすると、内側が 2.3 倍のときハローの当てはまりの改善の 92% を ICS が説明してしまう。全体の明るさのずれ (f_ics が 1.6 倍など) は倍率が吸収するのでハローにならない。必要なのは内と外の比のずれ。</a:t>
-            </a:r>
-          </a:p>
-          <a:p>
-            <a:r>
-              <a:t>等方近似: GALPROP の設定が IC_anisotropic = 0。Moskalenko &amp; Strong (2000) の Fig.6 では、非等方の補正は 10 GeV 付近で 1.1〜1.3 倍、銀河中心の上より外側のほうが大きい。</a:t>
-            </a:r>
-          </a:p>
-          <a:p>
-            <a:r>
-              <a:t>3 分割: 星の光・ちり・宇宙背景の光に分けて明るさを自由にすると、20 GeV のハローは 19.5σ → 18.4σ。この 2 つはクラウドの計算機で同じ条件で比べた値で、基準が 19.0σ (本人 PC) と少し違うので「約 1σ 下がる」と差で言う。Totani §3.4.4 の同種の確認とも同じ結論。</a:t>
+              <a:t>MCMC (マルコフ連鎖モンテカルロ): 「今いる点の近くに一歩動いてみて、尤度が上がれば進む、下がっても確率的に進む」を繰り返す。長く歩くと、歩いた場所の分布が事後分布になる。</a:t>
+            </a:r>
+          </a:p>
+          <a:p>
+            <a:r>
+              <a:t>事前分布は一様 (倍率の符号の制約と、広い範囲の制限だけ)。</a:t>
+            </a:r>
+          </a:p>
+          <a:p>
+            <a:r>
+              <a:t>emcee は、複数の歩行者が互いの位置を使って次の一歩を決める方式 (affine-invariant ensemble sampler)。</a:t>
+            </a:r>
+          </a:p>
+          <a:p>
+            <a:r>
+              <a:t>自己相関時間 τ: 何歩離れたら前の位置を「忘れる」か。50τ 以上の長さは emcee の推奨。</a:t>
             </a:r>
           </a:p>
         </p:txBody>
@@ -1755,17 +3068,12 @@
           <a:lstStyle/>
           <a:p>
             <a:r>
-              <a:t>結果ファイルに「どの状態のコードで計算したか」の記録が無かった (ローカルの調査)。</a:t>
-            </a:r>
-          </a:p>
-          <a:p>
-            <a:r>
-              <a:t>10/1 に同じ計算を 2 回して、テンプレート・尤度・全パラメータが最後の桁まで一致することを確認。今後の結果ファイルにはコミット番号と設定を自動で記録する。</a:t>
-            </a:r>
-          </a:p>
-          <a:p>
-            <a:r>
-              <a:t>有意度は 19.1σ → 19.0σ でほぼ同じ。全 13 ビンで差は 1σ 未満。ガスと ICS の分け方は少し変わった (成分比: ガス 0.91 / ICS 1.15)。</a:t>
+              <a:t>青が本研究 (v20r、10/1 にコードの版と設定の記録つきで再計算)、赤が Totani Fig. 9。</a:t>
+            </a:r>
+          </a:p>
+          <a:p>
+            <a:r>
+              <a:t>ただしこの 19.0σ は Wilks の定理を信じた「名目の値」。後で較正する。</a:t>
             </a:r>
           </a:p>
         </p:txBody>
@@ -1835,47 +3143,17 @@
           <a:lstStyle/>
           <a:p>
             <a:r>
-              <a:t>95% 区間: ばらつき 1.14–1.39、較正後 13.7–16.6σ。</a:t>
-            </a:r>
-          </a:p>
-          <a:p>
-            <a:r>
-              <a:t>何をしたか: 何も無い空 23 か所で、天の川と同じ解析をしたときの σ のばらつき (0 からのずれの 2 乗平均の平方根) をエネルギーごとに測り直し、その推定値に信頼区間を付けた。</a:t>
-            </a:r>
-          </a:p>
-          <a:p>
-            <a:r>
-              <a:t>区間の付け方: (A) 299 個を全部独立とみなす方法と、(B) 場所ごとにまとめて引き直す方法 (クラスターブートストラップ、Efron &amp; Tibshirani 1993) を比べた。</a:t>
-            </a:r>
-          </a:p>
-          <a:p>
-            <a:r>
-              <a:t>同じ場所のエネルギービン同士は相関する (隣どうし +0.31、分散のうち場所共通の割合 0.22)。この相関がある仮想データでは、95% 区間が本当に当たる割合が (A) 90.5%、(B) 92.1%。相関が強いほど (A) は区間が狭すぎて外れやすく、(B) のほうが安全。実データでは 2 つの区間はほぼ同じだった。</a:t>
-            </a:r>
-          </a:p>
-          <a:p>
-            <a:r>
-              <a:t>使ったのは光子が十分あるビン 2–10 (2.6–169 GeV)。最低エネルギー (1.5 GeV) はばらつき 2.2 で外れ (空での最大 4.50σ もここ)。ビン 11–13 は光子が数個〜数十個で、理論の前提 (光子が多い) が崩れる。</a:t>
-            </a:r>
-          </a:p>
-          <a:p>
-            <a:r>
-              <a:t>較正の仮定: 背景モデルの誤りで、σ の分散が一様に 1.26² 倍に膨らむ (統計でいう過分散)。そのとき較正後の σ = 名目 σ ÷ 1.26。</a:t>
-            </a:r>
-          </a:p>
-          <a:p>
-            <a:r>
-              <a:t>なぜ膨らむか (解釈): 今の尤度は「GALPROP の型紙は完璧で、誤差は光子の数のばらつきだけ」と仮定している。型紙そのものの誤差 (モデル化誤差) が入っていないので、何も無い空でも σ がばらつく。</a:t>
-            </a:r>
-          </a:p>
-          <a:p>
-            <a:r>
-              <a:t>記録の 1.362 (250 個) は、今の結果ファイルからは再現できなかった (同じ 23 か所の全 299 個で 1.259)。どの 250 個を選んだのかが不明。</a:t>
-            </a:r>
-          </a:p>
-          <a:p>
-            <a:r>
-              <a:t>スクリプト: cloud_reports/2026-10-02_null_variance_ci.py、図: slides/figs/plot_null_variance.py。</a:t>
+              <a:t>縮退: 2 つの成分の形が似ていて、どちらに光を割り振っても同じくらい合ってしまう状態。</a:t>
+            </a:r>
+          </a:p>
+          <a:p>
+            <a:r>
+              <a:t>たとえ: 部屋に電球 (ICS) がついていて、もう 1 つの光 (ハロー) を探している。写真では 2 つの光の形がほとんど同じなので、余った明るさが本当にもう 1 つの光なのか、電球が少し明るいだけなのか見分けにくい。</a:t>
+            </a:r>
+          </a:p>
+          <a:p>
+            <a:r>
+              <a:t>図: ICS の倍率 (GALPROP の予測の何倍か)。ハローなしでは全エネルギーで約 1.6 倍で平ら。ハローを入れると、ハローが効くビンでだけへこむ。</a:t>
             </a:r>
           </a:p>
         </p:txBody>
@@ -1945,17 +3223,17 @@
           <a:lstStyle/>
           <a:p>
             <a:r>
-              <a:t>言えるのは「既知の背景では説明できない超過がある」まで。それが暗黒物質かどうかは別の主張。</a:t>
-            </a:r>
-          </a:p>
-          <a:p>
-            <a:r>
-              <a:t>残る可能性: ICS の空間分布が銀河中心寄りで 2.3 倍もずれている場合。今の道具では確かめられない。</a:t>
-            </a:r>
-          </a:p>
-          <a:p>
-            <a:r>
-              <a:t>→ 独立な確認として、矮小銀河を見る。</a:t>
+              <a:t>① フェルミバブル = 銀河中心の上下に広がる、ガンマ線で明るい泡状の構造。その矩形 |l| &lt; 22°, 10° &lt; |b| &lt; 55° を当てはめから外した。</a:t>
+            </a:r>
+          </a:p>
+          <a:p>
+            <a:r>
+              <a:t>② 何も無い空 23 か所で同じ解析をした (2026-07-31)。</a:t>
+            </a:r>
+          </a:p>
+          <a:p>
+            <a:r>
+              <a:t>③ 同じ設定で計算し直しても一致しなかった。</a:t>
             </a:r>
           </a:p>
         </p:txBody>
@@ -5178,7 +6456,7 @@
 </file>
 
 <file path=ppt/slides/slide1.xml><?xml version="1.0" encoding="utf-8"?>
-<p:sld xmlns:a="http://schemas.openxmlformats.org/drawingml/2006/main" xmlns:p="http://schemas.openxmlformats.org/presentationml/2006/main" xmlns:r="http://schemas.openxmlformats.org/officeDocument/2006/relationships">
+<p:sld xmlns:a="http://schemas.openxmlformats.org/drawingml/2006/main" xmlns:r="http://schemas.openxmlformats.org/officeDocument/2006/relationships" xmlns:p="http://schemas.openxmlformats.org/presentationml/2006/main">
   <p:cSld>
     <p:spTree>
       <p:nvGrpSpPr>
@@ -5186,58 +6464,111 @@
         <p:cNvGrpSpPr/>
         <p:nvPr/>
       </p:nvGrpSpPr>
-      <p:grpSpPr/>
-      <p:sp>
-        <p:nvSpPr>
-          <p:cNvPr id="2" name="Title 1"/>
-          <p:cNvSpPr>
-            <a:spLocks noGrp="1"/>
-          </p:cNvSpPr>
-          <p:nvPr>
-            <p:ph type="ctrTitle"/>
-          </p:nvPr>
-        </p:nvSpPr>
-        <p:spPr/>
-        <p:txBody>
-          <a:bodyPr/>
-          <a:lstStyle/>
-          <a:p>
-            <a:r>
-              <a:rPr sz="3400"/>
-              <a:t>天の川の 20 GeV ガンマ線超過の検証と</a:t>
-            </a:r>
-          </a:p>
-          <a:p>
-            <a:r>
-              <a:rPr sz="3400"/>
-              <a:t>矮小銀河による確認</a:t>
-            </a:r>
-          </a:p>
-        </p:txBody>
-      </p:sp>
-      <p:sp>
-        <p:nvSpPr>
-          <p:cNvPr id="3" name="Subtitle 2"/>
-          <p:cNvSpPr>
-            <a:spLocks noGrp="1"/>
-          </p:cNvSpPr>
-          <p:nvPr>
-            <p:ph type="subTitle" idx="1"/>
-          </p:nvPr>
-        </p:nvSpPr>
-        <p:spPr/>
-        <p:txBody>
-          <a:bodyPr/>
-          <a:lstStyle/>
-          <a:p>
-            <a:r>
-              <a:rPr sz="2400"/>
-              <a:t>中村惺一　研究進捗報告　2026年10月2日</a:t>
-            </a:r>
+      <p:grpSpPr>
+        <a:xfrm>
+          <a:off x="0" y="0"/>
+          <a:ext cx="0" cy="0"/>
+          <a:chOff x="0" y="0"/>
+          <a:chExt cx="0" cy="0"/>
+        </a:xfrm>
+      </p:grpSpPr>
+      <p:sp>
+        <p:nvSpPr>
+          <p:cNvPr id="8" name="TextBox 7">
+            <a:extLst>
+              <a:ext uri="{FF2B5EF4-FFF2-40B4-BE49-F238E27FC236}">
+                <a16:creationId xmlns:a16="http://schemas.microsoft.com/office/drawing/2014/main" id="{F85CD606-E3CE-F314-B3EE-F3D7028115CB}"/>
+              </a:ext>
+            </a:extLst>
+          </p:cNvPr>
+          <p:cNvSpPr txBox="1"/>
+          <p:nvPr/>
+        </p:nvSpPr>
+        <p:spPr>
+          <a:xfrm>
+            <a:off x="5837182" y="5663239"/>
+            <a:ext cx="6093372" cy="923330"/>
+          </a:xfrm>
+          <a:prstGeom prst="rect">
+            <a:avLst/>
+          </a:prstGeom>
+          <a:noFill/>
+        </p:spPr>
+        <p:txBody>
+          <a:bodyPr wrap="square">
+            <a:spAutoFit/>
+          </a:bodyPr>
+          <a:lstStyle/>
+          <a:p>
+            <a:r>
+              <a:rPr lang="en-US" b="1"/>
+              <a:t>Reference:</a:t>
+            </a:r>
+            <a:r>
+              <a:rPr lang="en-US"/>
+              <a:t> Toni Bertólez-Martínez, et al. (2026). "Systematic uncertainties in the J-factor determination of dwarf spheroidal galaxies", </a:t>
+            </a:r>
+            <a:r>
+              <a:rPr lang="en-US" i="1"/>
+              <a:t>arXiv:2609.20944</a:t>
+            </a:r>
+            <a:endParaRPr lang="en-US"/>
+          </a:p>
+        </p:txBody>
+      </p:sp>
+      <p:sp>
+        <p:nvSpPr>
+          <p:cNvPr id="10" name="TextBox 9">
+            <a:extLst>
+              <a:ext uri="{FF2B5EF4-FFF2-40B4-BE49-F238E27FC236}">
+                <a16:creationId xmlns:a16="http://schemas.microsoft.com/office/drawing/2014/main" id="{72E0FE36-509A-D2B0-488B-C638301D6998}"/>
+              </a:ext>
+            </a:extLst>
+          </p:cNvPr>
+          <p:cNvSpPr txBox="1"/>
+          <p:nvPr/>
+        </p:nvSpPr>
+        <p:spPr>
+          <a:xfrm>
+            <a:off x="1564727" y="1242113"/>
+            <a:ext cx="9455369" cy="2308324"/>
+          </a:xfrm>
+          <a:prstGeom prst="rect">
+            <a:avLst/>
+          </a:prstGeom>
+          <a:noFill/>
+        </p:spPr>
+        <p:txBody>
+          <a:bodyPr wrap="square">
+            <a:spAutoFit/>
+          </a:bodyPr>
+          <a:lstStyle/>
+          <a:p>
+            <a:r>
+              <a:rPr lang="en-US" sz="4800"/>
+              <a:t>Toni Bertólez-Martínez, et al. (2026)</a:t>
+            </a:r>
+            <a:r>
+              <a:rPr lang="ja-JP" altLang="en-US" sz="4800"/>
+              <a:t>の内容解説と、それを踏まえた</a:t>
+            </a:r>
+            <a:endParaRPr lang="en-US" altLang="ja-JP" sz="4800"/>
+          </a:p>
+          <a:p>
+            <a:r>
+              <a:rPr lang="ja-JP" altLang="en-US" sz="4800"/>
+              <a:t>卒論拡張について</a:t>
+            </a:r>
+            <a:endParaRPr lang="en-US" sz="4800"/>
           </a:p>
         </p:txBody>
       </p:sp>
     </p:spTree>
+    <p:extLst>
+      <p:ext uri="{BB962C8B-B14F-4D97-AF65-F5344CB8AC3E}">
+        <p14:creationId xmlns:p14="http://schemas.microsoft.com/office/powerpoint/2010/main" val="2385481918"/>
+      </p:ext>
+    </p:extLst>
   </p:cSld>
   <p:clrMapOvr>
     <a:masterClrMapping/>
@@ -5271,8 +6602,8 @@
           <a:lstStyle/>
           <a:p>
             <a:r>
-              <a:rPr sz="3800"/>
-              <a:t>矮小銀河への適用（7 月に実施済み）</a:t>
+              <a:rPr sz="3400"/>
+              <a:t>縮退が引き起こした 3 つの疑問</a:t>
             </a:r>
           </a:p>
         </p:txBody>
@@ -5287,43 +6618,62 @@
             <p:ph idx="1"/>
           </p:nvPr>
         </p:nvSpPr>
-        <p:spPr/>
-        <p:txBody>
-          <a:bodyPr/>
-          <a:lstStyle/>
-          <a:p>
-            <a:pPr/>
-            <a:r>
-              <a:rPr sz="2600"/>
-              <a:t>暗黒物質なら、矮小銀河からも同じ光が来るはず</a:t>
-            </a:r>
-          </a:p>
-          <a:p>
-            <a:pPr/>
-            <a:r>
-              <a:rPr sz="2600"/>
-              <a:t>同じ手法を各天体のまわり半径 10° に</a:t>
-            </a:r>
-          </a:p>
-          <a:p>
-            <a:pPr/>
-            <a:r>
-              <a:rPr sz="2600"/>
-              <a:t>対象：矮小銀河 54 ＋ M31・M33 ＋ 何も無い対照領域 23</a:t>
-            </a:r>
-          </a:p>
-          <a:p>
-            <a:pPr/>
-            <a:r>
-              <a:rPr sz="2600"/>
-              <a:t>天の川のような縮退は起きない</a:t>
+        <p:spPr>
+          <a:xfrm>
+            <a:off x="841248" y="1463040"/>
+            <a:ext cx="10515600" cy="4937760"/>
+          </a:xfrm>
+        </p:spPr>
+        <p:txBody>
+          <a:bodyPr/>
+          <a:lstStyle/>
+          <a:p>
+            <a:pPr/>
+            <a:r>
+              <a:rPr sz="2400"/>
+              <a:t>① バブル領域を外すと 19.0σ → 5.0σ に落ちる</a:t>
             </a:r>
           </a:p>
           <a:p>
             <a:pPr lvl="1"/>
             <a:r>
               <a:rPr sz="2000"/>
-              <a:t>矮小銀河は点に近く、ICS は広がった平らな光</a:t>
+              <a:t>ハローは、本当は ICS やバブルの間違いでは？</a:t>
+            </a:r>
+          </a:p>
+          <a:p>
+            <a:pPr/>
+            <a:r>
+              <a:rPr sz="2400"/>
+              <a:t>② 何も無い空でも、最大 4.5σ が出る</a:t>
+            </a:r>
+          </a:p>
+          <a:p>
+            <a:pPr lvl="1"/>
+            <a:r>
+              <a:rPr sz="2000"/>
+              <a:t>σ をそのまま信じてよいのか？</a:t>
+            </a:r>
+          </a:p>
+          <a:p>
+            <a:pPr/>
+            <a:r>
+              <a:rPr sz="2400"/>
+              <a:t>③ 7/23 に出した 19.1σ が再現できない</a:t>
+            </a:r>
+          </a:p>
+          <a:p>
+            <a:pPr lvl="1"/>
+            <a:r>
+              <a:rPr sz="2000"/>
+              <a:t>結果そのものを信じてよいのか？</a:t>
+            </a:r>
+          </a:p>
+          <a:p>
+            <a:pPr/>
+            <a:r>
+              <a:rPr sz="2400"/>
+              <a:t>→ 次から、1 つずつ調べた結果</a:t>
             </a:r>
           </a:p>
         </p:txBody>
@@ -5362,61 +6712,71 @@
           <a:lstStyle/>
           <a:p>
             <a:r>
-              <a:rPr sz="3800"/>
-              <a:t>結果：どこにも信号は見えなかった</a:t>
-            </a:r>
-          </a:p>
-        </p:txBody>
-      </p:sp>
-      <p:pic>
-        <p:nvPicPr>
-          <p:cNvPr id="3" name="Picture 2" descr="ensemble_significance.png"/>
-          <p:cNvPicPr>
-            <a:picLocks noChangeAspect="1"/>
-          </p:cNvPicPr>
-          <p:nvPr/>
-        </p:nvPicPr>
-        <p:blipFill>
-          <a:blip r:embed="rId2"/>
-          <a:stretch>
-            <a:fillRect/>
-          </a:stretch>
-        </p:blipFill>
+              <a:rPr sz="3400"/>
+              <a:t>① を調べる：手がかりはどこにあるか</a:t>
+            </a:r>
+          </a:p>
+        </p:txBody>
+      </p:sp>
+      <p:sp>
+        <p:nvSpPr>
+          <p:cNvPr id="3" name="Content Placeholder 2"/>
+          <p:cNvSpPr>
+            <a:spLocks noGrp="1"/>
+          </p:cNvSpPr>
+          <p:nvPr>
+            <p:ph idx="1"/>
+          </p:nvPr>
+        </p:nvSpPr>
         <p:spPr>
           <a:xfrm>
-            <a:off x="365760" y="1554480"/>
-            <a:ext cx="11430000" cy="3810000"/>
+            <a:off x="841248" y="1463040"/>
+            <a:ext cx="10515600" cy="4937760"/>
           </a:xfrm>
-          <a:prstGeom prst="rect">
-            <a:avLst/>
-          </a:prstGeom>
         </p:spPr>
-      </p:pic>
-      <p:sp>
-        <p:nvSpPr>
-          <p:cNvPr id="4" name="TextBox 3"/>
-          <p:cNvSpPr txBox="1"/>
-          <p:nvPr/>
-        </p:nvSpPr>
-        <p:spPr>
-          <a:xfrm>
-            <a:off x="548640" y="5806440"/>
-            <a:ext cx="11064240" cy="822960"/>
-          </a:xfrm>
-          <a:prstGeom prst="rect">
-            <a:avLst/>
-          </a:prstGeom>
-          <a:noFill/>
-        </p:spPr>
-        <p:txBody>
-          <a:bodyPr wrap="square">
-            <a:spAutoFit/>
-          </a:bodyPr>
-          <a:lstStyle/>
-          <a:p>
+        <p:txBody>
+          <a:bodyPr/>
+          <a:lstStyle/>
+          <a:p>
+            <a:pPr/>
             <a:r>
               <a:rPr sz="2200"/>
-              <a:t>77 天体 × 13 ビンの有意度のうち最大 +3.46σ。何も無い対照領域でも最大 +4.50σ</a:t>
+              <a:t>フィッシャー情報：データがパラメータをどれだけ決められるか</a:t>
+            </a:r>
+          </a:p>
+          <a:p>
+            <a:pPr/>
+            <a:r>
+              <a:rPr sz="2200"/>
+              <a:t>ICS など他の成分では説明できない「ハローだけの手がかり」を、空の場所ごとに計算</a:t>
+            </a:r>
+          </a:p>
+          <a:p>
+            <a:pPr lvl="1"/>
+            <a:r>
+              <a:rPr sz="1800"/>
+              <a:t>その 54% がバブル領域（面積は 34%）に集中</a:t>
+            </a:r>
+          </a:p>
+          <a:p>
+            <a:pPr/>
+            <a:r>
+              <a:rPr sz="2200"/>
+              <a:t>手がかりの減り方だけで予測すると 6.4σ、実測 5.0σ</a:t>
+            </a:r>
+          </a:p>
+          <a:p>
+            <a:pPr/>
+            <a:r>
+              <a:rPr sz="2200"/>
+              <a:t>同じ形の領域を横にずらして外すと 13〜16σ（予測とも一致）</a:t>
+            </a:r>
+          </a:p>
+          <a:p>
+            <a:pPr/>
+            <a:r>
+              <a:rPr sz="2200"/>
+              <a:t>→ 19 → 5σ は「手がかりを捨てた」から。汚染の証拠ではない</a:t>
             </a:r>
           </a:p>
         </p:txBody>
@@ -5455,8 +6815,8 @@
           <a:lstStyle/>
           <a:p>
             <a:r>
-              <a:rPr sz="3800"/>
-              <a:t>論文：Bertólez-Martínez ら (2026)</a:t>
+              <a:rPr sz="3400"/>
+              <a:t>① を調べる：ICS が犯人なら</a:t>
             </a:r>
           </a:p>
         </p:txBody>
@@ -5471,49 +6831,103 @@
             <p:ph idx="1"/>
           </p:nvPr>
         </p:nvSpPr>
-        <p:spPr/>
-        <p:txBody>
-          <a:bodyPr/>
-          <a:lstStyle/>
-          <a:p>
-            <a:pPr/>
-            <a:r>
-              <a:rPr sz="2400"/>
-              <a:t>矮小銀河の J ファクター（暗黒物質の量の指標）の</a:t>
-            </a:r>
-            <a:br/>
-            <a:r>
-              <a:rPr sz="2400"/>
-              <a:t>誤差は小さく見積もられている</a:t>
-            </a:r>
-          </a:p>
-          <a:p>
-            <a:pPr/>
-            <a:r>
-              <a:rPr sz="2400"/>
-              <a:t>見落とされがちな原因の例</a:t>
+        <p:spPr>
+          <a:xfrm>
+            <a:off x="841248" y="1463040"/>
+            <a:ext cx="10515600" cy="4114800"/>
+          </a:xfrm>
+        </p:spPr>
+        <p:txBody>
+          <a:bodyPr/>
+          <a:lstStyle/>
+          <a:p>
+            <a:pPr/>
+            <a:r>
+              <a:rPr sz="2200"/>
+              <a:t>ICS をバブルの内と外で別々の明るさにして当てはめた</a:t>
             </a:r>
           </a:p>
           <a:p>
             <a:pPr lvl="1"/>
             <a:r>
               <a:rPr sz="1800"/>
-              <a:t>点として扱う・ハローや星の分布の形の仮定・球対称からのずれ</a:t>
+              <a:t>内側が約 2.3 倍明るければ、ハローの改善の 92% を ICS が説明</a:t>
+            </a:r>
+          </a:p>
+          <a:p>
+            <a:pPr/>
+            <a:r>
+              <a:rPr sz="2200"/>
+              <a:t>ICS の計算の近似（等方近似）を直しても 1.1〜1.3 倍</a:t>
             </a:r>
           </a:p>
           <a:p>
             <a:pPr lvl="1"/>
             <a:r>
               <a:rPr sz="1800"/>
-              <a:t>力学的な釣り合いからのずれ・連星・手前の星の混入</a:t>
-            </a:r>
-          </a:p>
-          <a:p>
-            <a:pPr/>
-            <a:r>
-              <a:rPr sz="2400"/>
-              <a:t>文献ごとの J のばらつきから、約 3 倍（Δlog₁₀J ≈ 0.5）は見込むべき</a:t>
-            </a:r>
+              <a:t>しかも外側のほうが大きくなる → 2.3 倍には届かない</a:t>
+            </a:r>
+          </a:p>
+          <a:p>
+            <a:pPr/>
+            <a:r>
+              <a:rPr sz="2200"/>
+              <a:t>ICS を 3 種類に分けて、それぞれ自由に動かしても</a:t>
+            </a:r>
+          </a:p>
+          <a:p>
+            <a:pPr lvl="1"/>
+            <a:r>
+              <a:rPr sz="1800"/>
+              <a:t>19.5σ → 18.4σ（約 1σ しか下がらない）</a:t>
+            </a:r>
+          </a:p>
+          <a:p>
+            <a:pPr/>
+            <a:r>
+              <a:rPr sz="2200"/>
+              <a:t>→ ICS の「明るさ」の間違いでは、ハローを説明できない</a:t>
+            </a:r>
+          </a:p>
+        </p:txBody>
+      </p:sp>
+      <p:sp>
+        <p:nvSpPr>
+          <p:cNvPr id="8" name="TextBox 7">
+            <a:extLst>
+              <a:ext uri="{FF2B5EF4-FFF2-40B4-BE49-F238E27FC236}">
+                <a16:creationId xmlns:a16="http://schemas.microsoft.com/office/drawing/2014/main" id="{F85CD606-E3CE-F314-B3EE-F3D7028115CB}"/>
+              </a:ext>
+            </a:extLst>
+          </p:cNvPr>
+          <p:cNvSpPr txBox="1"/>
+          <p:nvPr/>
+        </p:nvSpPr>
+        <p:spPr>
+          <a:xfrm>
+            <a:off x="5837182" y="5663239"/>
+            <a:ext cx="6093372" cy="923330"/>
+          </a:xfrm>
+          <a:prstGeom prst="rect">
+            <a:avLst/>
+          </a:prstGeom>
+          <a:noFill/>
+        </p:spPr>
+        <p:txBody>
+          <a:bodyPr wrap="square">
+            <a:spAutoFit/>
+          </a:bodyPr>
+          <a:lstStyle/>
+          <a:p>
+            <a:r>
+              <a:rPr lang="en-US" b="1" sz="1400"/>
+              <a:t>Reference:</a:t>
+            </a:r>
+            <a:r>
+              <a:rPr lang="en-US" sz="1400"/>
+              <a:t> I. V. Moskalenko &amp; A. W. Strong (2000), ApJ 528, 357</a:t>
+            </a:r>
+            <a:endParaRPr lang="en-US"/>
           </a:p>
         </p:txBody>
       </p:sp>
@@ -5551,8 +6965,8 @@
           <a:lstStyle/>
           <a:p>
             <a:r>
-              <a:rPr sz="3800"/>
-              <a:t>論文：何をしたか</a:t>
+              <a:rPr sz="3400"/>
+              <a:t>② を調べる：σ を信じてよいか</a:t>
             </a:r>
           </a:p>
         </p:txBody>
@@ -5567,44 +6981,96 @@
             <p:ph idx="1"/>
           </p:nvPr>
         </p:nvSpPr>
-        <p:spPr/>
-        <p:txBody>
-          <a:bodyPr/>
-          <a:lstStyle/>
-          <a:p>
-            <a:pPr/>
-            <a:r>
-              <a:rPr sz="2800"/>
-              <a:t>暗黒物質の信号を入れた疑似データを何度も作る</a:t>
+        <p:spPr>
+          <a:xfrm>
+            <a:off x="841248" y="1463040"/>
+            <a:ext cx="10515600" cy="4114800"/>
+          </a:xfrm>
+        </p:spPr>
+        <p:txBody>
+          <a:bodyPr/>
+          <a:lstStyle/>
+          <a:p>
+            <a:pPr/>
+            <a:r>
+              <a:rPr sz="2200"/>
+              <a:t>何も無い空 23 か所で、天の川と同じ解析をした</a:t>
+            </a:r>
+          </a:p>
+          <a:p>
+            <a:pPr/>
+            <a:r>
+              <a:rPr sz="2200"/>
+              <a:t>本物の信号が無ければ、σ は「平均 0、ばらつき 1」になるはず</a:t>
             </a:r>
           </a:p>
           <a:p>
             <a:pPr lvl="1"/>
             <a:r>
+              <a:rPr sz="1800"/>
+              <a:t>Wilks の定理が成り立っていれば</a:t>
+            </a:r>
+          </a:p>
+          <a:p>
+            <a:pPr/>
+            <a:r>
               <a:rPr sz="2200"/>
-              <a:t>Fermi-LAT 17.4 年分、銀河中心超過と同じ 42 GeV の WIMP</a:t>
-            </a:r>
-          </a:p>
-          <a:p>
-            <a:pPr/>
-            <a:r>
-              <a:rPr sz="2800"/>
-              <a:t>J の誤差を 2 つに分けて動かす</a:t>
+              <a:t>実際のばらつき：1.26（95% 区間 1.14–1.39）</a:t>
             </a:r>
           </a:p>
           <a:p>
             <a:pPr lvl="1"/>
             <a:r>
+              <a:rPr sz="1800"/>
+              <a:t>σ は 1.26 倍大きく出ている</a:t>
+            </a:r>
+          </a:p>
+          <a:p>
+            <a:pPr/>
+            <a:r>
               <a:rPr sz="2200"/>
-              <a:t>σ：J の本当のばらつき　σ_L：解析で仮定する幅</a:t>
-            </a:r>
-          </a:p>
-          <a:p>
-            <a:pPr/>
-            <a:r>
-              <a:rPr sz="2800"/>
-              <a:t>対象：Ursa Minor 1 個、27 個をまとめた解析</a:t>
-            </a:r>
+              <a:t>19.0σ を較正すると 19.0 ÷ 1.26 ≈ 15σ（13.7–16.6σ）</a:t>
+            </a:r>
+          </a:p>
+        </p:txBody>
+      </p:sp>
+      <p:sp>
+        <p:nvSpPr>
+          <p:cNvPr id="8" name="TextBox 7">
+            <a:extLst>
+              <a:ext uri="{FF2B5EF4-FFF2-40B4-BE49-F238E27FC236}">
+                <a16:creationId xmlns:a16="http://schemas.microsoft.com/office/drawing/2014/main" id="{F85CD606-E3CE-F314-B3EE-F3D7028115CB}"/>
+              </a:ext>
+            </a:extLst>
+          </p:cNvPr>
+          <p:cNvSpPr txBox="1"/>
+          <p:nvPr/>
+        </p:nvSpPr>
+        <p:spPr>
+          <a:xfrm>
+            <a:off x="5837182" y="5663239"/>
+            <a:ext cx="6093372" cy="923330"/>
+          </a:xfrm>
+          <a:prstGeom prst="rect">
+            <a:avLst/>
+          </a:prstGeom>
+          <a:noFill/>
+        </p:spPr>
+        <p:txBody>
+          <a:bodyPr wrap="square">
+            <a:spAutoFit/>
+          </a:bodyPr>
+          <a:lstStyle/>
+          <a:p>
+            <a:r>
+              <a:rPr lang="en-US" b="1" sz="1400"/>
+              <a:t>Reference:</a:t>
+            </a:r>
+            <a:r>
+              <a:rPr lang="en-US" sz="1400"/>
+              <a:t> B. Efron &amp; R. J. Tibshirani (1993), An Introduction to the Bootstrap</a:t>
+            </a:r>
+            <a:endParaRPr lang="en-US"/>
           </a:p>
         </p:txBody>
       </p:sp>
@@ -5642,64 +7108,61 @@
           <a:lstStyle/>
           <a:p>
             <a:r>
-              <a:rPr sz="3800"/>
-              <a:t>論文：分かったこと</a:t>
-            </a:r>
-          </a:p>
-        </p:txBody>
-      </p:sp>
-      <p:sp>
-        <p:nvSpPr>
-          <p:cNvPr id="3" name="Content Placeholder 2"/>
-          <p:cNvSpPr>
-            <a:spLocks noGrp="1"/>
-          </p:cNvSpPr>
-          <p:nvPr>
-            <p:ph idx="1"/>
-          </p:nvPr>
-        </p:nvSpPr>
-        <p:spPr/>
-        <p:txBody>
-          <a:bodyPr/>
-          <a:lstStyle/>
-          <a:p>
-            <a:pPr/>
-            <a:r>
-              <a:rPr sz="2400"/>
-              <a:t>Ursa Minor：J の誤差を小さく見積もると、</a:t>
-            </a:r>
-            <a:br/>
-            <a:r>
-              <a:rPr sz="2400"/>
-              <a:t>本物を誤って除外する割合が 1.7% → 8% → 22%</a:t>
-            </a:r>
-          </a:p>
-          <a:p>
-            <a:pPr/>
-            <a:r>
-              <a:rPr sz="2400"/>
-              <a:t>27 個まとめると、ふつうの設定でも 21%</a:t>
-            </a:r>
-          </a:p>
-          <a:p>
-            <a:pPr lvl="1"/>
-            <a:r>
-              <a:rPr sz="1800"/>
-              <a:t>誤差を小さく見積もると 31% → 49% → 88%</a:t>
-            </a:r>
-          </a:p>
-          <a:p>
-            <a:pPr/>
-            <a:r>
-              <a:rPr sz="2400"/>
-              <a:t>ハローを点として扱うと、上限が 1.4 倍きつく出すぎる</a:t>
-            </a:r>
-          </a:p>
-          <a:p>
-            <a:pPr/>
-            <a:r>
-              <a:rPr sz="2400"/>
-              <a:t>→ 銀河中心と矮小銀河の「矛盾」は誇張されうる</a:t>
+              <a:rPr sz="3400"/>
+              <a:t>② の結果：エネルギーごとのばらつき</a:t>
+            </a:r>
+          </a:p>
+        </p:txBody>
+      </p:sp>
+      <p:pic>
+        <p:nvPicPr>
+          <p:cNvPr id="3" name="Picture 2" descr="fig_null_variance.png"/>
+          <p:cNvPicPr>
+            <a:picLocks noChangeAspect="1"/>
+          </p:cNvPicPr>
+          <p:nvPr/>
+        </p:nvPicPr>
+        <p:blipFill>
+          <a:blip r:embed="rId2"/>
+          <a:stretch>
+            <a:fillRect/>
+          </a:stretch>
+        </p:blipFill>
+        <p:spPr>
+          <a:xfrm>
+            <a:off x="2103120" y="1234440"/>
+            <a:ext cx="7156174" cy="4114800"/>
+          </a:xfrm>
+          <a:prstGeom prst="rect">
+            <a:avLst/>
+          </a:prstGeom>
+        </p:spPr>
+      </p:pic>
+      <p:sp>
+        <p:nvSpPr>
+          <p:cNvPr id="4" name="TextBox 3"/>
+          <p:cNvSpPr txBox="1"/>
+          <p:nvPr/>
+        </p:nvSpPr>
+        <p:spPr>
+          <a:xfrm>
+            <a:off x="457200" y="5486400"/>
+            <a:ext cx="11247120" cy="457200"/>
+          </a:xfrm>
+          <a:prstGeom prst="rect">
+            <a:avLst/>
+          </a:prstGeom>
+          <a:noFill/>
+        </p:spPr>
+        <p:txBody>
+          <a:bodyPr wrap="square">
+            <a:spAutoFit/>
+          </a:bodyPr>
+          <a:lstStyle/>
+          <a:p>
+            <a:r>
+              <a:rPr sz="2000"/>
+              <a:t>どのエネルギーでもばらつきは 1 より大きい（光子が十分ある範囲）</a:t>
             </a:r>
           </a:p>
         </p:txBody>
@@ -5738,8 +7201,8 @@
           <a:lstStyle/>
           <a:p>
             <a:r>
-              <a:rPr sz="3800"/>
-              <a:t>論文の誤差を、僕の結果に当てはめる</a:t>
+              <a:rPr sz="3400"/>
+              <a:t>③ を調べる：19.1σ が再現できない理由</a:t>
             </a:r>
           </a:p>
         </p:txBody>
@@ -5754,39 +7217,41 @@
             <p:ph idx="1"/>
           </p:nvPr>
         </p:nvSpPr>
-        <p:spPr/>
-        <p:txBody>
-          <a:bodyPr/>
-          <a:lstStyle/>
-          <a:p>
-            <a:pPr/>
-            <a:r>
-              <a:rPr sz="2600"/>
-              <a:t>これまで：矮小銀河の J の誤差をゼロとして扱っていた</a:t>
-            </a:r>
-          </a:p>
-          <a:p>
-            <a:pPr/>
-            <a:r>
-              <a:rPr sz="2600"/>
-              <a:t>論文と同じ考え方で、各天体の J を「約 3 倍の範囲」で</a:t>
-            </a:r>
-            <a:br/>
-            <a:r>
-              <a:rPr sz="2600"/>
-              <a:t>ランダムにずらし、暗黒物質なら何σ見えたはずかを何度も計算</a:t>
-            </a:r>
-          </a:p>
-          <a:p>
-            <a:pPr/>
-            <a:r>
-              <a:rPr sz="2600"/>
-              <a:t>ついでに見つけた誤り：使えない天体 2 つ（SMC・LMC）が</a:t>
-            </a:r>
-            <a:br/>
-            <a:r>
-              <a:rPr sz="2600"/>
-              <a:t>予測に混ざっていた → 除いて 43 天体で計算</a:t>
+        <p:spPr>
+          <a:xfrm>
+            <a:off x="841248" y="1463040"/>
+            <a:ext cx="10515600" cy="4937760"/>
+          </a:xfrm>
+        </p:spPr>
+        <p:txBody>
+          <a:bodyPr/>
+          <a:lstStyle/>
+          <a:p>
+            <a:pPr/>
+            <a:r>
+              <a:rPr sz="2400"/>
+              <a:t>7/23 の計算の直後にコードを直していて、当時の状態が残っていなかった</a:t>
+            </a:r>
+          </a:p>
+          <a:p>
+            <a:pPr/>
+            <a:r>
+              <a:rPr sz="2400"/>
+              <a:t>今のコードは、何度計算しても同じ答えになる（10/1 に確認）</a:t>
+            </a:r>
+          </a:p>
+          <a:p>
+            <a:pPr/>
+            <a:r>
+              <a:rPr sz="2400"/>
+              <a:t>結果ファイルに、コードの版と設定を自動で記録するようにした</a:t>
+            </a:r>
+          </a:p>
+          <a:p>
+            <a:pPr/>
+            <a:r>
+              <a:rPr sz="2400"/>
+              <a:t>→ 主結果を 19.0σ（10/1 の再計算）に統一</a:t>
             </a:r>
           </a:p>
         </p:txBody>
@@ -5825,61 +7290,64 @@
           <a:lstStyle/>
           <a:p>
             <a:r>
-              <a:rPr sz="3800"/>
-              <a:t>結果：「判定できない」がはっきりした</a:t>
-            </a:r>
-          </a:p>
-        </p:txBody>
-      </p:sp>
-      <p:pic>
-        <p:nvPicPr>
-          <p:cNvPr id="3" name="Picture 2" descr="fig_dwarf_J_uncertainty.png"/>
-          <p:cNvPicPr>
-            <a:picLocks noChangeAspect="1"/>
-          </p:cNvPicPr>
-          <p:nvPr/>
-        </p:nvPicPr>
-        <p:blipFill>
-          <a:blip r:embed="rId2"/>
-          <a:stretch>
-            <a:fillRect/>
-          </a:stretch>
-        </p:blipFill>
+              <a:rPr sz="3400"/>
+              <a:t>ここまでのまとめ</a:t>
+            </a:r>
+          </a:p>
+        </p:txBody>
+      </p:sp>
+      <p:sp>
+        <p:nvSpPr>
+          <p:cNvPr id="3" name="Content Placeholder 2"/>
+          <p:cNvSpPr>
+            <a:spLocks noGrp="1"/>
+          </p:cNvSpPr>
+          <p:nvPr>
+            <p:ph idx="1"/>
+          </p:nvPr>
+        </p:nvSpPr>
         <p:spPr>
           <a:xfrm>
-            <a:off x="1828800" y="1371600"/>
-            <a:ext cx="7010400" cy="4206240"/>
+            <a:off x="841248" y="1463040"/>
+            <a:ext cx="10515600" cy="4937760"/>
           </a:xfrm>
-          <a:prstGeom prst="rect">
-            <a:avLst/>
-          </a:prstGeom>
         </p:spPr>
-      </p:pic>
-      <p:sp>
-        <p:nvSpPr>
-          <p:cNvPr id="4" name="TextBox 3"/>
-          <p:cNvSpPr txBox="1"/>
-          <p:nvPr/>
-        </p:nvSpPr>
-        <p:spPr>
-          <a:xfrm>
-            <a:off x="548640" y="5806440"/>
-            <a:ext cx="11064240" cy="822960"/>
-          </a:xfrm>
-          <a:prstGeom prst="rect">
-            <a:avLst/>
-          </a:prstGeom>
-          <a:noFill/>
-        </p:spPr>
-        <p:txBody>
-          <a:bodyPr wrap="square">
-            <a:spAutoFit/>
-          </a:bodyPr>
-          <a:lstStyle/>
-          <a:p>
-            <a:r>
-              <a:rPr sz="2200"/>
-              <a:t>期待 1.7σ → 1.3〜5.0σ（J の誤差あり）　実測 0.4σ ± 1.26　ずれ約 1.3σ</a:t>
+        <p:txBody>
+          <a:bodyPr/>
+          <a:lstStyle/>
+          <a:p>
+            <a:pPr/>
+            <a:r>
+              <a:rPr sz="2400"/>
+              <a:t>ICS の明るさ・バブル・計算の近似の間違いでは、超過を説明できない</a:t>
+            </a:r>
+          </a:p>
+          <a:p>
+            <a:pPr/>
+            <a:r>
+              <a:rPr sz="2400"/>
+              <a:t>σ は 1.26 倍の過大評価 → 較正すると約 15σ</a:t>
+            </a:r>
+          </a:p>
+          <a:p>
+            <a:pPr/>
+            <a:r>
+              <a:rPr sz="2400"/>
+              <a:t>ただし、暗黒物質の証拠ではない</a:t>
+            </a:r>
+          </a:p>
+          <a:p>
+            <a:pPr lvl="1"/>
+            <a:r>
+              <a:rPr sz="2000"/>
+              <a:t>ICS の「空間の形」の間違いは否定できていない</a:t>
+            </a:r>
+          </a:p>
+          <a:p>
+            <a:pPr/>
+            <a:r>
+              <a:rPr sz="2400"/>
+              <a:t>→ 独立な確認として、矮小銀河を見る</a:t>
             </a:r>
           </a:p>
         </p:txBody>
@@ -5918,8 +7386,8 @@
           <a:lstStyle/>
           <a:p>
             <a:r>
-              <a:rPr sz="3800"/>
-              <a:t>結論</a:t>
+              <a:rPr sz="3400"/>
+              <a:t>矮小銀河で確かめる</a:t>
             </a:r>
           </a:p>
         </p:txBody>
@@ -5934,37 +7402,96 @@
             <p:ph idx="1"/>
           </p:nvPr>
         </p:nvSpPr>
-        <p:spPr/>
-        <p:txBody>
-          <a:bodyPr/>
-          <a:lstStyle/>
-          <a:p>
-            <a:pPr/>
-            <a:r>
-              <a:rPr sz="2800"/>
-              <a:t>Totani の超過を再現（名目 19.0σ、較正後 約 15σ）</a:t>
-            </a:r>
-          </a:p>
-          <a:p>
-            <a:pPr/>
-            <a:r>
-              <a:rPr sz="2800"/>
-              <a:t>背景（ICS・バブル）の間違いでは説明できない、が増えた</a:t>
+        <p:spPr>
+          <a:xfrm>
+            <a:off x="841248" y="1463040"/>
+            <a:ext cx="10515600" cy="4114800"/>
+          </a:xfrm>
+        </p:spPr>
+        <p:txBody>
+          <a:bodyPr/>
+          <a:lstStyle/>
+          <a:p>
+            <a:pPr/>
+            <a:r>
+              <a:rPr sz="2400"/>
+              <a:t>矮小銀河：天の川のまわりの小さな銀河</a:t>
             </a:r>
           </a:p>
           <a:p>
             <a:pPr lvl="1"/>
             <a:r>
-              <a:rPr sz="2200"/>
-              <a:t>暗黒物質の証拠ではない</a:t>
-            </a:r>
-          </a:p>
-          <a:p>
-            <a:pPr/>
-            <a:r>
-              <a:rPr sz="2800"/>
-              <a:t>矮小銀河では判定できない（J の誤差を入れるとさらに）</a:t>
-            </a:r>
+              <a:rPr sz="2000"/>
+              <a:t>暗黒物質が多く、ガスや星形成が少ない（雑音が少ない）</a:t>
+            </a:r>
+          </a:p>
+          <a:p>
+            <a:pPr/>
+            <a:r>
+              <a:rPr sz="2400"/>
+              <a:t>暗黒物質なら、矮小銀河からも同じ 20 GeV の光が来るはず</a:t>
+            </a:r>
+          </a:p>
+          <a:p>
+            <a:pPr/>
+            <a:r>
+              <a:rPr sz="2400"/>
+              <a:t>同じ手法を、各天体のまわり半径 10° に使った</a:t>
+            </a:r>
+          </a:p>
+          <a:p>
+            <a:pPr lvl="1"/>
+            <a:r>
+              <a:rPr sz="2000"/>
+              <a:t>矮小銀河 54 ＋ M31・M33 ＋ 何も無い空 23 か所</a:t>
+            </a:r>
+          </a:p>
+          <a:p>
+            <a:pPr/>
+            <a:r>
+              <a:rPr sz="2400"/>
+              <a:t>矮小銀河は小さい（0.2〜0.4°）ので、広がった ICS とは縮退しない</a:t>
+            </a:r>
+          </a:p>
+        </p:txBody>
+      </p:sp>
+      <p:sp>
+        <p:nvSpPr>
+          <p:cNvPr id="8" name="TextBox 7">
+            <a:extLst>
+              <a:ext uri="{FF2B5EF4-FFF2-40B4-BE49-F238E27FC236}">
+                <a16:creationId xmlns:a16="http://schemas.microsoft.com/office/drawing/2014/main" id="{F85CD606-E3CE-F314-B3EE-F3D7028115CB}"/>
+              </a:ext>
+            </a:extLst>
+          </p:cNvPr>
+          <p:cNvSpPr txBox="1"/>
+          <p:nvPr/>
+        </p:nvSpPr>
+        <p:spPr>
+          <a:xfrm>
+            <a:off x="5837182" y="5663239"/>
+            <a:ext cx="6093372" cy="923330"/>
+          </a:xfrm>
+          <a:prstGeom prst="rect">
+            <a:avLst/>
+          </a:prstGeom>
+          <a:noFill/>
+        </p:spPr>
+        <p:txBody>
+          <a:bodyPr wrap="square">
+            <a:spAutoFit/>
+          </a:bodyPr>
+          <a:lstStyle/>
+          <a:p>
+            <a:r>
+              <a:rPr lang="en-US" b="1" sz="1400"/>
+              <a:t>Reference:</a:t>
+            </a:r>
+            <a:r>
+              <a:rPr lang="en-US" sz="1400"/>
+              <a:t> A. B. Pace (2025), Open J. Astrophys. 8, 142</a:t>
+            </a:r>
+            <a:endParaRPr lang="en-US"/>
           </a:p>
         </p:txBody>
       </p:sp>
@@ -6002,8 +7529,8 @@
           <a:lstStyle/>
           <a:p>
             <a:r>
-              <a:rPr sz="3800"/>
-              <a:t>参考文献</a:t>
+              <a:rPr sz="3400"/>
+              <a:t>予測の立て方：J ファクター</a:t>
             </a:r>
           </a:p>
         </p:txBody>
@@ -6018,43 +7545,188 @@
             <p:ph idx="1"/>
           </p:nvPr>
         </p:nvSpPr>
-        <p:spPr/>
-        <p:txBody>
-          <a:bodyPr/>
-          <a:lstStyle/>
-          <a:p>
-            <a:pPr/>
+        <p:spPr>
+          <a:xfrm>
+            <a:off x="841248" y="1463040"/>
+            <a:ext cx="10515600" cy="4114800"/>
+          </a:xfrm>
+        </p:spPr>
+        <p:txBody>
+          <a:bodyPr/>
+          <a:lstStyle/>
+          <a:p>
+            <a:pPr/>
+            <a:r>
+              <a:rPr sz="2400"/>
+              <a:t>対消滅の明るさ：F = ⟨σv⟩ / (8π m²) × dN/dE × J</a:t>
+            </a:r>
+          </a:p>
+          <a:p>
+            <a:pPr/>
+            <a:r>
+              <a:rPr sz="2400"/>
+              <a:t>J ファクター = 暗黒物質の密度の 2 乗を、視線方向に足し合わせた量</a:t>
+            </a:r>
+          </a:p>
+          <a:p>
+            <a:pPr/>
+            <a:r>
+              <a:rPr sz="2400"/>
+              <a:t>天の川と矮小銀河で粒子は同じ → 比をとると J の比だけが残る</a:t>
+            </a:r>
+          </a:p>
+          <a:p>
+            <a:pPr lvl="1"/>
             <a:r>
               <a:rPr sz="2000"/>
-              <a:t>T. Totani (2025), arXiv:2507.07209</a:t>
-            </a:r>
-          </a:p>
-          <a:p>
-            <a:pPr/>
+              <a:t>F_矮小 = F_天の川 × J_矮小 / J_天の川</a:t>
+            </a:r>
+          </a:p>
+          <a:p>
+            <a:pPr/>
+            <a:r>
+              <a:rPr sz="2400"/>
+              <a:t>粒子の質量などを仮定せずに「何σ見えるはずか」が出る</a:t>
+            </a:r>
+          </a:p>
+          <a:p>
+            <a:pPr/>
+            <a:r>
+              <a:rPr sz="2400"/>
+              <a:t>矮小銀河の J は、星の動きから推定する</a:t>
+            </a:r>
+          </a:p>
+        </p:txBody>
+      </p:sp>
+      <p:sp>
+        <p:nvSpPr>
+          <p:cNvPr id="8" name="TextBox 7">
+            <a:extLst>
+              <a:ext uri="{FF2B5EF4-FFF2-40B4-BE49-F238E27FC236}">
+                <a16:creationId xmlns:a16="http://schemas.microsoft.com/office/drawing/2014/main" id="{F85CD606-E3CE-F314-B3EE-F3D7028115CB}"/>
+              </a:ext>
+            </a:extLst>
+          </p:cNvPr>
+          <p:cNvSpPr txBox="1"/>
+          <p:nvPr/>
+        </p:nvSpPr>
+        <p:spPr>
+          <a:xfrm>
+            <a:off x="5837182" y="5663239"/>
+            <a:ext cx="6093372" cy="923330"/>
+          </a:xfrm>
+          <a:prstGeom prst="rect">
+            <a:avLst/>
+          </a:prstGeom>
+          <a:noFill/>
+        </p:spPr>
+        <p:txBody>
+          <a:bodyPr wrap="square">
+            <a:spAutoFit/>
+          </a:bodyPr>
+          <a:lstStyle/>
+          <a:p>
+            <a:r>
+              <a:rPr lang="en-US" b="1" sz="1400"/>
+              <a:t>Reference:</a:t>
+            </a:r>
+            <a:r>
+              <a:rPr lang="en-US" sz="1400"/>
+              <a:t> A. B. Pace &amp; L. E. Strigari (2019), MNRAS 482, 3480</a:t>
+            </a:r>
+            <a:endParaRPr lang="en-US"/>
+          </a:p>
+        </p:txBody>
+      </p:sp>
+    </p:spTree>
+  </p:cSld>
+  <p:clrMapOvr>
+    <a:masterClrMapping/>
+  </p:clrMapOvr>
+</p:sld>
+</file>
+
+<file path=ppt/slides/slide19.xml><?xml version="1.0" encoding="utf-8"?>
+<p:sld xmlns:a="http://schemas.openxmlformats.org/drawingml/2006/main" xmlns:p="http://schemas.openxmlformats.org/presentationml/2006/main" xmlns:r="http://schemas.openxmlformats.org/officeDocument/2006/relationships">
+  <p:cSld>
+    <p:spTree>
+      <p:nvGrpSpPr>
+        <p:cNvPr id="1" name=""/>
+        <p:cNvGrpSpPr/>
+        <p:nvPr/>
+      </p:nvGrpSpPr>
+      <p:grpSpPr/>
+      <p:sp>
+        <p:nvSpPr>
+          <p:cNvPr id="2" name="Title 1"/>
+          <p:cNvSpPr>
+            <a:spLocks noGrp="1"/>
+          </p:cNvSpPr>
+          <p:nvPr>
+            <p:ph type="title"/>
+          </p:nvPr>
+        </p:nvSpPr>
+        <p:spPr/>
+        <p:txBody>
+          <a:bodyPr/>
+          <a:lstStyle/>
+          <a:p>
+            <a:r>
+              <a:rPr sz="3400"/>
+              <a:t>結果：どこにも信号は見えなかった</a:t>
+            </a:r>
+          </a:p>
+        </p:txBody>
+      </p:sp>
+      <p:pic>
+        <p:nvPicPr>
+          <p:cNvPr id="3" name="Picture 2" descr="fig_dwarf_results.png"/>
+          <p:cNvPicPr>
+            <a:picLocks noChangeAspect="1"/>
+          </p:cNvPicPr>
+          <p:nvPr/>
+        </p:nvPicPr>
+        <p:blipFill>
+          <a:blip r:embed="rId2"/>
+          <a:stretch>
+            <a:fillRect/>
+          </a:stretch>
+        </p:blipFill>
+        <p:spPr>
+          <a:xfrm>
+            <a:off x="2194560" y="1234440"/>
+            <a:ext cx="7156174" cy="4114800"/>
+          </a:xfrm>
+          <a:prstGeom prst="rect">
+            <a:avLst/>
+          </a:prstGeom>
+        </p:spPr>
+      </p:pic>
+      <p:sp>
+        <p:nvSpPr>
+          <p:cNvPr id="4" name="TextBox 3"/>
+          <p:cNvSpPr txBox="1"/>
+          <p:nvPr/>
+        </p:nvSpPr>
+        <p:spPr>
+          <a:xfrm>
+            <a:off x="457200" y="5486400"/>
+            <a:ext cx="11247120" cy="457200"/>
+          </a:xfrm>
+          <a:prstGeom prst="rect">
+            <a:avLst/>
+          </a:prstGeom>
+          <a:noFill/>
+        </p:spPr>
+        <p:txBody>
+          <a:bodyPr wrap="square">
+            <a:spAutoFit/>
+          </a:bodyPr>
+          <a:lstStyle/>
+          <a:p>
             <a:r>
               <a:rPr sz="2000"/>
-              <a:t>Bertólez-Martínez, Hooper &amp; Khatee Zathul (2026), arXiv:2609.20944</a:t>
-            </a:r>
-          </a:p>
-          <a:p>
-            <a:pPr/>
-            <a:r>
-              <a:rPr sz="2000"/>
-              <a:t>B. Efron, R. J. Tibshirani (1993), An Introduction to the Bootstrap</a:t>
-            </a:r>
-          </a:p>
-          <a:p>
-            <a:pPr/>
-            <a:r>
-              <a:rPr sz="2000"/>
-              <a:t>I. V. Moskalenko, A. W. Strong (2000), ApJ 528, 357</a:t>
-            </a:r>
-          </a:p>
-          <a:p>
-            <a:pPr/>
-            <a:r>
-              <a:rPr sz="2000"/>
-              <a:t>A. B. Pace (2025), Open J. Astrophys. 8, 142</a:t>
+              <a:t>どの天体・どのエネルギーでも最大 +3.46σ（何も無い空でも 4.50σ）</a:t>
             </a:r>
           </a:p>
         </p:txBody>
@@ -6093,8 +7765,8 @@
           <a:lstStyle/>
           <a:p>
             <a:r>
-              <a:rPr sz="3800"/>
-              <a:t>今の研究：Totani (2025) の再現</a:t>
+              <a:rPr sz="3400"/>
+              <a:t>研究の目的</a:t>
             </a:r>
           </a:p>
         </p:txBody>
@@ -6111,7 +7783,8 @@
         </p:nvSpPr>
         <p:spPr>
           <a:xfrm>
-            <a:ext cx="4206240" cy="0"/>
+            <a:off x="841248" y="1463040"/>
+            <a:ext cx="10515600" cy="4114800"/>
           </a:xfrm>
         </p:spPr>
         <p:txBody>
@@ -6121,61 +7794,1450 @@
             <a:pPr/>
             <a:r>
               <a:rPr sz="2400"/>
-              <a:t>天の川のハローから 20 GeV のガンマ線超過（13–19σ）</a:t>
+              <a:t>暗黒物質どうしがぶつかると消えて、ガンマ線を出すと考えられている（対消滅）</a:t>
             </a:r>
           </a:p>
           <a:p>
             <a:pPr/>
             <a:r>
               <a:rPr sz="2400"/>
-              <a:t>同じ手法で独立に再現</a:t>
+              <a:t>天の川は暗黒物質の「ハロー」に包まれている</a:t>
             </a:r>
           </a:p>
           <a:p>
             <a:pPr lvl="1"/>
             <a:r>
-              <a:rPr sz="1800"/>
-              <a:t>既知の光（ガス・ICS・点源・バブルなど）と</a:t>
-            </a:r>
-            <a:br/>
-            <a:r>
-              <a:rPr sz="1800"/>
-              <a:t>ハローを同時に当てはめる</a:t>
+              <a:rPr sz="2000"/>
+              <a:t>→ 空全体から、かすかなガンマ線が来るはず</a:t>
             </a:r>
           </a:p>
           <a:p>
             <a:pPr/>
             <a:r>
               <a:rPr sz="2400"/>
-              <a:t>結果：20 GeV で 19.0σ</a:t>
-            </a:r>
-          </a:p>
-        </p:txBody>
-      </p:sp>
-      <p:pic>
-        <p:nvPicPr>
-          <p:cNvPr id="4" name="Picture 3" descr="significance_spectrum.png"/>
-          <p:cNvPicPr>
-            <a:picLocks noChangeAspect="1"/>
-          </p:cNvPicPr>
+              <a:t>Totani (2025)：20 GeV 付近にハロー型の超過を報告（13–19σ）</a:t>
+            </a:r>
+          </a:p>
+          <a:p>
+            <a:pPr/>
+            <a:r>
+              <a:rPr sz="2400"/>
+              <a:t>僕の研究：これを自分で再現し、本物かどうか確かめる</a:t>
+            </a:r>
+          </a:p>
+        </p:txBody>
+      </p:sp>
+      <p:sp>
+        <p:nvSpPr>
+          <p:cNvPr id="8" name="TextBox 7">
+            <a:extLst>
+              <a:ext uri="{FF2B5EF4-FFF2-40B4-BE49-F238E27FC236}">
+                <a16:creationId xmlns:a16="http://schemas.microsoft.com/office/drawing/2014/main" id="{F85CD606-E3CE-F314-B3EE-F3D7028115CB}"/>
+              </a:ext>
+            </a:extLst>
+          </p:cNvPr>
+          <p:cNvSpPr txBox="1"/>
           <p:nvPr/>
-        </p:nvPicPr>
-        <p:blipFill>
-          <a:blip r:embed="rId3"/>
-          <a:stretch>
-            <a:fillRect/>
-          </a:stretch>
-        </p:blipFill>
+        </p:nvSpPr>
         <p:spPr>
           <a:xfrm>
-            <a:off x="4846320" y="1463040"/>
-            <a:ext cx="6213231" cy="4846320"/>
+            <a:off x="5837182" y="5663239"/>
+            <a:ext cx="6093372" cy="923330"/>
           </a:xfrm>
           <a:prstGeom prst="rect">
             <a:avLst/>
           </a:prstGeom>
+          <a:noFill/>
         </p:spPr>
-      </p:pic>
+        <p:txBody>
+          <a:bodyPr wrap="square">
+            <a:spAutoFit/>
+          </a:bodyPr>
+          <a:lstStyle/>
+          <a:p>
+            <a:r>
+              <a:rPr lang="en-US" b="1" sz="1400"/>
+              <a:t>Reference:</a:t>
+            </a:r>
+            <a:r>
+              <a:rPr lang="en-US" sz="1400"/>
+              <a:t> T. Totani (2025), arXiv:2507.07209</a:t>
+            </a:r>
+            <a:endParaRPr lang="en-US"/>
+          </a:p>
+        </p:txBody>
+      </p:sp>
+    </p:spTree>
+  </p:cSld>
+  <p:clrMapOvr>
+    <a:masterClrMapping/>
+  </p:clrMapOvr>
+</p:sld>
+</file>
+
+<file path=ppt/slides/slide20.xml><?xml version="1.0" encoding="utf-8"?>
+<p:sld xmlns:a="http://schemas.openxmlformats.org/drawingml/2006/main" xmlns:p="http://schemas.openxmlformats.org/presentationml/2006/main" xmlns:r="http://schemas.openxmlformats.org/officeDocument/2006/relationships">
+  <p:cSld>
+    <p:spTree>
+      <p:nvGrpSpPr>
+        <p:cNvPr id="1" name=""/>
+        <p:cNvGrpSpPr/>
+        <p:nvPr/>
+      </p:nvGrpSpPr>
+      <p:grpSpPr/>
+      <p:sp>
+        <p:nvSpPr>
+          <p:cNvPr id="2" name="Title 1"/>
+          <p:cNvSpPr>
+            <a:spLocks noGrp="1"/>
+          </p:cNvSpPr>
+          <p:nvPr>
+            <p:ph type="title"/>
+          </p:nvPr>
+        </p:nvSpPr>
+        <p:spPr/>
+        <p:txBody>
+          <a:bodyPr/>
+          <a:lstStyle/>
+          <a:p>
+            <a:r>
+              <a:rPr sz="3400"/>
+              <a:t>天体をまとめて比べる</a:t>
+            </a:r>
+          </a:p>
+        </p:txBody>
+      </p:sp>
+      <p:sp>
+        <p:nvSpPr>
+          <p:cNvPr id="3" name="Content Placeholder 2"/>
+          <p:cNvSpPr>
+            <a:spLocks noGrp="1"/>
+          </p:cNvSpPr>
+          <p:nvPr>
+            <p:ph idx="1"/>
+          </p:nvPr>
+        </p:nvSpPr>
+        <p:spPr>
+          <a:xfrm>
+            <a:off x="841248" y="1463040"/>
+            <a:ext cx="10515600" cy="4937760"/>
+          </a:xfrm>
+        </p:spPr>
+        <p:txBody>
+          <a:bodyPr/>
+          <a:lstStyle/>
+          <a:p>
+            <a:pPr/>
+            <a:r>
+              <a:rPr sz="2400"/>
+              <a:t>1 個ずつでは弱いので、J が求まる 43 天体をまとめる</a:t>
+            </a:r>
+          </a:p>
+          <a:p>
+            <a:pPr/>
+            <a:r>
+              <a:rPr sz="2400"/>
+              <a:t>T = Σ w_i z_i / √( Σ w_i² )、重み w_i = 天体 i の予測 σ</a:t>
+            </a:r>
+          </a:p>
+          <a:p>
+            <a:pPr lvl="1"/>
+            <a:r>
+              <a:rPr sz="2000"/>
+              <a:t>z_i：天体 i の実測の σ（20 GeV）</a:t>
+            </a:r>
+          </a:p>
+          <a:p>
+            <a:pPr/>
+            <a:r>
+              <a:rPr sz="2400"/>
+              <a:t>暗黒物質が無ければ：T は平均 0、ばらつき 1</a:t>
+            </a:r>
+          </a:p>
+          <a:p>
+            <a:pPr/>
+            <a:r>
+              <a:rPr sz="2400"/>
+              <a:t>暗黒物質があれば：T の平均 = √( Σ pred_i² ) = 1.73</a:t>
+            </a:r>
+          </a:p>
+          <a:p>
+            <a:pPr/>
+            <a:r>
+              <a:rPr sz="2400"/>
+              <a:t>実測 T = 0.39 → ずれ 1.3σ</a:t>
+            </a:r>
+          </a:p>
+          <a:p>
+            <a:pPr/>
+            <a:r>
+              <a:rPr sz="2400"/>
+              <a:t>ただし、ここでは J に誤差は無いとしていた</a:t>
+            </a:r>
+          </a:p>
+        </p:txBody>
+      </p:sp>
+    </p:spTree>
+  </p:cSld>
+  <p:clrMapOvr>
+    <a:masterClrMapping/>
+  </p:clrMapOvr>
+</p:sld>
+</file>
+
+<file path=ppt/slides/slide21.xml><?xml version="1.0" encoding="utf-8"?>
+<p:sld xmlns:a="http://schemas.openxmlformats.org/drawingml/2006/main" xmlns:p="http://schemas.openxmlformats.org/presentationml/2006/main" xmlns:r="http://schemas.openxmlformats.org/officeDocument/2006/relationships">
+  <p:cSld>
+    <p:spTree>
+      <p:nvGrpSpPr>
+        <p:cNvPr id="1" name=""/>
+        <p:cNvGrpSpPr/>
+        <p:nvPr/>
+      </p:nvGrpSpPr>
+      <p:grpSpPr/>
+      <p:sp>
+        <p:nvSpPr>
+          <p:cNvPr id="2" name="Title 1"/>
+          <p:cNvSpPr>
+            <a:spLocks noGrp="1"/>
+          </p:cNvSpPr>
+          <p:nvPr>
+            <p:ph type="title"/>
+          </p:nvPr>
+        </p:nvSpPr>
+        <p:spPr/>
+        <p:txBody>
+          <a:bodyPr/>
+          <a:lstStyle/>
+          <a:p>
+            <a:r>
+              <a:rPr sz="3400"/>
+              <a:t>ここで論文：J の誤差は小さく見積もられている</a:t>
+            </a:r>
+          </a:p>
+        </p:txBody>
+      </p:sp>
+      <p:sp>
+        <p:nvSpPr>
+          <p:cNvPr id="3" name="Content Placeholder 2"/>
+          <p:cNvSpPr>
+            <a:spLocks noGrp="1"/>
+          </p:cNvSpPr>
+          <p:nvPr>
+            <p:ph idx="1"/>
+          </p:nvPr>
+        </p:nvSpPr>
+        <p:spPr>
+          <a:xfrm>
+            <a:off x="841248" y="1463040"/>
+            <a:ext cx="10515600" cy="4114800"/>
+          </a:xfrm>
+        </p:spPr>
+        <p:txBody>
+          <a:bodyPr/>
+          <a:lstStyle/>
+          <a:p>
+            <a:pPr/>
+            <a:r>
+              <a:rPr sz="2400"/>
+              <a:t>文献ごとの J の値は、書かれた誤差よりも大きくばらつく</a:t>
+            </a:r>
+          </a:p>
+          <a:p>
+            <a:pPr/>
+            <a:r>
+              <a:rPr sz="2400"/>
+              <a:t>見落とされがちな誤差の原因（8 つ）</a:t>
+            </a:r>
+          </a:p>
+          <a:p>
+            <a:pPr lvl="1"/>
+            <a:r>
+              <a:rPr sz="2000"/>
+              <a:t>点として扱う・ハローの形・星の分布の形の仮定</a:t>
+            </a:r>
+          </a:p>
+          <a:p>
+            <a:pPr lvl="1"/>
+            <a:r>
+              <a:rPr sz="2000"/>
+              <a:t>非球対称（最大 0.4 dex）・非平衡（〜0.1）・連星（Ret II で〜0.3）</a:t>
+            </a:r>
+          </a:p>
+          <a:p>
+            <a:pPr lvl="1"/>
+            <a:r>
+              <a:rPr sz="2000"/>
+              <a:t>前景の星の混入・誤差の分布が正規分布でない</a:t>
+            </a:r>
+          </a:p>
+          <a:p>
+            <a:pPr/>
+            <a:r>
+              <a:rPr sz="2400"/>
+              <a:t>Δlog₁₀J ≈ 0.5（約 3 倍）以上の誤差を見込むべき</a:t>
+            </a:r>
+          </a:p>
+        </p:txBody>
+      </p:sp>
+      <p:sp>
+        <p:nvSpPr>
+          <p:cNvPr id="8" name="TextBox 7">
+            <a:extLst>
+              <a:ext uri="{FF2B5EF4-FFF2-40B4-BE49-F238E27FC236}">
+                <a16:creationId xmlns:a16="http://schemas.microsoft.com/office/drawing/2014/main" id="{F85CD606-E3CE-F314-B3EE-F3D7028115CB}"/>
+              </a:ext>
+            </a:extLst>
+          </p:cNvPr>
+          <p:cNvSpPr txBox="1"/>
+          <p:nvPr/>
+        </p:nvSpPr>
+        <p:spPr>
+          <a:xfrm>
+            <a:off x="5837182" y="5663239"/>
+            <a:ext cx="6093372" cy="923330"/>
+          </a:xfrm>
+          <a:prstGeom prst="rect">
+            <a:avLst/>
+          </a:prstGeom>
+          <a:noFill/>
+        </p:spPr>
+        <p:txBody>
+          <a:bodyPr wrap="square">
+            <a:spAutoFit/>
+          </a:bodyPr>
+          <a:lstStyle/>
+          <a:p>
+            <a:r>
+              <a:rPr lang="en-US" b="1" sz="1400"/>
+              <a:t>Reference:</a:t>
+            </a:r>
+            <a:r>
+              <a:rPr lang="en-US" sz="1400"/>
+              <a:t> Bertólez-Martínez, Hooper &amp; Khatee Zathul (2026), arXiv:2609.20944 §II</a:t>
+            </a:r>
+            <a:endParaRPr lang="en-US"/>
+          </a:p>
+        </p:txBody>
+      </p:sp>
+    </p:spTree>
+  </p:cSld>
+  <p:clrMapOvr>
+    <a:masterClrMapping/>
+  </p:clrMapOvr>
+</p:sld>
+</file>
+
+<file path=ppt/slides/slide22.xml><?xml version="1.0" encoding="utf-8"?>
+<p:sld xmlns:a="http://schemas.openxmlformats.org/drawingml/2006/main" xmlns:p="http://schemas.openxmlformats.org/presentationml/2006/main" xmlns:r="http://schemas.openxmlformats.org/officeDocument/2006/relationships">
+  <p:cSld>
+    <p:spTree>
+      <p:nvGrpSpPr>
+        <p:cNvPr id="1" name=""/>
+        <p:cNvGrpSpPr/>
+        <p:nvPr/>
+      </p:nvGrpSpPr>
+      <p:grpSpPr/>
+      <p:sp>
+        <p:nvSpPr>
+          <p:cNvPr id="2" name="Title 1"/>
+          <p:cNvSpPr>
+            <a:spLocks noGrp="1"/>
+          </p:cNvSpPr>
+          <p:nvPr>
+            <p:ph type="title"/>
+          </p:nvPr>
+        </p:nvSpPr>
+        <p:spPr/>
+        <p:txBody>
+          <a:bodyPr/>
+          <a:lstStyle/>
+          <a:p>
+            <a:r>
+              <a:rPr sz="3400"/>
+              <a:t>詳細なmethodについて①：仮想データの作り方</a:t>
+            </a:r>
+          </a:p>
+        </p:txBody>
+      </p:sp>
+      <p:sp>
+        <p:nvSpPr>
+          <p:cNvPr id="3" name="Content Placeholder 2"/>
+          <p:cNvSpPr>
+            <a:spLocks noGrp="1"/>
+          </p:cNvSpPr>
+          <p:nvPr>
+            <p:ph idx="1"/>
+          </p:nvPr>
+        </p:nvSpPr>
+        <p:spPr>
+          <a:xfrm>
+            <a:off x="841248" y="1463040"/>
+            <a:ext cx="10515600" cy="4114800"/>
+          </a:xfrm>
+        </p:spPr>
+        <p:txBody>
+          <a:bodyPr/>
+          <a:lstStyle/>
+          <a:p>
+            <a:pPr/>
+            <a:r>
+              <a:rPr sz="2200"/>
+              <a:t>Fermi-LAT の観測を計算機の中で作る（FermiTools、fermipy）</a:t>
+            </a:r>
+          </a:p>
+          <a:p>
+            <a:pPr lvl="1"/>
+            <a:r>
+              <a:rPr sz="1800"/>
+              <a:t>17.4 年分、0.5 GeV〜1 TeV、10° × 10° の領域、0.08° の画素</a:t>
+            </a:r>
+          </a:p>
+          <a:p>
+            <a:pPr/>
+            <a:r>
+              <a:rPr sz="2200"/>
+              <a:t>背景：銀河の拡散光＋等方の光から、ポアソン乱数で光子を作る</a:t>
+            </a:r>
+          </a:p>
+          <a:p>
+            <a:pPr/>
+            <a:r>
+              <a:rPr sz="2200"/>
+              <a:t>暗黒物質の信号を入れる</a:t>
+            </a:r>
+          </a:p>
+          <a:p>
+            <a:pPr lvl="1"/>
+            <a:r>
+              <a:rPr sz="1800"/>
+              <a:t>質量 42 GeV、b クォーク対、⟨σv⟩ = 1.4 × 10⁻²⁶ cm³/s</a:t>
+            </a:r>
+          </a:p>
+          <a:p>
+            <a:pPr lvl="1"/>
+            <a:r>
+              <a:rPr sz="1800"/>
+              <a:t>銀河中心 GeV 超過（GCE）に合う値</a:t>
+            </a:r>
+          </a:p>
+          <a:p>
+            <a:pPr/>
+            <a:r>
+              <a:rPr sz="2200"/>
+              <a:t>対象：Ursa Minor 1 個と、27 個の矮小銀河</a:t>
+            </a:r>
+          </a:p>
+        </p:txBody>
+      </p:sp>
+      <p:sp>
+        <p:nvSpPr>
+          <p:cNvPr id="8" name="TextBox 7">
+            <a:extLst>
+              <a:ext uri="{FF2B5EF4-FFF2-40B4-BE49-F238E27FC236}">
+                <a16:creationId xmlns:a16="http://schemas.microsoft.com/office/drawing/2014/main" id="{F85CD606-E3CE-F314-B3EE-F3D7028115CB}"/>
+              </a:ext>
+            </a:extLst>
+          </p:cNvPr>
+          <p:cNvSpPr txBox="1"/>
+          <p:nvPr/>
+        </p:nvSpPr>
+        <p:spPr>
+          <a:xfrm>
+            <a:off x="5837182" y="5663239"/>
+            <a:ext cx="6093372" cy="923330"/>
+          </a:xfrm>
+          <a:prstGeom prst="rect">
+            <a:avLst/>
+          </a:prstGeom>
+          <a:noFill/>
+        </p:spPr>
+        <p:txBody>
+          <a:bodyPr wrap="square">
+            <a:spAutoFit/>
+          </a:bodyPr>
+          <a:lstStyle/>
+          <a:p>
+            <a:r>
+              <a:rPr lang="en-US" b="1" sz="1400"/>
+              <a:t>Reference:</a:t>
+            </a:r>
+            <a:r>
+              <a:rPr lang="en-US" sz="1400"/>
+              <a:t> Bertólez-Martínez, Hooper &amp; Khatee Zathul (2026), arXiv:2609.20944 §III</a:t>
+            </a:r>
+            <a:endParaRPr lang="en-US"/>
+          </a:p>
+        </p:txBody>
+      </p:sp>
+    </p:spTree>
+  </p:cSld>
+  <p:clrMapOvr>
+    <a:masterClrMapping/>
+  </p:clrMapOvr>
+</p:sld>
+</file>
+
+<file path=ppt/slides/slide23.xml><?xml version="1.0" encoding="utf-8"?>
+<p:sld xmlns:a="http://schemas.openxmlformats.org/drawingml/2006/main" xmlns:p="http://schemas.openxmlformats.org/presentationml/2006/main" xmlns:r="http://schemas.openxmlformats.org/officeDocument/2006/relationships">
+  <p:cSld>
+    <p:spTree>
+      <p:nvGrpSpPr>
+        <p:cNvPr id="1" name=""/>
+        <p:cNvGrpSpPr/>
+        <p:nvPr/>
+      </p:nvGrpSpPr>
+      <p:grpSpPr/>
+      <p:sp>
+        <p:nvSpPr>
+          <p:cNvPr id="2" name="Title 1"/>
+          <p:cNvSpPr>
+            <a:spLocks noGrp="1"/>
+          </p:cNvSpPr>
+          <p:nvPr>
+            <p:ph type="title"/>
+          </p:nvPr>
+        </p:nvSpPr>
+        <p:spPr/>
+        <p:txBody>
+          <a:bodyPr/>
+          <a:lstStyle/>
+          <a:p>
+            <a:r>
+              <a:rPr sz="3400"/>
+              <a:t>詳細なmethodについて②：尤度と 2 つの誤差</a:t>
+            </a:r>
+          </a:p>
+        </p:txBody>
+      </p:sp>
+      <p:sp>
+        <p:nvSpPr>
+          <p:cNvPr id="3" name="Content Placeholder 2"/>
+          <p:cNvSpPr>
+            <a:spLocks noGrp="1"/>
+          </p:cNvSpPr>
+          <p:nvPr>
+            <p:ph idx="1"/>
+          </p:nvPr>
+        </p:nvSpPr>
+        <p:spPr>
+          <a:xfrm>
+            <a:off x="841248" y="1463040"/>
+            <a:ext cx="10515600" cy="4114800"/>
+          </a:xfrm>
+        </p:spPr>
+        <p:txBody>
+          <a:bodyPr/>
+          <a:lstStyle/>
+          <a:p>
+            <a:pPr/>
+            <a:r>
+              <a:rPr sz="2200"/>
+              <a:t>各天体の尤度 = 光子のポアソン尤度 × J の尤度</a:t>
+            </a:r>
+          </a:p>
+          <a:p>
+            <a:pPr lvl="1"/>
+            <a:r>
+              <a:rPr sz="1800"/>
+              <a:t>L_J ∝ exp[ −(log₁₀J − log₁₀J_obs)² / 2σ_L² ]</a:t>
+            </a:r>
+          </a:p>
+          <a:p>
+            <a:pPr/>
+            <a:r>
+              <a:rPr sz="2200"/>
+              <a:t>27 個は尤度の積でまとめる（⟨σv⟩ は共通、J は天体ごと）</a:t>
+            </a:r>
+          </a:p>
+          <a:p>
+            <a:pPr/>
+            <a:r>
+              <a:rPr sz="2200"/>
+              <a:t>2 つの誤差を分けて動かす</a:t>
+            </a:r>
+          </a:p>
+          <a:p>
+            <a:pPr lvl="1"/>
+            <a:r>
+              <a:rPr sz="1800"/>
+              <a:t>σ：J の本当のばらつき（J_obs を J_true のまわりに σ でばらつかせる）</a:t>
+            </a:r>
+          </a:p>
+          <a:p>
+            <a:pPr lvl="1"/>
+            <a:r>
+              <a:rPr sz="1800"/>
+              <a:t>σ_L：解析で仮定する幅</a:t>
+            </a:r>
+          </a:p>
+          <a:p>
+            <a:pPr/>
+            <a:r>
+              <a:rPr sz="2200"/>
+              <a:t>95% 上限：TS が最大値から 2.71 下がる点（Wilks の定理を仮定）</a:t>
+            </a:r>
+          </a:p>
+        </p:txBody>
+      </p:sp>
+      <p:sp>
+        <p:nvSpPr>
+          <p:cNvPr id="8" name="TextBox 7">
+            <a:extLst>
+              <a:ext uri="{FF2B5EF4-FFF2-40B4-BE49-F238E27FC236}">
+                <a16:creationId xmlns:a16="http://schemas.microsoft.com/office/drawing/2014/main" id="{F85CD606-E3CE-F314-B3EE-F3D7028115CB}"/>
+              </a:ext>
+            </a:extLst>
+          </p:cNvPr>
+          <p:cNvSpPr txBox="1"/>
+          <p:nvPr/>
+        </p:nvSpPr>
+        <p:spPr>
+          <a:xfrm>
+            <a:off x="5837182" y="5663239"/>
+            <a:ext cx="6093372" cy="923330"/>
+          </a:xfrm>
+          <a:prstGeom prst="rect">
+            <a:avLst/>
+          </a:prstGeom>
+          <a:noFill/>
+        </p:spPr>
+        <p:txBody>
+          <a:bodyPr wrap="square">
+            <a:spAutoFit/>
+          </a:bodyPr>
+          <a:lstStyle/>
+          <a:p>
+            <a:r>
+              <a:rPr lang="en-US" b="1" sz="1400"/>
+              <a:t>Reference:</a:t>
+            </a:r>
+            <a:r>
+              <a:rPr lang="en-US" sz="1400"/>
+              <a:t> Bertólez-Martínez, Hooper &amp; Khatee Zathul (2026), arXiv:2609.20944 式 (6)–(10)</a:t>
+            </a:r>
+            <a:endParaRPr lang="en-US"/>
+          </a:p>
+        </p:txBody>
+      </p:sp>
+    </p:spTree>
+  </p:cSld>
+  <p:clrMapOvr>
+    <a:masterClrMapping/>
+  </p:clrMapOvr>
+</p:sld>
+</file>
+
+<file path=ppt/slides/slide24.xml><?xml version="1.0" encoding="utf-8"?>
+<p:sld xmlns:a="http://schemas.openxmlformats.org/drawingml/2006/main" xmlns:p="http://schemas.openxmlformats.org/presentationml/2006/main" xmlns:r="http://schemas.openxmlformats.org/officeDocument/2006/relationships">
+  <p:cSld>
+    <p:spTree>
+      <p:nvGrpSpPr>
+        <p:cNvPr id="1" name=""/>
+        <p:cNvGrpSpPr/>
+        <p:nvPr/>
+      </p:nvGrpSpPr>
+      <p:grpSpPr/>
+      <p:sp>
+        <p:nvSpPr>
+          <p:cNvPr id="2" name="Title 1"/>
+          <p:cNvSpPr>
+            <a:spLocks noGrp="1"/>
+          </p:cNvSpPr>
+          <p:nvPr>
+            <p:ph type="title"/>
+          </p:nvPr>
+        </p:nvSpPr>
+        <p:spPr/>
+        <p:txBody>
+          <a:bodyPr/>
+          <a:lstStyle/>
+          <a:p>
+            <a:r>
+              <a:rPr sz="3400"/>
+              <a:t>詳細なmethodについて③：何を数えたか</a:t>
+            </a:r>
+          </a:p>
+        </p:txBody>
+      </p:sp>
+      <p:sp>
+        <p:nvSpPr>
+          <p:cNvPr id="3" name="Content Placeholder 2"/>
+          <p:cNvSpPr>
+            <a:spLocks noGrp="1"/>
+          </p:cNvSpPr>
+          <p:nvPr>
+            <p:ph idx="1"/>
+          </p:nvPr>
+        </p:nvSpPr>
+        <p:spPr>
+          <a:xfrm>
+            <a:off x="841248" y="1463040"/>
+            <a:ext cx="10515600" cy="4114800"/>
+          </a:xfrm>
+        </p:spPr>
+        <p:txBody>
+          <a:bodyPr/>
+          <a:lstStyle/>
+          <a:p>
+            <a:pPr/>
+            <a:r>
+              <a:rPr sz="2400"/>
+              <a:t>本物の信号を入れた仮想データを何度も作る</a:t>
+            </a:r>
+          </a:p>
+          <a:p>
+            <a:pPr lvl="1"/>
+            <a:r>
+              <a:rPr sz="2000"/>
+              <a:t>Ursa Minor で 1000 回（基準の設定では 1 万回）</a:t>
+            </a:r>
+          </a:p>
+          <a:p>
+            <a:pPr/>
+            <a:r>
+              <a:rPr sz="2400"/>
+              <a:t>それぞれで 95% 上限を出す</a:t>
+            </a:r>
+          </a:p>
+          <a:p>
+            <a:pPr/>
+            <a:r>
+              <a:rPr sz="2400"/>
+              <a:t>上限が本物の ⟨σv⟩ より下 =「本物を無いと間違えた」</a:t>
+            </a:r>
+          </a:p>
+          <a:p>
+            <a:pPr/>
+            <a:r>
+              <a:rPr sz="2400"/>
+              <a:t>95% 上限なら、間違いは 5% 以下のはず</a:t>
+            </a:r>
+          </a:p>
+          <a:p>
+            <a:pPr lvl="1"/>
+            <a:r>
+              <a:rPr sz="2000"/>
+              <a:t>これが守られているか（カバレッジ）を調べる</a:t>
+            </a:r>
+          </a:p>
+        </p:txBody>
+      </p:sp>
+      <p:sp>
+        <p:nvSpPr>
+          <p:cNvPr id="8" name="TextBox 7">
+            <a:extLst>
+              <a:ext uri="{FF2B5EF4-FFF2-40B4-BE49-F238E27FC236}">
+                <a16:creationId xmlns:a16="http://schemas.microsoft.com/office/drawing/2014/main" id="{F85CD606-E3CE-F314-B3EE-F3D7028115CB}"/>
+              </a:ext>
+            </a:extLst>
+          </p:cNvPr>
+          <p:cNvSpPr txBox="1"/>
+          <p:nvPr/>
+        </p:nvSpPr>
+        <p:spPr>
+          <a:xfrm>
+            <a:off x="5837182" y="5663239"/>
+            <a:ext cx="6093372" cy="923330"/>
+          </a:xfrm>
+          <a:prstGeom prst="rect">
+            <a:avLst/>
+          </a:prstGeom>
+          <a:noFill/>
+        </p:spPr>
+        <p:txBody>
+          <a:bodyPr wrap="square">
+            <a:spAutoFit/>
+          </a:bodyPr>
+          <a:lstStyle/>
+          <a:p>
+            <a:r>
+              <a:rPr lang="en-US" b="1" sz="1400"/>
+              <a:t>Reference:</a:t>
+            </a:r>
+            <a:r>
+              <a:rPr lang="en-US" sz="1400"/>
+              <a:t> Bertólez-Martínez, Hooper &amp; Khatee Zathul (2026), arXiv:2609.20944 §IV</a:t>
+            </a:r>
+            <a:endParaRPr lang="en-US"/>
+          </a:p>
+        </p:txBody>
+      </p:sp>
+    </p:spTree>
+  </p:cSld>
+  <p:clrMapOvr>
+    <a:masterClrMapping/>
+  </p:clrMapOvr>
+</p:sld>
+</file>
+
+<file path=ppt/slides/slide25.xml><?xml version="1.0" encoding="utf-8"?>
+<p:sld xmlns:a="http://schemas.openxmlformats.org/drawingml/2006/main" xmlns:p="http://schemas.openxmlformats.org/presentationml/2006/main" xmlns:r="http://schemas.openxmlformats.org/officeDocument/2006/relationships">
+  <p:cSld>
+    <p:spTree>
+      <p:nvGrpSpPr>
+        <p:cNvPr id="1" name=""/>
+        <p:cNvGrpSpPr/>
+        <p:nvPr/>
+      </p:nvGrpSpPr>
+      <p:grpSpPr/>
+      <p:sp>
+        <p:nvSpPr>
+          <p:cNvPr id="2" name="Title 1"/>
+          <p:cNvSpPr>
+            <a:spLocks noGrp="1"/>
+          </p:cNvSpPr>
+          <p:nvPr>
+            <p:ph type="title"/>
+          </p:nvPr>
+        </p:nvSpPr>
+        <p:spPr/>
+        <p:txBody>
+          <a:bodyPr/>
+          <a:lstStyle/>
+          <a:p>
+            <a:r>
+              <a:rPr sz="3400"/>
+              <a:t>論文の結果①：Ursa Minor 1 個</a:t>
+            </a:r>
+          </a:p>
+        </p:txBody>
+      </p:sp>
+      <p:sp>
+        <p:nvSpPr>
+          <p:cNvPr id="3" name="Content Placeholder 2"/>
+          <p:cNvSpPr>
+            <a:spLocks noGrp="1"/>
+          </p:cNvSpPr>
+          <p:nvPr>
+            <p:ph idx="1"/>
+          </p:nvPr>
+        </p:nvSpPr>
+        <p:spPr>
+          <a:xfrm>
+            <a:off x="841248" y="1463040"/>
+            <a:ext cx="10515600" cy="4114800"/>
+          </a:xfrm>
+        </p:spPr>
+        <p:txBody>
+          <a:bodyPr/>
+          <a:lstStyle/>
+          <a:p>
+            <a:pPr/>
+            <a:r>
+              <a:rPr sz="2400"/>
+              <a:t>σ_L を 0.3 / 0.5 / 1.0 だけ大きくすると</a:t>
+            </a:r>
+          </a:p>
+          <a:p>
+            <a:pPr lvl="1"/>
+            <a:r>
+              <a:rPr sz="2000"/>
+              <a:t>上限が 1.5 / 2.5 / 11 倍ゆるくなる</a:t>
+            </a:r>
+          </a:p>
+          <a:p>
+            <a:pPr/>
+            <a:r>
+              <a:rPr sz="2400"/>
+              <a:t>本当の誤差 σ だけ大きく、σ_L は小さいままだと</a:t>
+            </a:r>
+          </a:p>
+          <a:p>
+            <a:pPr lvl="1"/>
+            <a:r>
+              <a:rPr sz="2000"/>
+              <a:t>本物を除外する割合 1.7% / 8.0% / 22%</a:t>
+            </a:r>
+          </a:p>
+          <a:p>
+            <a:pPr lvl="1"/>
+            <a:r>
+              <a:rPr sz="2000"/>
+              <a:t>σ_L を σ に合わせれば 5% 以下に戻る</a:t>
+            </a:r>
+          </a:p>
+          <a:p>
+            <a:pPr/>
+            <a:r>
+              <a:rPr sz="2400"/>
+              <a:t>形の間違い：球対称 NFW で解析 → 上限 2.4 倍厳しく</a:t>
+            </a:r>
+          </a:p>
+          <a:p>
+            <a:pPr lvl="1"/>
+            <a:r>
+              <a:rPr sz="2000"/>
+              <a:t>点として扱う → 1.4 倍厳しく</a:t>
+            </a:r>
+          </a:p>
+        </p:txBody>
+      </p:sp>
+      <p:sp>
+        <p:nvSpPr>
+          <p:cNvPr id="8" name="TextBox 7">
+            <a:extLst>
+              <a:ext uri="{FF2B5EF4-FFF2-40B4-BE49-F238E27FC236}">
+                <a16:creationId xmlns:a16="http://schemas.microsoft.com/office/drawing/2014/main" id="{F85CD606-E3CE-F314-B3EE-F3D7028115CB}"/>
+              </a:ext>
+            </a:extLst>
+          </p:cNvPr>
+          <p:cNvSpPr txBox="1"/>
+          <p:nvPr/>
+        </p:nvSpPr>
+        <p:spPr>
+          <a:xfrm>
+            <a:off x="5837182" y="5663239"/>
+            <a:ext cx="6093372" cy="923330"/>
+          </a:xfrm>
+          <a:prstGeom prst="rect">
+            <a:avLst/>
+          </a:prstGeom>
+          <a:noFill/>
+        </p:spPr>
+        <p:txBody>
+          <a:bodyPr wrap="square">
+            <a:spAutoFit/>
+          </a:bodyPr>
+          <a:lstStyle/>
+          <a:p>
+            <a:r>
+              <a:rPr lang="en-US" b="1" sz="1400"/>
+              <a:t>Reference:</a:t>
+            </a:r>
+            <a:r>
+              <a:rPr lang="en-US" sz="1400"/>
+              <a:t> Bertólez-Martínez, Hooper &amp; Khatee Zathul (2026), arXiv:2609.20944 §IV, Fig. 2–4</a:t>
+            </a:r>
+            <a:endParaRPr lang="en-US"/>
+          </a:p>
+        </p:txBody>
+      </p:sp>
+    </p:spTree>
+  </p:cSld>
+  <p:clrMapOvr>
+    <a:masterClrMapping/>
+  </p:clrMapOvr>
+</p:sld>
+</file>
+
+<file path=ppt/slides/slide26.xml><?xml version="1.0" encoding="utf-8"?>
+<p:sld xmlns:a="http://schemas.openxmlformats.org/drawingml/2006/main" xmlns:p="http://schemas.openxmlformats.org/presentationml/2006/main" xmlns:r="http://schemas.openxmlformats.org/officeDocument/2006/relationships">
+  <p:cSld>
+    <p:spTree>
+      <p:nvGrpSpPr>
+        <p:cNvPr id="1" name=""/>
+        <p:cNvGrpSpPr/>
+        <p:nvPr/>
+      </p:nvGrpSpPr>
+      <p:grpSpPr/>
+      <p:sp>
+        <p:nvSpPr>
+          <p:cNvPr id="2" name="Title 1"/>
+          <p:cNvSpPr>
+            <a:spLocks noGrp="1"/>
+          </p:cNvSpPr>
+          <p:nvPr>
+            <p:ph type="title"/>
+          </p:nvPr>
+        </p:nvSpPr>
+        <p:spPr/>
+        <p:txBody>
+          <a:bodyPr/>
+          <a:lstStyle/>
+          <a:p>
+            <a:r>
+              <a:rPr sz="3400"/>
+              <a:t>論文の結果②：27 個をまとめると</a:t>
+            </a:r>
+          </a:p>
+        </p:txBody>
+      </p:sp>
+      <p:sp>
+        <p:nvSpPr>
+          <p:cNvPr id="3" name="Content Placeholder 2"/>
+          <p:cNvSpPr>
+            <a:spLocks noGrp="1"/>
+          </p:cNvSpPr>
+          <p:nvPr>
+            <p:ph idx="1"/>
+          </p:nvPr>
+        </p:nvSpPr>
+        <p:spPr>
+          <a:xfrm>
+            <a:off x="841248" y="1463040"/>
+            <a:ext cx="10515600" cy="4114800"/>
+          </a:xfrm>
+        </p:spPr>
+        <p:txBody>
+          <a:bodyPr/>
+          <a:lstStyle/>
+          <a:p>
+            <a:pPr/>
+            <a:r>
+              <a:rPr sz="2200"/>
+              <a:t>σ_L を 0.3 / 0.5 / 1.0 → 上限 1.14 / 1.44 / 3.23 倍ゆるく</a:t>
+            </a:r>
+          </a:p>
+          <a:p>
+            <a:pPr/>
+            <a:r>
+              <a:rPr sz="2200"/>
+              <a:t>誤差を正しく入れても、本物を除外する割合 21%（5% のはず）</a:t>
+            </a:r>
+          </a:p>
+          <a:p>
+            <a:pPr lvl="1"/>
+            <a:r>
+              <a:rPr sz="1800"/>
+              <a:t>J の数が天体の数と一緒に増え、Wilks の定理の前提が崩れる</a:t>
+            </a:r>
+          </a:p>
+          <a:p>
+            <a:pPr/>
+            <a:r>
+              <a:rPr sz="2200"/>
+              <a:t>本当の誤差を 0.3 / 0.5 / 1.0 大きくすると 31% / 49% / 88%</a:t>
+            </a:r>
+          </a:p>
+          <a:p>
+            <a:pPr lvl="1"/>
+            <a:r>
+              <a:rPr sz="1800"/>
+              <a:t>σ_L を合わせても 23% / 28% / 38%</a:t>
+            </a:r>
+          </a:p>
+          <a:p>
+            <a:pPr/>
+            <a:r>
+              <a:rPr sz="2200"/>
+              <a:t>原因：J が上に振れた天体が、上限を決めてしまう</a:t>
+            </a:r>
+          </a:p>
+          <a:p>
+            <a:pPr/>
+            <a:r>
+              <a:rPr sz="2200"/>
+              <a:t>対策の一つ：何も無い領域で較正する</a:t>
+            </a:r>
+          </a:p>
+        </p:txBody>
+      </p:sp>
+      <p:sp>
+        <p:nvSpPr>
+          <p:cNvPr id="8" name="TextBox 7">
+            <a:extLst>
+              <a:ext uri="{FF2B5EF4-FFF2-40B4-BE49-F238E27FC236}">
+                <a16:creationId xmlns:a16="http://schemas.microsoft.com/office/drawing/2014/main" id="{F85CD606-E3CE-F314-B3EE-F3D7028115CB}"/>
+              </a:ext>
+            </a:extLst>
+          </p:cNvPr>
+          <p:cNvSpPr txBox="1"/>
+          <p:nvPr/>
+        </p:nvSpPr>
+        <p:spPr>
+          <a:xfrm>
+            <a:off x="5837182" y="5663239"/>
+            <a:ext cx="6093372" cy="923330"/>
+          </a:xfrm>
+          <a:prstGeom prst="rect">
+            <a:avLst/>
+          </a:prstGeom>
+          <a:noFill/>
+        </p:spPr>
+        <p:txBody>
+          <a:bodyPr wrap="square">
+            <a:spAutoFit/>
+          </a:bodyPr>
+          <a:lstStyle/>
+          <a:p>
+            <a:r>
+              <a:rPr lang="en-US" b="1" sz="1400"/>
+              <a:t>Reference:</a:t>
+            </a:r>
+            <a:r>
+              <a:rPr lang="en-US" sz="1400"/>
+              <a:t> Bertólez-Martínez, Hooper &amp; Khatee Zathul (2026), arXiv:2609.20944 §V, Fig. 5–7</a:t>
+            </a:r>
+            <a:endParaRPr lang="en-US"/>
+          </a:p>
+        </p:txBody>
+      </p:sp>
+    </p:spTree>
+  </p:cSld>
+  <p:clrMapOvr>
+    <a:masterClrMapping/>
+  </p:clrMapOvr>
+</p:sld>
+</file>
+
+<file path=ppt/slides/slide27.xml><?xml version="1.0" encoding="utf-8"?>
+<p:sld xmlns:a="http://schemas.openxmlformats.org/drawingml/2006/main" xmlns:p="http://schemas.openxmlformats.org/presentationml/2006/main" xmlns:r="http://schemas.openxmlformats.org/officeDocument/2006/relationships">
+  <p:cSld>
+    <p:spTree>
+      <p:nvGrpSpPr>
+        <p:cNvPr id="1" name=""/>
+        <p:cNvGrpSpPr/>
+        <p:nvPr/>
+      </p:nvGrpSpPr>
+      <p:grpSpPr/>
+      <p:sp>
+        <p:nvSpPr>
+          <p:cNvPr id="2" name="Title 1"/>
+          <p:cNvSpPr>
+            <a:spLocks noGrp="1"/>
+          </p:cNvSpPr>
+          <p:nvPr>
+            <p:ph type="title"/>
+          </p:nvPr>
+        </p:nvSpPr>
+        <p:spPr/>
+        <p:txBody>
+          <a:bodyPr/>
+          <a:lstStyle/>
+          <a:p>
+            <a:r>
+              <a:rPr sz="3400"/>
+              <a:t>論文のまとめ</a:t>
+            </a:r>
+          </a:p>
+        </p:txBody>
+      </p:sp>
+      <p:sp>
+        <p:nvSpPr>
+          <p:cNvPr id="3" name="Content Placeholder 2"/>
+          <p:cNvSpPr>
+            <a:spLocks noGrp="1"/>
+          </p:cNvSpPr>
+          <p:nvPr>
+            <p:ph idx="1"/>
+          </p:nvPr>
+        </p:nvSpPr>
+        <p:spPr>
+          <a:xfrm>
+            <a:off x="841248" y="1463040"/>
+            <a:ext cx="10515600" cy="4114800"/>
+          </a:xfrm>
+        </p:spPr>
+        <p:txBody>
+          <a:bodyPr/>
+          <a:lstStyle/>
+          <a:p>
+            <a:pPr/>
+            <a:r>
+              <a:rPr sz="2400"/>
+              <a:t>J の誤差や形を雑に扱うと、上限は厳しく出すぎ、本物の信号を除外しやすい</a:t>
+            </a:r>
+          </a:p>
+          <a:p>
+            <a:pPr/>
+            <a:r>
+              <a:rPr sz="2400"/>
+              <a:t>「銀河中心と矮小銀河が矛盾する」とは、まだ言えない</a:t>
+            </a:r>
+          </a:p>
+          <a:p>
+            <a:pPr/>
+            <a:r>
+              <a:rPr sz="2400"/>
+              <a:t>Δlog₁₀J ≈ 0.5 程度の誤差を見込むべき</a:t>
+            </a:r>
+          </a:p>
+        </p:txBody>
+      </p:sp>
+      <p:sp>
+        <p:nvSpPr>
+          <p:cNvPr id="8" name="TextBox 7">
+            <a:extLst>
+              <a:ext uri="{FF2B5EF4-FFF2-40B4-BE49-F238E27FC236}">
+                <a16:creationId xmlns:a16="http://schemas.microsoft.com/office/drawing/2014/main" id="{F85CD606-E3CE-F314-B3EE-F3D7028115CB}"/>
+              </a:ext>
+            </a:extLst>
+          </p:cNvPr>
+          <p:cNvSpPr txBox="1"/>
+          <p:nvPr/>
+        </p:nvSpPr>
+        <p:spPr>
+          <a:xfrm>
+            <a:off x="5837182" y="5663239"/>
+            <a:ext cx="6093372" cy="923330"/>
+          </a:xfrm>
+          <a:prstGeom prst="rect">
+            <a:avLst/>
+          </a:prstGeom>
+          <a:noFill/>
+        </p:spPr>
+        <p:txBody>
+          <a:bodyPr wrap="square">
+            <a:spAutoFit/>
+          </a:bodyPr>
+          <a:lstStyle/>
+          <a:p>
+            <a:r>
+              <a:rPr lang="en-US" b="1" sz="1400"/>
+              <a:t>Reference:</a:t>
+            </a:r>
+            <a:r>
+              <a:rPr lang="en-US" sz="1400"/>
+              <a:t> Bertólez-Martínez, Hooper &amp; Khatee Zathul (2026), arXiv:2609.20944 §VI</a:t>
+            </a:r>
+            <a:endParaRPr lang="en-US"/>
+          </a:p>
+        </p:txBody>
+      </p:sp>
+    </p:spTree>
+  </p:cSld>
+  <p:clrMapOvr>
+    <a:masterClrMapping/>
+  </p:clrMapOvr>
+</p:sld>
+</file>
+
+<file path=ppt/slides/slide28.xml><?xml version="1.0" encoding="utf-8"?>
+<p:sld xmlns:a="http://schemas.openxmlformats.org/drawingml/2006/main" xmlns:p="http://schemas.openxmlformats.org/presentationml/2006/main" xmlns:r="http://schemas.openxmlformats.org/officeDocument/2006/relationships">
+  <p:cSld>
+    <p:spTree>
+      <p:nvGrpSpPr>
+        <p:cNvPr id="1" name=""/>
+        <p:cNvGrpSpPr/>
+        <p:nvPr/>
+      </p:nvGrpSpPr>
+      <p:grpSpPr/>
+      <p:sp>
+        <p:nvSpPr>
+          <p:cNvPr id="2" name="Title 1"/>
+          <p:cNvSpPr>
+            <a:spLocks noGrp="1"/>
+          </p:cNvSpPr>
+          <p:nvPr>
+            <p:ph type="title"/>
+          </p:nvPr>
+        </p:nvSpPr>
+        <p:spPr/>
+        <p:txBody>
+          <a:bodyPr/>
+          <a:lstStyle/>
+          <a:p>
+            <a:r>
+              <a:rPr sz="3400"/>
+              <a:t>論文の考え方を、僕の結果に当てはめる</a:t>
+            </a:r>
+          </a:p>
+        </p:txBody>
+      </p:sp>
+      <p:sp>
+        <p:nvSpPr>
+          <p:cNvPr id="3" name="Content Placeholder 2"/>
+          <p:cNvSpPr>
+            <a:spLocks noGrp="1"/>
+          </p:cNvSpPr>
+          <p:nvPr>
+            <p:ph idx="1"/>
+          </p:nvPr>
+        </p:nvSpPr>
+        <p:spPr>
+          <a:xfrm>
+            <a:off x="841248" y="1463040"/>
+            <a:ext cx="10515600" cy="4114800"/>
+          </a:xfrm>
+        </p:spPr>
+        <p:txBody>
+          <a:bodyPr/>
+          <a:lstStyle/>
+          <a:p>
+            <a:pPr/>
+            <a:r>
+              <a:rPr sz="2400"/>
+              <a:t>これまで：J の誤差 = 0（J は推定値そのまま）</a:t>
+            </a:r>
+          </a:p>
+          <a:p>
+            <a:pPr/>
+            <a:r>
+              <a:rPr sz="2400"/>
+              <a:t>今回：各天体の本当の J = 推定値 × 10^δ_i</a:t>
+            </a:r>
+          </a:p>
+          <a:p>
+            <a:pPr lvl="1"/>
+            <a:r>
+              <a:rPr sz="2000"/>
+              <a:t>δ_i は平均 0、幅 0.5 の正規分布（天体ごとに独立）</a:t>
+            </a:r>
+          </a:p>
+          <a:p>
+            <a:pPr lvl="1"/>
+            <a:r>
+              <a:rPr sz="2000"/>
+              <a:t>→ J がおよそ 1/3 倍〜3 倍の範囲でずれる</a:t>
+            </a:r>
+          </a:p>
+          <a:p>
+            <a:pPr/>
+            <a:r>
+              <a:rPr sz="2400"/>
+              <a:t>予測 σ は J に比例 → pred_i × 10^δ_i</a:t>
+            </a:r>
+          </a:p>
+          <a:p>
+            <a:pPr/>
+            <a:r>
+              <a:rPr sz="2400"/>
+              <a:t>論文と同じく「J をずらした世界」をたくさん作る（20 万回）</a:t>
+            </a:r>
+          </a:p>
+        </p:txBody>
+      </p:sp>
+      <p:sp>
+        <p:nvSpPr>
+          <p:cNvPr id="8" name="TextBox 7">
+            <a:extLst>
+              <a:ext uri="{FF2B5EF4-FFF2-40B4-BE49-F238E27FC236}">
+                <a16:creationId xmlns:a16="http://schemas.microsoft.com/office/drawing/2014/main" id="{F85CD606-E3CE-F314-B3EE-F3D7028115CB}"/>
+              </a:ext>
+            </a:extLst>
+          </p:cNvPr>
+          <p:cNvSpPr txBox="1"/>
+          <p:nvPr/>
+        </p:nvSpPr>
+        <p:spPr>
+          <a:xfrm>
+            <a:off x="5837182" y="5663239"/>
+            <a:ext cx="6093372" cy="923330"/>
+          </a:xfrm>
+          <a:prstGeom prst="rect">
+            <a:avLst/>
+          </a:prstGeom>
+          <a:noFill/>
+        </p:spPr>
+        <p:txBody>
+          <a:bodyPr wrap="square">
+            <a:spAutoFit/>
+          </a:bodyPr>
+          <a:lstStyle/>
+          <a:p>
+            <a:r>
+              <a:rPr lang="en-US" b="1" sz="1400"/>
+              <a:t>Reference:</a:t>
+            </a:r>
+            <a:r>
+              <a:rPr lang="en-US" sz="1400"/>
+              <a:t> Bertólez-Martínez, Hooper &amp; Khatee Zathul (2026), arXiv:2609.20944 §IV</a:t>
+            </a:r>
+            <a:endParaRPr lang="en-US"/>
+          </a:p>
+        </p:txBody>
+      </p:sp>
+    </p:spTree>
+  </p:cSld>
+  <p:clrMapOvr>
+    <a:masterClrMapping/>
+  </p:clrMapOvr>
+</p:sld>
+</file>
+
+<file path=ppt/slides/slide29.xml><?xml version="1.0" encoding="utf-8"?>
+<p:sld xmlns:a="http://schemas.openxmlformats.org/drawingml/2006/main" xmlns:p="http://schemas.openxmlformats.org/presentationml/2006/main" xmlns:r="http://schemas.openxmlformats.org/officeDocument/2006/relationships">
+  <p:cSld>
+    <p:spTree>
+      <p:nvGrpSpPr>
+        <p:cNvPr id="1" name=""/>
+        <p:cNvGrpSpPr/>
+        <p:nvPr/>
+      </p:nvGrpSpPr>
+      <p:grpSpPr/>
+      <p:sp>
+        <p:nvSpPr>
+          <p:cNvPr id="2" name="Title 1"/>
+          <p:cNvSpPr>
+            <a:spLocks noGrp="1"/>
+          </p:cNvSpPr>
+          <p:nvPr>
+            <p:ph type="title"/>
+          </p:nvPr>
+        </p:nvSpPr>
+        <p:spPr/>
+        <p:txBody>
+          <a:bodyPr/>
+          <a:lstStyle/>
+          <a:p>
+            <a:r>
+              <a:rPr sz="3400"/>
+              <a:t>有意度の計算式のどこに誤差が入るか</a:t>
+            </a:r>
+          </a:p>
+        </p:txBody>
+      </p:sp>
+      <p:sp>
+        <p:nvSpPr>
+          <p:cNvPr id="3" name="Content Placeholder 2"/>
+          <p:cNvSpPr>
+            <a:spLocks noGrp="1"/>
+          </p:cNvSpPr>
+          <p:nvPr>
+            <p:ph idx="1"/>
+          </p:nvPr>
+        </p:nvSpPr>
+        <p:spPr>
+          <a:xfrm>
+            <a:off x="841248" y="1463040"/>
+            <a:ext cx="10515600" cy="4937760"/>
+          </a:xfrm>
+        </p:spPr>
+        <p:txBody>
+          <a:bodyPr/>
+          <a:lstStyle/>
+          <a:p>
+            <a:pPr/>
+            <a:r>
+              <a:rPr sz="2400"/>
+              <a:t>暗黒物質ありで期待される T</a:t>
+            </a:r>
+          </a:p>
+          <a:p>
+            <a:pPr lvl="1"/>
+            <a:r>
+              <a:rPr sz="2000"/>
+              <a:t>誤差なし：E[T] = Σ w_i pred_i / √Σ w_i² = 1.73</a:t>
+            </a:r>
+          </a:p>
+          <a:p>
+            <a:pPr lvl="1"/>
+            <a:r>
+              <a:rPr sz="2000"/>
+              <a:t>誤差あり：E[T] = Σ w_i pred_i 10^δ_i / √Σ w_i²  ← δ でばらつく</a:t>
+            </a:r>
+          </a:p>
+          <a:p>
+            <a:pPr/>
+            <a:r>
+              <a:rPr sz="2400"/>
+              <a:t>実測 T にも測定の揺れ s がある（s = 1、または空で測った 1.26）</a:t>
+            </a:r>
+          </a:p>
+          <a:p>
+            <a:pPr/>
+            <a:r>
+              <a:rPr sz="2400"/>
+              <a:t>暗黒物質ありで、実測 0.39 以下になる確率</a:t>
+            </a:r>
+          </a:p>
+          <a:p>
+            <a:pPr lvl="1"/>
+            <a:r>
+              <a:rPr sz="2000"/>
+              <a:t>p = （δ について平均）Φ( (0.39 − E[T]) / s )</a:t>
+            </a:r>
+          </a:p>
+          <a:p>
+            <a:pPr/>
+            <a:r>
+              <a:rPr sz="2400"/>
+              <a:t>p を σ に直したもの =「ずれ」</a:t>
+            </a:r>
+          </a:p>
+        </p:txBody>
+      </p:sp>
     </p:spTree>
   </p:cSld>
   <p:clrMapOvr>
@@ -6210,8 +9272,8 @@
           <a:lstStyle/>
           <a:p>
             <a:r>
-              <a:rPr sz="3800"/>
-              <a:t>起きた問題（3 つ）</a:t>
+              <a:rPr sz="3400"/>
+              <a:t>データ：光子を数える</a:t>
             </a:r>
           </a:p>
         </p:txBody>
@@ -6226,43 +9288,757 @@
             <p:ph idx="1"/>
           </p:nvPr>
         </p:nvSpPr>
-        <p:spPr/>
-        <p:txBody>
-          <a:bodyPr/>
-          <a:lstStyle/>
-          <a:p>
-            <a:pPr/>
-            <a:r>
-              <a:rPr sz="2800"/>
-              <a:t>(a) 何も無い空でも最大 4.5σ が出る</a:t>
+        <p:spPr>
+          <a:xfrm>
+            <a:off x="841248" y="1463040"/>
+            <a:ext cx="10515600" cy="4114800"/>
+          </a:xfrm>
+        </p:spPr>
+        <p:txBody>
+          <a:bodyPr/>
+          <a:lstStyle/>
+          <a:p>
+            <a:pPr/>
+            <a:r>
+              <a:rPr sz="2400"/>
+              <a:t>Fermi-LAT 衛星が集めたガンマ線の光子（約 15 年分）</a:t>
             </a:r>
           </a:p>
           <a:p>
             <a:pPr lvl="1"/>
             <a:r>
-              <a:rPr sz="2200"/>
-              <a:t>→ σ は過大評価になっている</a:t>
-            </a:r>
-          </a:p>
-          <a:p>
-            <a:pPr/>
-            <a:r>
-              <a:rPr sz="2800"/>
-              <a:t>(b) バブル領域を外すと 19.0σ → 5.0σ に落ちる</a:t>
+              <a:rPr sz="2000"/>
+              <a:t>2008-08 〜 2023-08、UltraClean（雑音の少ない事象）、1 GeV 以上</a:t>
+            </a:r>
+          </a:p>
+          <a:p>
+            <a:pPr/>
+            <a:r>
+              <a:rPr sz="2400"/>
+              <a:t>空の範囲：銀経・銀緯とも ±60°（銀河面 |b| &lt; 10° は除く）</a:t>
+            </a:r>
+          </a:p>
+          <a:p>
+            <a:pPr/>
+            <a:r>
+              <a:rPr sz="2400"/>
+              <a:t>エネルギーを 13 個のビンに分ける（1.5 〜 814 GeV）</a:t>
             </a:r>
           </a:p>
           <a:p>
             <a:pPr lvl="1"/>
             <a:r>
-              <a:rPr sz="2200"/>
-              <a:t>→ バブルの汚染を疑った</a:t>
-            </a:r>
-          </a:p>
-          <a:p>
-            <a:pPr/>
-            <a:r>
-              <a:rPr sz="2800"/>
-              <a:t>(c) 7/23 の 19.1σ が再現できなかった</a:t>
+              <a:rPr sz="2000"/>
+              <a:t>ビンごとに別々に解析する</a:t>
+            </a:r>
+          </a:p>
+          <a:p>
+            <a:pPr/>
+            <a:r>
+              <a:rPr sz="2400"/>
+              <a:t>各ビンで「空のどこに、光子が何個来たか」の地図を作る</a:t>
+            </a:r>
+          </a:p>
+        </p:txBody>
+      </p:sp>
+      <p:sp>
+        <p:nvSpPr>
+          <p:cNvPr id="8" name="TextBox 7">
+            <a:extLst>
+              <a:ext uri="{FF2B5EF4-FFF2-40B4-BE49-F238E27FC236}">
+                <a16:creationId xmlns:a16="http://schemas.microsoft.com/office/drawing/2014/main" id="{F85CD606-E3CE-F314-B3EE-F3D7028115CB}"/>
+              </a:ext>
+            </a:extLst>
+          </p:cNvPr>
+          <p:cNvSpPr txBox="1"/>
+          <p:nvPr/>
+        </p:nvSpPr>
+        <p:spPr>
+          <a:xfrm>
+            <a:off x="5837182" y="5663239"/>
+            <a:ext cx="6093372" cy="923330"/>
+          </a:xfrm>
+          <a:prstGeom prst="rect">
+            <a:avLst/>
+          </a:prstGeom>
+          <a:noFill/>
+        </p:spPr>
+        <p:txBody>
+          <a:bodyPr wrap="square">
+            <a:spAutoFit/>
+          </a:bodyPr>
+          <a:lstStyle/>
+          <a:p>
+            <a:r>
+              <a:rPr lang="en-US" b="1" sz="1400"/>
+              <a:t>Reference:</a:t>
+            </a:r>
+            <a:r>
+              <a:rPr lang="en-US" sz="1400"/>
+              <a:t> T. Totani (2025), arXiv:2507.07209 §2.1</a:t>
+            </a:r>
+            <a:endParaRPr lang="en-US"/>
+          </a:p>
+        </p:txBody>
+      </p:sp>
+    </p:spTree>
+  </p:cSld>
+  <p:clrMapOvr>
+    <a:masterClrMapping/>
+  </p:clrMapOvr>
+</p:sld>
+</file>
+
+<file path=ppt/slides/slide30.xml><?xml version="1.0" encoding="utf-8"?>
+<p:sld xmlns:a="http://schemas.openxmlformats.org/drawingml/2006/main" xmlns:p="http://schemas.openxmlformats.org/presentationml/2006/main" xmlns:r="http://schemas.openxmlformats.org/officeDocument/2006/relationships">
+  <p:cSld>
+    <p:spTree>
+      <p:nvGrpSpPr>
+        <p:cNvPr id="1" name=""/>
+        <p:cNvGrpSpPr/>
+        <p:nvPr/>
+      </p:nvGrpSpPr>
+      <p:grpSpPr/>
+      <p:sp>
+        <p:nvSpPr>
+          <p:cNvPr id="2" name="Title 1"/>
+          <p:cNvSpPr>
+            <a:spLocks noGrp="1"/>
+          </p:cNvSpPr>
+          <p:nvPr>
+            <p:ph type="title"/>
+          </p:nvPr>
+        </p:nvSpPr>
+        <p:spPr/>
+        <p:txBody>
+          <a:bodyPr/>
+          <a:lstStyle/>
+          <a:p>
+            <a:r>
+              <a:rPr sz="3400"/>
+              <a:t>結果：予測の幅と実測</a:t>
+            </a:r>
+          </a:p>
+        </p:txBody>
+      </p:sp>
+      <p:pic>
+        <p:nvPicPr>
+          <p:cNvPr id="3" name="Picture 2" descr="fig_dwarf_J_uncertainty.png"/>
+          <p:cNvPicPr>
+            <a:picLocks noChangeAspect="1"/>
+          </p:cNvPicPr>
+          <p:nvPr/>
+        </p:nvPicPr>
+        <p:blipFill>
+          <a:blip r:embed="rId2"/>
+          <a:stretch>
+            <a:fillRect/>
+          </a:stretch>
+        </p:blipFill>
+        <p:spPr>
+          <a:xfrm>
+            <a:off x="2194560" y="1234440"/>
+            <a:ext cx="6858000" cy="4114800"/>
+          </a:xfrm>
+          <a:prstGeom prst="rect">
+            <a:avLst/>
+          </a:prstGeom>
+        </p:spPr>
+      </p:pic>
+      <p:sp>
+        <p:nvSpPr>
+          <p:cNvPr id="4" name="TextBox 3"/>
+          <p:cNvSpPr txBox="1"/>
+          <p:nvPr/>
+        </p:nvSpPr>
+        <p:spPr>
+          <a:xfrm>
+            <a:off x="457200" y="5486400"/>
+            <a:ext cx="11247120" cy="457200"/>
+          </a:xfrm>
+          <a:prstGeom prst="rect">
+            <a:avLst/>
+          </a:prstGeom>
+          <a:noFill/>
+        </p:spPr>
+        <p:txBody>
+          <a:bodyPr wrap="square">
+            <a:spAutoFit/>
+          </a:bodyPr>
+          <a:lstStyle/>
+          <a:p>
+            <a:r>
+              <a:rPr sz="2000"/>
+              <a:t>期待 1.7σ → J の誤差で 1.3〜5.0σ に広がる。実測 0.4σ ± 1.26。ずれ 1.3σ</a:t>
+            </a:r>
+          </a:p>
+        </p:txBody>
+      </p:sp>
+    </p:spTree>
+  </p:cSld>
+  <p:clrMapOvr>
+    <a:masterClrMapping/>
+  </p:clrMapOvr>
+</p:sld>
+</file>
+
+<file path=ppt/slides/slide31.xml><?xml version="1.0" encoding="utf-8"?>
+<p:sld xmlns:a="http://schemas.openxmlformats.org/drawingml/2006/main" xmlns:p="http://schemas.openxmlformats.org/presentationml/2006/main" xmlns:r="http://schemas.openxmlformats.org/officeDocument/2006/relationships">
+  <p:cSld>
+    <p:spTree>
+      <p:nvGrpSpPr>
+        <p:cNvPr id="1" name=""/>
+        <p:cNvGrpSpPr/>
+        <p:nvPr/>
+      </p:nvGrpSpPr>
+      <p:grpSpPr/>
+      <p:sp>
+        <p:nvSpPr>
+          <p:cNvPr id="2" name="Title 1"/>
+          <p:cNvSpPr>
+            <a:spLocks noGrp="1"/>
+          </p:cNvSpPr>
+          <p:nvPr>
+            <p:ph type="title"/>
+          </p:nvPr>
+        </p:nvSpPr>
+        <p:spPr/>
+        <p:txBody>
+          <a:bodyPr/>
+          <a:lstStyle/>
+          <a:p>
+            <a:r>
+              <a:rPr sz="3400"/>
+              <a:t>結果の数字</a:t>
+            </a:r>
+          </a:p>
+        </p:txBody>
+      </p:sp>
+      <p:sp>
+        <p:nvSpPr>
+          <p:cNvPr id="3" name="Content Placeholder 2"/>
+          <p:cNvSpPr>
+            <a:spLocks noGrp="1"/>
+          </p:cNvSpPr>
+          <p:nvPr>
+            <p:ph idx="1"/>
+          </p:nvPr>
+        </p:nvSpPr>
+        <p:spPr>
+          <a:xfrm>
+            <a:off x="841248" y="1463040"/>
+            <a:ext cx="10515600" cy="4937760"/>
+          </a:xfrm>
+        </p:spPr>
+        <p:txBody>
+          <a:bodyPr/>
+          <a:lstStyle/>
+          <a:p>
+            <a:pPr/>
+            <a:r>
+              <a:rPr sz="2400"/>
+              <a:t>局所密度 0.42 GeV/cm³ の場合（43 天体、20 GeV）</a:t>
+            </a:r>
+          </a:p>
+          <a:p>
+            <a:pPr lvl="1"/>
+            <a:r>
+              <a:rPr sz="2000"/>
+              <a:t>J の誤差なし：期待 1.73、ずれ 1.3σ（s = 1.26 なら 1.1σ）</a:t>
+            </a:r>
+          </a:p>
+          <a:p>
+            <a:pPr lvl="1"/>
+            <a:r>
+              <a:rPr sz="2000"/>
+              <a:t>J の誤差あり：期待 2.4（68% で 1.3–5.0）、ずれ 1.5σ（1.3σ）</a:t>
+            </a:r>
+          </a:p>
+          <a:p>
+            <a:pPr/>
+            <a:r>
+              <a:rPr sz="2400"/>
+              <a:t>天の川側の局所密度を 0.3〜0.6 GeV/cm³ で動かしても</a:t>
+            </a:r>
+          </a:p>
+          <a:p>
+            <a:pPr lvl="1"/>
+            <a:r>
+              <a:rPr sz="2000"/>
+              <a:t>ずれは較正後 2.4σ 以下</a:t>
+            </a:r>
+          </a:p>
+          <a:p>
+            <a:pPr/>
+            <a:r>
+              <a:rPr sz="2400"/>
+              <a:t>→ 暗黒物質と矛盾はしないが、確認もできない（判定できない）</a:t>
+            </a:r>
+          </a:p>
+        </p:txBody>
+      </p:sp>
+    </p:spTree>
+  </p:cSld>
+  <p:clrMapOvr>
+    <a:masterClrMapping/>
+  </p:clrMapOvr>
+</p:sld>
+</file>
+
+<file path=ppt/slides/slide32.xml><?xml version="1.0" encoding="utf-8"?>
+<p:sld xmlns:a="http://schemas.openxmlformats.org/drawingml/2006/main" xmlns:p="http://schemas.openxmlformats.org/presentationml/2006/main" xmlns:r="http://schemas.openxmlformats.org/officeDocument/2006/relationships">
+  <p:cSld>
+    <p:spTree>
+      <p:nvGrpSpPr>
+        <p:cNvPr id="1" name=""/>
+        <p:cNvGrpSpPr/>
+        <p:nvPr/>
+      </p:nvGrpSpPr>
+      <p:grpSpPr/>
+      <p:sp>
+        <p:nvSpPr>
+          <p:cNvPr id="2" name="Title 1"/>
+          <p:cNvSpPr>
+            <a:spLocks noGrp="1"/>
+          </p:cNvSpPr>
+          <p:nvPr>
+            <p:ph type="title"/>
+          </p:nvPr>
+        </p:nvSpPr>
+        <p:spPr/>
+        <p:txBody>
+          <a:bodyPr/>
+          <a:lstStyle/>
+          <a:p>
+            <a:r>
+              <a:rPr sz="3400"/>
+              <a:t>2 つの数字の違い：15σ と 1.3σ</a:t>
+            </a:r>
+          </a:p>
+        </p:txBody>
+      </p:sp>
+      <p:sp>
+        <p:nvSpPr>
+          <p:cNvPr id="3" name="Content Placeholder 2"/>
+          <p:cNvSpPr>
+            <a:spLocks noGrp="1"/>
+          </p:cNvSpPr>
+          <p:nvPr>
+            <p:ph idx="1"/>
+          </p:nvPr>
+        </p:nvSpPr>
+        <p:spPr>
+          <a:xfrm>
+            <a:off x="841248" y="1463040"/>
+            <a:ext cx="10515600" cy="4937760"/>
+          </a:xfrm>
+        </p:spPr>
+        <p:txBody>
+          <a:bodyPr/>
+          <a:lstStyle/>
+          <a:p>
+            <a:pPr/>
+            <a:r>
+              <a:rPr sz="2400"/>
+              <a:t>約 15σ：天の川のハロー超過の強さ</a:t>
+            </a:r>
+          </a:p>
+          <a:p>
+            <a:pPr lvl="1"/>
+            <a:r>
+              <a:rPr sz="2000"/>
+              <a:t>19.0σ を、何も無い空でのばらつき 1.26 で割ったもの</a:t>
+            </a:r>
+          </a:p>
+          <a:p>
+            <a:pPr lvl="1"/>
+            <a:r>
+              <a:rPr sz="2000"/>
+              <a:t>「天の川に、背景では説明しにくい何かがある」</a:t>
+            </a:r>
+          </a:p>
+          <a:p>
+            <a:pPr/>
+            <a:r>
+              <a:rPr sz="2400"/>
+              <a:t>1.3σ：矮小銀河での「予測と実測のずれ」</a:t>
+            </a:r>
+          </a:p>
+          <a:p>
+            <a:pPr lvl="1"/>
+            <a:r>
+              <a:rPr sz="2000"/>
+              <a:t>「天の川の超過が暗黒物質だとしても、矮小銀河の結果と矛盾しない」</a:t>
+            </a:r>
+          </a:p>
+          <a:p>
+            <a:pPr/>
+            <a:r>
+              <a:rPr sz="2400"/>
+              <a:t>別のものを測った、別の数字</a:t>
+            </a:r>
+          </a:p>
+        </p:txBody>
+      </p:sp>
+    </p:spTree>
+  </p:cSld>
+  <p:clrMapOvr>
+    <a:masterClrMapping/>
+  </p:clrMapOvr>
+</p:sld>
+</file>
+
+<file path=ppt/slides/slide33.xml><?xml version="1.0" encoding="utf-8"?>
+<p:sld xmlns:a="http://schemas.openxmlformats.org/drawingml/2006/main" xmlns:p="http://schemas.openxmlformats.org/presentationml/2006/main" xmlns:r="http://schemas.openxmlformats.org/officeDocument/2006/relationships">
+  <p:cSld>
+    <p:spTree>
+      <p:nvGrpSpPr>
+        <p:cNvPr id="1" name=""/>
+        <p:cNvGrpSpPr/>
+        <p:nvPr/>
+      </p:nvGrpSpPr>
+      <p:grpSpPr/>
+      <p:sp>
+        <p:nvSpPr>
+          <p:cNvPr id="2" name="Title 1"/>
+          <p:cNvSpPr>
+            <a:spLocks noGrp="1"/>
+          </p:cNvSpPr>
+          <p:nvPr>
+            <p:ph type="title"/>
+          </p:nvPr>
+        </p:nvSpPr>
+        <p:spPr/>
+        <p:txBody>
+          <a:bodyPr/>
+          <a:lstStyle/>
+          <a:p>
+            <a:r>
+              <a:rPr sz="3400"/>
+              <a:t>結論</a:t>
+            </a:r>
+          </a:p>
+        </p:txBody>
+      </p:sp>
+      <p:sp>
+        <p:nvSpPr>
+          <p:cNvPr id="3" name="Content Placeholder 2"/>
+          <p:cNvSpPr>
+            <a:spLocks noGrp="1"/>
+          </p:cNvSpPr>
+          <p:nvPr>
+            <p:ph idx="1"/>
+          </p:nvPr>
+        </p:nvSpPr>
+        <p:spPr>
+          <a:xfrm>
+            <a:off x="841248" y="1463040"/>
+            <a:ext cx="10515600" cy="4937760"/>
+          </a:xfrm>
+        </p:spPr>
+        <p:txBody>
+          <a:bodyPr/>
+          <a:lstStyle/>
+          <a:p>
+            <a:pPr/>
+            <a:r>
+              <a:rPr sz="2400"/>
+              <a:t>Totani の超過を再現（名目 19.0σ、較正後 約 15σ）</a:t>
+            </a:r>
+          </a:p>
+          <a:p>
+            <a:pPr/>
+            <a:r>
+              <a:rPr sz="2400"/>
+              <a:t>ICS の明るさ・バブル・計算の近似の間違いでは説明できない</a:t>
+            </a:r>
+          </a:p>
+          <a:p>
+            <a:pPr lvl="1"/>
+            <a:r>
+              <a:rPr sz="2000"/>
+              <a:t>暗黒物質の証拠ではない（ICS の空間の形は未確認）</a:t>
+            </a:r>
+          </a:p>
+          <a:p>
+            <a:pPr/>
+            <a:r>
+              <a:rPr sz="2400"/>
+              <a:t>矮小銀河では非検出</a:t>
+            </a:r>
+          </a:p>
+          <a:p>
+            <a:pPr lvl="1"/>
+            <a:r>
+              <a:rPr sz="2000"/>
+              <a:t>J の誤差（約 3 倍）を入れると、予測とのずれは 1.3σ → 判定できない</a:t>
+            </a:r>
+          </a:p>
+        </p:txBody>
+      </p:sp>
+    </p:spTree>
+  </p:cSld>
+  <p:clrMapOvr>
+    <a:masterClrMapping/>
+  </p:clrMapOvr>
+</p:sld>
+</file>
+
+<file path=ppt/slides/slide34.xml><?xml version="1.0" encoding="utf-8"?>
+<p:sld xmlns:a="http://schemas.openxmlformats.org/drawingml/2006/main" xmlns:p="http://schemas.openxmlformats.org/presentationml/2006/main" xmlns:r="http://schemas.openxmlformats.org/officeDocument/2006/relationships">
+  <p:cSld>
+    <p:spTree>
+      <p:nvGrpSpPr>
+        <p:cNvPr id="1" name=""/>
+        <p:cNvGrpSpPr/>
+        <p:nvPr/>
+      </p:nvGrpSpPr>
+      <p:grpSpPr/>
+      <p:sp>
+        <p:nvSpPr>
+          <p:cNvPr id="2" name="Title 1"/>
+          <p:cNvSpPr>
+            <a:spLocks noGrp="1"/>
+          </p:cNvSpPr>
+          <p:nvPr>
+            <p:ph type="title"/>
+          </p:nvPr>
+        </p:nvSpPr>
+        <p:spPr/>
+        <p:txBody>
+          <a:bodyPr/>
+          <a:lstStyle/>
+          <a:p>
+            <a:r>
+              <a:rPr sz="3400"/>
+              <a:t>統計の視点から：この研究に足りなかったもの</a:t>
+            </a:r>
+          </a:p>
+        </p:txBody>
+      </p:sp>
+      <p:sp>
+        <p:nvSpPr>
+          <p:cNvPr id="3" name="Content Placeholder 2"/>
+          <p:cNvSpPr>
+            <a:spLocks noGrp="1"/>
+          </p:cNvSpPr>
+          <p:nvPr>
+            <p:ph idx="1"/>
+          </p:nvPr>
+        </p:nvSpPr>
+        <p:spPr>
+          <a:xfrm>
+            <a:off x="841248" y="1463040"/>
+            <a:ext cx="10515600" cy="4114800"/>
+          </a:xfrm>
+        </p:spPr>
+        <p:txBody>
+          <a:bodyPr/>
+          <a:lstStyle/>
+          <a:p>
+            <a:pPr/>
+            <a:r>
+              <a:rPr sz="2400"/>
+              <a:t>σ が 1.26 倍に膨らんだ原因</a:t>
+            </a:r>
+          </a:p>
+          <a:p>
+            <a:pPr lvl="1"/>
+            <a:r>
+              <a:rPr sz="2000"/>
+              <a:t>尤度は「型紙（GALPROP）は完璧、誤差は光子の数のばらつきだけ」と仮定</a:t>
+            </a:r>
+          </a:p>
+          <a:p>
+            <a:pPr lvl="1"/>
+            <a:r>
+              <a:rPr sz="2000"/>
+              <a:t>型紙そのものの誤差が、統計モデルに入っていない</a:t>
+            </a:r>
+          </a:p>
+          <a:p>
+            <a:pPr/>
+            <a:r>
+              <a:rPr sz="2400"/>
+              <a:t>データ同化：シミュレーションの誤差と観測の誤差を分けて、統計モデルに入れる枠組み</a:t>
+            </a:r>
+          </a:p>
+          <a:p>
+            <a:pPr/>
+            <a:r>
+              <a:rPr sz="2400"/>
+              <a:t>J をずらして何度も計算したのも、分布をたくさんのサンプルで表すという同じ発想</a:t>
+            </a:r>
+          </a:p>
+          <a:p>
+            <a:pPr lvl="1"/>
+            <a:r>
+              <a:rPr sz="2000"/>
+              <a:t>（アンサンブル・粒子フィルタ）</a:t>
+            </a:r>
+          </a:p>
+        </p:txBody>
+      </p:sp>
+      <p:sp>
+        <p:nvSpPr>
+          <p:cNvPr id="8" name="TextBox 7">
+            <a:extLst>
+              <a:ext uri="{FF2B5EF4-FFF2-40B4-BE49-F238E27FC236}">
+                <a16:creationId xmlns:a16="http://schemas.microsoft.com/office/drawing/2014/main" id="{F85CD606-E3CE-F314-B3EE-F3D7028115CB}"/>
+              </a:ext>
+            </a:extLst>
+          </p:cNvPr>
+          <p:cNvSpPr txBox="1"/>
+          <p:nvPr/>
+        </p:nvSpPr>
+        <p:spPr>
+          <a:xfrm>
+            <a:off x="5837182" y="5663239"/>
+            <a:ext cx="6093372" cy="923330"/>
+          </a:xfrm>
+          <a:prstGeom prst="rect">
+            <a:avLst/>
+          </a:prstGeom>
+          <a:noFill/>
+        </p:spPr>
+        <p:txBody>
+          <a:bodyPr wrap="square">
+            <a:spAutoFit/>
+          </a:bodyPr>
+          <a:lstStyle/>
+          <a:p>
+            <a:r>
+              <a:rPr lang="en-US" b="1" sz="1400"/>
+              <a:t>Reference:</a:t>
+            </a:r>
+            <a:r>
+              <a:rPr lang="en-US" sz="1400"/>
+              <a:t> 中村和幸 (2017), 数理解析研究所講究録 2057, 59–66</a:t>
+            </a:r>
+            <a:endParaRPr lang="en-US"/>
+          </a:p>
+        </p:txBody>
+      </p:sp>
+    </p:spTree>
+  </p:cSld>
+  <p:clrMapOvr>
+    <a:masterClrMapping/>
+  </p:clrMapOvr>
+</p:sld>
+</file>
+
+<file path=ppt/slides/slide35.xml><?xml version="1.0" encoding="utf-8"?>
+<p:sld xmlns:a="http://schemas.openxmlformats.org/drawingml/2006/main" xmlns:p="http://schemas.openxmlformats.org/presentationml/2006/main" xmlns:r="http://schemas.openxmlformats.org/officeDocument/2006/relationships">
+  <p:cSld>
+    <p:spTree>
+      <p:nvGrpSpPr>
+        <p:cNvPr id="1" name=""/>
+        <p:cNvGrpSpPr/>
+        <p:nvPr/>
+      </p:nvGrpSpPr>
+      <p:grpSpPr/>
+      <p:sp>
+        <p:nvSpPr>
+          <p:cNvPr id="2" name="Title 1"/>
+          <p:cNvSpPr>
+            <a:spLocks noGrp="1"/>
+          </p:cNvSpPr>
+          <p:nvPr>
+            <p:ph type="title"/>
+          </p:nvPr>
+        </p:nvSpPr>
+        <p:spPr/>
+        <p:txBody>
+          <a:bodyPr/>
+          <a:lstStyle/>
+          <a:p>
+            <a:r>
+              <a:rPr sz="3400"/>
+              <a:t>参考文献</a:t>
+            </a:r>
+          </a:p>
+        </p:txBody>
+      </p:sp>
+      <p:sp>
+        <p:nvSpPr>
+          <p:cNvPr id="3" name="Content Placeholder 2"/>
+          <p:cNvSpPr>
+            <a:spLocks noGrp="1"/>
+          </p:cNvSpPr>
+          <p:nvPr>
+            <p:ph idx="1"/>
+          </p:nvPr>
+        </p:nvSpPr>
+        <p:spPr>
+          <a:xfrm>
+            <a:off x="841248" y="1463040"/>
+            <a:ext cx="10515600" cy="4937760"/>
+          </a:xfrm>
+        </p:spPr>
+        <p:txBody>
+          <a:bodyPr/>
+          <a:lstStyle/>
+          <a:p>
+            <a:pPr/>
+            <a:r>
+              <a:rPr sz="1800"/>
+              <a:t>T. Totani (2025), arXiv:2507.07209</a:t>
+            </a:r>
+          </a:p>
+          <a:p>
+            <a:pPr/>
+            <a:r>
+              <a:rPr sz="1800"/>
+              <a:t>Bertólez-Martínez, Hooper &amp; Khatee Zathul (2026), arXiv:2609.20944</a:t>
+            </a:r>
+          </a:p>
+          <a:p>
+            <a:pPr/>
+            <a:r>
+              <a:rPr sz="1800"/>
+              <a:t>S. S. Wilks (1938), Ann. Math. Stat. 9, 60</a:t>
+            </a:r>
+          </a:p>
+          <a:p>
+            <a:pPr/>
+            <a:r>
+              <a:rPr sz="1800"/>
+              <a:t>D. Foreman-Mackey et al. (2013), PASP 125, 306</a:t>
+            </a:r>
+          </a:p>
+          <a:p>
+            <a:pPr/>
+            <a:r>
+              <a:rPr sz="1800"/>
+              <a:t>I. V. Moskalenko &amp; A. W. Strong (2000), ApJ 528, 357</a:t>
+            </a:r>
+          </a:p>
+          <a:p>
+            <a:pPr/>
+            <a:r>
+              <a:rPr sz="1800"/>
+              <a:t>B. Efron &amp; R. J. Tibshirani (1993), An Introduction to the Bootstrap</a:t>
+            </a:r>
+          </a:p>
+          <a:p>
+            <a:pPr/>
+            <a:r>
+              <a:rPr sz="1800"/>
+              <a:t>A. B. Pace (2025), Open J. Astrophys. 8, 142</a:t>
+            </a:r>
+          </a:p>
+          <a:p>
+            <a:pPr/>
+            <a:r>
+              <a:rPr sz="1800"/>
+              <a:t>A. B. Pace &amp; L. E. Strigari (2019), MNRAS 482, 3480</a:t>
+            </a:r>
+          </a:p>
+          <a:p>
+            <a:pPr/>
+            <a:r>
+              <a:rPr sz="1800"/>
+              <a:t>中村和幸 (2017), 数理解析研究所講究録 2057, 59–66</a:t>
             </a:r>
           </a:p>
         </p:txBody>
@@ -6301,8 +10077,8 @@
           <a:lstStyle/>
           <a:p>
             <a:r>
-              <a:rPr sz="3800"/>
-              <a:t>(b) の背景：ハローと ICS は見分けにくい</a:t>
+              <a:rPr sz="3400"/>
+              <a:t>手法①：テンプレートフィット</a:t>
             </a:r>
           </a:p>
         </p:txBody>
@@ -6319,7 +10095,8 @@
         </p:nvSpPr>
         <p:spPr>
           <a:xfrm>
-            <a:ext cx="4937760" cy="0"/>
+            <a:off x="841248" y="1463040"/>
+            <a:ext cx="10515600" cy="4114800"/>
           </a:xfrm>
         </p:spPr>
         <p:txBody>
@@ -6329,49 +10106,93 @@
             <a:pPr/>
             <a:r>
               <a:rPr sz="2400"/>
-              <a:t>ICS：宇宙線の電子が星の光をはね上げたガンマ線</a:t>
+              <a:t>空の光を「知っている光源の型紙の足し算」で表す</a:t>
+            </a:r>
+          </a:p>
+          <a:p>
+            <a:pPr lvl="1"/>
+            <a:r>
+              <a:rPr sz="2000"/>
+              <a:t>予測 = Σ（倍率 f_l）×（型紙 l）</a:t>
             </a:r>
           </a:p>
           <a:p>
             <a:pPr/>
             <a:r>
               <a:rPr sz="2400"/>
-              <a:t>空での形がハローとよく似ている（縮退）</a:t>
+              <a:t>型紙は 9 枚</a:t>
+            </a:r>
+          </a:p>
+          <a:p>
+            <a:pPr lvl="1"/>
+            <a:r>
+              <a:rPr sz="2000"/>
+              <a:t>等方背景、ガス（π⁰ 崩壊＋制動放射）、ICS、点源</a:t>
+            </a:r>
+          </a:p>
+          <a:p>
+            <a:pPr lvl="1"/>
+            <a:r>
+              <a:rPr sz="2000"/>
+              <a:t>Loop I（2 枚）、フェルミバブル（正・負）、ハロー</a:t>
             </a:r>
           </a:p>
           <a:p>
             <a:pPr/>
             <a:r>
               <a:rPr sz="2400"/>
-              <a:t>ハローを入れると、その分 ICS が暗くなる</a:t>
-            </a:r>
-          </a:p>
-        </p:txBody>
-      </p:sp>
-      <p:pic>
-        <p:nvPicPr>
-          <p:cNvPr id="4" name="Picture 3" descr="fig_ics_v20r.png"/>
-          <p:cNvPicPr>
-            <a:picLocks noChangeAspect="1"/>
-          </p:cNvPicPr>
+              <a:t>ガスと ICS の型紙は、宇宙線のシミュレーション GALPROP で計算</a:t>
+            </a:r>
+          </a:p>
+          <a:p>
+            <a:pPr/>
+            <a:r>
+              <a:rPr sz="2400"/>
+              <a:t>倍率 f_l をデータに合うように決める（ハローの f は負も許す）</a:t>
+            </a:r>
+          </a:p>
+        </p:txBody>
+      </p:sp>
+      <p:sp>
+        <p:nvSpPr>
+          <p:cNvPr id="8" name="TextBox 7">
+            <a:extLst>
+              <a:ext uri="{FF2B5EF4-FFF2-40B4-BE49-F238E27FC236}">
+                <a16:creationId xmlns:a16="http://schemas.microsoft.com/office/drawing/2014/main" id="{F85CD606-E3CE-F314-B3EE-F3D7028115CB}"/>
+              </a:ext>
+            </a:extLst>
+          </p:cNvPr>
+          <p:cNvSpPr txBox="1"/>
           <p:nvPr/>
-        </p:nvPicPr>
-        <p:blipFill>
-          <a:blip r:embed="rId3"/>
-          <a:stretch>
-            <a:fillRect/>
-          </a:stretch>
-        </p:blipFill>
+        </p:nvSpPr>
         <p:spPr>
           <a:xfrm>
-            <a:off x="5852160" y="1828800"/>
-            <a:ext cx="5852160" cy="4096512"/>
+            <a:off x="5837182" y="5663239"/>
+            <a:ext cx="6093372" cy="923330"/>
           </a:xfrm>
           <a:prstGeom prst="rect">
             <a:avLst/>
           </a:prstGeom>
+          <a:noFill/>
         </p:spPr>
-      </p:pic>
+        <p:txBody>
+          <a:bodyPr wrap="square">
+            <a:spAutoFit/>
+          </a:bodyPr>
+          <a:lstStyle/>
+          <a:p>
+            <a:r>
+              <a:rPr lang="en-US" b="1" sz="1400"/>
+              <a:t>Reference:</a:t>
+            </a:r>
+            <a:r>
+              <a:rPr lang="en-US" sz="1400"/>
+              <a:t> T. Totani (2025), arXiv:2507.07209 §2.3</a:t>
+            </a:r>
+            <a:endParaRPr lang="en-US"/>
+          </a:p>
+        </p:txBody>
+      </p:sp>
     </p:spTree>
   </p:cSld>
   <p:clrMapOvr>
@@ -6406,8 +10227,8 @@
           <a:lstStyle/>
           <a:p>
             <a:r>
-              <a:rPr sz="3800"/>
-              <a:t>分かったこと①：(b) は汚染ではない</a:t>
+              <a:rPr sz="3400"/>
+              <a:t>手法②：尤度（どれだけ合っているか）</a:t>
             </a:r>
           </a:p>
         </p:txBody>
@@ -6422,37 +10243,89 @@
             <p:ph idx="1"/>
           </p:nvPr>
         </p:nvSpPr>
-        <p:spPr/>
-        <p:txBody>
-          <a:bodyPr/>
-          <a:lstStyle/>
-          <a:p>
-            <a:pPr/>
-            <a:r>
-              <a:rPr sz="2800"/>
-              <a:t>ハローを見分ける手がかりの 54% がバブル領域にある</a:t>
+        <p:spPr>
+          <a:xfrm>
+            <a:off x="841248" y="1463040"/>
+            <a:ext cx="10515600" cy="4114800"/>
+          </a:xfrm>
+        </p:spPr>
+        <p:txBody>
+          <a:bodyPr/>
+          <a:lstStyle/>
+          <a:p>
+            <a:pPr/>
+            <a:r>
+              <a:rPr sz="2400"/>
+              <a:t>光子の数はポアソン分布でばらつく</a:t>
+            </a:r>
+          </a:p>
+          <a:p>
+            <a:pPr/>
+            <a:r>
+              <a:rPr sz="2400"/>
+              <a:t>尤度：ln L = Σ_i [ C_obs,i ln C_exp,i − C_exp,i ]</a:t>
             </a:r>
           </a:p>
           <a:p>
             <a:pPr lvl="1"/>
             <a:r>
-              <a:rPr sz="2200"/>
-              <a:t>手がかりの量だけで予測すると 6.4σ（実測 5.0σ）</a:t>
-            </a:r>
-          </a:p>
-          <a:p>
-            <a:pPr/>
-            <a:r>
-              <a:rPr sz="2800"/>
-              <a:t>同じ広さを横にずらして外すと 13〜16σ</a:t>
-            </a:r>
-          </a:p>
-          <a:p>
-            <a:pPr/>
-            <a:r>
-              <a:rPr sz="2800"/>
-              <a:t>バブルの内と外で、ハローの明るさに意味のある差は無い</a:t>
-            </a:r>
+              <a:rPr sz="2000"/>
+              <a:t>C_obs：観測した光子数、C_exp：予測した光子数</a:t>
+            </a:r>
+          </a:p>
+          <a:p>
+            <a:pPr lvl="1"/>
+            <a:r>
+              <a:rPr sz="2000"/>
+              <a:t>i：10° × 10° のセル（空をマス目に分ける）</a:t>
+            </a:r>
+          </a:p>
+          <a:p>
+            <a:pPr/>
+            <a:r>
+              <a:rPr sz="2400"/>
+              <a:t>ln L が最大になる倍率 f を探す（最尤推定）</a:t>
+            </a:r>
+          </a:p>
+        </p:txBody>
+      </p:sp>
+      <p:sp>
+        <p:nvSpPr>
+          <p:cNvPr id="8" name="TextBox 7">
+            <a:extLst>
+              <a:ext uri="{FF2B5EF4-FFF2-40B4-BE49-F238E27FC236}">
+                <a16:creationId xmlns:a16="http://schemas.microsoft.com/office/drawing/2014/main" id="{F85CD606-E3CE-F314-B3EE-F3D7028115CB}"/>
+              </a:ext>
+            </a:extLst>
+          </p:cNvPr>
+          <p:cNvSpPr txBox="1"/>
+          <p:nvPr/>
+        </p:nvSpPr>
+        <p:spPr>
+          <a:xfrm>
+            <a:off x="5837182" y="5663239"/>
+            <a:ext cx="6093372" cy="923330"/>
+          </a:xfrm>
+          <a:prstGeom prst="rect">
+            <a:avLst/>
+          </a:prstGeom>
+          <a:noFill/>
+        </p:spPr>
+        <p:txBody>
+          <a:bodyPr wrap="square">
+            <a:spAutoFit/>
+          </a:bodyPr>
+          <a:lstStyle/>
+          <a:p>
+            <a:r>
+              <a:rPr lang="en-US" b="1" sz="1400"/>
+              <a:t>Reference:</a:t>
+            </a:r>
+            <a:r>
+              <a:rPr lang="en-US" sz="1400"/>
+              <a:t> T. Totani (2025), arXiv:2507.07209 式 (2.1)</a:t>
+            </a:r>
+            <a:endParaRPr lang="en-US"/>
           </a:p>
         </p:txBody>
       </p:sp>
@@ -6490,8 +10363,8 @@
           <a:lstStyle/>
           <a:p>
             <a:r>
-              <a:rPr sz="3800"/>
-              <a:t>分かったこと②：ICS が犯人とは言いにくい</a:t>
+              <a:rPr sz="3400"/>
+              <a:t>手法③：有意度 σ の出し方</a:t>
             </a:r>
           </a:p>
         </p:txBody>
@@ -6506,37 +10379,96 @@
             <p:ph idx="1"/>
           </p:nvPr>
         </p:nvSpPr>
-        <p:spPr/>
-        <p:txBody>
-          <a:bodyPr/>
-          <a:lstStyle/>
-          <a:p>
-            <a:pPr/>
-            <a:r>
-              <a:rPr sz="2800"/>
-              <a:t>ICS が犯人なら、銀河中心寄りで約 2.3 倍の「形のずれ」が必要</a:t>
-            </a:r>
-          </a:p>
-          <a:p>
-            <a:pPr/>
-            <a:r>
-              <a:rPr sz="2800"/>
-              <a:t>ICS の計算の近似（等方近似）を直しても 1.1〜1.3 倍</a:t>
+        <p:spPr>
+          <a:xfrm>
+            <a:off x="841248" y="1463040"/>
+            <a:ext cx="10515600" cy="4114800"/>
+          </a:xfrm>
+        </p:spPr>
+        <p:txBody>
+          <a:bodyPr/>
+          <a:lstStyle/>
+          <a:p>
+            <a:pPr/>
+            <a:r>
+              <a:rPr sz="2400"/>
+              <a:t>ハロー「あり」と「なし」の 2 通りで当てはめる</a:t>
+            </a:r>
+          </a:p>
+          <a:p>
+            <a:pPr/>
+            <a:r>
+              <a:rPr sz="2400"/>
+              <a:t>差 Δln L = ln L(あり) − ln L(なし)</a:t>
+            </a:r>
+          </a:p>
+          <a:p>
+            <a:pPr/>
+            <a:r>
+              <a:rPr sz="2400"/>
+              <a:t>有意度 σ = √( 2 Δln L )</a:t>
+            </a:r>
+          </a:p>
+          <a:p>
+            <a:pPr/>
+            <a:r>
+              <a:rPr sz="2400"/>
+              <a:t>根拠：Wilks の定理</a:t>
             </a:r>
           </a:p>
           <a:p>
             <a:pPr lvl="1"/>
             <a:r>
-              <a:rPr sz="2200"/>
-              <a:t>しかも外側のほうが明るくなる → 届かない</a:t>
-            </a:r>
-          </a:p>
-          <a:p>
-            <a:pPr/>
-            <a:r>
-              <a:rPr sz="2800"/>
-              <a:t>ICS を 3 種類に分けて自由にしても、約 1σ しか下がらない</a:t>
-            </a:r>
+              <a:rPr sz="2000"/>
+              <a:t>データが十分多いと、2Δln L は自由度 1 の χ² 分布に従う</a:t>
+            </a:r>
+          </a:p>
+          <a:p>
+            <a:pPr/>
+            <a:r>
+              <a:rPr sz="2400"/>
+              <a:t>→ この定理が本当に成り立つかが、後で問題になる</a:t>
+            </a:r>
+          </a:p>
+        </p:txBody>
+      </p:sp>
+      <p:sp>
+        <p:nvSpPr>
+          <p:cNvPr id="8" name="TextBox 7">
+            <a:extLst>
+              <a:ext uri="{FF2B5EF4-FFF2-40B4-BE49-F238E27FC236}">
+                <a16:creationId xmlns:a16="http://schemas.microsoft.com/office/drawing/2014/main" id="{F85CD606-E3CE-F314-B3EE-F3D7028115CB}"/>
+              </a:ext>
+            </a:extLst>
+          </p:cNvPr>
+          <p:cNvSpPr txBox="1"/>
+          <p:nvPr/>
+        </p:nvSpPr>
+        <p:spPr>
+          <a:xfrm>
+            <a:off x="5837182" y="5663239"/>
+            <a:ext cx="6093372" cy="923330"/>
+          </a:xfrm>
+          <a:prstGeom prst="rect">
+            <a:avLst/>
+          </a:prstGeom>
+          <a:noFill/>
+        </p:spPr>
+        <p:txBody>
+          <a:bodyPr wrap="square">
+            <a:spAutoFit/>
+          </a:bodyPr>
+          <a:lstStyle/>
+          <a:p>
+            <a:r>
+              <a:rPr lang="en-US" b="1" sz="1400"/>
+              <a:t>Reference:</a:t>
+            </a:r>
+            <a:r>
+              <a:rPr lang="en-US" sz="1400"/>
+              <a:t> S. S. Wilks (1938), Ann. Math. Stat. 9, 60</a:t>
+            </a:r>
+            <a:endParaRPr lang="en-US"/>
           </a:p>
         </p:txBody>
       </p:sp>
@@ -6574,8 +10506,8 @@
           <a:lstStyle/>
           <a:p>
             <a:r>
-              <a:rPr sz="3800"/>
-              <a:t>分かったこと③：(c) は記録の問題</a:t>
+              <a:rPr sz="3400"/>
+              <a:t>手法④：MCMC（誤差の見積もり）</a:t>
             </a:r>
           </a:p>
         </p:txBody>
@@ -6590,35 +10522,96 @@
             <p:ph idx="1"/>
           </p:nvPr>
         </p:nvSpPr>
-        <p:spPr/>
-        <p:txBody>
-          <a:bodyPr/>
-          <a:lstStyle/>
-          <a:p>
-            <a:pPr/>
-            <a:r>
-              <a:rPr sz="2800"/>
-              <a:t>7/23 の計算の直後にコードを直していたため、</a:t>
-            </a:r>
-            <a:br/>
-            <a:r>
-              <a:rPr sz="2800"/>
-              <a:t>当時の状態が残っていなかった</a:t>
-            </a:r>
-          </a:p>
-          <a:p>
-            <a:pPr/>
-            <a:r>
-              <a:rPr sz="2800"/>
-              <a:t>今のコードは、何度計算しても同じ答え</a:t>
-            </a:r>
-          </a:p>
-          <a:p>
-            <a:pPr/>
-            <a:r>
-              <a:rPr sz="2800"/>
-              <a:t>→ 主結果を 19.0σ（10/1 再計算、記録付き）に統一</a:t>
-            </a:r>
+        <p:spPr>
+          <a:xfrm>
+            <a:off x="841248" y="1463040"/>
+            <a:ext cx="10515600" cy="4114800"/>
+          </a:xfrm>
+        </p:spPr>
+        <p:txBody>
+          <a:bodyPr/>
+          <a:lstStyle/>
+          <a:p>
+            <a:pPr/>
+            <a:r>
+              <a:rPr sz="2400"/>
+              <a:t>最尤の 1 点だけでなく、倍率 f が「どれくらいの範囲にありうるか」を知りたい</a:t>
+            </a:r>
+          </a:p>
+          <a:p>
+            <a:pPr/>
+            <a:r>
+              <a:rPr sz="2400"/>
+              <a:t>MCMC：尤度に比例する確率で、パラメータの空間を歩き回る</a:t>
+            </a:r>
+          </a:p>
+          <a:p>
+            <a:pPr lvl="1"/>
+            <a:r>
+              <a:rPr sz="2000"/>
+              <a:t>歩いた跡の分布 = パラメータの事後分布 → 誤差棒</a:t>
+            </a:r>
+          </a:p>
+          <a:p>
+            <a:pPr/>
+            <a:r>
+              <a:rPr sz="2400"/>
+              <a:t>emcee を使用：32 本の歩行者、最初の 400 歩は捨てる</a:t>
+            </a:r>
+          </a:p>
+          <a:p>
+            <a:pPr lvl="1"/>
+            <a:r>
+              <a:rPr sz="2000"/>
+              <a:t>自己相関時間の 50 倍以上の長さがあるか確認</a:t>
+            </a:r>
+          </a:p>
+          <a:p>
+            <a:pPr/>
+            <a:r>
+              <a:rPr sz="2400"/>
+              <a:t>有意度 σ は Δln L から出すので、MCMC の有無で変わらない</a:t>
+            </a:r>
+          </a:p>
+        </p:txBody>
+      </p:sp>
+      <p:sp>
+        <p:nvSpPr>
+          <p:cNvPr id="8" name="TextBox 7">
+            <a:extLst>
+              <a:ext uri="{FF2B5EF4-FFF2-40B4-BE49-F238E27FC236}">
+                <a16:creationId xmlns:a16="http://schemas.microsoft.com/office/drawing/2014/main" id="{F85CD606-E3CE-F314-B3EE-F3D7028115CB}"/>
+              </a:ext>
+            </a:extLst>
+          </p:cNvPr>
+          <p:cNvSpPr txBox="1"/>
+          <p:nvPr/>
+        </p:nvSpPr>
+        <p:spPr>
+          <a:xfrm>
+            <a:off x="5837182" y="5663239"/>
+            <a:ext cx="6093372" cy="923330"/>
+          </a:xfrm>
+          <a:prstGeom prst="rect">
+            <a:avLst/>
+          </a:prstGeom>
+          <a:noFill/>
+        </p:spPr>
+        <p:txBody>
+          <a:bodyPr wrap="square">
+            <a:spAutoFit/>
+          </a:bodyPr>
+          <a:lstStyle/>
+          <a:p>
+            <a:r>
+              <a:rPr lang="en-US" b="1" sz="1400"/>
+              <a:t>Reference:</a:t>
+            </a:r>
+            <a:r>
+              <a:rPr lang="en-US" sz="1400"/>
+              <a:t> D. Foreman-Mackey et al. (2013), PASP 125, 306</a:t>
+            </a:r>
+            <a:endParaRPr lang="en-US"/>
           </a:p>
         </p:txBody>
       </p:sp>
@@ -6656,15 +10649,15 @@
           <a:lstStyle/>
           <a:p>
             <a:r>
-              <a:rPr sz="3800"/>
-              <a:t>分かったこと④：(a) どれくらい過大評価か</a:t>
+              <a:rPr sz="3400"/>
+              <a:t>結果：Totani の超過を再現</a:t>
             </a:r>
           </a:p>
         </p:txBody>
       </p:sp>
       <p:pic>
         <p:nvPicPr>
-          <p:cNvPr id="3" name="Picture 2" descr="fig_null_variance.png"/>
+          <p:cNvPr id="3" name="Picture 2" descr="fig_significance_v20r.png"/>
           <p:cNvPicPr>
             <a:picLocks noChangeAspect="1"/>
           </p:cNvPicPr>
@@ -6678,8 +10671,8 @@
         </p:blipFill>
         <p:spPr>
           <a:xfrm>
-            <a:off x="1280160" y="1325880"/>
-            <a:ext cx="7633252" cy="4389120"/>
+            <a:off x="2377440" y="1234440"/>
+            <a:ext cx="5334000" cy="4160520"/>
           </a:xfrm>
           <a:prstGeom prst="rect">
             <a:avLst/>
@@ -6694,8 +10687,8 @@
         </p:nvSpPr>
         <p:spPr>
           <a:xfrm>
-            <a:off x="548640" y="5806440"/>
-            <a:ext cx="11064240" cy="822960"/>
+            <a:off x="457200" y="5486400"/>
+            <a:ext cx="11247120" cy="457200"/>
           </a:xfrm>
           <a:prstGeom prst="rect">
             <a:avLst/>
@@ -6709,9 +10702,49 @@
           <a:lstStyle/>
           <a:p>
             <a:r>
-              <a:rPr sz="2200"/>
-              <a:t>ばらつきは 1 ではなく 1.26 → 19.0σ は較正すると約 15σ</a:t>
-            </a:r>
+              <a:rPr sz="2000"/>
+              <a:t>20.8 GeV で 19.0σ（Totani は 13–19σ）。山の位置も一致</a:t>
+            </a:r>
+          </a:p>
+        </p:txBody>
+      </p:sp>
+      <p:sp>
+        <p:nvSpPr>
+          <p:cNvPr id="8" name="TextBox 7">
+            <a:extLst>
+              <a:ext uri="{FF2B5EF4-FFF2-40B4-BE49-F238E27FC236}">
+                <a16:creationId xmlns:a16="http://schemas.microsoft.com/office/drawing/2014/main" id="{F85CD606-E3CE-F314-B3EE-F3D7028115CB}"/>
+              </a:ext>
+            </a:extLst>
+          </p:cNvPr>
+          <p:cNvSpPr txBox="1"/>
+          <p:nvPr/>
+        </p:nvSpPr>
+        <p:spPr>
+          <a:xfrm>
+            <a:off x="5837182" y="6035040"/>
+            <a:ext cx="6093372" cy="923330"/>
+          </a:xfrm>
+          <a:prstGeom prst="rect">
+            <a:avLst/>
+          </a:prstGeom>
+          <a:noFill/>
+        </p:spPr>
+        <p:txBody>
+          <a:bodyPr wrap="square">
+            <a:spAutoFit/>
+          </a:bodyPr>
+          <a:lstStyle/>
+          <a:p>
+            <a:r>
+              <a:rPr lang="en-US" b="1" sz="1400"/>
+              <a:t>Reference:</a:t>
+            </a:r>
+            <a:r>
+              <a:rPr lang="en-US" sz="1400"/>
+              <a:t> T. Totani (2025), arXiv:2507.07209 Fig. 9</a:t>
+            </a:r>
+            <a:endParaRPr lang="en-US"/>
           </a:p>
         </p:txBody>
       </p:sp>
@@ -6749,8 +10782,8 @@
           <a:lstStyle/>
           <a:p>
             <a:r>
-              <a:rPr sz="3800"/>
-              <a:t>ここまでのまとめ</a:t>
+              <a:rPr sz="3400"/>
+              <a:t>問題：ハローと ICS が見分けにくい（縮退）</a:t>
             </a:r>
           </a:p>
         </p:txBody>
@@ -6765,40 +10798,76 @@
             <p:ph idx="1"/>
           </p:nvPr>
         </p:nvSpPr>
-        <p:spPr/>
-        <p:txBody>
-          <a:bodyPr/>
-          <a:lstStyle/>
-          <a:p>
-            <a:pPr/>
-            <a:r>
-              <a:rPr sz="2800"/>
-              <a:t>Totani の 20 GeV 超過は再現できた（19.0σ）</a:t>
-            </a:r>
-          </a:p>
-          <a:p>
-            <a:pPr/>
-            <a:r>
-              <a:rPr sz="2800"/>
-              <a:t>「背景（ICS・バブル）の間違いでは説明できない」が増えた</a:t>
+        <p:spPr>
+          <a:xfrm>
+            <a:off x="841248" y="1463040"/>
+            <a:ext cx="5669280" cy="4937760"/>
+          </a:xfrm>
+        </p:spPr>
+        <p:txBody>
+          <a:bodyPr/>
+          <a:lstStyle/>
+          <a:p>
+            <a:pPr/>
+            <a:r>
+              <a:rPr sz="2200"/>
+              <a:t>ICS とハローは、空の上での形がよく似ている</a:t>
             </a:r>
           </a:p>
           <a:p>
             <a:pPr lvl="1"/>
             <a:r>
+              <a:rPr sz="1800"/>
+              <a:t>緯度 25° → 55° で暗くなる割合：ハロー 2.74 倍、ICS 2.75 倍</a:t>
+            </a:r>
+          </a:p>
+          <a:p>
+            <a:pPr/>
+            <a:r>
               <a:rPr sz="2200"/>
-              <a:t>バブルの汚染・計算の近似・ICS の形、の 3 つを否定</a:t>
-            </a:r>
-          </a:p>
-          <a:p>
-            <a:pPr/>
-            <a:r>
-              <a:rPr sz="2800"/>
-              <a:t>σ は較正すると約 15σ。暗黒物質の証拠とまでは言えない</a:t>
-            </a:r>
-          </a:p>
-        </p:txBody>
-      </p:sp>
+              <a:t>違いは「銀河中心の方向に集まっているか」だけ</a:t>
+            </a:r>
+          </a:p>
+          <a:p>
+            <a:pPr/>
+            <a:r>
+              <a:rPr sz="2200"/>
+              <a:t>ハローを入れると、その分 ICS が暗くなる</a:t>
+            </a:r>
+          </a:p>
+          <a:p>
+            <a:pPr lvl="1"/>
+            <a:r>
+              <a:rPr sz="1800"/>
+              <a:t>ハローの光の 8〜10 割は ICS から移ったもの</a:t>
+            </a:r>
+          </a:p>
+        </p:txBody>
+      </p:sp>
+      <p:pic>
+        <p:nvPicPr>
+          <p:cNvPr id="4" name="Picture 3" descr="fig_ics_norm_v20r.png"/>
+          <p:cNvPicPr>
+            <a:picLocks noChangeAspect="1"/>
+          </p:cNvPicPr>
+          <p:nvPr/>
+        </p:nvPicPr>
+        <p:blipFill>
+          <a:blip r:embed="rId3"/>
+          <a:stretch>
+            <a:fillRect/>
+          </a:stretch>
+        </p:blipFill>
+        <p:spPr>
+          <a:xfrm>
+            <a:off x="6309360" y="1737360"/>
+            <a:ext cx="5669280" cy="3968496"/>
+          </a:xfrm>
+          <a:prstGeom prst="rect">
+            <a:avLst/>
+          </a:prstGeom>
+        </p:spPr>
+      </p:pic>
     </p:spTree>
   </p:cSld>
   <p:clrMapOvr>

--- a/slides/2026-10-02_研究進捗報告.pptx
+++ b/slides/2026-10-02_研究進捗報告.pptx
@@ -807,7 +807,7 @@
           <a:lstStyle/>
           <a:p>
             <a:r>
-              <a:t>ばらつき = 0 からのずれの 2 乗平均の平方根。光子が十分あるビン 2–10 (2.6–169 GeV) の 207 個から計算。</a:t>
+              <a:t>何も無い空 23 か所は 10/2 に今のコードで計算し直した (値は 7 月と同じ 1.264)。ばらつき = 0 からのずれの 2 乗平均の平方根。光子が十分あるビン 2–10 (2.6–169 GeV) の 207 個から計算。</a:t>
             </a:r>
           </a:p>
           <a:p>
@@ -1297,6 +1297,11 @@
           </a:p>
           <a:p>
             <a:r>
+              <a:t>10/2 に今のコード (天の川の v20r と同じ版) で 79 か所すべてを計算し直した結果 (cloud_reports/2026-10-02_v20r_targets/)。7 月の結果との差は中央値 0.0002σ、最大 0.64σ。</a:t>
+            </a:r>
+          </a:p>
+          <a:p>
+            <a:r>
               <a:t>図は slides/figs/plot_dwarf_results.py で作った。</a:t>
             </a:r>
           </a:p>
@@ -1378,6 +1383,11 @@
           <a:p>
             <a:r>
               <a:t>ずれ = (1.73 − 0.39) ÷ 1 = 1.3σ。天の川側の局所密度 0.42 GeV/cm³ の場合。</a:t>
+            </a:r>
+          </a:p>
+          <a:p>
+            <a:r>
+              <a:t>天の川のハローの明るさは v20r (10/1 再計算) の値、各天体の有意度は 10/2 の再計算。v20 の値を使っても 1.73 と 0.39 は変わらない。</a:t>
             </a:r>
           </a:p>
           <a:p>

--- a/slides/2026-10-02_研究進捗報告.pptx
+++ b/slides/2026-10-02_研究進捗報告.pptx
@@ -4,42 +4,45 @@
   <p:sldMasterIdLst>
     <p:sldMasterId id="2147483648" r:id="rId1"/>
   </p:sldMasterIdLst>
+  <p:notesMasterIdLst>
+    <p:notesMasterId r:id="rId37"/>
+  </p:notesMasterIdLst>
   <p:sldIdLst>
     <p:sldId id="256" r:id="rId2"/>
-    <p:sldId id="257" r:id="rId5"/>
-    <p:sldId id="258" r:id="rId3"/>
-    <p:sldId id="259" r:id="rId10"/>
-    <p:sldId id="260" r:id="rId11"/>
-    <p:sldId id="261" r:id="rId12"/>
-    <p:sldId id="262" r:id="rId13"/>
-    <p:sldId id="263" r:id="rId14"/>
-    <p:sldId id="264" r:id="rId15"/>
-    <p:sldId id="265" r:id="rId16"/>
-    <p:sldId id="266" r:id="rId17"/>
-    <p:sldId id="267" r:id="rId18"/>
-    <p:sldId id="268" r:id="rId19"/>
-    <p:sldId id="269" r:id="rId20"/>
-    <p:sldId id="270" r:id="rId21"/>
-    <p:sldId id="271" r:id="rId22"/>
-    <p:sldId id="272" r:id="rId23"/>
-    <p:sldId id="273" r:id="rId24"/>
-    <p:sldId id="274" r:id="rId25"/>
-    <p:sldId id="275" r:id="rId26"/>
-    <p:sldId id="276" r:id="rId27"/>
-    <p:sldId id="277" r:id="rId28"/>
-    <p:sldId id="278" r:id="rId29"/>
-    <p:sldId id="279" r:id="rId30"/>
-    <p:sldId id="280" r:id="rId31"/>
-    <p:sldId id="281" r:id="rId32"/>
-    <p:sldId id="282" r:id="rId33"/>
-    <p:sldId id="283" r:id="rId34"/>
-    <p:sldId id="284" r:id="rId35"/>
-    <p:sldId id="285" r:id="rId36"/>
-    <p:sldId id="286" r:id="rId37"/>
-    <p:sldId id="287" r:id="rId38"/>
-    <p:sldId id="288" r:id="rId39"/>
-    <p:sldId id="289" r:id="rId40"/>
-    <p:sldId id="290" r:id="rId41"/>
+    <p:sldId id="257" r:id="rId3"/>
+    <p:sldId id="258" r:id="rId4"/>
+    <p:sldId id="259" r:id="rId5"/>
+    <p:sldId id="260" r:id="rId6"/>
+    <p:sldId id="261" r:id="rId7"/>
+    <p:sldId id="262" r:id="rId8"/>
+    <p:sldId id="263" r:id="rId9"/>
+    <p:sldId id="264" r:id="rId10"/>
+    <p:sldId id="265" r:id="rId11"/>
+    <p:sldId id="266" r:id="rId12"/>
+    <p:sldId id="267" r:id="rId13"/>
+    <p:sldId id="268" r:id="rId14"/>
+    <p:sldId id="269" r:id="rId15"/>
+    <p:sldId id="270" r:id="rId16"/>
+    <p:sldId id="271" r:id="rId17"/>
+    <p:sldId id="272" r:id="rId18"/>
+    <p:sldId id="273" r:id="rId19"/>
+    <p:sldId id="274" r:id="rId20"/>
+    <p:sldId id="275" r:id="rId21"/>
+    <p:sldId id="276" r:id="rId22"/>
+    <p:sldId id="277" r:id="rId23"/>
+    <p:sldId id="278" r:id="rId24"/>
+    <p:sldId id="279" r:id="rId25"/>
+    <p:sldId id="280" r:id="rId26"/>
+    <p:sldId id="281" r:id="rId27"/>
+    <p:sldId id="282" r:id="rId28"/>
+    <p:sldId id="283" r:id="rId29"/>
+    <p:sldId id="284" r:id="rId30"/>
+    <p:sldId id="285" r:id="rId31"/>
+    <p:sldId id="286" r:id="rId32"/>
+    <p:sldId id="287" r:id="rId33"/>
+    <p:sldId id="288" r:id="rId34"/>
+    <p:sldId id="289" r:id="rId35"/>
+    <p:sldId id="290" r:id="rId36"/>
   </p:sldIdLst>
   <p:sldSz cx="12192000" cy="6858000"/>
   <p:notesSz cx="6858000" cy="9144000"/>
@@ -158,7 +161,7 @@
 </file>
 
 <file path=ppt/notesMasters/notesMaster1.xml><?xml version="1.0" encoding="utf-8"?>
-<p:notesMaster xmlns:a="http://schemas.openxmlformats.org/drawingml/2006/main" xmlns:p="http://schemas.openxmlformats.org/presentationml/2006/main" xmlns:r="http://schemas.openxmlformats.org/officeDocument/2006/relationships">
+<p:notesMaster xmlns:a="http://schemas.openxmlformats.org/drawingml/2006/main" xmlns:r="http://schemas.openxmlformats.org/officeDocument/2006/relationships" xmlns:p="http://schemas.openxmlformats.org/presentationml/2006/main">
   <p:cSld>
     <p:bg>
       <p:bgRef idx="1001">
@@ -192,7 +195,7 @@
         <p:spPr>
           <a:xfrm>
             <a:off x="0" y="0"/>
-            <a:ext cx="2971800" cy="457200"/>
+            <a:ext cx="2971800" cy="458788"/>
           </a:xfrm>
           <a:prstGeom prst="rect">
             <a:avLst/>
@@ -223,7 +226,7 @@
         <p:spPr>
           <a:xfrm>
             <a:off x="3884613" y="0"/>
-            <a:ext cx="2971800" cy="457200"/>
+            <a:ext cx="2971800" cy="458788"/>
           </a:xfrm>
           <a:prstGeom prst="rect">
             <a:avLst/>
@@ -237,9 +240,9 @@
             </a:lvl1pPr>
           </a:lstStyle>
           <a:p>
-            <a:fld id="{0F89C1C7-3DCD-1040-A9CF-14679D8B5DDD}" type="datetimeFigureOut">
+            <a:fld id="{B414FD46-9C41-4E77-8212-EE695A2FE528}" type="datetimeFigureOut">
               <a:rPr lang="en-US" smtClean="0"/>
-              <a:t>10/17/16</a:t>
+              <a:t>10/2/2026</a:t>
             </a:fld>
             <a:endParaRPr lang="en-US"/>
           </a:p>
@@ -257,8 +260,8 @@
         </p:nvSpPr>
         <p:spPr>
           <a:xfrm>
-            <a:off x="1143000" y="685800"/>
-            <a:ext cx="4572000" cy="3429000"/>
+            <a:off x="685800" y="1143000"/>
+            <a:ext cx="5486400" cy="3086100"/>
           </a:xfrm>
           <a:prstGeom prst="rect">
             <a:avLst/>
@@ -290,8 +293,8 @@
         </p:nvSpPr>
         <p:spPr>
           <a:xfrm>
-            <a:off x="685800" y="4343400"/>
-            <a:ext cx="5486400" cy="4114800"/>
+            <a:off x="685800" y="4400550"/>
+            <a:ext cx="5486400" cy="3600450"/>
           </a:xfrm>
           <a:prstGeom prst="rect">
             <a:avLst/>
@@ -303,38 +306,37 @@
           <a:p>
             <a:pPr lvl="0"/>
             <a:r>
-              <a:rPr lang="en-US" smtClean="0"/>
+              <a:rPr lang="en-US"/>
               <a:t>Click to edit Master text styles</a:t>
             </a:r>
           </a:p>
           <a:p>
             <a:pPr lvl="1"/>
             <a:r>
-              <a:rPr lang="en-US" smtClean="0"/>
+              <a:rPr lang="en-US"/>
               <a:t>Second level</a:t>
             </a:r>
           </a:p>
           <a:p>
             <a:pPr lvl="2"/>
             <a:r>
-              <a:rPr lang="en-US" smtClean="0"/>
+              <a:rPr lang="en-US"/>
               <a:t>Third level</a:t>
             </a:r>
           </a:p>
           <a:p>
             <a:pPr lvl="3"/>
             <a:r>
-              <a:rPr lang="en-US" smtClean="0"/>
+              <a:rPr lang="en-US"/>
               <a:t>Fourth level</a:t>
             </a:r>
           </a:p>
           <a:p>
             <a:pPr lvl="4"/>
             <a:r>
-              <a:rPr lang="en-US" smtClean="0"/>
+              <a:rPr lang="en-US"/>
               <a:t>Fifth level</a:t>
             </a:r>
-            <a:endParaRPr lang="en-US"/>
           </a:p>
         </p:txBody>
       </p:sp>
@@ -351,7 +353,7 @@
         <p:spPr>
           <a:xfrm>
             <a:off x="0" y="8685213"/>
-            <a:ext cx="2971800" cy="457200"/>
+            <a:ext cx="2971800" cy="458787"/>
           </a:xfrm>
           <a:prstGeom prst="rect">
             <a:avLst/>
@@ -382,7 +384,7 @@
         <p:spPr>
           <a:xfrm>
             <a:off x="3884613" y="8685213"/>
-            <a:ext cx="2971800" cy="457200"/>
+            <a:ext cx="2971800" cy="458787"/>
           </a:xfrm>
           <a:prstGeom prst="rect">
             <a:avLst/>
@@ -396,7 +398,7 @@
             </a:lvl1pPr>
           </a:lstStyle>
           <a:p>
-            <a:fld id="{BB5E49A5-4136-284D-997B-48E1D791AD67}" type="slidenum">
+            <a:fld id="{9917160C-44A9-423E-AA11-6BCE5A9F41C5}" type="slidenum">
               <a:rPr lang="en-US" smtClean="0"/>
               <a:t>‹#›</a:t>
             </a:fld>
@@ -407,13 +409,13 @@
     </p:spTree>
     <p:extLst>
       <p:ext uri="{BB962C8B-B14F-4D97-AF65-F5344CB8AC3E}">
-        <p14:creationId xmlns:p14="http://schemas.microsoft.com/office/powerpoint/2010/main" val="2623252185"/>
+        <p14:creationId xmlns:p14="http://schemas.microsoft.com/office/powerpoint/2010/main" val="3001696547"/>
       </p:ext>
     </p:extLst>
   </p:cSld>
   <p:clrMap bg1="lt1" tx1="dk1" bg2="lt2" tx2="dk2" accent1="accent1" accent2="accent2" accent3="accent3" accent4="accent4" accent5="accent5" accent6="accent6" hlink="hlink" folHlink="folHlink"/>
   <p:notesStyle>
-    <a:lvl1pPr marL="0" algn="l" defTabSz="457200" rtl="0" eaLnBrk="1" latinLnBrk="0" hangingPunct="1">
+    <a:lvl1pPr marL="0" algn="l" defTabSz="914400" rtl="0" eaLnBrk="1" latinLnBrk="0" hangingPunct="1">
       <a:defRPr sz="1200" kern="1200">
         <a:solidFill>
           <a:schemeClr val="tx1"/>
@@ -423,7 +425,7 @@
         <a:cs typeface="+mn-cs"/>
       </a:defRPr>
     </a:lvl1pPr>
-    <a:lvl2pPr marL="457200" algn="l" defTabSz="457200" rtl="0" eaLnBrk="1" latinLnBrk="0" hangingPunct="1">
+    <a:lvl2pPr marL="457200" algn="l" defTabSz="914400" rtl="0" eaLnBrk="1" latinLnBrk="0" hangingPunct="1">
       <a:defRPr sz="1200" kern="1200">
         <a:solidFill>
           <a:schemeClr val="tx1"/>
@@ -433,7 +435,7 @@
         <a:cs typeface="+mn-cs"/>
       </a:defRPr>
     </a:lvl2pPr>
-    <a:lvl3pPr marL="914400" algn="l" defTabSz="457200" rtl="0" eaLnBrk="1" latinLnBrk="0" hangingPunct="1">
+    <a:lvl3pPr marL="914400" algn="l" defTabSz="914400" rtl="0" eaLnBrk="1" latinLnBrk="0" hangingPunct="1">
       <a:defRPr sz="1200" kern="1200">
         <a:solidFill>
           <a:schemeClr val="tx1"/>
@@ -443,7 +445,7 @@
         <a:cs typeface="+mn-cs"/>
       </a:defRPr>
     </a:lvl3pPr>
-    <a:lvl4pPr marL="1371600" algn="l" defTabSz="457200" rtl="0" eaLnBrk="1" latinLnBrk="0" hangingPunct="1">
+    <a:lvl4pPr marL="1371600" algn="l" defTabSz="914400" rtl="0" eaLnBrk="1" latinLnBrk="0" hangingPunct="1">
       <a:defRPr sz="1200" kern="1200">
         <a:solidFill>
           <a:schemeClr val="tx1"/>
@@ -453,7 +455,7 @@
         <a:cs typeface="+mn-cs"/>
       </a:defRPr>
     </a:lvl4pPr>
-    <a:lvl5pPr marL="1828800" algn="l" defTabSz="457200" rtl="0" eaLnBrk="1" latinLnBrk="0" hangingPunct="1">
+    <a:lvl5pPr marL="1828800" algn="l" defTabSz="914400" rtl="0" eaLnBrk="1" latinLnBrk="0" hangingPunct="1">
       <a:defRPr sz="1200" kern="1200">
         <a:solidFill>
           <a:schemeClr val="tx1"/>
@@ -463,7 +465,7 @@
         <a:cs typeface="+mn-cs"/>
       </a:defRPr>
     </a:lvl5pPr>
-    <a:lvl6pPr marL="2286000" algn="l" defTabSz="457200" rtl="0" eaLnBrk="1" latinLnBrk="0" hangingPunct="1">
+    <a:lvl6pPr marL="2286000" algn="l" defTabSz="914400" rtl="0" eaLnBrk="1" latinLnBrk="0" hangingPunct="1">
       <a:defRPr sz="1200" kern="1200">
         <a:solidFill>
           <a:schemeClr val="tx1"/>
@@ -473,7 +475,7 @@
         <a:cs typeface="+mn-cs"/>
       </a:defRPr>
     </a:lvl6pPr>
-    <a:lvl7pPr marL="2743200" algn="l" defTabSz="457200" rtl="0" eaLnBrk="1" latinLnBrk="0" hangingPunct="1">
+    <a:lvl7pPr marL="2743200" algn="l" defTabSz="914400" rtl="0" eaLnBrk="1" latinLnBrk="0" hangingPunct="1">
       <a:defRPr sz="1200" kern="1200">
         <a:solidFill>
           <a:schemeClr val="tx1"/>
@@ -483,7 +485,7 @@
         <a:cs typeface="+mn-cs"/>
       </a:defRPr>
     </a:lvl7pPr>
-    <a:lvl8pPr marL="3200400" algn="l" defTabSz="457200" rtl="0" eaLnBrk="1" latinLnBrk="0" hangingPunct="1">
+    <a:lvl8pPr marL="3200400" algn="l" defTabSz="914400" rtl="0" eaLnBrk="1" latinLnBrk="0" hangingPunct="1">
       <a:defRPr sz="1200" kern="1200">
         <a:solidFill>
           <a:schemeClr val="tx1"/>
@@ -493,7 +495,7 @@
         <a:cs typeface="+mn-cs"/>
       </a:defRPr>
     </a:lvl8pPr>
-    <a:lvl9pPr marL="3657600" algn="l" defTabSz="457200" rtl="0" eaLnBrk="1" latinLnBrk="0" hangingPunct="1">
+    <a:lvl9pPr marL="3657600" algn="l" defTabSz="914400" rtl="0" eaLnBrk="1" latinLnBrk="0" hangingPunct="1">
       <a:defRPr sz="1200" kern="1200">
         <a:solidFill>
           <a:schemeClr val="tx1"/>
@@ -508,7 +510,7 @@
 </file>
 
 <file path=ppt/notesSlides/notesSlide1.xml><?xml version="1.0" encoding="utf-8"?>
-<p:notes xmlns:a="http://schemas.openxmlformats.org/drawingml/2006/main" xmlns:p="http://schemas.openxmlformats.org/presentationml/2006/main" xmlns:r="http://schemas.openxmlformats.org/officeDocument/2006/relationships">
+<p:notes xmlns:a="http://schemas.openxmlformats.org/drawingml/2006/main" xmlns:r="http://schemas.openxmlformats.org/officeDocument/2006/relationships" xmlns:p="http://schemas.openxmlformats.org/presentationml/2006/main">
   <p:cSld>
     <p:spTree>
       <p:nvGrpSpPr>
@@ -528,7 +530,7 @@
         <p:nvSpPr>
           <p:cNvPr id="2" name="Slide Image Placeholder 1"/>
           <p:cNvSpPr>
-            <a:spLocks noGrp="1"/>
+            <a:spLocks noGrp="1" noRot="1" noChangeAspect="1"/>
           </p:cNvSpPr>
           <p:nvPr>
             <p:ph type="sldImg" idx="2"/>
@@ -543,7 +545,7 @@
             <a:spLocks noGrp="1"/>
           </p:cNvSpPr>
           <p:nvPr>
-            <p:ph type="body" idx="3" sz="quarter"/>
+            <p:ph type="body" sz="quarter" idx="3"/>
           </p:nvPr>
         </p:nvSpPr>
         <p:spPr/>
@@ -574,7 +576,7 @@
             <a:spLocks noGrp="1"/>
           </p:cNvSpPr>
           <p:nvPr>
-            <p:ph type="sldNum" idx="5" sz="quarter"/>
+            <p:ph type="sldNum" sz="quarter" idx="5"/>
           </p:nvPr>
         </p:nvSpPr>
         <p:spPr/>
@@ -588,7 +590,7 @@
 </file>
 
 <file path=ppt/notesSlides/notesSlide10.xml><?xml version="1.0" encoding="utf-8"?>
-<p:notes xmlns:a="http://schemas.openxmlformats.org/drawingml/2006/main" xmlns:p="http://schemas.openxmlformats.org/presentationml/2006/main" xmlns:r="http://schemas.openxmlformats.org/officeDocument/2006/relationships">
+<p:notes xmlns:a="http://schemas.openxmlformats.org/drawingml/2006/main" xmlns:r="http://schemas.openxmlformats.org/officeDocument/2006/relationships" xmlns:p="http://schemas.openxmlformats.org/presentationml/2006/main">
   <p:cSld>
     <p:spTree>
       <p:nvGrpSpPr>
@@ -608,7 +610,7 @@
         <p:nvSpPr>
           <p:cNvPr id="2" name="Slide Image Placeholder 1"/>
           <p:cNvSpPr>
-            <a:spLocks noGrp="1"/>
+            <a:spLocks noGrp="1" noRot="1" noChangeAspect="1"/>
           </p:cNvSpPr>
           <p:nvPr>
             <p:ph type="sldImg" idx="2"/>
@@ -623,7 +625,7 @@
             <a:spLocks noGrp="1"/>
           </p:cNvSpPr>
           <p:nvPr>
-            <p:ph type="body" idx="3" sz="quarter"/>
+            <p:ph type="body" sz="quarter" idx="3"/>
           </p:nvPr>
         </p:nvSpPr>
         <p:spPr/>
@@ -664,7 +666,7 @@
             <a:spLocks noGrp="1"/>
           </p:cNvSpPr>
           <p:nvPr>
-            <p:ph type="sldNum" idx="5" sz="quarter"/>
+            <p:ph type="sldNum" sz="quarter" idx="5"/>
           </p:nvPr>
         </p:nvSpPr>
         <p:spPr/>
@@ -678,7 +680,7 @@
 </file>
 
 <file path=ppt/notesSlides/notesSlide11.xml><?xml version="1.0" encoding="utf-8"?>
-<p:notes xmlns:a="http://schemas.openxmlformats.org/drawingml/2006/main" xmlns:p="http://schemas.openxmlformats.org/presentationml/2006/main" xmlns:r="http://schemas.openxmlformats.org/officeDocument/2006/relationships">
+<p:notes xmlns:a="http://schemas.openxmlformats.org/drawingml/2006/main" xmlns:r="http://schemas.openxmlformats.org/officeDocument/2006/relationships" xmlns:p="http://schemas.openxmlformats.org/presentationml/2006/main">
   <p:cSld>
     <p:spTree>
       <p:nvGrpSpPr>
@@ -698,7 +700,7 @@
         <p:nvSpPr>
           <p:cNvPr id="2" name="Slide Image Placeholder 1"/>
           <p:cNvSpPr>
-            <a:spLocks noGrp="1"/>
+            <a:spLocks noGrp="1" noRot="1" noChangeAspect="1"/>
           </p:cNvSpPr>
           <p:nvPr>
             <p:ph type="sldImg" idx="2"/>
@@ -713,7 +715,7 @@
             <a:spLocks noGrp="1"/>
           </p:cNvSpPr>
           <p:nvPr>
-            <p:ph type="body" idx="3" sz="quarter"/>
+            <p:ph type="body" sz="quarter" idx="3"/>
           </p:nvPr>
         </p:nvSpPr>
         <p:spPr/>
@@ -749,7 +751,7 @@
             <a:spLocks noGrp="1"/>
           </p:cNvSpPr>
           <p:nvPr>
-            <p:ph type="sldNum" idx="5" sz="quarter"/>
+            <p:ph type="sldNum" sz="quarter" idx="5"/>
           </p:nvPr>
         </p:nvSpPr>
         <p:spPr/>
@@ -763,7 +765,7 @@
 </file>
 
 <file path=ppt/notesSlides/notesSlide12.xml><?xml version="1.0" encoding="utf-8"?>
-<p:notes xmlns:a="http://schemas.openxmlformats.org/drawingml/2006/main" xmlns:p="http://schemas.openxmlformats.org/presentationml/2006/main" xmlns:r="http://schemas.openxmlformats.org/officeDocument/2006/relationships">
+<p:notes xmlns:a="http://schemas.openxmlformats.org/drawingml/2006/main" xmlns:r="http://schemas.openxmlformats.org/officeDocument/2006/relationships" xmlns:p="http://schemas.openxmlformats.org/presentationml/2006/main">
   <p:cSld>
     <p:spTree>
       <p:nvGrpSpPr>
@@ -783,7 +785,7 @@
         <p:nvSpPr>
           <p:cNvPr id="2" name="Slide Image Placeholder 1"/>
           <p:cNvSpPr>
-            <a:spLocks noGrp="1"/>
+            <a:spLocks noGrp="1" noRot="1" noChangeAspect="1"/>
           </p:cNvSpPr>
           <p:nvPr>
             <p:ph type="sldImg" idx="2"/>
@@ -798,16 +800,16 @@
             <a:spLocks noGrp="1"/>
           </p:cNvSpPr>
           <p:nvPr>
-            <p:ph type="body" idx="3" sz="quarter"/>
-          </p:nvPr>
-        </p:nvSpPr>
-        <p:spPr/>
-        <p:txBody>
-          <a:bodyPr/>
-          <a:lstStyle/>
-          <a:p>
-            <a:r>
-              <a:t>何も無い空 23 か所は 10/2 に今のコードで計算し直した (値は 7 月と同じ 1.264)。ばらつき = 0 からのずれの 2 乗平均の平方根。光子が十分あるビン 2–10 (2.6–169 GeV) の 207 個から計算。</a:t>
+            <p:ph type="body" sz="quarter" idx="3"/>
+          </p:nvPr>
+        </p:nvSpPr>
+        <p:spPr/>
+        <p:txBody>
+          <a:bodyPr/>
+          <a:lstStyle/>
+          <a:p>
+            <a:r>
+              <a:t>ばらつき = 0 からのずれの 2 乗平均の平方根。光子が十分あるビン 2–10 (2.6–169 GeV) の 207 個から計算。</a:t>
             </a:r>
           </a:p>
           <a:p>
@@ -834,7 +836,7 @@
             <a:spLocks noGrp="1"/>
           </p:cNvSpPr>
           <p:nvPr>
-            <p:ph type="sldNum" idx="5" sz="quarter"/>
+            <p:ph type="sldNum" sz="quarter" idx="5"/>
           </p:nvPr>
         </p:nvSpPr>
         <p:spPr/>
@@ -848,7 +850,7 @@
 </file>
 
 <file path=ppt/notesSlides/notesSlide13.xml><?xml version="1.0" encoding="utf-8"?>
-<p:notes xmlns:a="http://schemas.openxmlformats.org/drawingml/2006/main" xmlns:p="http://schemas.openxmlformats.org/presentationml/2006/main" xmlns:r="http://schemas.openxmlformats.org/officeDocument/2006/relationships">
+<p:notes xmlns:a="http://schemas.openxmlformats.org/drawingml/2006/main" xmlns:r="http://schemas.openxmlformats.org/officeDocument/2006/relationships" xmlns:p="http://schemas.openxmlformats.org/presentationml/2006/main">
   <p:cSld>
     <p:spTree>
       <p:nvGrpSpPr>
@@ -868,7 +870,7 @@
         <p:nvSpPr>
           <p:cNvPr id="2" name="Slide Image Placeholder 1"/>
           <p:cNvSpPr>
-            <a:spLocks noGrp="1"/>
+            <a:spLocks noGrp="1" noRot="1" noChangeAspect="1"/>
           </p:cNvSpPr>
           <p:nvPr>
             <p:ph type="sldImg" idx="2"/>
@@ -883,7 +885,7 @@
             <a:spLocks noGrp="1"/>
           </p:cNvSpPr>
           <p:nvPr>
-            <p:ph type="body" idx="3" sz="quarter"/>
+            <p:ph type="body" sz="quarter" idx="3"/>
           </p:nvPr>
         </p:nvSpPr>
         <p:spPr/>
@@ -914,7 +916,7 @@
             <a:spLocks noGrp="1"/>
           </p:cNvSpPr>
           <p:nvPr>
-            <p:ph type="sldNum" idx="5" sz="quarter"/>
+            <p:ph type="sldNum" sz="quarter" idx="5"/>
           </p:nvPr>
         </p:nvSpPr>
         <p:spPr/>
@@ -928,7 +930,7 @@
 </file>
 
 <file path=ppt/notesSlides/notesSlide14.xml><?xml version="1.0" encoding="utf-8"?>
-<p:notes xmlns:a="http://schemas.openxmlformats.org/drawingml/2006/main" xmlns:p="http://schemas.openxmlformats.org/presentationml/2006/main" xmlns:r="http://schemas.openxmlformats.org/officeDocument/2006/relationships">
+<p:notes xmlns:a="http://schemas.openxmlformats.org/drawingml/2006/main" xmlns:r="http://schemas.openxmlformats.org/officeDocument/2006/relationships" xmlns:p="http://schemas.openxmlformats.org/presentationml/2006/main">
   <p:cSld>
     <p:spTree>
       <p:nvGrpSpPr>
@@ -948,7 +950,7 @@
         <p:nvSpPr>
           <p:cNvPr id="2" name="Slide Image Placeholder 1"/>
           <p:cNvSpPr>
-            <a:spLocks noGrp="1"/>
+            <a:spLocks noGrp="1" noRot="1" noChangeAspect="1"/>
           </p:cNvSpPr>
           <p:nvPr>
             <p:ph type="sldImg" idx="2"/>
@@ -963,7 +965,7 @@
             <a:spLocks noGrp="1"/>
           </p:cNvSpPr>
           <p:nvPr>
-            <p:ph type="body" idx="3" sz="quarter"/>
+            <p:ph type="body" sz="quarter" idx="3"/>
           </p:nvPr>
         </p:nvSpPr>
         <p:spPr/>
@@ -994,7 +996,7 @@
             <a:spLocks noGrp="1"/>
           </p:cNvSpPr>
           <p:nvPr>
-            <p:ph type="sldNum" idx="5" sz="quarter"/>
+            <p:ph type="sldNum" sz="quarter" idx="5"/>
           </p:nvPr>
         </p:nvSpPr>
         <p:spPr/>
@@ -1008,7 +1010,7 @@
 </file>
 
 <file path=ppt/notesSlides/notesSlide15.xml><?xml version="1.0" encoding="utf-8"?>
-<p:notes xmlns:a="http://schemas.openxmlformats.org/drawingml/2006/main" xmlns:p="http://schemas.openxmlformats.org/presentationml/2006/main" xmlns:r="http://schemas.openxmlformats.org/officeDocument/2006/relationships">
+<p:notes xmlns:a="http://schemas.openxmlformats.org/drawingml/2006/main" xmlns:r="http://schemas.openxmlformats.org/officeDocument/2006/relationships" xmlns:p="http://schemas.openxmlformats.org/presentationml/2006/main">
   <p:cSld>
     <p:spTree>
       <p:nvGrpSpPr>
@@ -1028,7 +1030,7 @@
         <p:nvSpPr>
           <p:cNvPr id="2" name="Slide Image Placeholder 1"/>
           <p:cNvSpPr>
-            <a:spLocks noGrp="1"/>
+            <a:spLocks noGrp="1" noRot="1" noChangeAspect="1"/>
           </p:cNvSpPr>
           <p:nvPr>
             <p:ph type="sldImg" idx="2"/>
@@ -1043,7 +1045,7 @@
             <a:spLocks noGrp="1"/>
           </p:cNvSpPr>
           <p:nvPr>
-            <p:ph type="body" idx="3" sz="quarter"/>
+            <p:ph type="body" sz="quarter" idx="3"/>
           </p:nvPr>
         </p:nvSpPr>
         <p:spPr/>
@@ -1064,7 +1066,7 @@
             <a:spLocks noGrp="1"/>
           </p:cNvSpPr>
           <p:nvPr>
-            <p:ph type="sldNum" idx="5" sz="quarter"/>
+            <p:ph type="sldNum" sz="quarter" idx="5"/>
           </p:nvPr>
         </p:nvSpPr>
         <p:spPr/>
@@ -1078,7 +1080,7 @@
 </file>
 
 <file path=ppt/notesSlides/notesSlide16.xml><?xml version="1.0" encoding="utf-8"?>
-<p:notes xmlns:a="http://schemas.openxmlformats.org/drawingml/2006/main" xmlns:p="http://schemas.openxmlformats.org/presentationml/2006/main" xmlns:r="http://schemas.openxmlformats.org/officeDocument/2006/relationships">
+<p:notes xmlns:a="http://schemas.openxmlformats.org/drawingml/2006/main" xmlns:r="http://schemas.openxmlformats.org/officeDocument/2006/relationships" xmlns:p="http://schemas.openxmlformats.org/presentationml/2006/main">
   <p:cSld>
     <p:spTree>
       <p:nvGrpSpPr>
@@ -1098,7 +1100,7 @@
         <p:nvSpPr>
           <p:cNvPr id="2" name="Slide Image Placeholder 1"/>
           <p:cNvSpPr>
-            <a:spLocks noGrp="1"/>
+            <a:spLocks noGrp="1" noRot="1" noChangeAspect="1"/>
           </p:cNvSpPr>
           <p:nvPr>
             <p:ph type="sldImg" idx="2"/>
@@ -1113,7 +1115,7 @@
             <a:spLocks noGrp="1"/>
           </p:cNvSpPr>
           <p:nvPr>
-            <p:ph type="body" idx="3" sz="quarter"/>
+            <p:ph type="body" sz="quarter" idx="3"/>
           </p:nvPr>
         </p:nvSpPr>
         <p:spPr/>
@@ -1144,7 +1146,7 @@
             <a:spLocks noGrp="1"/>
           </p:cNvSpPr>
           <p:nvPr>
-            <p:ph type="sldNum" idx="5" sz="quarter"/>
+            <p:ph type="sldNum" sz="quarter" idx="5"/>
           </p:nvPr>
         </p:nvSpPr>
         <p:spPr/>
@@ -1158,7 +1160,7 @@
 </file>
 
 <file path=ppt/notesSlides/notesSlide17.xml><?xml version="1.0" encoding="utf-8"?>
-<p:notes xmlns:a="http://schemas.openxmlformats.org/drawingml/2006/main" xmlns:p="http://schemas.openxmlformats.org/presentationml/2006/main" xmlns:r="http://schemas.openxmlformats.org/officeDocument/2006/relationships">
+<p:notes xmlns:a="http://schemas.openxmlformats.org/drawingml/2006/main" xmlns:r="http://schemas.openxmlformats.org/officeDocument/2006/relationships" xmlns:p="http://schemas.openxmlformats.org/presentationml/2006/main">
   <p:cSld>
     <p:spTree>
       <p:nvGrpSpPr>
@@ -1178,7 +1180,7 @@
         <p:nvSpPr>
           <p:cNvPr id="2" name="Slide Image Placeholder 1"/>
           <p:cNvSpPr>
-            <a:spLocks noGrp="1"/>
+            <a:spLocks noGrp="1" noRot="1" noChangeAspect="1"/>
           </p:cNvSpPr>
           <p:nvPr>
             <p:ph type="sldImg" idx="2"/>
@@ -1193,7 +1195,7 @@
             <a:spLocks noGrp="1"/>
           </p:cNvSpPr>
           <p:nvPr>
-            <p:ph type="body" idx="3" sz="quarter"/>
+            <p:ph type="body" sz="quarter" idx="3"/>
           </p:nvPr>
         </p:nvSpPr>
         <p:spPr/>
@@ -1224,7 +1226,7 @@
             <a:spLocks noGrp="1"/>
           </p:cNvSpPr>
           <p:nvPr>
-            <p:ph type="sldNum" idx="5" sz="quarter"/>
+            <p:ph type="sldNum" sz="quarter" idx="5"/>
           </p:nvPr>
         </p:nvSpPr>
         <p:spPr/>
@@ -1238,7 +1240,7 @@
 </file>
 
 <file path=ppt/notesSlides/notesSlide18.xml><?xml version="1.0" encoding="utf-8"?>
-<p:notes xmlns:a="http://schemas.openxmlformats.org/drawingml/2006/main" xmlns:p="http://schemas.openxmlformats.org/presentationml/2006/main" xmlns:r="http://schemas.openxmlformats.org/officeDocument/2006/relationships">
+<p:notes xmlns:a="http://schemas.openxmlformats.org/drawingml/2006/main" xmlns:r="http://schemas.openxmlformats.org/officeDocument/2006/relationships" xmlns:p="http://schemas.openxmlformats.org/presentationml/2006/main">
   <p:cSld>
     <p:spTree>
       <p:nvGrpSpPr>
@@ -1258,7 +1260,7 @@
         <p:nvSpPr>
           <p:cNvPr id="2" name="Slide Image Placeholder 1"/>
           <p:cNvSpPr>
-            <a:spLocks noGrp="1"/>
+            <a:spLocks noGrp="1" noRot="1" noChangeAspect="1"/>
           </p:cNvSpPr>
           <p:nvPr>
             <p:ph type="sldImg" idx="2"/>
@@ -1273,7 +1275,7 @@
             <a:spLocks noGrp="1"/>
           </p:cNvSpPr>
           <p:nvPr>
-            <p:ph type="body" idx="3" sz="quarter"/>
+            <p:ph type="body" sz="quarter" idx="3"/>
           </p:nvPr>
         </p:nvSpPr>
         <p:spPr/>
@@ -1297,11 +1299,6 @@
           </a:p>
           <a:p>
             <a:r>
-              <a:t>10/2 に今のコード (天の川の v20r と同じ版) で 79 か所すべてを計算し直した結果 (cloud_reports/2026-10-02_v20r_targets/)。7 月の結果との差は中央値 0.0002σ、最大 0.64σ。</a:t>
-            </a:r>
-          </a:p>
-          <a:p>
-            <a:r>
               <a:t>図は slides/figs/plot_dwarf_results.py で作った。</a:t>
             </a:r>
           </a:p>
@@ -1314,7 +1311,7 @@
             <a:spLocks noGrp="1"/>
           </p:cNvSpPr>
           <p:nvPr>
-            <p:ph type="sldNum" idx="5" sz="quarter"/>
+            <p:ph type="sldNum" sz="quarter" idx="5"/>
           </p:nvPr>
         </p:nvSpPr>
         <p:spPr/>
@@ -1328,7 +1325,7 @@
 </file>
 
 <file path=ppt/notesSlides/notesSlide19.xml><?xml version="1.0" encoding="utf-8"?>
-<p:notes xmlns:a="http://schemas.openxmlformats.org/drawingml/2006/main" xmlns:p="http://schemas.openxmlformats.org/presentationml/2006/main" xmlns:r="http://schemas.openxmlformats.org/officeDocument/2006/relationships">
+<p:notes xmlns:a="http://schemas.openxmlformats.org/drawingml/2006/main" xmlns:r="http://schemas.openxmlformats.org/officeDocument/2006/relationships" xmlns:p="http://schemas.openxmlformats.org/presentationml/2006/main">
   <p:cSld>
     <p:spTree>
       <p:nvGrpSpPr>
@@ -1348,7 +1345,7 @@
         <p:nvSpPr>
           <p:cNvPr id="2" name="Slide Image Placeholder 1"/>
           <p:cNvSpPr>
-            <a:spLocks noGrp="1"/>
+            <a:spLocks noGrp="1" noRot="1" noChangeAspect="1"/>
           </p:cNvSpPr>
           <p:nvPr>
             <p:ph type="sldImg" idx="2"/>
@@ -1363,7 +1360,7 @@
             <a:spLocks noGrp="1"/>
           </p:cNvSpPr>
           <p:nvPr>
-            <p:ph type="body" idx="3" sz="quarter"/>
+            <p:ph type="body" sz="quarter" idx="3"/>
           </p:nvPr>
         </p:nvSpPr>
         <p:spPr/>
@@ -1387,11 +1384,6 @@
           </a:p>
           <a:p>
             <a:r>
-              <a:t>天の川のハローの明るさは v20r (10/1 再計算) の値、各天体の有意度は 10/2 の再計算。v20 の値を使っても 1.73 と 0.39 は変わらない。</a:t>
-            </a:r>
-          </a:p>
-          <a:p>
-            <a:r>
               <a:t>注意: 9/28 の計算は SMC・LMC を誤って含めていた (予測 2.69σ のうち 2.06σ が SMC 1 天体)。</a:t>
             </a:r>
           </a:p>
@@ -1404,7 +1396,7 @@
             <a:spLocks noGrp="1"/>
           </p:cNvSpPr>
           <p:nvPr>
-            <p:ph type="sldNum" idx="5" sz="quarter"/>
+            <p:ph type="sldNum" sz="quarter" idx="5"/>
           </p:nvPr>
         </p:nvSpPr>
         <p:spPr/>
@@ -1418,7 +1410,7 @@
 </file>
 
 <file path=ppt/notesSlides/notesSlide2.xml><?xml version="1.0" encoding="utf-8"?>
-<p:notes xmlns:a="http://schemas.openxmlformats.org/drawingml/2006/main" xmlns:p="http://schemas.openxmlformats.org/presentationml/2006/main" xmlns:r="http://schemas.openxmlformats.org/officeDocument/2006/relationships">
+<p:notes xmlns:a="http://schemas.openxmlformats.org/drawingml/2006/main" xmlns:r="http://schemas.openxmlformats.org/officeDocument/2006/relationships" xmlns:p="http://schemas.openxmlformats.org/presentationml/2006/main">
   <p:cSld>
     <p:spTree>
       <p:nvGrpSpPr>
@@ -1438,7 +1430,7 @@
         <p:nvSpPr>
           <p:cNvPr id="2" name="Slide Image Placeholder 1"/>
           <p:cNvSpPr>
-            <a:spLocks noGrp="1"/>
+            <a:spLocks noGrp="1" noRot="1" noChangeAspect="1"/>
           </p:cNvSpPr>
           <p:nvPr>
             <p:ph type="sldImg" idx="2"/>
@@ -1453,7 +1445,7 @@
             <a:spLocks noGrp="1"/>
           </p:cNvSpPr>
           <p:nvPr>
-            <p:ph type="body" idx="3" sz="quarter"/>
+            <p:ph type="body" sz="quarter" idx="3"/>
           </p:nvPr>
         </p:nvSpPr>
         <p:spPr/>
@@ -1484,7 +1476,7 @@
             <a:spLocks noGrp="1"/>
           </p:cNvSpPr>
           <p:nvPr>
-            <p:ph type="sldNum" idx="5" sz="quarter"/>
+            <p:ph type="sldNum" sz="quarter" idx="5"/>
           </p:nvPr>
         </p:nvSpPr>
         <p:spPr/>
@@ -1498,7 +1490,7 @@
 </file>
 
 <file path=ppt/notesSlides/notesSlide20.xml><?xml version="1.0" encoding="utf-8"?>
-<p:notes xmlns:a="http://schemas.openxmlformats.org/drawingml/2006/main" xmlns:p="http://schemas.openxmlformats.org/presentationml/2006/main" xmlns:r="http://schemas.openxmlformats.org/officeDocument/2006/relationships">
+<p:notes xmlns:a="http://schemas.openxmlformats.org/drawingml/2006/main" xmlns:r="http://schemas.openxmlformats.org/officeDocument/2006/relationships" xmlns:p="http://schemas.openxmlformats.org/presentationml/2006/main">
   <p:cSld>
     <p:spTree>
       <p:nvGrpSpPr>
@@ -1518,7 +1510,7 @@
         <p:nvSpPr>
           <p:cNvPr id="2" name="Slide Image Placeholder 1"/>
           <p:cNvSpPr>
-            <a:spLocks noGrp="1"/>
+            <a:spLocks noGrp="1" noRot="1" noChangeAspect="1"/>
           </p:cNvSpPr>
           <p:nvPr>
             <p:ph type="sldImg" idx="2"/>
@@ -1533,7 +1525,7 @@
             <a:spLocks noGrp="1"/>
           </p:cNvSpPr>
           <p:nvPr>
-            <p:ph type="body" idx="3" sz="quarter"/>
+            <p:ph type="body" sz="quarter" idx="3"/>
           </p:nvPr>
         </p:nvSpPr>
         <p:spPr/>
@@ -1574,7 +1566,7 @@
             <a:spLocks noGrp="1"/>
           </p:cNvSpPr>
           <p:nvPr>
-            <p:ph type="sldNum" idx="5" sz="quarter"/>
+            <p:ph type="sldNum" sz="quarter" idx="5"/>
           </p:nvPr>
         </p:nvSpPr>
         <p:spPr/>
@@ -1588,7 +1580,7 @@
 </file>
 
 <file path=ppt/notesSlides/notesSlide21.xml><?xml version="1.0" encoding="utf-8"?>
-<p:notes xmlns:a="http://schemas.openxmlformats.org/drawingml/2006/main" xmlns:p="http://schemas.openxmlformats.org/presentationml/2006/main" xmlns:r="http://schemas.openxmlformats.org/officeDocument/2006/relationships">
+<p:notes xmlns:a="http://schemas.openxmlformats.org/drawingml/2006/main" xmlns:r="http://schemas.openxmlformats.org/officeDocument/2006/relationships" xmlns:p="http://schemas.openxmlformats.org/presentationml/2006/main">
   <p:cSld>
     <p:spTree>
       <p:nvGrpSpPr>
@@ -1608,7 +1600,7 @@
         <p:nvSpPr>
           <p:cNvPr id="2" name="Slide Image Placeholder 1"/>
           <p:cNvSpPr>
-            <a:spLocks noGrp="1"/>
+            <a:spLocks noGrp="1" noRot="1" noChangeAspect="1"/>
           </p:cNvSpPr>
           <p:nvPr>
             <p:ph type="sldImg" idx="2"/>
@@ -1623,7 +1615,7 @@
             <a:spLocks noGrp="1"/>
           </p:cNvSpPr>
           <p:nvPr>
-            <p:ph type="body" idx="3" sz="quarter"/>
+            <p:ph type="body" sz="quarter" idx="3"/>
           </p:nvPr>
         </p:nvSpPr>
         <p:spPr/>
@@ -1659,7 +1651,7 @@
             <a:spLocks noGrp="1"/>
           </p:cNvSpPr>
           <p:nvPr>
-            <p:ph type="sldNum" idx="5" sz="quarter"/>
+            <p:ph type="sldNum" sz="quarter" idx="5"/>
           </p:nvPr>
         </p:nvSpPr>
         <p:spPr/>
@@ -1673,7 +1665,7 @@
 </file>
 
 <file path=ppt/notesSlides/notesSlide22.xml><?xml version="1.0" encoding="utf-8"?>
-<p:notes xmlns:a="http://schemas.openxmlformats.org/drawingml/2006/main" xmlns:p="http://schemas.openxmlformats.org/presentationml/2006/main" xmlns:r="http://schemas.openxmlformats.org/officeDocument/2006/relationships">
+<p:notes xmlns:a="http://schemas.openxmlformats.org/drawingml/2006/main" xmlns:r="http://schemas.openxmlformats.org/officeDocument/2006/relationships" xmlns:p="http://schemas.openxmlformats.org/presentationml/2006/main">
   <p:cSld>
     <p:spTree>
       <p:nvGrpSpPr>
@@ -1693,7 +1685,7 @@
         <p:nvSpPr>
           <p:cNvPr id="2" name="Slide Image Placeholder 1"/>
           <p:cNvSpPr>
-            <a:spLocks noGrp="1"/>
+            <a:spLocks noGrp="1" noRot="1" noChangeAspect="1"/>
           </p:cNvSpPr>
           <p:nvPr>
             <p:ph type="sldImg" idx="2"/>
@@ -1708,7 +1700,7 @@
             <a:spLocks noGrp="1"/>
           </p:cNvSpPr>
           <p:nvPr>
-            <p:ph type="body" idx="3" sz="quarter"/>
+            <p:ph type="body" sz="quarter" idx="3"/>
           </p:nvPr>
         </p:nvSpPr>
         <p:spPr/>
@@ -1744,7 +1736,7 @@
             <a:spLocks noGrp="1"/>
           </p:cNvSpPr>
           <p:nvPr>
-            <p:ph type="sldNum" idx="5" sz="quarter"/>
+            <p:ph type="sldNum" sz="quarter" idx="5"/>
           </p:nvPr>
         </p:nvSpPr>
         <p:spPr/>
@@ -1758,7 +1750,7 @@
 </file>
 
 <file path=ppt/notesSlides/notesSlide23.xml><?xml version="1.0" encoding="utf-8"?>
-<p:notes xmlns:a="http://schemas.openxmlformats.org/drawingml/2006/main" xmlns:p="http://schemas.openxmlformats.org/presentationml/2006/main" xmlns:r="http://schemas.openxmlformats.org/officeDocument/2006/relationships">
+<p:notes xmlns:a="http://schemas.openxmlformats.org/drawingml/2006/main" xmlns:r="http://schemas.openxmlformats.org/officeDocument/2006/relationships" xmlns:p="http://schemas.openxmlformats.org/presentationml/2006/main">
   <p:cSld>
     <p:spTree>
       <p:nvGrpSpPr>
@@ -1778,7 +1770,7 @@
         <p:nvSpPr>
           <p:cNvPr id="2" name="Slide Image Placeholder 1"/>
           <p:cNvSpPr>
-            <a:spLocks noGrp="1"/>
+            <a:spLocks noGrp="1" noRot="1" noChangeAspect="1"/>
           </p:cNvSpPr>
           <p:nvPr>
             <p:ph type="sldImg" idx="2"/>
@@ -1793,7 +1785,7 @@
             <a:spLocks noGrp="1"/>
           </p:cNvSpPr>
           <p:nvPr>
-            <p:ph type="body" idx="3" sz="quarter"/>
+            <p:ph type="body" sz="quarter" idx="3"/>
           </p:nvPr>
         </p:nvSpPr>
         <p:spPr/>
@@ -1819,7 +1811,7 @@
             <a:spLocks noGrp="1"/>
           </p:cNvSpPr>
           <p:nvPr>
-            <p:ph type="sldNum" idx="5" sz="quarter"/>
+            <p:ph type="sldNum" sz="quarter" idx="5"/>
           </p:nvPr>
         </p:nvSpPr>
         <p:spPr/>
@@ -1833,7 +1825,7 @@
 </file>
 
 <file path=ppt/notesSlides/notesSlide24.xml><?xml version="1.0" encoding="utf-8"?>
-<p:notes xmlns:a="http://schemas.openxmlformats.org/drawingml/2006/main" xmlns:p="http://schemas.openxmlformats.org/presentationml/2006/main" xmlns:r="http://schemas.openxmlformats.org/officeDocument/2006/relationships">
+<p:notes xmlns:a="http://schemas.openxmlformats.org/drawingml/2006/main" xmlns:r="http://schemas.openxmlformats.org/officeDocument/2006/relationships" xmlns:p="http://schemas.openxmlformats.org/presentationml/2006/main">
   <p:cSld>
     <p:spTree>
       <p:nvGrpSpPr>
@@ -1853,7 +1845,7 @@
         <p:nvSpPr>
           <p:cNvPr id="2" name="Slide Image Placeholder 1"/>
           <p:cNvSpPr>
-            <a:spLocks noGrp="1"/>
+            <a:spLocks noGrp="1" noRot="1" noChangeAspect="1"/>
           </p:cNvSpPr>
           <p:nvPr>
             <p:ph type="sldImg" idx="2"/>
@@ -1868,7 +1860,7 @@
             <a:spLocks noGrp="1"/>
           </p:cNvSpPr>
           <p:nvPr>
-            <p:ph type="body" idx="3" sz="quarter"/>
+            <p:ph type="body" sz="quarter" idx="3"/>
           </p:nvPr>
         </p:nvSpPr>
         <p:spPr/>
@@ -1904,7 +1896,7 @@
             <a:spLocks noGrp="1"/>
           </p:cNvSpPr>
           <p:nvPr>
-            <p:ph type="sldNum" idx="5" sz="quarter"/>
+            <p:ph type="sldNum" sz="quarter" idx="5"/>
           </p:nvPr>
         </p:nvSpPr>
         <p:spPr/>
@@ -1918,7 +1910,7 @@
 </file>
 
 <file path=ppt/notesSlides/notesSlide25.xml><?xml version="1.0" encoding="utf-8"?>
-<p:notes xmlns:a="http://schemas.openxmlformats.org/drawingml/2006/main" xmlns:p="http://schemas.openxmlformats.org/presentationml/2006/main" xmlns:r="http://schemas.openxmlformats.org/officeDocument/2006/relationships">
+<p:notes xmlns:a="http://schemas.openxmlformats.org/drawingml/2006/main" xmlns:r="http://schemas.openxmlformats.org/officeDocument/2006/relationships" xmlns:p="http://schemas.openxmlformats.org/presentationml/2006/main">
   <p:cSld>
     <p:spTree>
       <p:nvGrpSpPr>
@@ -1938,7 +1930,7 @@
         <p:nvSpPr>
           <p:cNvPr id="2" name="Slide Image Placeholder 1"/>
           <p:cNvSpPr>
-            <a:spLocks noGrp="1"/>
+            <a:spLocks noGrp="1" noRot="1" noChangeAspect="1"/>
           </p:cNvSpPr>
           <p:nvPr>
             <p:ph type="sldImg" idx="2"/>
@@ -1953,7 +1945,7 @@
             <a:spLocks noGrp="1"/>
           </p:cNvSpPr>
           <p:nvPr>
-            <p:ph type="body" idx="3" sz="quarter"/>
+            <p:ph type="body" sz="quarter" idx="3"/>
           </p:nvPr>
         </p:nvSpPr>
         <p:spPr/>
@@ -1994,7 +1986,7 @@
             <a:spLocks noGrp="1"/>
           </p:cNvSpPr>
           <p:nvPr>
-            <p:ph type="sldNum" idx="5" sz="quarter"/>
+            <p:ph type="sldNum" sz="quarter" idx="5"/>
           </p:nvPr>
         </p:nvSpPr>
         <p:spPr/>
@@ -2008,7 +2000,7 @@
 </file>
 
 <file path=ppt/notesSlides/notesSlide26.xml><?xml version="1.0" encoding="utf-8"?>
-<p:notes xmlns:a="http://schemas.openxmlformats.org/drawingml/2006/main" xmlns:p="http://schemas.openxmlformats.org/presentationml/2006/main" xmlns:r="http://schemas.openxmlformats.org/officeDocument/2006/relationships">
+<p:notes xmlns:a="http://schemas.openxmlformats.org/drawingml/2006/main" xmlns:r="http://schemas.openxmlformats.org/officeDocument/2006/relationships" xmlns:p="http://schemas.openxmlformats.org/presentationml/2006/main">
   <p:cSld>
     <p:spTree>
       <p:nvGrpSpPr>
@@ -2028,7 +2020,7 @@
         <p:nvSpPr>
           <p:cNvPr id="2" name="Slide Image Placeholder 1"/>
           <p:cNvSpPr>
-            <a:spLocks noGrp="1"/>
+            <a:spLocks noGrp="1" noRot="1" noChangeAspect="1"/>
           </p:cNvSpPr>
           <p:nvPr>
             <p:ph type="sldImg" idx="2"/>
@@ -2043,7 +2035,7 @@
             <a:spLocks noGrp="1"/>
           </p:cNvSpPr>
           <p:nvPr>
-            <p:ph type="body" idx="3" sz="quarter"/>
+            <p:ph type="body" sz="quarter" idx="3"/>
           </p:nvPr>
         </p:nvSpPr>
         <p:spPr/>
@@ -2064,7 +2056,7 @@
             <a:spLocks noGrp="1"/>
           </p:cNvSpPr>
           <p:nvPr>
-            <p:ph type="sldNum" idx="5" sz="quarter"/>
+            <p:ph type="sldNum" sz="quarter" idx="5"/>
           </p:nvPr>
         </p:nvSpPr>
         <p:spPr/>
@@ -2078,7 +2070,7 @@
 </file>
 
 <file path=ppt/notesSlides/notesSlide27.xml><?xml version="1.0" encoding="utf-8"?>
-<p:notes xmlns:a="http://schemas.openxmlformats.org/drawingml/2006/main" xmlns:p="http://schemas.openxmlformats.org/presentationml/2006/main" xmlns:r="http://schemas.openxmlformats.org/officeDocument/2006/relationships">
+<p:notes xmlns:a="http://schemas.openxmlformats.org/drawingml/2006/main" xmlns:r="http://schemas.openxmlformats.org/officeDocument/2006/relationships" xmlns:p="http://schemas.openxmlformats.org/presentationml/2006/main">
   <p:cSld>
     <p:spTree>
       <p:nvGrpSpPr>
@@ -2098,7 +2090,7 @@
         <p:nvSpPr>
           <p:cNvPr id="2" name="Slide Image Placeholder 1"/>
           <p:cNvSpPr>
-            <a:spLocks noGrp="1"/>
+            <a:spLocks noGrp="1" noRot="1" noChangeAspect="1"/>
           </p:cNvSpPr>
           <p:nvPr>
             <p:ph type="sldImg" idx="2"/>
@@ -2113,7 +2105,7 @@
             <a:spLocks noGrp="1"/>
           </p:cNvSpPr>
           <p:nvPr>
-            <p:ph type="body" idx="3" sz="quarter"/>
+            <p:ph type="body" sz="quarter" idx="3"/>
           </p:nvPr>
         </p:nvSpPr>
         <p:spPr/>
@@ -2144,7 +2136,7 @@
             <a:spLocks noGrp="1"/>
           </p:cNvSpPr>
           <p:nvPr>
-            <p:ph type="sldNum" idx="5" sz="quarter"/>
+            <p:ph type="sldNum" sz="quarter" idx="5"/>
           </p:nvPr>
         </p:nvSpPr>
         <p:spPr/>
@@ -2158,7 +2150,7 @@
 </file>
 
 <file path=ppt/notesSlides/notesSlide28.xml><?xml version="1.0" encoding="utf-8"?>
-<p:notes xmlns:a="http://schemas.openxmlformats.org/drawingml/2006/main" xmlns:p="http://schemas.openxmlformats.org/presentationml/2006/main" xmlns:r="http://schemas.openxmlformats.org/officeDocument/2006/relationships">
+<p:notes xmlns:a="http://schemas.openxmlformats.org/drawingml/2006/main" xmlns:r="http://schemas.openxmlformats.org/officeDocument/2006/relationships" xmlns:p="http://schemas.openxmlformats.org/presentationml/2006/main">
   <p:cSld>
     <p:spTree>
       <p:nvGrpSpPr>
@@ -2178,7 +2170,7 @@
         <p:nvSpPr>
           <p:cNvPr id="2" name="Slide Image Placeholder 1"/>
           <p:cNvSpPr>
-            <a:spLocks noGrp="1"/>
+            <a:spLocks noGrp="1" noRot="1" noChangeAspect="1"/>
           </p:cNvSpPr>
           <p:nvPr>
             <p:ph type="sldImg" idx="2"/>
@@ -2193,7 +2185,7 @@
             <a:spLocks noGrp="1"/>
           </p:cNvSpPr>
           <p:nvPr>
-            <p:ph type="body" idx="3" sz="quarter"/>
+            <p:ph type="body" sz="quarter" idx="3"/>
           </p:nvPr>
         </p:nvSpPr>
         <p:spPr/>
@@ -2224,7 +2216,7 @@
             <a:spLocks noGrp="1"/>
           </p:cNvSpPr>
           <p:nvPr>
-            <p:ph type="sldNum" idx="5" sz="quarter"/>
+            <p:ph type="sldNum" sz="quarter" idx="5"/>
           </p:nvPr>
         </p:nvSpPr>
         <p:spPr/>
@@ -2238,7 +2230,7 @@
 </file>
 
 <file path=ppt/notesSlides/notesSlide29.xml><?xml version="1.0" encoding="utf-8"?>
-<p:notes xmlns:a="http://schemas.openxmlformats.org/drawingml/2006/main" xmlns:p="http://schemas.openxmlformats.org/presentationml/2006/main" xmlns:r="http://schemas.openxmlformats.org/officeDocument/2006/relationships">
+<p:notes xmlns:a="http://schemas.openxmlformats.org/drawingml/2006/main" xmlns:r="http://schemas.openxmlformats.org/officeDocument/2006/relationships" xmlns:p="http://schemas.openxmlformats.org/presentationml/2006/main">
   <p:cSld>
     <p:spTree>
       <p:nvGrpSpPr>
@@ -2258,7 +2250,7 @@
         <p:nvSpPr>
           <p:cNvPr id="2" name="Slide Image Placeholder 1"/>
           <p:cNvSpPr>
-            <a:spLocks noGrp="1"/>
+            <a:spLocks noGrp="1" noRot="1" noChangeAspect="1"/>
           </p:cNvSpPr>
           <p:nvPr>
             <p:ph type="sldImg" idx="2"/>
@@ -2273,7 +2265,7 @@
             <a:spLocks noGrp="1"/>
           </p:cNvSpPr>
           <p:nvPr>
-            <p:ph type="body" idx="3" sz="quarter"/>
+            <p:ph type="body" sz="quarter" idx="3"/>
           </p:nvPr>
         </p:nvSpPr>
         <p:spPr/>
@@ -2304,7 +2296,7 @@
             <a:spLocks noGrp="1"/>
           </p:cNvSpPr>
           <p:nvPr>
-            <p:ph type="sldNum" idx="5" sz="quarter"/>
+            <p:ph type="sldNum" sz="quarter" idx="5"/>
           </p:nvPr>
         </p:nvSpPr>
         <p:spPr/>
@@ -2318,7 +2310,7 @@
 </file>
 
 <file path=ppt/notesSlides/notesSlide3.xml><?xml version="1.0" encoding="utf-8"?>
-<p:notes xmlns:a="http://schemas.openxmlformats.org/drawingml/2006/main" xmlns:p="http://schemas.openxmlformats.org/presentationml/2006/main" xmlns:r="http://schemas.openxmlformats.org/officeDocument/2006/relationships">
+<p:notes xmlns:a="http://schemas.openxmlformats.org/drawingml/2006/main" xmlns:r="http://schemas.openxmlformats.org/officeDocument/2006/relationships" xmlns:p="http://schemas.openxmlformats.org/presentationml/2006/main">
   <p:cSld>
     <p:spTree>
       <p:nvGrpSpPr>
@@ -2338,7 +2330,7 @@
         <p:nvSpPr>
           <p:cNvPr id="2" name="Slide Image Placeholder 1"/>
           <p:cNvSpPr>
-            <a:spLocks noGrp="1"/>
+            <a:spLocks noGrp="1" noRot="1" noChangeAspect="1"/>
           </p:cNvSpPr>
           <p:nvPr>
             <p:ph type="sldImg" idx="2"/>
@@ -2353,7 +2345,7 @@
             <a:spLocks noGrp="1"/>
           </p:cNvSpPr>
           <p:nvPr>
-            <p:ph type="body" idx="3" sz="quarter"/>
+            <p:ph type="body" sz="quarter" idx="3"/>
           </p:nvPr>
         </p:nvSpPr>
         <p:spPr/>
@@ -2394,7 +2386,7 @@
             <a:spLocks noGrp="1"/>
           </p:cNvSpPr>
           <p:nvPr>
-            <p:ph type="sldNum" idx="5" sz="quarter"/>
+            <p:ph type="sldNum" sz="quarter" idx="5"/>
           </p:nvPr>
         </p:nvSpPr>
         <p:spPr/>
@@ -2408,7 +2400,7 @@
 </file>
 
 <file path=ppt/notesSlides/notesSlide30.xml><?xml version="1.0" encoding="utf-8"?>
-<p:notes xmlns:a="http://schemas.openxmlformats.org/drawingml/2006/main" xmlns:p="http://schemas.openxmlformats.org/presentationml/2006/main" xmlns:r="http://schemas.openxmlformats.org/officeDocument/2006/relationships">
+<p:notes xmlns:a="http://schemas.openxmlformats.org/drawingml/2006/main" xmlns:r="http://schemas.openxmlformats.org/officeDocument/2006/relationships" xmlns:p="http://schemas.openxmlformats.org/presentationml/2006/main">
   <p:cSld>
     <p:spTree>
       <p:nvGrpSpPr>
@@ -2428,7 +2420,7 @@
         <p:nvSpPr>
           <p:cNvPr id="2" name="Slide Image Placeholder 1"/>
           <p:cNvSpPr>
-            <a:spLocks noGrp="1"/>
+            <a:spLocks noGrp="1" noRot="1" noChangeAspect="1"/>
           </p:cNvSpPr>
           <p:nvPr>
             <p:ph type="sldImg" idx="2"/>
@@ -2443,7 +2435,7 @@
             <a:spLocks noGrp="1"/>
           </p:cNvSpPr>
           <p:nvPr>
-            <p:ph type="body" idx="3" sz="quarter"/>
+            <p:ph type="body" sz="quarter" idx="3"/>
           </p:nvPr>
         </p:nvSpPr>
         <p:spPr/>
@@ -2479,7 +2471,7 @@
             <a:spLocks noGrp="1"/>
           </p:cNvSpPr>
           <p:nvPr>
-            <p:ph type="sldNum" idx="5" sz="quarter"/>
+            <p:ph type="sldNum" sz="quarter" idx="5"/>
           </p:nvPr>
         </p:nvSpPr>
         <p:spPr/>
@@ -2493,7 +2485,7 @@
 </file>
 
 <file path=ppt/notesSlides/notesSlide31.xml><?xml version="1.0" encoding="utf-8"?>
-<p:notes xmlns:a="http://schemas.openxmlformats.org/drawingml/2006/main" xmlns:p="http://schemas.openxmlformats.org/presentationml/2006/main" xmlns:r="http://schemas.openxmlformats.org/officeDocument/2006/relationships">
+<p:notes xmlns:a="http://schemas.openxmlformats.org/drawingml/2006/main" xmlns:r="http://schemas.openxmlformats.org/officeDocument/2006/relationships" xmlns:p="http://schemas.openxmlformats.org/presentationml/2006/main">
   <p:cSld>
     <p:spTree>
       <p:nvGrpSpPr>
@@ -2513,7 +2505,7 @@
         <p:nvSpPr>
           <p:cNvPr id="2" name="Slide Image Placeholder 1"/>
           <p:cNvSpPr>
-            <a:spLocks noGrp="1"/>
+            <a:spLocks noGrp="1" noRot="1" noChangeAspect="1"/>
           </p:cNvSpPr>
           <p:nvPr>
             <p:ph type="sldImg" idx="2"/>
@@ -2528,7 +2520,7 @@
             <a:spLocks noGrp="1"/>
           </p:cNvSpPr>
           <p:nvPr>
-            <p:ph type="body" idx="3" sz="quarter"/>
+            <p:ph type="body" sz="quarter" idx="3"/>
           </p:nvPr>
         </p:nvSpPr>
         <p:spPr/>
@@ -2554,7 +2546,7 @@
             <a:spLocks noGrp="1"/>
           </p:cNvSpPr>
           <p:nvPr>
-            <p:ph type="sldNum" idx="5" sz="quarter"/>
+            <p:ph type="sldNum" sz="quarter" idx="5"/>
           </p:nvPr>
         </p:nvSpPr>
         <p:spPr/>
@@ -2568,7 +2560,7 @@
 </file>
 
 <file path=ppt/notesSlides/notesSlide32.xml><?xml version="1.0" encoding="utf-8"?>
-<p:notes xmlns:a="http://schemas.openxmlformats.org/drawingml/2006/main" xmlns:p="http://schemas.openxmlformats.org/presentationml/2006/main" xmlns:r="http://schemas.openxmlformats.org/officeDocument/2006/relationships">
+<p:notes xmlns:a="http://schemas.openxmlformats.org/drawingml/2006/main" xmlns:r="http://schemas.openxmlformats.org/officeDocument/2006/relationships" xmlns:p="http://schemas.openxmlformats.org/presentationml/2006/main">
   <p:cSld>
     <p:spTree>
       <p:nvGrpSpPr>
@@ -2588,7 +2580,7 @@
         <p:nvSpPr>
           <p:cNvPr id="2" name="Slide Image Placeholder 1"/>
           <p:cNvSpPr>
-            <a:spLocks noGrp="1"/>
+            <a:spLocks noGrp="1" noRot="1" noChangeAspect="1"/>
           </p:cNvSpPr>
           <p:nvPr>
             <p:ph type="sldImg" idx="2"/>
@@ -2603,7 +2595,7 @@
             <a:spLocks noGrp="1"/>
           </p:cNvSpPr>
           <p:nvPr>
-            <p:ph type="body" idx="3" sz="quarter"/>
+            <p:ph type="body" sz="quarter" idx="3"/>
           </p:nvPr>
         </p:nvSpPr>
         <p:spPr/>
@@ -2624,7 +2616,7 @@
             <a:spLocks noGrp="1"/>
           </p:cNvSpPr>
           <p:nvPr>
-            <p:ph type="sldNum" idx="5" sz="quarter"/>
+            <p:ph type="sldNum" sz="quarter" idx="5"/>
           </p:nvPr>
         </p:nvSpPr>
         <p:spPr/>
@@ -2638,7 +2630,7 @@
 </file>
 
 <file path=ppt/notesSlides/notesSlide33.xml><?xml version="1.0" encoding="utf-8"?>
-<p:notes xmlns:a="http://schemas.openxmlformats.org/drawingml/2006/main" xmlns:p="http://schemas.openxmlformats.org/presentationml/2006/main" xmlns:r="http://schemas.openxmlformats.org/officeDocument/2006/relationships">
+<p:notes xmlns:a="http://schemas.openxmlformats.org/drawingml/2006/main" xmlns:r="http://schemas.openxmlformats.org/officeDocument/2006/relationships" xmlns:p="http://schemas.openxmlformats.org/presentationml/2006/main">
   <p:cSld>
     <p:spTree>
       <p:nvGrpSpPr>
@@ -2658,7 +2650,7 @@
         <p:nvSpPr>
           <p:cNvPr id="2" name="Slide Image Placeholder 1"/>
           <p:cNvSpPr>
-            <a:spLocks noGrp="1"/>
+            <a:spLocks noGrp="1" noRot="1" noChangeAspect="1"/>
           </p:cNvSpPr>
           <p:nvPr>
             <p:ph type="sldImg" idx="2"/>
@@ -2673,7 +2665,7 @@
             <a:spLocks noGrp="1"/>
           </p:cNvSpPr>
           <p:nvPr>
-            <p:ph type="body" idx="3" sz="quarter"/>
+            <p:ph type="body" sz="quarter" idx="3"/>
           </p:nvPr>
         </p:nvSpPr>
         <p:spPr/>
@@ -2709,7 +2701,7 @@
             <a:spLocks noGrp="1"/>
           </p:cNvSpPr>
           <p:nvPr>
-            <p:ph type="sldNum" idx="5" sz="quarter"/>
+            <p:ph type="sldNum" sz="quarter" idx="5"/>
           </p:nvPr>
         </p:nvSpPr>
         <p:spPr/>
@@ -2723,7 +2715,7 @@
 </file>
 
 <file path=ppt/notesSlides/notesSlide34.xml><?xml version="1.0" encoding="utf-8"?>
-<p:notes xmlns:a="http://schemas.openxmlformats.org/drawingml/2006/main" xmlns:p="http://schemas.openxmlformats.org/presentationml/2006/main" xmlns:r="http://schemas.openxmlformats.org/officeDocument/2006/relationships">
+<p:notes xmlns:a="http://schemas.openxmlformats.org/drawingml/2006/main" xmlns:r="http://schemas.openxmlformats.org/officeDocument/2006/relationships" xmlns:p="http://schemas.openxmlformats.org/presentationml/2006/main">
   <p:cSld>
     <p:spTree>
       <p:nvGrpSpPr>
@@ -2743,7 +2735,7 @@
         <p:nvSpPr>
           <p:cNvPr id="2" name="Slide Image Placeholder 1"/>
           <p:cNvSpPr>
-            <a:spLocks noGrp="1"/>
+            <a:spLocks noGrp="1" noRot="1" noChangeAspect="1"/>
           </p:cNvSpPr>
           <p:nvPr>
             <p:ph type="sldImg" idx="2"/>
@@ -2758,14 +2750,16 @@
             <a:spLocks noGrp="1"/>
           </p:cNvSpPr>
           <p:nvPr>
-            <p:ph type="body" idx="3" sz="quarter"/>
-          </p:nvPr>
-        </p:nvSpPr>
-        <p:spPr/>
-        <p:txBody>
-          <a:bodyPr/>
-          <a:lstStyle/>
-          <a:p/>
+            <p:ph type="body" sz="quarter" idx="3"/>
+          </p:nvPr>
+        </p:nvSpPr>
+        <p:spPr/>
+        <p:txBody>
+          <a:bodyPr/>
+          <a:lstStyle/>
+          <a:p>
+            <a:endParaRPr/>
+          </a:p>
         </p:txBody>
       </p:sp>
       <p:sp>
@@ -2775,7 +2769,7 @@
             <a:spLocks noGrp="1"/>
           </p:cNvSpPr>
           <p:nvPr>
-            <p:ph type="sldNum" idx="5" sz="quarter"/>
+            <p:ph type="sldNum" sz="quarter" idx="5"/>
           </p:nvPr>
         </p:nvSpPr>
         <p:spPr/>
@@ -2789,7 +2783,7 @@
 </file>
 
 <file path=ppt/notesSlides/notesSlide4.xml><?xml version="1.0" encoding="utf-8"?>
-<p:notes xmlns:a="http://schemas.openxmlformats.org/drawingml/2006/main" xmlns:p="http://schemas.openxmlformats.org/presentationml/2006/main" xmlns:r="http://schemas.openxmlformats.org/officeDocument/2006/relationships">
+<p:notes xmlns:a="http://schemas.openxmlformats.org/drawingml/2006/main" xmlns:r="http://schemas.openxmlformats.org/officeDocument/2006/relationships" xmlns:p="http://schemas.openxmlformats.org/presentationml/2006/main">
   <p:cSld>
     <p:spTree>
       <p:nvGrpSpPr>
@@ -2809,7 +2803,7 @@
         <p:nvSpPr>
           <p:cNvPr id="2" name="Slide Image Placeholder 1"/>
           <p:cNvSpPr>
-            <a:spLocks noGrp="1"/>
+            <a:spLocks noGrp="1" noRot="1" noChangeAspect="1"/>
           </p:cNvSpPr>
           <p:nvPr>
             <p:ph type="sldImg" idx="2"/>
@@ -2824,7 +2818,7 @@
             <a:spLocks noGrp="1"/>
           </p:cNvSpPr>
           <p:nvPr>
-            <p:ph type="body" idx="3" sz="quarter"/>
+            <p:ph type="body" sz="quarter" idx="3"/>
           </p:nvPr>
         </p:nvSpPr>
         <p:spPr/>
@@ -2855,7 +2849,7 @@
             <a:spLocks noGrp="1"/>
           </p:cNvSpPr>
           <p:nvPr>
-            <p:ph type="sldNum" idx="5" sz="quarter"/>
+            <p:ph type="sldNum" sz="quarter" idx="5"/>
           </p:nvPr>
         </p:nvSpPr>
         <p:spPr/>
@@ -2869,7 +2863,7 @@
 </file>
 
 <file path=ppt/notesSlides/notesSlide5.xml><?xml version="1.0" encoding="utf-8"?>
-<p:notes xmlns:a="http://schemas.openxmlformats.org/drawingml/2006/main" xmlns:p="http://schemas.openxmlformats.org/presentationml/2006/main" xmlns:r="http://schemas.openxmlformats.org/officeDocument/2006/relationships">
+<p:notes xmlns:a="http://schemas.openxmlformats.org/drawingml/2006/main" xmlns:r="http://schemas.openxmlformats.org/officeDocument/2006/relationships" xmlns:p="http://schemas.openxmlformats.org/presentationml/2006/main">
   <p:cSld>
     <p:spTree>
       <p:nvGrpSpPr>
@@ -2889,7 +2883,7 @@
         <p:nvSpPr>
           <p:cNvPr id="2" name="Slide Image Placeholder 1"/>
           <p:cNvSpPr>
-            <a:spLocks noGrp="1"/>
+            <a:spLocks noGrp="1" noRot="1" noChangeAspect="1"/>
           </p:cNvSpPr>
           <p:nvPr>
             <p:ph type="sldImg" idx="2"/>
@@ -2904,7 +2898,7 @@
             <a:spLocks noGrp="1"/>
           </p:cNvSpPr>
           <p:nvPr>
-            <p:ph type="body" idx="3" sz="quarter"/>
+            <p:ph type="body" sz="quarter" idx="3"/>
           </p:nvPr>
         </p:nvSpPr>
         <p:spPr/>
@@ -2935,7 +2929,7 @@
             <a:spLocks noGrp="1"/>
           </p:cNvSpPr>
           <p:nvPr>
-            <p:ph type="sldNum" idx="5" sz="quarter"/>
+            <p:ph type="sldNum" sz="quarter" idx="5"/>
           </p:nvPr>
         </p:nvSpPr>
         <p:spPr/>
@@ -2949,7 +2943,7 @@
 </file>
 
 <file path=ppt/notesSlides/notesSlide6.xml><?xml version="1.0" encoding="utf-8"?>
-<p:notes xmlns:a="http://schemas.openxmlformats.org/drawingml/2006/main" xmlns:p="http://schemas.openxmlformats.org/presentationml/2006/main" xmlns:r="http://schemas.openxmlformats.org/officeDocument/2006/relationships">
+<p:notes xmlns:a="http://schemas.openxmlformats.org/drawingml/2006/main" xmlns:r="http://schemas.openxmlformats.org/officeDocument/2006/relationships" xmlns:p="http://schemas.openxmlformats.org/presentationml/2006/main">
   <p:cSld>
     <p:spTree>
       <p:nvGrpSpPr>
@@ -2969,7 +2963,7 @@
         <p:nvSpPr>
           <p:cNvPr id="2" name="Slide Image Placeholder 1"/>
           <p:cNvSpPr>
-            <a:spLocks noGrp="1"/>
+            <a:spLocks noGrp="1" noRot="1" noChangeAspect="1"/>
           </p:cNvSpPr>
           <p:nvPr>
             <p:ph type="sldImg" idx="2"/>
@@ -2984,7 +2978,7 @@
             <a:spLocks noGrp="1"/>
           </p:cNvSpPr>
           <p:nvPr>
-            <p:ph type="body" idx="3" sz="quarter"/>
+            <p:ph type="body" sz="quarter" idx="3"/>
           </p:nvPr>
         </p:nvSpPr>
         <p:spPr/>
@@ -3020,7 +3014,7 @@
             <a:spLocks noGrp="1"/>
           </p:cNvSpPr>
           <p:nvPr>
-            <p:ph type="sldNum" idx="5" sz="quarter"/>
+            <p:ph type="sldNum" sz="quarter" idx="5"/>
           </p:nvPr>
         </p:nvSpPr>
         <p:spPr/>
@@ -3034,7 +3028,7 @@
 </file>
 
 <file path=ppt/notesSlides/notesSlide7.xml><?xml version="1.0" encoding="utf-8"?>
-<p:notes xmlns:a="http://schemas.openxmlformats.org/drawingml/2006/main" xmlns:p="http://schemas.openxmlformats.org/presentationml/2006/main" xmlns:r="http://schemas.openxmlformats.org/officeDocument/2006/relationships">
+<p:notes xmlns:a="http://schemas.openxmlformats.org/drawingml/2006/main" xmlns:r="http://schemas.openxmlformats.org/officeDocument/2006/relationships" xmlns:p="http://schemas.openxmlformats.org/presentationml/2006/main">
   <p:cSld>
     <p:spTree>
       <p:nvGrpSpPr>
@@ -3054,7 +3048,7 @@
         <p:nvSpPr>
           <p:cNvPr id="2" name="Slide Image Placeholder 1"/>
           <p:cNvSpPr>
-            <a:spLocks noGrp="1"/>
+            <a:spLocks noGrp="1" noRot="1" noChangeAspect="1"/>
           </p:cNvSpPr>
           <p:nvPr>
             <p:ph type="sldImg" idx="2"/>
@@ -3069,7 +3063,7 @@
             <a:spLocks noGrp="1"/>
           </p:cNvSpPr>
           <p:nvPr>
-            <p:ph type="body" idx="3" sz="quarter"/>
+            <p:ph type="body" sz="quarter" idx="3"/>
           </p:nvPr>
         </p:nvSpPr>
         <p:spPr/>
@@ -3095,7 +3089,7 @@
             <a:spLocks noGrp="1"/>
           </p:cNvSpPr>
           <p:nvPr>
-            <p:ph type="sldNum" idx="5" sz="quarter"/>
+            <p:ph type="sldNum" sz="quarter" idx="5"/>
           </p:nvPr>
         </p:nvSpPr>
         <p:spPr/>
@@ -3109,7 +3103,7 @@
 </file>
 
 <file path=ppt/notesSlides/notesSlide8.xml><?xml version="1.0" encoding="utf-8"?>
-<p:notes xmlns:a="http://schemas.openxmlformats.org/drawingml/2006/main" xmlns:p="http://schemas.openxmlformats.org/presentationml/2006/main" xmlns:r="http://schemas.openxmlformats.org/officeDocument/2006/relationships">
+<p:notes xmlns:a="http://schemas.openxmlformats.org/drawingml/2006/main" xmlns:r="http://schemas.openxmlformats.org/officeDocument/2006/relationships" xmlns:p="http://schemas.openxmlformats.org/presentationml/2006/main">
   <p:cSld>
     <p:spTree>
       <p:nvGrpSpPr>
@@ -3129,7 +3123,7 @@
         <p:nvSpPr>
           <p:cNvPr id="2" name="Slide Image Placeholder 1"/>
           <p:cNvSpPr>
-            <a:spLocks noGrp="1"/>
+            <a:spLocks noGrp="1" noRot="1" noChangeAspect="1"/>
           </p:cNvSpPr>
           <p:nvPr>
             <p:ph type="sldImg" idx="2"/>
@@ -3144,7 +3138,7 @@
             <a:spLocks noGrp="1"/>
           </p:cNvSpPr>
           <p:nvPr>
-            <p:ph type="body" idx="3" sz="quarter"/>
+            <p:ph type="body" sz="quarter" idx="3"/>
           </p:nvPr>
         </p:nvSpPr>
         <p:spPr/>
@@ -3175,7 +3169,7 @@
             <a:spLocks noGrp="1"/>
           </p:cNvSpPr>
           <p:nvPr>
-            <p:ph type="sldNum" idx="5" sz="quarter"/>
+            <p:ph type="sldNum" sz="quarter" idx="5"/>
           </p:nvPr>
         </p:nvSpPr>
         <p:spPr/>
@@ -3189,7 +3183,7 @@
 </file>
 
 <file path=ppt/notesSlides/notesSlide9.xml><?xml version="1.0" encoding="utf-8"?>
-<p:notes xmlns:a="http://schemas.openxmlformats.org/drawingml/2006/main" xmlns:p="http://schemas.openxmlformats.org/presentationml/2006/main" xmlns:r="http://schemas.openxmlformats.org/officeDocument/2006/relationships">
+<p:notes xmlns:a="http://schemas.openxmlformats.org/drawingml/2006/main" xmlns:r="http://schemas.openxmlformats.org/officeDocument/2006/relationships" xmlns:p="http://schemas.openxmlformats.org/presentationml/2006/main">
   <p:cSld>
     <p:spTree>
       <p:nvGrpSpPr>
@@ -3209,7 +3203,7 @@
         <p:nvSpPr>
           <p:cNvPr id="2" name="Slide Image Placeholder 1"/>
           <p:cNvSpPr>
-            <a:spLocks noGrp="1"/>
+            <a:spLocks noGrp="1" noRot="1" noChangeAspect="1"/>
           </p:cNvSpPr>
           <p:nvPr>
             <p:ph type="sldImg" idx="2"/>
@@ -3224,7 +3218,7 @@
             <a:spLocks noGrp="1"/>
           </p:cNvSpPr>
           <p:nvPr>
-            <p:ph type="body" idx="3" sz="quarter"/>
+            <p:ph type="body" sz="quarter" idx="3"/>
           </p:nvPr>
         </p:nvSpPr>
         <p:spPr/>
@@ -3255,7 +3249,7 @@
             <a:spLocks noGrp="1"/>
           </p:cNvSpPr>
           <p:nvPr>
-            <p:ph type="sldNum" idx="5" sz="quarter"/>
+            <p:ph type="sldNum" sz="quarter" idx="5"/>
           </p:nvPr>
         </p:nvSpPr>
         <p:spPr/>
@@ -3415,7 +3409,7 @@
           <a:p>
             <a:fld id="{030FFF5C-2D96-4D39-AE5C-E4AC30C80AB5}" type="datetimeFigureOut">
               <a:rPr lang="en-US" smtClean="0"/>
-              <a:t>10/1/2026</a:t>
+              <a:t>10/2/2026</a:t>
             </a:fld>
             <a:endParaRPr lang="en-US"/>
           </a:p>
@@ -3613,7 +3607,7 @@
           <a:p>
             <a:fld id="{030FFF5C-2D96-4D39-AE5C-E4AC30C80AB5}" type="datetimeFigureOut">
               <a:rPr lang="en-US" smtClean="0"/>
-              <a:t>10/1/2026</a:t>
+              <a:t>10/2/2026</a:t>
             </a:fld>
             <a:endParaRPr lang="en-US"/>
           </a:p>
@@ -3821,7 +3815,7 @@
           <a:p>
             <a:fld id="{030FFF5C-2D96-4D39-AE5C-E4AC30C80AB5}" type="datetimeFigureOut">
               <a:rPr lang="en-US" smtClean="0"/>
-              <a:t>10/1/2026</a:t>
+              <a:t>10/2/2026</a:t>
             </a:fld>
             <a:endParaRPr lang="en-US"/>
           </a:p>
@@ -4019,7 +4013,7 @@
           <a:p>
             <a:fld id="{030FFF5C-2D96-4D39-AE5C-E4AC30C80AB5}" type="datetimeFigureOut">
               <a:rPr lang="en-US" smtClean="0"/>
-              <a:t>10/1/2026</a:t>
+              <a:t>10/2/2026</a:t>
             </a:fld>
             <a:endParaRPr lang="en-US"/>
           </a:p>
@@ -4294,7 +4288,7 @@
           <a:p>
             <a:fld id="{030FFF5C-2D96-4D39-AE5C-E4AC30C80AB5}" type="datetimeFigureOut">
               <a:rPr lang="en-US" smtClean="0"/>
-              <a:t>10/1/2026</a:t>
+              <a:t>10/2/2026</a:t>
             </a:fld>
             <a:endParaRPr lang="en-US"/>
           </a:p>
@@ -4559,7 +4553,7 @@
           <a:p>
             <a:fld id="{030FFF5C-2D96-4D39-AE5C-E4AC30C80AB5}" type="datetimeFigureOut">
               <a:rPr lang="en-US" smtClean="0"/>
-              <a:t>10/1/2026</a:t>
+              <a:t>10/2/2026</a:t>
             </a:fld>
             <a:endParaRPr lang="en-US"/>
           </a:p>
@@ -4971,7 +4965,7 @@
           <a:p>
             <a:fld id="{030FFF5C-2D96-4D39-AE5C-E4AC30C80AB5}" type="datetimeFigureOut">
               <a:rPr lang="en-US" smtClean="0"/>
-              <a:t>10/1/2026</a:t>
+              <a:t>10/2/2026</a:t>
             </a:fld>
             <a:endParaRPr lang="en-US"/>
           </a:p>
@@ -5112,7 +5106,7 @@
           <a:p>
             <a:fld id="{030FFF5C-2D96-4D39-AE5C-E4AC30C80AB5}" type="datetimeFigureOut">
               <a:rPr lang="en-US" smtClean="0"/>
-              <a:t>10/1/2026</a:t>
+              <a:t>10/2/2026</a:t>
             </a:fld>
             <a:endParaRPr lang="en-US"/>
           </a:p>
@@ -5225,7 +5219,7 @@
           <a:p>
             <a:fld id="{030FFF5C-2D96-4D39-AE5C-E4AC30C80AB5}" type="datetimeFigureOut">
               <a:rPr lang="en-US" smtClean="0"/>
-              <a:t>10/1/2026</a:t>
+              <a:t>10/2/2026</a:t>
             </a:fld>
             <a:endParaRPr lang="en-US"/>
           </a:p>
@@ -5536,7 +5530,7 @@
           <a:p>
             <a:fld id="{030FFF5C-2D96-4D39-AE5C-E4AC30C80AB5}" type="datetimeFigureOut">
               <a:rPr lang="en-US" smtClean="0"/>
-              <a:t>10/1/2026</a:t>
+              <a:t>10/2/2026</a:t>
             </a:fld>
             <a:endParaRPr lang="en-US"/>
           </a:p>
@@ -5824,7 +5818,7 @@
           <a:p>
             <a:fld id="{030FFF5C-2D96-4D39-AE5C-E4AC30C80AB5}" type="datetimeFigureOut">
               <a:rPr lang="en-US" smtClean="0"/>
-              <a:t>10/1/2026</a:t>
+              <a:t>10/2/2026</a:t>
             </a:fld>
             <a:endParaRPr lang="en-US"/>
           </a:p>
@@ -6065,7 +6059,7 @@
           <a:p>
             <a:fld id="{030FFF5C-2D96-4D39-AE5C-E4AC30C80AB5}" type="datetimeFigureOut">
               <a:rPr lang="en-US" smtClean="0"/>
-              <a:t>10/1/2026</a:t>
+              <a:t>10/2/2026</a:t>
             </a:fld>
             <a:endParaRPr lang="en-US"/>
           </a:p>
@@ -6587,7 +6581,7 @@
 </file>
 
 <file path=ppt/slides/slide10.xml><?xml version="1.0" encoding="utf-8"?>
-<p:sld xmlns:a="http://schemas.openxmlformats.org/drawingml/2006/main" xmlns:p="http://schemas.openxmlformats.org/presentationml/2006/main" xmlns:r="http://schemas.openxmlformats.org/officeDocument/2006/relationships">
+<p:sld xmlns:a="http://schemas.openxmlformats.org/drawingml/2006/main" xmlns:r="http://schemas.openxmlformats.org/officeDocument/2006/relationships" xmlns:p="http://schemas.openxmlformats.org/presentationml/2006/main">
   <p:cSld>
     <p:spTree>
       <p:nvGrpSpPr>
@@ -6595,7 +6589,14 @@
         <p:cNvGrpSpPr/>
         <p:nvPr/>
       </p:nvGrpSpPr>
-      <p:grpSpPr/>
+      <p:grpSpPr>
+        <a:xfrm>
+          <a:off x="0" y="0"/>
+          <a:ext cx="0" cy="0"/>
+          <a:chOff x="0" y="0"/>
+          <a:chExt cx="0" cy="0"/>
+        </a:xfrm>
+      </p:grpSpPr>
       <p:sp>
         <p:nvSpPr>
           <p:cNvPr id="2" name="Title 1"/>
@@ -6638,7 +6639,6 @@
           <a:bodyPr/>
           <a:lstStyle/>
           <a:p>
-            <a:pPr/>
             <a:r>
               <a:rPr sz="2400"/>
               <a:t>① バブル領域を外すと 19.0σ → 5.0σ に落ちる</a:t>
@@ -6652,7 +6652,6 @@
             </a:r>
           </a:p>
           <a:p>
-            <a:pPr/>
             <a:r>
               <a:rPr sz="2400"/>
               <a:t>② 何も無い空でも、最大 4.5σ が出る</a:t>
@@ -6666,7 +6665,6 @@
             </a:r>
           </a:p>
           <a:p>
-            <a:pPr/>
             <a:r>
               <a:rPr sz="2400"/>
               <a:t>③ 7/23 に出した 19.1σ が再現できない</a:t>
@@ -6680,7 +6678,6 @@
             </a:r>
           </a:p>
           <a:p>
-            <a:pPr/>
             <a:r>
               <a:rPr sz="2400"/>
               <a:t>→ 次から、1 つずつ調べた結果</a:t>
@@ -6697,7 +6694,7 @@
 </file>
 
 <file path=ppt/slides/slide11.xml><?xml version="1.0" encoding="utf-8"?>
-<p:sld xmlns:a="http://schemas.openxmlformats.org/drawingml/2006/main" xmlns:p="http://schemas.openxmlformats.org/presentationml/2006/main" xmlns:r="http://schemas.openxmlformats.org/officeDocument/2006/relationships">
+<p:sld xmlns:a="http://schemas.openxmlformats.org/drawingml/2006/main" xmlns:r="http://schemas.openxmlformats.org/officeDocument/2006/relationships" xmlns:p="http://schemas.openxmlformats.org/presentationml/2006/main">
   <p:cSld>
     <p:spTree>
       <p:nvGrpSpPr>
@@ -6705,7 +6702,14 @@
         <p:cNvGrpSpPr/>
         <p:nvPr/>
       </p:nvGrpSpPr>
-      <p:grpSpPr/>
+      <p:grpSpPr>
+        <a:xfrm>
+          <a:off x="0" y="0"/>
+          <a:ext cx="0" cy="0"/>
+          <a:chOff x="0" y="0"/>
+          <a:chExt cx="0" cy="0"/>
+        </a:xfrm>
+      </p:grpSpPr>
       <p:sp>
         <p:nvSpPr>
           <p:cNvPr id="2" name="Title 1"/>
@@ -6748,14 +6752,12 @@
           <a:bodyPr/>
           <a:lstStyle/>
           <a:p>
-            <a:pPr/>
             <a:r>
               <a:rPr sz="2200"/>
               <a:t>フィッシャー情報：データがパラメータをどれだけ決められるか</a:t>
             </a:r>
           </a:p>
           <a:p>
-            <a:pPr/>
             <a:r>
               <a:rPr sz="2200"/>
               <a:t>ICS など他の成分では説明できない「ハローだけの手がかり」を、空の場所ごとに計算</a:t>
@@ -6769,21 +6771,18 @@
             </a:r>
           </a:p>
           <a:p>
-            <a:pPr/>
             <a:r>
               <a:rPr sz="2200"/>
               <a:t>手がかりの減り方だけで予測すると 6.4σ、実測 5.0σ</a:t>
             </a:r>
           </a:p>
           <a:p>
-            <a:pPr/>
             <a:r>
               <a:rPr sz="2200"/>
               <a:t>同じ形の領域を横にずらして外すと 13〜16σ（予測とも一致）</a:t>
             </a:r>
           </a:p>
           <a:p>
-            <a:pPr/>
             <a:r>
               <a:rPr sz="2200"/>
               <a:t>→ 19 → 5σ は「手がかりを捨てた」から。汚染の証拠ではない</a:t>
@@ -6800,7 +6799,7 @@
 </file>
 
 <file path=ppt/slides/slide12.xml><?xml version="1.0" encoding="utf-8"?>
-<p:sld xmlns:a="http://schemas.openxmlformats.org/drawingml/2006/main" xmlns:p="http://schemas.openxmlformats.org/presentationml/2006/main" xmlns:r="http://schemas.openxmlformats.org/officeDocument/2006/relationships">
+<p:sld xmlns:a="http://schemas.openxmlformats.org/drawingml/2006/main" xmlns:r="http://schemas.openxmlformats.org/officeDocument/2006/relationships" xmlns:p="http://schemas.openxmlformats.org/presentationml/2006/main">
   <p:cSld>
     <p:spTree>
       <p:nvGrpSpPr>
@@ -6808,7 +6807,14 @@
         <p:cNvGrpSpPr/>
         <p:nvPr/>
       </p:nvGrpSpPr>
-      <p:grpSpPr/>
+      <p:grpSpPr>
+        <a:xfrm>
+          <a:off x="0" y="0"/>
+          <a:ext cx="0" cy="0"/>
+          <a:chOff x="0" y="0"/>
+          <a:chExt cx="0" cy="0"/>
+        </a:xfrm>
+      </p:grpSpPr>
       <p:sp>
         <p:nvSpPr>
           <p:cNvPr id="2" name="Title 1"/>
@@ -6851,7 +6857,6 @@
           <a:bodyPr/>
           <a:lstStyle/>
           <a:p>
-            <a:pPr/>
             <a:r>
               <a:rPr sz="2200"/>
               <a:t>ICS をバブルの内と外で別々の明るさにして当てはめた</a:t>
@@ -6865,7 +6870,6 @@
             </a:r>
           </a:p>
           <a:p>
-            <a:pPr/>
             <a:r>
               <a:rPr sz="2200"/>
               <a:t>ICS の計算の近似（等方近似）を直しても 1.1〜1.3 倍</a:t>
@@ -6879,7 +6883,6 @@
             </a:r>
           </a:p>
           <a:p>
-            <a:pPr/>
             <a:r>
               <a:rPr sz="2200"/>
               <a:t>ICS を 3 種類に分けて、それぞれ自由に動かしても</a:t>
@@ -6893,7 +6896,6 @@
             </a:r>
           </a:p>
           <a:p>
-            <a:pPr/>
             <a:r>
               <a:rPr sz="2200"/>
               <a:t>→ ICS の「明るさ」の間違いでは、ハローを説明できない</a:t>
@@ -6930,7 +6932,7 @@
           <a:lstStyle/>
           <a:p>
             <a:r>
-              <a:rPr lang="en-US" b="1" sz="1400"/>
+              <a:rPr lang="en-US" sz="1400" b="1"/>
               <a:t>Reference:</a:t>
             </a:r>
             <a:r>
@@ -6950,7 +6952,7 @@
 </file>
 
 <file path=ppt/slides/slide13.xml><?xml version="1.0" encoding="utf-8"?>
-<p:sld xmlns:a="http://schemas.openxmlformats.org/drawingml/2006/main" xmlns:p="http://schemas.openxmlformats.org/presentationml/2006/main" xmlns:r="http://schemas.openxmlformats.org/officeDocument/2006/relationships">
+<p:sld xmlns:a="http://schemas.openxmlformats.org/drawingml/2006/main" xmlns:r="http://schemas.openxmlformats.org/officeDocument/2006/relationships" xmlns:p="http://schemas.openxmlformats.org/presentationml/2006/main">
   <p:cSld>
     <p:spTree>
       <p:nvGrpSpPr>
@@ -6958,7 +6960,14 @@
         <p:cNvGrpSpPr/>
         <p:nvPr/>
       </p:nvGrpSpPr>
-      <p:grpSpPr/>
+      <p:grpSpPr>
+        <a:xfrm>
+          <a:off x="0" y="0"/>
+          <a:ext cx="0" cy="0"/>
+          <a:chOff x="0" y="0"/>
+          <a:chExt cx="0" cy="0"/>
+        </a:xfrm>
+      </p:grpSpPr>
       <p:sp>
         <p:nvSpPr>
           <p:cNvPr id="2" name="Title 1"/>
@@ -7001,14 +7010,12 @@
           <a:bodyPr/>
           <a:lstStyle/>
           <a:p>
-            <a:pPr/>
             <a:r>
               <a:rPr sz="2200"/>
               <a:t>何も無い空 23 か所で、天の川と同じ解析をした</a:t>
             </a:r>
           </a:p>
           <a:p>
-            <a:pPr/>
             <a:r>
               <a:rPr sz="2200"/>
               <a:t>本物の信号が無ければ、σ は「平均 0、ばらつき 1」になるはず</a:t>
@@ -7022,7 +7029,6 @@
             </a:r>
           </a:p>
           <a:p>
-            <a:pPr/>
             <a:r>
               <a:rPr sz="2200"/>
               <a:t>実際のばらつき：1.26（95% 区間 1.14–1.39）</a:t>
@@ -7036,7 +7042,6 @@
             </a:r>
           </a:p>
           <a:p>
-            <a:pPr/>
             <a:r>
               <a:rPr sz="2200"/>
               <a:t>19.0σ を較正すると 19.0 ÷ 1.26 ≈ 15σ（13.7–16.6σ）</a:t>
@@ -7073,7 +7078,7 @@
           <a:lstStyle/>
           <a:p>
             <a:r>
-              <a:rPr lang="en-US" b="1" sz="1400"/>
+              <a:rPr lang="en-US" sz="1400" b="1"/>
               <a:t>Reference:</a:t>
             </a:r>
             <a:r>
@@ -7093,7 +7098,7 @@
 </file>
 
 <file path=ppt/slides/slide14.xml><?xml version="1.0" encoding="utf-8"?>
-<p:sld xmlns:a="http://schemas.openxmlformats.org/drawingml/2006/main" xmlns:p="http://schemas.openxmlformats.org/presentationml/2006/main" xmlns:r="http://schemas.openxmlformats.org/officeDocument/2006/relationships">
+<p:sld xmlns:a="http://schemas.openxmlformats.org/drawingml/2006/main" xmlns:r="http://schemas.openxmlformats.org/officeDocument/2006/relationships" xmlns:p="http://schemas.openxmlformats.org/presentationml/2006/main">
   <p:cSld>
     <p:spTree>
       <p:nvGrpSpPr>
@@ -7101,7 +7106,14 @@
         <p:cNvGrpSpPr/>
         <p:nvPr/>
       </p:nvGrpSpPr>
-      <p:grpSpPr/>
+      <p:grpSpPr>
+        <a:xfrm>
+          <a:off x="0" y="0"/>
+          <a:ext cx="0" cy="0"/>
+          <a:chOff x="0" y="0"/>
+          <a:chExt cx="0" cy="0"/>
+        </a:xfrm>
+      </p:grpSpPr>
       <p:sp>
         <p:nvSpPr>
           <p:cNvPr id="2" name="Title 1"/>
@@ -7133,7 +7145,7 @@
           <p:nvPr/>
         </p:nvPicPr>
         <p:blipFill>
-          <a:blip r:embed="rId2"/>
+          <a:blip r:embed="rId3"/>
           <a:stretch>
             <a:fillRect/>
           </a:stretch>
@@ -7186,7 +7198,7 @@
 </file>
 
 <file path=ppt/slides/slide15.xml><?xml version="1.0" encoding="utf-8"?>
-<p:sld xmlns:a="http://schemas.openxmlformats.org/drawingml/2006/main" xmlns:p="http://schemas.openxmlformats.org/presentationml/2006/main" xmlns:r="http://schemas.openxmlformats.org/officeDocument/2006/relationships">
+<p:sld xmlns:a="http://schemas.openxmlformats.org/drawingml/2006/main" xmlns:r="http://schemas.openxmlformats.org/officeDocument/2006/relationships" xmlns:p="http://schemas.openxmlformats.org/presentationml/2006/main">
   <p:cSld>
     <p:spTree>
       <p:nvGrpSpPr>
@@ -7194,7 +7206,14 @@
         <p:cNvGrpSpPr/>
         <p:nvPr/>
       </p:nvGrpSpPr>
-      <p:grpSpPr/>
+      <p:grpSpPr>
+        <a:xfrm>
+          <a:off x="0" y="0"/>
+          <a:ext cx="0" cy="0"/>
+          <a:chOff x="0" y="0"/>
+          <a:chExt cx="0" cy="0"/>
+        </a:xfrm>
+      </p:grpSpPr>
       <p:sp>
         <p:nvSpPr>
           <p:cNvPr id="2" name="Title 1"/>
@@ -7237,28 +7256,24 @@
           <a:bodyPr/>
           <a:lstStyle/>
           <a:p>
-            <a:pPr/>
             <a:r>
               <a:rPr sz="2400"/>
               <a:t>7/23 の計算の直後にコードを直していて、当時の状態が残っていなかった</a:t>
             </a:r>
           </a:p>
           <a:p>
-            <a:pPr/>
             <a:r>
               <a:rPr sz="2400"/>
               <a:t>今のコードは、何度計算しても同じ答えになる（10/1 に確認）</a:t>
             </a:r>
           </a:p>
           <a:p>
-            <a:pPr/>
             <a:r>
               <a:rPr sz="2400"/>
               <a:t>結果ファイルに、コードの版と設定を自動で記録するようにした</a:t>
             </a:r>
           </a:p>
           <a:p>
-            <a:pPr/>
             <a:r>
               <a:rPr sz="2400"/>
               <a:t>→ 主結果を 19.0σ（10/1 の再計算）に統一</a:t>
@@ -7275,7 +7290,7 @@
 </file>
 
 <file path=ppt/slides/slide16.xml><?xml version="1.0" encoding="utf-8"?>
-<p:sld xmlns:a="http://schemas.openxmlformats.org/drawingml/2006/main" xmlns:p="http://schemas.openxmlformats.org/presentationml/2006/main" xmlns:r="http://schemas.openxmlformats.org/officeDocument/2006/relationships">
+<p:sld xmlns:a="http://schemas.openxmlformats.org/drawingml/2006/main" xmlns:r="http://schemas.openxmlformats.org/officeDocument/2006/relationships" xmlns:p="http://schemas.openxmlformats.org/presentationml/2006/main">
   <p:cSld>
     <p:spTree>
       <p:nvGrpSpPr>
@@ -7283,7 +7298,14 @@
         <p:cNvGrpSpPr/>
         <p:nvPr/>
       </p:nvGrpSpPr>
-      <p:grpSpPr/>
+      <p:grpSpPr>
+        <a:xfrm>
+          <a:off x="0" y="0"/>
+          <a:ext cx="0" cy="0"/>
+          <a:chOff x="0" y="0"/>
+          <a:chExt cx="0" cy="0"/>
+        </a:xfrm>
+      </p:grpSpPr>
       <p:sp>
         <p:nvSpPr>
           <p:cNvPr id="2" name="Title 1"/>
@@ -7326,21 +7348,18 @@
           <a:bodyPr/>
           <a:lstStyle/>
           <a:p>
-            <a:pPr/>
             <a:r>
               <a:rPr sz="2400"/>
               <a:t>ICS の明るさ・バブル・計算の近似の間違いでは、超過を説明できない</a:t>
             </a:r>
           </a:p>
           <a:p>
-            <a:pPr/>
             <a:r>
               <a:rPr sz="2400"/>
               <a:t>σ は 1.26 倍の過大評価 → 較正すると約 15σ</a:t>
             </a:r>
           </a:p>
           <a:p>
-            <a:pPr/>
             <a:r>
               <a:rPr sz="2400"/>
               <a:t>ただし、暗黒物質の証拠ではない</a:t>
@@ -7354,7 +7373,6 @@
             </a:r>
           </a:p>
           <a:p>
-            <a:pPr/>
             <a:r>
               <a:rPr sz="2400"/>
               <a:t>→ 独立な確認として、矮小銀河を見る</a:t>
@@ -7371,7 +7389,7 @@
 </file>
 
 <file path=ppt/slides/slide17.xml><?xml version="1.0" encoding="utf-8"?>
-<p:sld xmlns:a="http://schemas.openxmlformats.org/drawingml/2006/main" xmlns:p="http://schemas.openxmlformats.org/presentationml/2006/main" xmlns:r="http://schemas.openxmlformats.org/officeDocument/2006/relationships">
+<p:sld xmlns:a="http://schemas.openxmlformats.org/drawingml/2006/main" xmlns:r="http://schemas.openxmlformats.org/officeDocument/2006/relationships" xmlns:p="http://schemas.openxmlformats.org/presentationml/2006/main">
   <p:cSld>
     <p:spTree>
       <p:nvGrpSpPr>
@@ -7379,7 +7397,14 @@
         <p:cNvGrpSpPr/>
         <p:nvPr/>
       </p:nvGrpSpPr>
-      <p:grpSpPr/>
+      <p:grpSpPr>
+        <a:xfrm>
+          <a:off x="0" y="0"/>
+          <a:ext cx="0" cy="0"/>
+          <a:chOff x="0" y="0"/>
+          <a:chExt cx="0" cy="0"/>
+        </a:xfrm>
+      </p:grpSpPr>
       <p:sp>
         <p:nvSpPr>
           <p:cNvPr id="2" name="Title 1"/>
@@ -7422,7 +7447,6 @@
           <a:bodyPr/>
           <a:lstStyle/>
           <a:p>
-            <a:pPr/>
             <a:r>
               <a:rPr sz="2400"/>
               <a:t>矮小銀河：天の川のまわりの小さな銀河</a:t>
@@ -7436,14 +7460,12 @@
             </a:r>
           </a:p>
           <a:p>
-            <a:pPr/>
             <a:r>
               <a:rPr sz="2400"/>
               <a:t>暗黒物質なら、矮小銀河からも同じ 20 GeV の光が来るはず</a:t>
             </a:r>
           </a:p>
           <a:p>
-            <a:pPr/>
             <a:r>
               <a:rPr sz="2400"/>
               <a:t>同じ手法を、各天体のまわり半径 10° に使った</a:t>
@@ -7457,7 +7479,6 @@
             </a:r>
           </a:p>
           <a:p>
-            <a:pPr/>
             <a:r>
               <a:rPr sz="2400"/>
               <a:t>矮小銀河は小さい（0.2〜0.4°）ので、広がった ICS とは縮退しない</a:t>
@@ -7494,7 +7515,7 @@
           <a:lstStyle/>
           <a:p>
             <a:r>
-              <a:rPr lang="en-US" b="1" sz="1400"/>
+              <a:rPr lang="en-US" sz="1400" b="1"/>
               <a:t>Reference:</a:t>
             </a:r>
             <a:r>
@@ -7514,7 +7535,7 @@
 </file>
 
 <file path=ppt/slides/slide18.xml><?xml version="1.0" encoding="utf-8"?>
-<p:sld xmlns:a="http://schemas.openxmlformats.org/drawingml/2006/main" xmlns:p="http://schemas.openxmlformats.org/presentationml/2006/main" xmlns:r="http://schemas.openxmlformats.org/officeDocument/2006/relationships">
+<p:sld xmlns:a="http://schemas.openxmlformats.org/drawingml/2006/main" xmlns:r="http://schemas.openxmlformats.org/officeDocument/2006/relationships" xmlns:p="http://schemas.openxmlformats.org/presentationml/2006/main">
   <p:cSld>
     <p:spTree>
       <p:nvGrpSpPr>
@@ -7522,7 +7543,14 @@
         <p:cNvGrpSpPr/>
         <p:nvPr/>
       </p:nvGrpSpPr>
-      <p:grpSpPr/>
+      <p:grpSpPr>
+        <a:xfrm>
+          <a:off x="0" y="0"/>
+          <a:ext cx="0" cy="0"/>
+          <a:chOff x="0" y="0"/>
+          <a:chExt cx="0" cy="0"/>
+        </a:xfrm>
+      </p:grpSpPr>
       <p:sp>
         <p:nvSpPr>
           <p:cNvPr id="2" name="Title 1"/>
@@ -7565,21 +7593,18 @@
           <a:bodyPr/>
           <a:lstStyle/>
           <a:p>
-            <a:pPr/>
             <a:r>
               <a:rPr sz="2400"/>
               <a:t>対消滅の明るさ：F = ⟨σv⟩ / (8π m²) × dN/dE × J</a:t>
             </a:r>
           </a:p>
           <a:p>
-            <a:pPr/>
             <a:r>
               <a:rPr sz="2400"/>
               <a:t>J ファクター = 暗黒物質の密度の 2 乗を、視線方向に足し合わせた量</a:t>
             </a:r>
           </a:p>
           <a:p>
-            <a:pPr/>
             <a:r>
               <a:rPr sz="2400"/>
               <a:t>天の川と矮小銀河で粒子は同じ → 比をとると J の比だけが残る</a:t>
@@ -7593,14 +7618,12 @@
             </a:r>
           </a:p>
           <a:p>
-            <a:pPr/>
             <a:r>
               <a:rPr sz="2400"/>
               <a:t>粒子の質量などを仮定せずに「何σ見えるはずか」が出る</a:t>
             </a:r>
           </a:p>
           <a:p>
-            <a:pPr/>
             <a:r>
               <a:rPr sz="2400"/>
               <a:t>矮小銀河の J は、星の動きから推定する</a:t>
@@ -7637,7 +7660,7 @@
           <a:lstStyle/>
           <a:p>
             <a:r>
-              <a:rPr lang="en-US" b="1" sz="1400"/>
+              <a:rPr lang="en-US" sz="1400" b="1"/>
               <a:t>Reference:</a:t>
             </a:r>
             <a:r>
@@ -7657,7 +7680,7 @@
 </file>
 
 <file path=ppt/slides/slide19.xml><?xml version="1.0" encoding="utf-8"?>
-<p:sld xmlns:a="http://schemas.openxmlformats.org/drawingml/2006/main" xmlns:p="http://schemas.openxmlformats.org/presentationml/2006/main" xmlns:r="http://schemas.openxmlformats.org/officeDocument/2006/relationships">
+<p:sld xmlns:a="http://schemas.openxmlformats.org/drawingml/2006/main" xmlns:r="http://schemas.openxmlformats.org/officeDocument/2006/relationships" xmlns:p="http://schemas.openxmlformats.org/presentationml/2006/main">
   <p:cSld>
     <p:spTree>
       <p:nvGrpSpPr>
@@ -7665,7 +7688,14 @@
         <p:cNvGrpSpPr/>
         <p:nvPr/>
       </p:nvGrpSpPr>
-      <p:grpSpPr/>
+      <p:grpSpPr>
+        <a:xfrm>
+          <a:off x="0" y="0"/>
+          <a:ext cx="0" cy="0"/>
+          <a:chOff x="0" y="0"/>
+          <a:chExt cx="0" cy="0"/>
+        </a:xfrm>
+      </p:grpSpPr>
       <p:sp>
         <p:nvSpPr>
           <p:cNvPr id="2" name="Title 1"/>
@@ -7697,7 +7727,7 @@
           <p:nvPr/>
         </p:nvPicPr>
         <p:blipFill>
-          <a:blip r:embed="rId2"/>
+          <a:blip r:embed="rId3"/>
           <a:stretch>
             <a:fillRect/>
           </a:stretch>
@@ -7750,7 +7780,7 @@
 </file>
 
 <file path=ppt/slides/slide2.xml><?xml version="1.0" encoding="utf-8"?>
-<p:sld xmlns:a="http://schemas.openxmlformats.org/drawingml/2006/main" xmlns:p="http://schemas.openxmlformats.org/presentationml/2006/main" xmlns:r="http://schemas.openxmlformats.org/officeDocument/2006/relationships">
+<p:sld xmlns:a="http://schemas.openxmlformats.org/drawingml/2006/main" xmlns:r="http://schemas.openxmlformats.org/officeDocument/2006/relationships" xmlns:p="http://schemas.openxmlformats.org/presentationml/2006/main">
   <p:cSld>
     <p:spTree>
       <p:nvGrpSpPr>
@@ -7758,7 +7788,14 @@
         <p:cNvGrpSpPr/>
         <p:nvPr/>
       </p:nvGrpSpPr>
-      <p:grpSpPr/>
+      <p:grpSpPr>
+        <a:xfrm>
+          <a:off x="0" y="0"/>
+          <a:ext cx="0" cy="0"/>
+          <a:chOff x="0" y="0"/>
+          <a:chExt cx="0" cy="0"/>
+        </a:xfrm>
+      </p:grpSpPr>
       <p:sp>
         <p:nvSpPr>
           <p:cNvPr id="2" name="Title 1"/>
@@ -7775,9 +7812,10 @@
           <a:lstStyle/>
           <a:p>
             <a:r>
-              <a:rPr sz="3400"/>
-              <a:t>研究の目的</a:t>
-            </a:r>
+              <a:rPr lang="ja-JP" altLang="en-US" sz="3400" b="1"/>
+              <a:t>卒業研究の目的</a:t>
+            </a:r>
+            <a:endParaRPr sz="3400" b="1"/>
           </a:p>
         </p:txBody>
       </p:sp>
@@ -7794,25 +7832,48 @@
         <p:spPr>
           <a:xfrm>
             <a:off x="841248" y="1463040"/>
-            <a:ext cx="10515600" cy="4114800"/>
+            <a:ext cx="11089306" cy="3076876"/>
           </a:xfrm>
         </p:spPr>
         <p:txBody>
-          <a:bodyPr/>
-          <a:lstStyle/>
-          <a:p>
-            <a:pPr/>
+          <a:bodyPr>
+            <a:normAutofit/>
+          </a:bodyPr>
+          <a:lstStyle/>
+          <a:p>
             <a:r>
               <a:rPr sz="2400"/>
-              <a:t>暗黒物質どうしがぶつかると消えて、ガンマ線を出すと考えられている（対消滅）</a:t>
-            </a:r>
-          </a:p>
-          <a:p>
-            <a:pPr/>
+              <a:t>暗黒物質どうしがぶつかると消えて、ガンマ線を出すと考えられている</a:t>
+            </a:r>
+            <a:endParaRPr lang="en-US" sz="2400"/>
+          </a:p>
+          <a:p>
+            <a:pPr marL="0" indent="0">
+              <a:buNone/>
+            </a:pPr>
+            <a:r>
+              <a:rPr sz="2400"/>
+              <a:t>（対消滅）</a:t>
+            </a:r>
+          </a:p>
+          <a:p>
             <a:r>
               <a:rPr sz="2400"/>
               <a:t>天の川は暗黒物質の「ハロー」に包まれている</a:t>
             </a:r>
+            <a:r>
+              <a:rPr lang="ja-JP" altLang="en-US" sz="2400"/>
+              <a:t>のではないか→（</a:t>
+            </a:r>
+            <a:r>
+              <a:rPr lang="en-US" altLang="ja-JP" sz="2400"/>
+              <a:t>NFW</a:t>
+            </a:r>
+            <a:r>
+              <a:rPr lang="ja-JP" altLang="en-US" sz="2400"/>
+              <a:t>）</a:t>
+            </a:r>
+            <a:endParaRPr sz="2400"/>
           </a:p>
           <a:p>
             <a:pPr lvl="1"/>
@@ -7822,18 +7883,32 @@
             </a:r>
           </a:p>
           <a:p>
-            <a:pPr/>
             <a:r>
               <a:rPr sz="2400"/>
               <a:t>Totani (2025)：20 GeV 付近にハロー型の超過を報告（13–19σ）</a:t>
             </a:r>
           </a:p>
           <a:p>
-            <a:pPr/>
-            <a:r>
-              <a:rPr sz="2400"/>
-              <a:t>僕の研究：これを自分で再現し、本物かどうか確かめる</a:t>
-            </a:r>
+            <a:r>
+              <a:rPr sz="2400" b="1"/>
+              <a:t>研究</a:t>
+            </a:r>
+            <a:r>
+              <a:rPr lang="ja-JP" altLang="en-US" sz="2400" b="1"/>
+              <a:t>卒業</a:t>
+            </a:r>
+            <a:r>
+              <a:rPr sz="2400" b="1"/>
+              <a:t>：これを自分で再現し、本物かどうか確かめる</a:t>
+            </a:r>
+            <a:endParaRPr lang="en-US" sz="2400" b="1"/>
+          </a:p>
+          <a:p>
+            <a:r>
+              <a:rPr lang="ja-JP" altLang="en-US" sz="2400" b="1"/>
+              <a:t>　　　→矮小銀河やほかの銀河にも適用したらどうなるか（拡張要素の原案）</a:t>
+            </a:r>
+            <a:endParaRPr sz="2400" b="1"/>
           </a:p>
         </p:txBody>
       </p:sp>
@@ -7866,7 +7941,7 @@
           <a:lstStyle/>
           <a:p>
             <a:r>
-              <a:rPr lang="en-US" b="1" sz="1400"/>
+              <a:rPr lang="en-US" sz="1400" b="1"/>
               <a:t>Reference:</a:t>
             </a:r>
             <a:r>
@@ -7886,7 +7961,7 @@
 </file>
 
 <file path=ppt/slides/slide20.xml><?xml version="1.0" encoding="utf-8"?>
-<p:sld xmlns:a="http://schemas.openxmlformats.org/drawingml/2006/main" xmlns:p="http://schemas.openxmlformats.org/presentationml/2006/main" xmlns:r="http://schemas.openxmlformats.org/officeDocument/2006/relationships">
+<p:sld xmlns:a="http://schemas.openxmlformats.org/drawingml/2006/main" xmlns:r="http://schemas.openxmlformats.org/officeDocument/2006/relationships" xmlns:p="http://schemas.openxmlformats.org/presentationml/2006/main">
   <p:cSld>
     <p:spTree>
       <p:nvGrpSpPr>
@@ -7894,7 +7969,14 @@
         <p:cNvGrpSpPr/>
         <p:nvPr/>
       </p:nvGrpSpPr>
-      <p:grpSpPr/>
+      <p:grpSpPr>
+        <a:xfrm>
+          <a:off x="0" y="0"/>
+          <a:ext cx="0" cy="0"/>
+          <a:chOff x="0" y="0"/>
+          <a:chExt cx="0" cy="0"/>
+        </a:xfrm>
+      </p:grpSpPr>
       <p:sp>
         <p:nvSpPr>
           <p:cNvPr id="2" name="Title 1"/>
@@ -7937,14 +8019,12 @@
           <a:bodyPr/>
           <a:lstStyle/>
           <a:p>
-            <a:pPr/>
             <a:r>
               <a:rPr sz="2400"/>
               <a:t>1 個ずつでは弱いので、J が求まる 43 天体をまとめる</a:t>
             </a:r>
           </a:p>
           <a:p>
-            <a:pPr/>
             <a:r>
               <a:rPr sz="2400"/>
               <a:t>T = Σ w_i z_i / √( Σ w_i² )、重み w_i = 天体 i の予測 σ</a:t>
@@ -7958,28 +8038,24 @@
             </a:r>
           </a:p>
           <a:p>
-            <a:pPr/>
             <a:r>
               <a:rPr sz="2400"/>
               <a:t>暗黒物質が無ければ：T は平均 0、ばらつき 1</a:t>
             </a:r>
           </a:p>
           <a:p>
-            <a:pPr/>
             <a:r>
               <a:rPr sz="2400"/>
               <a:t>暗黒物質があれば：T の平均 = √( Σ pred_i² ) = 1.73</a:t>
             </a:r>
           </a:p>
           <a:p>
-            <a:pPr/>
             <a:r>
               <a:rPr sz="2400"/>
               <a:t>実測 T = 0.39 → ずれ 1.3σ</a:t>
             </a:r>
           </a:p>
           <a:p>
-            <a:pPr/>
             <a:r>
               <a:rPr sz="2400"/>
               <a:t>ただし、ここでは J に誤差は無いとしていた</a:t>
@@ -7996,7 +8072,7 @@
 </file>
 
 <file path=ppt/slides/slide21.xml><?xml version="1.0" encoding="utf-8"?>
-<p:sld xmlns:a="http://schemas.openxmlformats.org/drawingml/2006/main" xmlns:p="http://schemas.openxmlformats.org/presentationml/2006/main" xmlns:r="http://schemas.openxmlformats.org/officeDocument/2006/relationships">
+<p:sld xmlns:a="http://schemas.openxmlformats.org/drawingml/2006/main" xmlns:r="http://schemas.openxmlformats.org/officeDocument/2006/relationships" xmlns:p="http://schemas.openxmlformats.org/presentationml/2006/main">
   <p:cSld>
     <p:spTree>
       <p:nvGrpSpPr>
@@ -8004,7 +8080,14 @@
         <p:cNvGrpSpPr/>
         <p:nvPr/>
       </p:nvGrpSpPr>
-      <p:grpSpPr/>
+      <p:grpSpPr>
+        <a:xfrm>
+          <a:off x="0" y="0"/>
+          <a:ext cx="0" cy="0"/>
+          <a:chOff x="0" y="0"/>
+          <a:chExt cx="0" cy="0"/>
+        </a:xfrm>
+      </p:grpSpPr>
       <p:sp>
         <p:nvSpPr>
           <p:cNvPr id="2" name="Title 1"/>
@@ -8047,14 +8130,12 @@
           <a:bodyPr/>
           <a:lstStyle/>
           <a:p>
-            <a:pPr/>
             <a:r>
               <a:rPr sz="2400"/>
               <a:t>文献ごとの J の値は、書かれた誤差よりも大きくばらつく</a:t>
             </a:r>
           </a:p>
           <a:p>
-            <a:pPr/>
             <a:r>
               <a:rPr sz="2400"/>
               <a:t>見落とされがちな誤差の原因（8 つ）</a:t>
@@ -8082,7 +8163,6 @@
             </a:r>
           </a:p>
           <a:p>
-            <a:pPr/>
             <a:r>
               <a:rPr sz="2400"/>
               <a:t>Δlog₁₀J ≈ 0.5（約 3 倍）以上の誤差を見込むべき</a:t>
@@ -8119,7 +8199,7 @@
           <a:lstStyle/>
           <a:p>
             <a:r>
-              <a:rPr lang="en-US" b="1" sz="1400"/>
+              <a:rPr lang="en-US" sz="1400" b="1"/>
               <a:t>Reference:</a:t>
             </a:r>
             <a:r>
@@ -8139,7 +8219,7 @@
 </file>
 
 <file path=ppt/slides/slide22.xml><?xml version="1.0" encoding="utf-8"?>
-<p:sld xmlns:a="http://schemas.openxmlformats.org/drawingml/2006/main" xmlns:p="http://schemas.openxmlformats.org/presentationml/2006/main" xmlns:r="http://schemas.openxmlformats.org/officeDocument/2006/relationships">
+<p:sld xmlns:a="http://schemas.openxmlformats.org/drawingml/2006/main" xmlns:r="http://schemas.openxmlformats.org/officeDocument/2006/relationships" xmlns:p="http://schemas.openxmlformats.org/presentationml/2006/main">
   <p:cSld>
     <p:spTree>
       <p:nvGrpSpPr>
@@ -8147,7 +8227,14 @@
         <p:cNvGrpSpPr/>
         <p:nvPr/>
       </p:nvGrpSpPr>
-      <p:grpSpPr/>
+      <p:grpSpPr>
+        <a:xfrm>
+          <a:off x="0" y="0"/>
+          <a:ext cx="0" cy="0"/>
+          <a:chOff x="0" y="0"/>
+          <a:chExt cx="0" cy="0"/>
+        </a:xfrm>
+      </p:grpSpPr>
       <p:sp>
         <p:nvSpPr>
           <p:cNvPr id="2" name="Title 1"/>
@@ -8190,7 +8277,6 @@
           <a:bodyPr/>
           <a:lstStyle/>
           <a:p>
-            <a:pPr/>
             <a:r>
               <a:rPr sz="2200"/>
               <a:t>Fermi-LAT の観測を計算機の中で作る（FermiTools、fermipy）</a:t>
@@ -8204,14 +8290,12 @@
             </a:r>
           </a:p>
           <a:p>
-            <a:pPr/>
             <a:r>
               <a:rPr sz="2200"/>
               <a:t>背景：銀河の拡散光＋等方の光から、ポアソン乱数で光子を作る</a:t>
             </a:r>
           </a:p>
           <a:p>
-            <a:pPr/>
             <a:r>
               <a:rPr sz="2200"/>
               <a:t>暗黒物質の信号を入れる</a:t>
@@ -8232,7 +8316,6 @@
             </a:r>
           </a:p>
           <a:p>
-            <a:pPr/>
             <a:r>
               <a:rPr sz="2200"/>
               <a:t>対象：Ursa Minor 1 個と、27 個の矮小銀河</a:t>
@@ -8269,7 +8352,7 @@
           <a:lstStyle/>
           <a:p>
             <a:r>
-              <a:rPr lang="en-US" b="1" sz="1400"/>
+              <a:rPr lang="en-US" sz="1400" b="1"/>
               <a:t>Reference:</a:t>
             </a:r>
             <a:r>
@@ -8289,7 +8372,7 @@
 </file>
 
 <file path=ppt/slides/slide23.xml><?xml version="1.0" encoding="utf-8"?>
-<p:sld xmlns:a="http://schemas.openxmlformats.org/drawingml/2006/main" xmlns:p="http://schemas.openxmlformats.org/presentationml/2006/main" xmlns:r="http://schemas.openxmlformats.org/officeDocument/2006/relationships">
+<p:sld xmlns:a="http://schemas.openxmlformats.org/drawingml/2006/main" xmlns:r="http://schemas.openxmlformats.org/officeDocument/2006/relationships" xmlns:p="http://schemas.openxmlformats.org/presentationml/2006/main">
   <p:cSld>
     <p:spTree>
       <p:nvGrpSpPr>
@@ -8297,7 +8380,14 @@
         <p:cNvGrpSpPr/>
         <p:nvPr/>
       </p:nvGrpSpPr>
-      <p:grpSpPr/>
+      <p:grpSpPr>
+        <a:xfrm>
+          <a:off x="0" y="0"/>
+          <a:ext cx="0" cy="0"/>
+          <a:chOff x="0" y="0"/>
+          <a:chExt cx="0" cy="0"/>
+        </a:xfrm>
+      </p:grpSpPr>
       <p:sp>
         <p:nvSpPr>
           <p:cNvPr id="2" name="Title 1"/>
@@ -8340,7 +8430,6 @@
           <a:bodyPr/>
           <a:lstStyle/>
           <a:p>
-            <a:pPr/>
             <a:r>
               <a:rPr sz="2200"/>
               <a:t>各天体の尤度 = 光子のポアソン尤度 × J の尤度</a:t>
@@ -8354,14 +8443,12 @@
             </a:r>
           </a:p>
           <a:p>
-            <a:pPr/>
             <a:r>
               <a:rPr sz="2200"/>
               <a:t>27 個は尤度の積でまとめる（⟨σv⟩ は共通、J は天体ごと）</a:t>
             </a:r>
           </a:p>
           <a:p>
-            <a:pPr/>
             <a:r>
               <a:rPr sz="2200"/>
               <a:t>2 つの誤差を分けて動かす</a:t>
@@ -8382,7 +8469,6 @@
             </a:r>
           </a:p>
           <a:p>
-            <a:pPr/>
             <a:r>
               <a:rPr sz="2200"/>
               <a:t>95% 上限：TS が最大値から 2.71 下がる点（Wilks の定理を仮定）</a:t>
@@ -8419,7 +8505,7 @@
           <a:lstStyle/>
           <a:p>
             <a:r>
-              <a:rPr lang="en-US" b="1" sz="1400"/>
+              <a:rPr lang="en-US" sz="1400" b="1"/>
               <a:t>Reference:</a:t>
             </a:r>
             <a:r>
@@ -8439,7 +8525,7 @@
 </file>
 
 <file path=ppt/slides/slide24.xml><?xml version="1.0" encoding="utf-8"?>
-<p:sld xmlns:a="http://schemas.openxmlformats.org/drawingml/2006/main" xmlns:p="http://schemas.openxmlformats.org/presentationml/2006/main" xmlns:r="http://schemas.openxmlformats.org/officeDocument/2006/relationships">
+<p:sld xmlns:a="http://schemas.openxmlformats.org/drawingml/2006/main" xmlns:r="http://schemas.openxmlformats.org/officeDocument/2006/relationships" xmlns:p="http://schemas.openxmlformats.org/presentationml/2006/main">
   <p:cSld>
     <p:spTree>
       <p:nvGrpSpPr>
@@ -8447,7 +8533,14 @@
         <p:cNvGrpSpPr/>
         <p:nvPr/>
       </p:nvGrpSpPr>
-      <p:grpSpPr/>
+      <p:grpSpPr>
+        <a:xfrm>
+          <a:off x="0" y="0"/>
+          <a:ext cx="0" cy="0"/>
+          <a:chOff x="0" y="0"/>
+          <a:chExt cx="0" cy="0"/>
+        </a:xfrm>
+      </p:grpSpPr>
       <p:sp>
         <p:nvSpPr>
           <p:cNvPr id="2" name="Title 1"/>
@@ -8490,7 +8583,6 @@
           <a:bodyPr/>
           <a:lstStyle/>
           <a:p>
-            <a:pPr/>
             <a:r>
               <a:rPr sz="2400"/>
               <a:t>本物の信号を入れた仮想データを何度も作る</a:t>
@@ -8504,21 +8596,18 @@
             </a:r>
           </a:p>
           <a:p>
-            <a:pPr/>
             <a:r>
               <a:rPr sz="2400"/>
               <a:t>それぞれで 95% 上限を出す</a:t>
             </a:r>
           </a:p>
           <a:p>
-            <a:pPr/>
             <a:r>
               <a:rPr sz="2400"/>
               <a:t>上限が本物の ⟨σv⟩ より下 =「本物を無いと間違えた」</a:t>
             </a:r>
           </a:p>
           <a:p>
-            <a:pPr/>
             <a:r>
               <a:rPr sz="2400"/>
               <a:t>95% 上限なら、間違いは 5% 以下のはず</a:t>
@@ -8562,7 +8651,7 @@
           <a:lstStyle/>
           <a:p>
             <a:r>
-              <a:rPr lang="en-US" b="1" sz="1400"/>
+              <a:rPr lang="en-US" sz="1400" b="1"/>
               <a:t>Reference:</a:t>
             </a:r>
             <a:r>
@@ -8582,7 +8671,7 @@
 </file>
 
 <file path=ppt/slides/slide25.xml><?xml version="1.0" encoding="utf-8"?>
-<p:sld xmlns:a="http://schemas.openxmlformats.org/drawingml/2006/main" xmlns:p="http://schemas.openxmlformats.org/presentationml/2006/main" xmlns:r="http://schemas.openxmlformats.org/officeDocument/2006/relationships">
+<p:sld xmlns:a="http://schemas.openxmlformats.org/drawingml/2006/main" xmlns:r="http://schemas.openxmlformats.org/officeDocument/2006/relationships" xmlns:p="http://schemas.openxmlformats.org/presentationml/2006/main">
   <p:cSld>
     <p:spTree>
       <p:nvGrpSpPr>
@@ -8590,7 +8679,14 @@
         <p:cNvGrpSpPr/>
         <p:nvPr/>
       </p:nvGrpSpPr>
-      <p:grpSpPr/>
+      <p:grpSpPr>
+        <a:xfrm>
+          <a:off x="0" y="0"/>
+          <a:ext cx="0" cy="0"/>
+          <a:chOff x="0" y="0"/>
+          <a:chExt cx="0" cy="0"/>
+        </a:xfrm>
+      </p:grpSpPr>
       <p:sp>
         <p:nvSpPr>
           <p:cNvPr id="2" name="Title 1"/>
@@ -8633,7 +8729,6 @@
           <a:bodyPr/>
           <a:lstStyle/>
           <a:p>
-            <a:pPr/>
             <a:r>
               <a:rPr sz="2400"/>
               <a:t>σ_L を 0.3 / 0.5 / 1.0 だけ大きくすると</a:t>
@@ -8647,7 +8742,6 @@
             </a:r>
           </a:p>
           <a:p>
-            <a:pPr/>
             <a:r>
               <a:rPr sz="2400"/>
               <a:t>本当の誤差 σ だけ大きく、σ_L は小さいままだと</a:t>
@@ -8668,7 +8762,6 @@
             </a:r>
           </a:p>
           <a:p>
-            <a:pPr/>
             <a:r>
               <a:rPr sz="2400"/>
               <a:t>形の間違い：球対称 NFW で解析 → 上限 2.4 倍厳しく</a:t>
@@ -8712,7 +8805,7 @@
           <a:lstStyle/>
           <a:p>
             <a:r>
-              <a:rPr lang="en-US" b="1" sz="1400"/>
+              <a:rPr lang="en-US" sz="1400" b="1"/>
               <a:t>Reference:</a:t>
             </a:r>
             <a:r>
@@ -8732,7 +8825,7 @@
 </file>
 
 <file path=ppt/slides/slide26.xml><?xml version="1.0" encoding="utf-8"?>
-<p:sld xmlns:a="http://schemas.openxmlformats.org/drawingml/2006/main" xmlns:p="http://schemas.openxmlformats.org/presentationml/2006/main" xmlns:r="http://schemas.openxmlformats.org/officeDocument/2006/relationships">
+<p:sld xmlns:a="http://schemas.openxmlformats.org/drawingml/2006/main" xmlns:r="http://schemas.openxmlformats.org/officeDocument/2006/relationships" xmlns:p="http://schemas.openxmlformats.org/presentationml/2006/main">
   <p:cSld>
     <p:spTree>
       <p:nvGrpSpPr>
@@ -8740,7 +8833,14 @@
         <p:cNvGrpSpPr/>
         <p:nvPr/>
       </p:nvGrpSpPr>
-      <p:grpSpPr/>
+      <p:grpSpPr>
+        <a:xfrm>
+          <a:off x="0" y="0"/>
+          <a:ext cx="0" cy="0"/>
+          <a:chOff x="0" y="0"/>
+          <a:chExt cx="0" cy="0"/>
+        </a:xfrm>
+      </p:grpSpPr>
       <p:sp>
         <p:nvSpPr>
           <p:cNvPr id="2" name="Title 1"/>
@@ -8783,14 +8883,12 @@
           <a:bodyPr/>
           <a:lstStyle/>
           <a:p>
-            <a:pPr/>
             <a:r>
               <a:rPr sz="2200"/>
               <a:t>σ_L を 0.3 / 0.5 / 1.0 → 上限 1.14 / 1.44 / 3.23 倍ゆるく</a:t>
             </a:r>
           </a:p>
           <a:p>
-            <a:pPr/>
             <a:r>
               <a:rPr sz="2200"/>
               <a:t>誤差を正しく入れても、本物を除外する割合 21%（5% のはず）</a:t>
@@ -8804,7 +8902,6 @@
             </a:r>
           </a:p>
           <a:p>
-            <a:pPr/>
             <a:r>
               <a:rPr sz="2200"/>
               <a:t>本当の誤差を 0.3 / 0.5 / 1.0 大きくすると 31% / 49% / 88%</a:t>
@@ -8818,14 +8915,12 @@
             </a:r>
           </a:p>
           <a:p>
-            <a:pPr/>
             <a:r>
               <a:rPr sz="2200"/>
               <a:t>原因：J が上に振れた天体が、上限を決めてしまう</a:t>
             </a:r>
           </a:p>
           <a:p>
-            <a:pPr/>
             <a:r>
               <a:rPr sz="2200"/>
               <a:t>対策の一つ：何も無い領域で較正する</a:t>
@@ -8862,7 +8957,7 @@
           <a:lstStyle/>
           <a:p>
             <a:r>
-              <a:rPr lang="en-US" b="1" sz="1400"/>
+              <a:rPr lang="en-US" sz="1400" b="1"/>
               <a:t>Reference:</a:t>
             </a:r>
             <a:r>
@@ -8882,7 +8977,7 @@
 </file>
 
 <file path=ppt/slides/slide27.xml><?xml version="1.0" encoding="utf-8"?>
-<p:sld xmlns:a="http://schemas.openxmlformats.org/drawingml/2006/main" xmlns:p="http://schemas.openxmlformats.org/presentationml/2006/main" xmlns:r="http://schemas.openxmlformats.org/officeDocument/2006/relationships">
+<p:sld xmlns:a="http://schemas.openxmlformats.org/drawingml/2006/main" xmlns:r="http://schemas.openxmlformats.org/officeDocument/2006/relationships" xmlns:p="http://schemas.openxmlformats.org/presentationml/2006/main">
   <p:cSld>
     <p:spTree>
       <p:nvGrpSpPr>
@@ -8890,7 +8985,14 @@
         <p:cNvGrpSpPr/>
         <p:nvPr/>
       </p:nvGrpSpPr>
-      <p:grpSpPr/>
+      <p:grpSpPr>
+        <a:xfrm>
+          <a:off x="0" y="0"/>
+          <a:ext cx="0" cy="0"/>
+          <a:chOff x="0" y="0"/>
+          <a:chExt cx="0" cy="0"/>
+        </a:xfrm>
+      </p:grpSpPr>
       <p:sp>
         <p:nvSpPr>
           <p:cNvPr id="2" name="Title 1"/>
@@ -8933,21 +9035,18 @@
           <a:bodyPr/>
           <a:lstStyle/>
           <a:p>
-            <a:pPr/>
             <a:r>
               <a:rPr sz="2400"/>
               <a:t>J の誤差や形を雑に扱うと、上限は厳しく出すぎ、本物の信号を除外しやすい</a:t>
             </a:r>
           </a:p>
           <a:p>
-            <a:pPr/>
             <a:r>
               <a:rPr sz="2400"/>
               <a:t>「銀河中心と矮小銀河が矛盾する」とは、まだ言えない</a:t>
             </a:r>
           </a:p>
           <a:p>
-            <a:pPr/>
             <a:r>
               <a:rPr sz="2400"/>
               <a:t>Δlog₁₀J ≈ 0.5 程度の誤差を見込むべき</a:t>
@@ -8984,7 +9083,7 @@
           <a:lstStyle/>
           <a:p>
             <a:r>
-              <a:rPr lang="en-US" b="1" sz="1400"/>
+              <a:rPr lang="en-US" sz="1400" b="1"/>
               <a:t>Reference:</a:t>
             </a:r>
             <a:r>
@@ -9004,7 +9103,7 @@
 </file>
 
 <file path=ppt/slides/slide28.xml><?xml version="1.0" encoding="utf-8"?>
-<p:sld xmlns:a="http://schemas.openxmlformats.org/drawingml/2006/main" xmlns:p="http://schemas.openxmlformats.org/presentationml/2006/main" xmlns:r="http://schemas.openxmlformats.org/officeDocument/2006/relationships">
+<p:sld xmlns:a="http://schemas.openxmlformats.org/drawingml/2006/main" xmlns:r="http://schemas.openxmlformats.org/officeDocument/2006/relationships" xmlns:p="http://schemas.openxmlformats.org/presentationml/2006/main">
   <p:cSld>
     <p:spTree>
       <p:nvGrpSpPr>
@@ -9012,7 +9111,14 @@
         <p:cNvGrpSpPr/>
         <p:nvPr/>
       </p:nvGrpSpPr>
-      <p:grpSpPr/>
+      <p:grpSpPr>
+        <a:xfrm>
+          <a:off x="0" y="0"/>
+          <a:ext cx="0" cy="0"/>
+          <a:chOff x="0" y="0"/>
+          <a:chExt cx="0" cy="0"/>
+        </a:xfrm>
+      </p:grpSpPr>
       <p:sp>
         <p:nvSpPr>
           <p:cNvPr id="2" name="Title 1"/>
@@ -9055,14 +9161,12 @@
           <a:bodyPr/>
           <a:lstStyle/>
           <a:p>
-            <a:pPr/>
             <a:r>
               <a:rPr sz="2400"/>
               <a:t>これまで：J の誤差 = 0（J は推定値そのまま）</a:t>
             </a:r>
           </a:p>
           <a:p>
-            <a:pPr/>
             <a:r>
               <a:rPr sz="2400"/>
               <a:t>今回：各天体の本当の J = 推定値 × 10^δ_i</a:t>
@@ -9083,14 +9187,12 @@
             </a:r>
           </a:p>
           <a:p>
-            <a:pPr/>
             <a:r>
               <a:rPr sz="2400"/>
               <a:t>予測 σ は J に比例 → pred_i × 10^δ_i</a:t>
             </a:r>
           </a:p>
           <a:p>
-            <a:pPr/>
             <a:r>
               <a:rPr sz="2400"/>
               <a:t>論文と同じく「J をずらした世界」をたくさん作る（20 万回）</a:t>
@@ -9127,7 +9229,7 @@
           <a:lstStyle/>
           <a:p>
             <a:r>
-              <a:rPr lang="en-US" b="1" sz="1400"/>
+              <a:rPr lang="en-US" sz="1400" b="1"/>
               <a:t>Reference:</a:t>
             </a:r>
             <a:r>
@@ -9147,7 +9249,7 @@
 </file>
 
 <file path=ppt/slides/slide29.xml><?xml version="1.0" encoding="utf-8"?>
-<p:sld xmlns:a="http://schemas.openxmlformats.org/drawingml/2006/main" xmlns:p="http://schemas.openxmlformats.org/presentationml/2006/main" xmlns:r="http://schemas.openxmlformats.org/officeDocument/2006/relationships">
+<p:sld xmlns:a="http://schemas.openxmlformats.org/drawingml/2006/main" xmlns:r="http://schemas.openxmlformats.org/officeDocument/2006/relationships" xmlns:p="http://schemas.openxmlformats.org/presentationml/2006/main">
   <p:cSld>
     <p:spTree>
       <p:nvGrpSpPr>
@@ -9155,7 +9257,14 @@
         <p:cNvGrpSpPr/>
         <p:nvPr/>
       </p:nvGrpSpPr>
-      <p:grpSpPr/>
+      <p:grpSpPr>
+        <a:xfrm>
+          <a:off x="0" y="0"/>
+          <a:ext cx="0" cy="0"/>
+          <a:chOff x="0" y="0"/>
+          <a:chExt cx="0" cy="0"/>
+        </a:xfrm>
+      </p:grpSpPr>
       <p:sp>
         <p:nvSpPr>
           <p:cNvPr id="2" name="Title 1"/>
@@ -9198,7 +9307,6 @@
           <a:bodyPr/>
           <a:lstStyle/>
           <a:p>
-            <a:pPr/>
             <a:r>
               <a:rPr sz="2400"/>
               <a:t>暗黒物質ありで期待される T</a:t>
@@ -9219,14 +9327,12 @@
             </a:r>
           </a:p>
           <a:p>
-            <a:pPr/>
             <a:r>
               <a:rPr sz="2400"/>
               <a:t>実測 T にも測定の揺れ s がある（s = 1、または空で測った 1.26）</a:t>
             </a:r>
           </a:p>
           <a:p>
-            <a:pPr/>
             <a:r>
               <a:rPr sz="2400"/>
               <a:t>暗黒物質ありで、実測 0.39 以下になる確率</a:t>
@@ -9240,7 +9346,6 @@
             </a:r>
           </a:p>
           <a:p>
-            <a:pPr/>
             <a:r>
               <a:rPr sz="2400"/>
               <a:t>p を σ に直したもの =「ずれ」</a:t>
@@ -9257,7 +9362,7 @@
 </file>
 
 <file path=ppt/slides/slide3.xml><?xml version="1.0" encoding="utf-8"?>
-<p:sld xmlns:a="http://schemas.openxmlformats.org/drawingml/2006/main" xmlns:p="http://schemas.openxmlformats.org/presentationml/2006/main" xmlns:r="http://schemas.openxmlformats.org/officeDocument/2006/relationships">
+<p:sld xmlns:a="http://schemas.openxmlformats.org/drawingml/2006/main" xmlns:r="http://schemas.openxmlformats.org/officeDocument/2006/relationships" xmlns:p="http://schemas.openxmlformats.org/presentationml/2006/main">
   <p:cSld>
     <p:spTree>
       <p:nvGrpSpPr>
@@ -9265,7 +9370,14 @@
         <p:cNvGrpSpPr/>
         <p:nvPr/>
       </p:nvGrpSpPr>
-      <p:grpSpPr/>
+      <p:grpSpPr>
+        <a:xfrm>
+          <a:off x="0" y="0"/>
+          <a:ext cx="0" cy="0"/>
+          <a:chOff x="0" y="0"/>
+          <a:chExt cx="0" cy="0"/>
+        </a:xfrm>
+      </p:grpSpPr>
       <p:sp>
         <p:nvSpPr>
           <p:cNvPr id="2" name="Title 1"/>
@@ -9274,33 +9386,38 @@
           </p:cNvSpPr>
           <p:nvPr>
             <p:ph type="title"/>
-          </p:nvPr>
-        </p:nvSpPr>
-        <p:spPr/>
-        <p:txBody>
-          <a:bodyPr/>
-          <a:lstStyle/>
-          <a:p>
-            <a:r>
-              <a:rPr sz="3400"/>
-              <a:t>データ：光子を数える</a:t>
-            </a:r>
-          </a:p>
-        </p:txBody>
-      </p:sp>
-      <p:sp>
-        <p:nvSpPr>
-          <p:cNvPr id="3" name="Content Placeholder 2"/>
-          <p:cNvSpPr>
-            <a:spLocks noGrp="1"/>
-          </p:cNvSpPr>
-          <p:nvPr>
-            <p:ph idx="1"/>
           </p:nvPr>
         </p:nvSpPr>
         <p:spPr>
           <a:xfrm>
-            <a:off x="841248" y="1463040"/>
+            <a:off x="0" y="-194592"/>
+            <a:ext cx="10515600" cy="1325563"/>
+          </a:xfrm>
+        </p:spPr>
+        <p:txBody>
+          <a:bodyPr/>
+          <a:lstStyle/>
+          <a:p>
+            <a:r>
+              <a:rPr sz="3400"/>
+              <a:t>光子を数える</a:t>
+            </a:r>
+          </a:p>
+        </p:txBody>
+      </p:sp>
+      <p:sp>
+        <p:nvSpPr>
+          <p:cNvPr id="3" name="Content Placeholder 2"/>
+          <p:cNvSpPr>
+            <a:spLocks noGrp="1"/>
+          </p:cNvSpPr>
+          <p:nvPr>
+            <p:ph idx="1"/>
+          </p:nvPr>
+        </p:nvSpPr>
+        <p:spPr>
+          <a:xfrm>
+            <a:off x="0" y="774644"/>
             <a:ext cx="10515600" cy="4114800"/>
           </a:xfrm>
         </p:spPr>
@@ -9308,7 +9425,6 @@
           <a:bodyPr/>
           <a:lstStyle/>
           <a:p>
-            <a:pPr/>
             <a:r>
               <a:rPr sz="2400"/>
               <a:t>Fermi-LAT 衛星が集めたガンマ線の光子（約 15 年分）</a:t>
@@ -9322,28 +9438,18 @@
             </a:r>
           </a:p>
           <a:p>
-            <a:pPr/>
             <a:r>
               <a:rPr sz="2400"/>
-              <a:t>空の範囲：銀経・銀緯とも ±60°（銀河面 |b| &lt; 10° は除く）</a:t>
-            </a:r>
-          </a:p>
-          <a:p>
-            <a:pPr/>
+              <a:t>空の範囲：銀経・銀緯とも ±60°（銀河面 |b| &lt; 10° 除く）</a:t>
+            </a:r>
+          </a:p>
+          <a:p>
             <a:r>
               <a:rPr sz="2400"/>
               <a:t>エネルギーを 13 個のビンに分ける（1.5 〜 814 GeV）</a:t>
             </a:r>
           </a:p>
           <a:p>
-            <a:pPr lvl="1"/>
-            <a:r>
-              <a:rPr sz="2000"/>
-              <a:t>ビンごとに別々に解析する</a:t>
-            </a:r>
-          </a:p>
-          <a:p>
-            <a:pPr/>
             <a:r>
               <a:rPr sz="2400"/>
               <a:t>各ビンで「空のどこに、光子が何個来たか」の地図を作る</a:t>
@@ -9351,12 +9457,100 @@
           </a:p>
         </p:txBody>
       </p:sp>
-      <p:sp>
-        <p:nvSpPr>
-          <p:cNvPr id="8" name="TextBox 7">
+      <p:pic>
+        <p:nvPicPr>
+          <p:cNvPr id="5" name="Picture 4">
             <a:extLst>
               <a:ext uri="{FF2B5EF4-FFF2-40B4-BE49-F238E27FC236}">
-                <a16:creationId xmlns:a16="http://schemas.microsoft.com/office/drawing/2014/main" id="{F85CD606-E3CE-F314-B3EE-F3D7028115CB}"/>
+                <a16:creationId xmlns:a16="http://schemas.microsoft.com/office/drawing/2014/main" id="{B2B30F14-F3FD-3F53-EC7E-3A869D50EC03}"/>
+              </a:ext>
+            </a:extLst>
+          </p:cNvPr>
+          <p:cNvPicPr>
+            <a:picLocks noChangeAspect="1"/>
+          </p:cNvPicPr>
+          <p:nvPr/>
+        </p:nvPicPr>
+        <p:blipFill>
+          <a:blip r:embed="rId3"/>
+          <a:srcRect r="49322"/>
+          <a:stretch>
+            <a:fillRect/>
+          </a:stretch>
+        </p:blipFill>
+        <p:spPr>
+          <a:xfrm>
+            <a:off x="5364481" y="2971718"/>
+            <a:ext cx="3708400" cy="3835451"/>
+          </a:xfrm>
+          <a:prstGeom prst="rect">
+            <a:avLst/>
+          </a:prstGeom>
+        </p:spPr>
+      </p:pic>
+      <p:sp>
+        <p:nvSpPr>
+          <p:cNvPr id="6" name="Arrow: Down 5">
+            <a:extLst>
+              <a:ext uri="{FF2B5EF4-FFF2-40B4-BE49-F238E27FC236}">
+                <a16:creationId xmlns:a16="http://schemas.microsoft.com/office/drawing/2014/main" id="{DDE5FA2F-AF5D-1CB3-11B6-5BBAE35CD7BA}"/>
+              </a:ext>
+            </a:extLst>
+          </p:cNvPr>
+          <p:cNvSpPr/>
+          <p:nvPr/>
+        </p:nvSpPr>
+        <p:spPr>
+          <a:xfrm rot="5400000">
+            <a:off x="9581969" y="3647825"/>
+            <a:ext cx="2036163" cy="2792425"/>
+          </a:xfrm>
+          <a:prstGeom prst="downArrow">
+            <a:avLst>
+              <a:gd name="adj1" fmla="val 44651"/>
+              <a:gd name="adj2" fmla="val 58348"/>
+            </a:avLst>
+          </a:prstGeom>
+          <a:solidFill>
+            <a:schemeClr val="bg1"/>
+          </a:solidFill>
+          <a:ln>
+            <a:solidFill>
+              <a:schemeClr val="tx1"/>
+            </a:solidFill>
+          </a:ln>
+        </p:spPr>
+        <p:style>
+          <a:lnRef idx="2">
+            <a:schemeClr val="accent1">
+              <a:shade val="15000"/>
+            </a:schemeClr>
+          </a:lnRef>
+          <a:fillRef idx="1">
+            <a:schemeClr val="accent1"/>
+          </a:fillRef>
+          <a:effectRef idx="0">
+            <a:schemeClr val="accent1"/>
+          </a:effectRef>
+          <a:fontRef idx="minor">
+            <a:schemeClr val="lt1"/>
+          </a:fontRef>
+        </p:style>
+        <p:txBody>
+          <a:bodyPr rtlCol="0" anchor="ctr"/>
+          <a:lstStyle/>
+          <a:p>
+            <a:pPr algn="ctr"/>
+            <a:endParaRPr lang="en-US"/>
+          </a:p>
+        </p:txBody>
+      </p:sp>
+      <p:sp>
+        <p:nvSpPr>
+          <p:cNvPr id="7" name="TextBox 6">
+            <a:extLst>
+              <a:ext uri="{FF2B5EF4-FFF2-40B4-BE49-F238E27FC236}">
+                <a16:creationId xmlns:a16="http://schemas.microsoft.com/office/drawing/2014/main" id="{0C0F810D-B137-252F-B137-69AD8335E4B7}"/>
               </a:ext>
             </a:extLst>
           </p:cNvPr>
@@ -9365,8 +9559,8 @@
         </p:nvSpPr>
         <p:spPr>
           <a:xfrm>
-            <a:off x="5837182" y="5663239"/>
-            <a:ext cx="6093372" cy="923330"/>
+            <a:off x="9995606" y="4690094"/>
+            <a:ext cx="1753564" cy="707886"/>
           </a:xfrm>
           <a:prstGeom prst="rect">
             <a:avLst/>
@@ -9374,20 +9568,19 @@
           <a:noFill/>
         </p:spPr>
         <p:txBody>
-          <a:bodyPr wrap="square">
+          <a:bodyPr wrap="square" rtlCol="0">
             <a:spAutoFit/>
           </a:bodyPr>
           <a:lstStyle/>
           <a:p>
             <a:r>
-              <a:rPr lang="en-US" b="1" sz="1400"/>
-              <a:t>Reference:</a:t>
-            </a:r>
-            <a:r>
-              <a:rPr lang="en-US" sz="1400"/>
-              <a:t> T. Totani (2025), arXiv:2507.07209 §2.1</a:t>
-            </a:r>
-            <a:endParaRPr lang="en-US"/>
+              <a:rPr lang="ja-JP" altLang="en-US" sz="4000"/>
+              <a:t>６</a:t>
+            </a:r>
+            <a:r>
+              <a:rPr lang="en-US" altLang="ja-JP" sz="4000"/>
+              <a:t>bin</a:t>
+            </a:r>
           </a:p>
         </p:txBody>
       </p:sp>
@@ -9400,7 +9593,7 @@
 </file>
 
 <file path=ppt/slides/slide30.xml><?xml version="1.0" encoding="utf-8"?>
-<p:sld xmlns:a="http://schemas.openxmlformats.org/drawingml/2006/main" xmlns:p="http://schemas.openxmlformats.org/presentationml/2006/main" xmlns:r="http://schemas.openxmlformats.org/officeDocument/2006/relationships">
+<p:sld xmlns:a="http://schemas.openxmlformats.org/drawingml/2006/main" xmlns:r="http://schemas.openxmlformats.org/officeDocument/2006/relationships" xmlns:p="http://schemas.openxmlformats.org/presentationml/2006/main">
   <p:cSld>
     <p:spTree>
       <p:nvGrpSpPr>
@@ -9408,7 +9601,14 @@
         <p:cNvGrpSpPr/>
         <p:nvPr/>
       </p:nvGrpSpPr>
-      <p:grpSpPr/>
+      <p:grpSpPr>
+        <a:xfrm>
+          <a:off x="0" y="0"/>
+          <a:ext cx="0" cy="0"/>
+          <a:chOff x="0" y="0"/>
+          <a:chExt cx="0" cy="0"/>
+        </a:xfrm>
+      </p:grpSpPr>
       <p:sp>
         <p:nvSpPr>
           <p:cNvPr id="2" name="Title 1"/>
@@ -9440,7 +9640,7 @@
           <p:nvPr/>
         </p:nvPicPr>
         <p:blipFill>
-          <a:blip r:embed="rId2"/>
+          <a:blip r:embed="rId3"/>
           <a:stretch>
             <a:fillRect/>
           </a:stretch>
@@ -9493,7 +9693,7 @@
 </file>
 
 <file path=ppt/slides/slide31.xml><?xml version="1.0" encoding="utf-8"?>
-<p:sld xmlns:a="http://schemas.openxmlformats.org/drawingml/2006/main" xmlns:p="http://schemas.openxmlformats.org/presentationml/2006/main" xmlns:r="http://schemas.openxmlformats.org/officeDocument/2006/relationships">
+<p:sld xmlns:a="http://schemas.openxmlformats.org/drawingml/2006/main" xmlns:r="http://schemas.openxmlformats.org/officeDocument/2006/relationships" xmlns:p="http://schemas.openxmlformats.org/presentationml/2006/main">
   <p:cSld>
     <p:spTree>
       <p:nvGrpSpPr>
@@ -9501,7 +9701,14 @@
         <p:cNvGrpSpPr/>
         <p:nvPr/>
       </p:nvGrpSpPr>
-      <p:grpSpPr/>
+      <p:grpSpPr>
+        <a:xfrm>
+          <a:off x="0" y="0"/>
+          <a:ext cx="0" cy="0"/>
+          <a:chOff x="0" y="0"/>
+          <a:chExt cx="0" cy="0"/>
+        </a:xfrm>
+      </p:grpSpPr>
       <p:sp>
         <p:nvSpPr>
           <p:cNvPr id="2" name="Title 1"/>
@@ -9544,7 +9751,6 @@
           <a:bodyPr/>
           <a:lstStyle/>
           <a:p>
-            <a:pPr/>
             <a:r>
               <a:rPr sz="2400"/>
               <a:t>局所密度 0.42 GeV/cm³ の場合（43 天体、20 GeV）</a:t>
@@ -9565,7 +9771,6 @@
             </a:r>
           </a:p>
           <a:p>
-            <a:pPr/>
             <a:r>
               <a:rPr sz="2400"/>
               <a:t>天の川側の局所密度を 0.3〜0.6 GeV/cm³ で動かしても</a:t>
@@ -9579,7 +9784,6 @@
             </a:r>
           </a:p>
           <a:p>
-            <a:pPr/>
             <a:r>
               <a:rPr sz="2400"/>
               <a:t>→ 暗黒物質と矛盾はしないが、確認もできない（判定できない）</a:t>
@@ -9596,7 +9800,7 @@
 </file>
 
 <file path=ppt/slides/slide32.xml><?xml version="1.0" encoding="utf-8"?>
-<p:sld xmlns:a="http://schemas.openxmlformats.org/drawingml/2006/main" xmlns:p="http://schemas.openxmlformats.org/presentationml/2006/main" xmlns:r="http://schemas.openxmlformats.org/officeDocument/2006/relationships">
+<p:sld xmlns:a="http://schemas.openxmlformats.org/drawingml/2006/main" xmlns:r="http://schemas.openxmlformats.org/officeDocument/2006/relationships" xmlns:p="http://schemas.openxmlformats.org/presentationml/2006/main">
   <p:cSld>
     <p:spTree>
       <p:nvGrpSpPr>
@@ -9604,7 +9808,14 @@
         <p:cNvGrpSpPr/>
         <p:nvPr/>
       </p:nvGrpSpPr>
-      <p:grpSpPr/>
+      <p:grpSpPr>
+        <a:xfrm>
+          <a:off x="0" y="0"/>
+          <a:ext cx="0" cy="0"/>
+          <a:chOff x="0" y="0"/>
+          <a:chExt cx="0" cy="0"/>
+        </a:xfrm>
+      </p:grpSpPr>
       <p:sp>
         <p:nvSpPr>
           <p:cNvPr id="2" name="Title 1"/>
@@ -9647,7 +9858,6 @@
           <a:bodyPr/>
           <a:lstStyle/>
           <a:p>
-            <a:pPr/>
             <a:r>
               <a:rPr sz="2400"/>
               <a:t>約 15σ：天の川のハロー超過の強さ</a:t>
@@ -9668,7 +9878,6 @@
             </a:r>
           </a:p>
           <a:p>
-            <a:pPr/>
             <a:r>
               <a:rPr sz="2400"/>
               <a:t>1.3σ：矮小銀河での「予測と実測のずれ」</a:t>
@@ -9682,7 +9891,6 @@
             </a:r>
           </a:p>
           <a:p>
-            <a:pPr/>
             <a:r>
               <a:rPr sz="2400"/>
               <a:t>別のものを測った、別の数字</a:t>
@@ -9699,7 +9907,7 @@
 </file>
 
 <file path=ppt/slides/slide33.xml><?xml version="1.0" encoding="utf-8"?>
-<p:sld xmlns:a="http://schemas.openxmlformats.org/drawingml/2006/main" xmlns:p="http://schemas.openxmlformats.org/presentationml/2006/main" xmlns:r="http://schemas.openxmlformats.org/officeDocument/2006/relationships">
+<p:sld xmlns:a="http://schemas.openxmlformats.org/drawingml/2006/main" xmlns:r="http://schemas.openxmlformats.org/officeDocument/2006/relationships" xmlns:p="http://schemas.openxmlformats.org/presentationml/2006/main">
   <p:cSld>
     <p:spTree>
       <p:nvGrpSpPr>
@@ -9707,7 +9915,14 @@
         <p:cNvGrpSpPr/>
         <p:nvPr/>
       </p:nvGrpSpPr>
-      <p:grpSpPr/>
+      <p:grpSpPr>
+        <a:xfrm>
+          <a:off x="0" y="0"/>
+          <a:ext cx="0" cy="0"/>
+          <a:chOff x="0" y="0"/>
+          <a:chExt cx="0" cy="0"/>
+        </a:xfrm>
+      </p:grpSpPr>
       <p:sp>
         <p:nvSpPr>
           <p:cNvPr id="2" name="Title 1"/>
@@ -9750,14 +9965,12 @@
           <a:bodyPr/>
           <a:lstStyle/>
           <a:p>
-            <a:pPr/>
             <a:r>
               <a:rPr sz="2400"/>
               <a:t>Totani の超過を再現（名目 19.0σ、較正後 約 15σ）</a:t>
             </a:r>
           </a:p>
           <a:p>
-            <a:pPr/>
             <a:r>
               <a:rPr sz="2400"/>
               <a:t>ICS の明るさ・バブル・計算の近似の間違いでは説明できない</a:t>
@@ -9771,7 +9984,6 @@
             </a:r>
           </a:p>
           <a:p>
-            <a:pPr/>
             <a:r>
               <a:rPr sz="2400"/>
               <a:t>矮小銀河では非検出</a:t>
@@ -9795,7 +10007,7 @@
 </file>
 
 <file path=ppt/slides/slide34.xml><?xml version="1.0" encoding="utf-8"?>
-<p:sld xmlns:a="http://schemas.openxmlformats.org/drawingml/2006/main" xmlns:p="http://schemas.openxmlformats.org/presentationml/2006/main" xmlns:r="http://schemas.openxmlformats.org/officeDocument/2006/relationships">
+<p:sld xmlns:a="http://schemas.openxmlformats.org/drawingml/2006/main" xmlns:r="http://schemas.openxmlformats.org/officeDocument/2006/relationships" xmlns:p="http://schemas.openxmlformats.org/presentationml/2006/main">
   <p:cSld>
     <p:spTree>
       <p:nvGrpSpPr>
@@ -9803,7 +10015,14 @@
         <p:cNvGrpSpPr/>
         <p:nvPr/>
       </p:nvGrpSpPr>
-      <p:grpSpPr/>
+      <p:grpSpPr>
+        <a:xfrm>
+          <a:off x="0" y="0"/>
+          <a:ext cx="0" cy="0"/>
+          <a:chOff x="0" y="0"/>
+          <a:chExt cx="0" cy="0"/>
+        </a:xfrm>
+      </p:grpSpPr>
       <p:sp>
         <p:nvSpPr>
           <p:cNvPr id="2" name="Title 1"/>
@@ -9846,7 +10065,6 @@
           <a:bodyPr/>
           <a:lstStyle/>
           <a:p>
-            <a:pPr/>
             <a:r>
               <a:rPr sz="2400"/>
               <a:t>σ が 1.26 倍に膨らんだ原因</a:t>
@@ -9867,14 +10085,12 @@
             </a:r>
           </a:p>
           <a:p>
-            <a:pPr/>
             <a:r>
               <a:rPr sz="2400"/>
               <a:t>データ同化：シミュレーションの誤差と観測の誤差を分けて、統計モデルに入れる枠組み</a:t>
             </a:r>
           </a:p>
           <a:p>
-            <a:pPr/>
             <a:r>
               <a:rPr sz="2400"/>
               <a:t>J をずらして何度も計算したのも、分布をたくさんのサンプルで表すという同じ発想</a:t>
@@ -9918,7 +10134,7 @@
           <a:lstStyle/>
           <a:p>
             <a:r>
-              <a:rPr lang="en-US" b="1" sz="1400"/>
+              <a:rPr lang="en-US" sz="1400" b="1"/>
               <a:t>Reference:</a:t>
             </a:r>
             <a:r>
@@ -9938,7 +10154,7 @@
 </file>
 
 <file path=ppt/slides/slide35.xml><?xml version="1.0" encoding="utf-8"?>
-<p:sld xmlns:a="http://schemas.openxmlformats.org/drawingml/2006/main" xmlns:p="http://schemas.openxmlformats.org/presentationml/2006/main" xmlns:r="http://schemas.openxmlformats.org/officeDocument/2006/relationships">
+<p:sld xmlns:a="http://schemas.openxmlformats.org/drawingml/2006/main" xmlns:r="http://schemas.openxmlformats.org/officeDocument/2006/relationships" xmlns:p="http://schemas.openxmlformats.org/presentationml/2006/main">
   <p:cSld>
     <p:spTree>
       <p:nvGrpSpPr>
@@ -9946,7 +10162,14 @@
         <p:cNvGrpSpPr/>
         <p:nvPr/>
       </p:nvGrpSpPr>
-      <p:grpSpPr/>
+      <p:grpSpPr>
+        <a:xfrm>
+          <a:off x="0" y="0"/>
+          <a:ext cx="0" cy="0"/>
+          <a:chOff x="0" y="0"/>
+          <a:chExt cx="0" cy="0"/>
+        </a:xfrm>
+      </p:grpSpPr>
       <p:sp>
         <p:nvSpPr>
           <p:cNvPr id="2" name="Title 1"/>
@@ -9989,63 +10212,54 @@
           <a:bodyPr/>
           <a:lstStyle/>
           <a:p>
-            <a:pPr/>
             <a:r>
               <a:rPr sz="1800"/>
               <a:t>T. Totani (2025), arXiv:2507.07209</a:t>
             </a:r>
           </a:p>
           <a:p>
-            <a:pPr/>
             <a:r>
               <a:rPr sz="1800"/>
               <a:t>Bertólez-Martínez, Hooper &amp; Khatee Zathul (2026), arXiv:2609.20944</a:t>
             </a:r>
           </a:p>
           <a:p>
-            <a:pPr/>
             <a:r>
               <a:rPr sz="1800"/>
               <a:t>S. S. Wilks (1938), Ann. Math. Stat. 9, 60</a:t>
             </a:r>
           </a:p>
           <a:p>
-            <a:pPr/>
             <a:r>
               <a:rPr sz="1800"/>
               <a:t>D. Foreman-Mackey et al. (2013), PASP 125, 306</a:t>
             </a:r>
           </a:p>
           <a:p>
-            <a:pPr/>
             <a:r>
               <a:rPr sz="1800"/>
               <a:t>I. V. Moskalenko &amp; A. W. Strong (2000), ApJ 528, 357</a:t>
             </a:r>
           </a:p>
           <a:p>
-            <a:pPr/>
             <a:r>
               <a:rPr sz="1800"/>
               <a:t>B. Efron &amp; R. J. Tibshirani (1993), An Introduction to the Bootstrap</a:t>
             </a:r>
           </a:p>
           <a:p>
-            <a:pPr/>
             <a:r>
               <a:rPr sz="1800"/>
               <a:t>A. B. Pace (2025), Open J. Astrophys. 8, 142</a:t>
             </a:r>
           </a:p>
           <a:p>
-            <a:pPr/>
             <a:r>
               <a:rPr sz="1800"/>
               <a:t>A. B. Pace &amp; L. E. Strigari (2019), MNRAS 482, 3480</a:t>
             </a:r>
           </a:p>
           <a:p>
-            <a:pPr/>
             <a:r>
               <a:rPr sz="1800"/>
               <a:t>中村和幸 (2017), 数理解析研究所講究録 2057, 59–66</a:t>
@@ -10062,7 +10276,7 @@
 </file>
 
 <file path=ppt/slides/slide4.xml><?xml version="1.0" encoding="utf-8"?>
-<p:sld xmlns:a="http://schemas.openxmlformats.org/drawingml/2006/main" xmlns:p="http://schemas.openxmlformats.org/presentationml/2006/main" xmlns:r="http://schemas.openxmlformats.org/officeDocument/2006/relationships">
+<p:sld xmlns:a="http://schemas.openxmlformats.org/drawingml/2006/main" xmlns:r="http://schemas.openxmlformats.org/officeDocument/2006/relationships" xmlns:p="http://schemas.openxmlformats.org/presentationml/2006/main">
   <p:cSld>
     <p:spTree>
       <p:nvGrpSpPr>
@@ -10070,7 +10284,14 @@
         <p:cNvGrpSpPr/>
         <p:nvPr/>
       </p:nvGrpSpPr>
-      <p:grpSpPr/>
+      <p:grpSpPr>
+        <a:xfrm>
+          <a:off x="0" y="0"/>
+          <a:ext cx="0" cy="0"/>
+          <a:chOff x="0" y="0"/>
+          <a:chExt cx="0" cy="0"/>
+        </a:xfrm>
+      </p:grpSpPr>
       <p:sp>
         <p:nvSpPr>
           <p:cNvPr id="2" name="Title 1"/>
@@ -10081,7 +10302,12 @@
             <p:ph type="title"/>
           </p:nvPr>
         </p:nvSpPr>
-        <p:spPr/>
+        <p:spPr>
+          <a:xfrm>
+            <a:off x="148389" y="0"/>
+            <a:ext cx="10515600" cy="1325563"/>
+          </a:xfrm>
+        </p:spPr>
         <p:txBody>
           <a:bodyPr/>
           <a:lstStyle/>
@@ -10089,6 +10315,151 @@
             <a:r>
               <a:rPr sz="3400"/>
               <a:t>手法①：テンプレートフィット</a:t>
+            </a:r>
+          </a:p>
+        </p:txBody>
+      </p:sp>
+      <p:sp>
+        <p:nvSpPr>
+          <p:cNvPr id="3" name="Content Placeholder 2"/>
+          <p:cNvSpPr>
+            <a:spLocks noGrp="1"/>
+          </p:cNvSpPr>
+          <p:nvPr>
+            <p:ph idx="1"/>
+          </p:nvPr>
+        </p:nvSpPr>
+        <p:spPr>
+          <a:xfrm>
+            <a:off x="440194" y="1371599"/>
+            <a:ext cx="11490359" cy="4716379"/>
+          </a:xfrm>
+        </p:spPr>
+        <p:txBody>
+          <a:bodyPr/>
+          <a:lstStyle/>
+          <a:p>
+            <a:r>
+              <a:rPr sz="2400"/>
+              <a:t>空の光を「</a:t>
+            </a:r>
+            <a:r>
+              <a:rPr lang="ja-JP" altLang="en-US" sz="2400"/>
+              <a:t>既知の要素</a:t>
+            </a:r>
+            <a:r>
+              <a:rPr sz="2400"/>
+              <a:t>の足し算」で表す</a:t>
+            </a:r>
+          </a:p>
+          <a:p>
+            <a:pPr lvl="1"/>
+            <a:r>
+              <a:rPr sz="2000"/>
+              <a:t>予測 = Σ（倍率 f_l）×（</a:t>
+            </a:r>
+            <a:r>
+              <a:rPr lang="ja-JP" altLang="en-US" sz="2000"/>
+              <a:t>要素</a:t>
+            </a:r>
+            <a:r>
+              <a:rPr sz="2000"/>
+              <a:t> l）</a:t>
+            </a:r>
+          </a:p>
+          <a:p>
+            <a:r>
+              <a:rPr lang="ja-JP" altLang="en-US" sz="2400"/>
+              <a:t>要素</a:t>
+            </a:r>
+            <a:r>
+              <a:rPr sz="2400"/>
+              <a:t>は 9 枚</a:t>
+            </a:r>
+          </a:p>
+          <a:p>
+            <a:r>
+              <a:rPr sz="2000"/>
+              <a:t>等方背景、ガス（π⁰ 崩壊＋制動放射）</a:t>
+            </a:r>
+            <a:r>
+              <a:rPr lang="en-US" sz="2000"/>
+              <a:t>(</a:t>
+            </a:r>
+            <a:r>
+              <a:rPr lang="en-US" sz="2400"/>
+              <a:t>GALPROP)</a:t>
+            </a:r>
+            <a:r>
+              <a:rPr lang="en-US" sz="2000"/>
+              <a:t>、ICS、</a:t>
+            </a:r>
+            <a:r>
+              <a:rPr lang="ja-JP" altLang="en-US" sz="2000"/>
+              <a:t>点源</a:t>
+            </a:r>
+          </a:p>
+          <a:p>
+            <a:pPr lvl="1"/>
+            <a:r>
+              <a:rPr sz="2000"/>
+              <a:t>Loop I（2 枚）、フェルミバブル（正・負）、ハロー</a:t>
+            </a:r>
+          </a:p>
+          <a:p>
+            <a:pPr marL="0" indent="0">
+              <a:buNone/>
+            </a:pPr>
+            <a:r>
+              <a:rPr sz="2400"/>
+              <a:t>倍率 f_l をデータに合うように決める</a:t>
+            </a:r>
+          </a:p>
+        </p:txBody>
+      </p:sp>
+    </p:spTree>
+  </p:cSld>
+  <p:clrMapOvr>
+    <a:masterClrMapping/>
+  </p:clrMapOvr>
+</p:sld>
+</file>
+
+<file path=ppt/slides/slide5.xml><?xml version="1.0" encoding="utf-8"?>
+<p:sld xmlns:a="http://schemas.openxmlformats.org/drawingml/2006/main" xmlns:r="http://schemas.openxmlformats.org/officeDocument/2006/relationships" xmlns:p="http://schemas.openxmlformats.org/presentationml/2006/main">
+  <p:cSld>
+    <p:spTree>
+      <p:nvGrpSpPr>
+        <p:cNvPr id="1" name=""/>
+        <p:cNvGrpSpPr/>
+        <p:nvPr/>
+      </p:nvGrpSpPr>
+      <p:grpSpPr>
+        <a:xfrm>
+          <a:off x="0" y="0"/>
+          <a:ext cx="0" cy="0"/>
+          <a:chOff x="0" y="0"/>
+          <a:chExt cx="0" cy="0"/>
+        </a:xfrm>
+      </p:grpSpPr>
+      <p:sp>
+        <p:nvSpPr>
+          <p:cNvPr id="2" name="Title 1"/>
+          <p:cNvSpPr>
+            <a:spLocks noGrp="1"/>
+          </p:cNvSpPr>
+          <p:nvPr>
+            <p:ph type="title"/>
+          </p:nvPr>
+        </p:nvSpPr>
+        <p:spPr/>
+        <p:txBody>
+          <a:bodyPr/>
+          <a:lstStyle/>
+          <a:p>
+            <a:r>
+              <a:rPr sz="3400"/>
+              <a:t>手法②：尤度（どれだけ合っているか）</a:t>
             </a:r>
           </a:p>
         </p:txBody>
@@ -10113,52 +10484,170 @@
           <a:bodyPr/>
           <a:lstStyle/>
           <a:p>
-            <a:pPr/>
             <a:r>
               <a:rPr sz="2400"/>
-              <a:t>空の光を「知っている光源の型紙の足し算」で表す</a:t>
+              <a:t>光子の数はポアソン分布でばらつく</a:t>
+            </a:r>
+          </a:p>
+          <a:p>
+            <a:r>
+              <a:rPr sz="2400"/>
+              <a:t>尤度：ln L = Σ_i [ C_obs,i ln C_exp,i − C_exp,i ]</a:t>
             </a:r>
           </a:p>
           <a:p>
             <a:pPr lvl="1"/>
             <a:r>
               <a:rPr sz="2000"/>
-              <a:t>予測 = Σ（倍率 f_l）×（型紙 l）</a:t>
-            </a:r>
-          </a:p>
-          <a:p>
-            <a:pPr/>
+              <a:t>C_obs：観測した光子数、C_exp：予測した光子数</a:t>
+            </a:r>
+          </a:p>
+          <a:p>
+            <a:pPr lvl="1"/>
+            <a:r>
+              <a:rPr sz="2000"/>
+              <a:t>i：10° × 10° のセル（空をマス目に分ける）</a:t>
+            </a:r>
+          </a:p>
+          <a:p>
             <a:r>
               <a:rPr sz="2400"/>
-              <a:t>型紙は 9 枚</a:t>
+              <a:t>ln L が最大になる倍率 f を探す（最尤推定）</a:t>
+            </a:r>
+          </a:p>
+        </p:txBody>
+      </p:sp>
+      <p:pic>
+        <p:nvPicPr>
+          <p:cNvPr id="5" name="Picture 4">
+            <a:extLst>
+              <a:ext uri="{FF2B5EF4-FFF2-40B4-BE49-F238E27FC236}">
+                <a16:creationId xmlns:a16="http://schemas.microsoft.com/office/drawing/2014/main" id="{1322290E-F674-5B31-CE05-04E65EC1C03F}"/>
+              </a:ext>
+            </a:extLst>
+          </p:cNvPr>
+          <p:cNvPicPr>
+            <a:picLocks noChangeAspect="1"/>
+          </p:cNvPicPr>
+          <p:nvPr/>
+        </p:nvPicPr>
+        <p:blipFill>
+          <a:blip r:embed="rId3"/>
+          <a:stretch>
+            <a:fillRect/>
+          </a:stretch>
+        </p:blipFill>
+        <p:spPr>
+          <a:xfrm>
+            <a:off x="2551565" y="3749403"/>
+            <a:ext cx="5751094" cy="3014367"/>
+          </a:xfrm>
+          <a:prstGeom prst="rect">
+            <a:avLst/>
+          </a:prstGeom>
+        </p:spPr>
+      </p:pic>
+    </p:spTree>
+  </p:cSld>
+  <p:clrMapOvr>
+    <a:masterClrMapping/>
+  </p:clrMapOvr>
+</p:sld>
+</file>
+
+<file path=ppt/slides/slide6.xml><?xml version="1.0" encoding="utf-8"?>
+<p:sld xmlns:a="http://schemas.openxmlformats.org/drawingml/2006/main" xmlns:r="http://schemas.openxmlformats.org/officeDocument/2006/relationships" xmlns:p="http://schemas.openxmlformats.org/presentationml/2006/main">
+  <p:cSld>
+    <p:spTree>
+      <p:nvGrpSpPr>
+        <p:cNvPr id="1" name=""/>
+        <p:cNvGrpSpPr/>
+        <p:nvPr/>
+      </p:nvGrpSpPr>
+      <p:grpSpPr>
+        <a:xfrm>
+          <a:off x="0" y="0"/>
+          <a:ext cx="0" cy="0"/>
+          <a:chOff x="0" y="0"/>
+          <a:chExt cx="0" cy="0"/>
+        </a:xfrm>
+      </p:grpSpPr>
+      <p:sp>
+        <p:nvSpPr>
+          <p:cNvPr id="2" name="Title 1"/>
+          <p:cNvSpPr>
+            <a:spLocks noGrp="1"/>
+          </p:cNvSpPr>
+          <p:nvPr>
+            <p:ph type="title"/>
+          </p:nvPr>
+        </p:nvSpPr>
+        <p:spPr/>
+        <p:txBody>
+          <a:bodyPr/>
+          <a:lstStyle/>
+          <a:p>
+            <a:r>
+              <a:rPr sz="3400"/>
+              <a:t>手法③：有意度 σ の出し方</a:t>
+            </a:r>
+          </a:p>
+        </p:txBody>
+      </p:sp>
+      <p:sp>
+        <p:nvSpPr>
+          <p:cNvPr id="3" name="Content Placeholder 2"/>
+          <p:cNvSpPr>
+            <a:spLocks noGrp="1"/>
+          </p:cNvSpPr>
+          <p:nvPr>
+            <p:ph idx="1"/>
+          </p:nvPr>
+        </p:nvSpPr>
+        <p:spPr>
+          <a:xfrm>
+            <a:off x="841248" y="1463040"/>
+            <a:ext cx="10515600" cy="4114800"/>
+          </a:xfrm>
+        </p:spPr>
+        <p:txBody>
+          <a:bodyPr/>
+          <a:lstStyle/>
+          <a:p>
+            <a:r>
+              <a:rPr sz="2400"/>
+              <a:t>ハロー「あり」と「なし」の 2 通りで当てはめる</a:t>
+            </a:r>
+          </a:p>
+          <a:p>
+            <a:r>
+              <a:rPr sz="2400"/>
+              <a:t>差 Δln L = ln L(あり) − ln L(なし)</a:t>
+            </a:r>
+          </a:p>
+          <a:p>
+            <a:r>
+              <a:rPr sz="2400"/>
+              <a:t>有意度 σ = √( 2 Δln L )</a:t>
+            </a:r>
+          </a:p>
+          <a:p>
+            <a:r>
+              <a:rPr sz="2400"/>
+              <a:t>根拠：Wilks の定理</a:t>
             </a:r>
           </a:p>
           <a:p>
             <a:pPr lvl="1"/>
             <a:r>
               <a:rPr sz="2000"/>
-              <a:t>等方背景、ガス（π⁰ 崩壊＋制動放射）、ICS、点源</a:t>
-            </a:r>
-          </a:p>
-          <a:p>
-            <a:pPr lvl="1"/>
-            <a:r>
-              <a:rPr sz="2000"/>
-              <a:t>Loop I（2 枚）、フェルミバブル（正・負）、ハロー</a:t>
-            </a:r>
-          </a:p>
-          <a:p>
-            <a:pPr/>
+              <a:t>データが十分多いと、2Δln L は自由度 1 の χ² 分布に従う</a:t>
+            </a:r>
+          </a:p>
+          <a:p>
             <a:r>
               <a:rPr sz="2400"/>
-              <a:t>ガスと ICS の型紙は、宇宙線のシミュレーション GALPROP で計算</a:t>
-            </a:r>
-          </a:p>
-          <a:p>
-            <a:pPr/>
-            <a:r>
-              <a:rPr sz="2400"/>
-              <a:t>倍率 f_l をデータに合うように決める（ハローの f は負も許す）</a:t>
+              <a:t>→ この定理が本当に成り立つかが、後で問題になる</a:t>
             </a:r>
           </a:p>
         </p:txBody>
@@ -10192,12 +10681,12 @@
           <a:lstStyle/>
           <a:p>
             <a:r>
-              <a:rPr lang="en-US" b="1" sz="1400"/>
+              <a:rPr lang="en-US" sz="1400" b="1"/>
               <a:t>Reference:</a:t>
             </a:r>
             <a:r>
               <a:rPr lang="en-US" sz="1400"/>
-              <a:t> T. Totani (2025), arXiv:2507.07209 §2.3</a:t>
+              <a:t> S. S. Wilks (1938), Ann. Math. Stat. 9, 60</a:t>
             </a:r>
             <a:endParaRPr lang="en-US"/>
           </a:p>
@@ -10211,8 +10700,8 @@
 </p:sld>
 </file>
 
-<file path=ppt/slides/slide5.xml><?xml version="1.0" encoding="utf-8"?>
-<p:sld xmlns:a="http://schemas.openxmlformats.org/drawingml/2006/main" xmlns:p="http://schemas.openxmlformats.org/presentationml/2006/main" xmlns:r="http://schemas.openxmlformats.org/officeDocument/2006/relationships">
+<file path=ppt/slides/slide7.xml><?xml version="1.0" encoding="utf-8"?>
+<p:sld xmlns:a="http://schemas.openxmlformats.org/drawingml/2006/main" xmlns:r="http://schemas.openxmlformats.org/officeDocument/2006/relationships" xmlns:p="http://schemas.openxmlformats.org/presentationml/2006/main">
   <p:cSld>
     <p:spTree>
       <p:nvGrpSpPr>
@@ -10220,7 +10709,14 @@
         <p:cNvGrpSpPr/>
         <p:nvPr/>
       </p:nvGrpSpPr>
-      <p:grpSpPr/>
+      <p:grpSpPr>
+        <a:xfrm>
+          <a:off x="0" y="0"/>
+          <a:ext cx="0" cy="0"/>
+          <a:chOff x="0" y="0"/>
+          <a:chExt cx="0" cy="0"/>
+        </a:xfrm>
+      </p:grpSpPr>
       <p:sp>
         <p:nvSpPr>
           <p:cNvPr id="2" name="Title 1"/>
@@ -10238,7 +10734,7 @@
           <a:p>
             <a:r>
               <a:rPr sz="3400"/>
-              <a:t>手法②：尤度（どれだけ合っているか）</a:t>
+              <a:t>手法④：MCMC（誤差の見積もり）</a:t>
             </a:r>
           </a:p>
         </p:txBody>
@@ -10263,38 +10759,41 @@
           <a:bodyPr/>
           <a:lstStyle/>
           <a:p>
-            <a:pPr/>
             <a:r>
               <a:rPr sz="2400"/>
-              <a:t>光子の数はポアソン分布でばらつく</a:t>
-            </a:r>
-          </a:p>
-          <a:p>
-            <a:pPr/>
+              <a:t>最尤の 1 点だけでなく、倍率 f が「どれくらいの範囲にありうるか」を知りたい</a:t>
+            </a:r>
+          </a:p>
+          <a:p>
             <a:r>
               <a:rPr sz="2400"/>
-              <a:t>尤度：ln L = Σ_i [ C_obs,i ln C_exp,i − C_exp,i ]</a:t>
+              <a:t>MCMC：尤度に比例する確率で、パラメータの空間を歩き回る</a:t>
             </a:r>
           </a:p>
           <a:p>
             <a:pPr lvl="1"/>
             <a:r>
               <a:rPr sz="2000"/>
-              <a:t>C_obs：観測した光子数、C_exp：予測した光子数</a:t>
+              <a:t>歩いた跡の分布 = パラメータの事後分布 → 誤差棒</a:t>
+            </a:r>
+          </a:p>
+          <a:p>
+            <a:r>
+              <a:rPr sz="2400"/>
+              <a:t>emcee を使用：32 本の歩行者、最初の 400 歩は捨てる</a:t>
             </a:r>
           </a:p>
           <a:p>
             <a:pPr lvl="1"/>
             <a:r>
               <a:rPr sz="2000"/>
-              <a:t>i：10° × 10° のセル（空をマス目に分ける）</a:t>
-            </a:r>
-          </a:p>
-          <a:p>
-            <a:pPr/>
+              <a:t>自己相関時間の 50 倍以上の長さがあるか確認</a:t>
+            </a:r>
+          </a:p>
+          <a:p>
             <a:r>
               <a:rPr sz="2400"/>
-              <a:t>ln L が最大になる倍率 f を探す（最尤推定）</a:t>
+              <a:t>有意度 σ は Δln L から出すので、MCMC の有無で変わらない</a:t>
             </a:r>
           </a:p>
         </p:txBody>
@@ -10328,293 +10827,7 @@
           <a:lstStyle/>
           <a:p>
             <a:r>
-              <a:rPr lang="en-US" b="1" sz="1400"/>
-              <a:t>Reference:</a:t>
-            </a:r>
-            <a:r>
-              <a:rPr lang="en-US" sz="1400"/>
-              <a:t> T. Totani (2025), arXiv:2507.07209 式 (2.1)</a:t>
-            </a:r>
-            <a:endParaRPr lang="en-US"/>
-          </a:p>
-        </p:txBody>
-      </p:sp>
-    </p:spTree>
-  </p:cSld>
-  <p:clrMapOvr>
-    <a:masterClrMapping/>
-  </p:clrMapOvr>
-</p:sld>
-</file>
-
-<file path=ppt/slides/slide6.xml><?xml version="1.0" encoding="utf-8"?>
-<p:sld xmlns:a="http://schemas.openxmlformats.org/drawingml/2006/main" xmlns:p="http://schemas.openxmlformats.org/presentationml/2006/main" xmlns:r="http://schemas.openxmlformats.org/officeDocument/2006/relationships">
-  <p:cSld>
-    <p:spTree>
-      <p:nvGrpSpPr>
-        <p:cNvPr id="1" name=""/>
-        <p:cNvGrpSpPr/>
-        <p:nvPr/>
-      </p:nvGrpSpPr>
-      <p:grpSpPr/>
-      <p:sp>
-        <p:nvSpPr>
-          <p:cNvPr id="2" name="Title 1"/>
-          <p:cNvSpPr>
-            <a:spLocks noGrp="1"/>
-          </p:cNvSpPr>
-          <p:nvPr>
-            <p:ph type="title"/>
-          </p:nvPr>
-        </p:nvSpPr>
-        <p:spPr/>
-        <p:txBody>
-          <a:bodyPr/>
-          <a:lstStyle/>
-          <a:p>
-            <a:r>
-              <a:rPr sz="3400"/>
-              <a:t>手法③：有意度 σ の出し方</a:t>
-            </a:r>
-          </a:p>
-        </p:txBody>
-      </p:sp>
-      <p:sp>
-        <p:nvSpPr>
-          <p:cNvPr id="3" name="Content Placeholder 2"/>
-          <p:cNvSpPr>
-            <a:spLocks noGrp="1"/>
-          </p:cNvSpPr>
-          <p:nvPr>
-            <p:ph idx="1"/>
-          </p:nvPr>
-        </p:nvSpPr>
-        <p:spPr>
-          <a:xfrm>
-            <a:off x="841248" y="1463040"/>
-            <a:ext cx="10515600" cy="4114800"/>
-          </a:xfrm>
-        </p:spPr>
-        <p:txBody>
-          <a:bodyPr/>
-          <a:lstStyle/>
-          <a:p>
-            <a:pPr/>
-            <a:r>
-              <a:rPr sz="2400"/>
-              <a:t>ハロー「あり」と「なし」の 2 通りで当てはめる</a:t>
-            </a:r>
-          </a:p>
-          <a:p>
-            <a:pPr/>
-            <a:r>
-              <a:rPr sz="2400"/>
-              <a:t>差 Δln L = ln L(あり) − ln L(なし)</a:t>
-            </a:r>
-          </a:p>
-          <a:p>
-            <a:pPr/>
-            <a:r>
-              <a:rPr sz="2400"/>
-              <a:t>有意度 σ = √( 2 Δln L )</a:t>
-            </a:r>
-          </a:p>
-          <a:p>
-            <a:pPr/>
-            <a:r>
-              <a:rPr sz="2400"/>
-              <a:t>根拠：Wilks の定理</a:t>
-            </a:r>
-          </a:p>
-          <a:p>
-            <a:pPr lvl="1"/>
-            <a:r>
-              <a:rPr sz="2000"/>
-              <a:t>データが十分多いと、2Δln L は自由度 1 の χ² 分布に従う</a:t>
-            </a:r>
-          </a:p>
-          <a:p>
-            <a:pPr/>
-            <a:r>
-              <a:rPr sz="2400"/>
-              <a:t>→ この定理が本当に成り立つかが、後で問題になる</a:t>
-            </a:r>
-          </a:p>
-        </p:txBody>
-      </p:sp>
-      <p:sp>
-        <p:nvSpPr>
-          <p:cNvPr id="8" name="TextBox 7">
-            <a:extLst>
-              <a:ext uri="{FF2B5EF4-FFF2-40B4-BE49-F238E27FC236}">
-                <a16:creationId xmlns:a16="http://schemas.microsoft.com/office/drawing/2014/main" id="{F85CD606-E3CE-F314-B3EE-F3D7028115CB}"/>
-              </a:ext>
-            </a:extLst>
-          </p:cNvPr>
-          <p:cNvSpPr txBox="1"/>
-          <p:nvPr/>
-        </p:nvSpPr>
-        <p:spPr>
-          <a:xfrm>
-            <a:off x="5837182" y="5663239"/>
-            <a:ext cx="6093372" cy="923330"/>
-          </a:xfrm>
-          <a:prstGeom prst="rect">
-            <a:avLst/>
-          </a:prstGeom>
-          <a:noFill/>
-        </p:spPr>
-        <p:txBody>
-          <a:bodyPr wrap="square">
-            <a:spAutoFit/>
-          </a:bodyPr>
-          <a:lstStyle/>
-          <a:p>
-            <a:r>
-              <a:rPr lang="en-US" b="1" sz="1400"/>
-              <a:t>Reference:</a:t>
-            </a:r>
-            <a:r>
-              <a:rPr lang="en-US" sz="1400"/>
-              <a:t> S. S. Wilks (1938), Ann. Math. Stat. 9, 60</a:t>
-            </a:r>
-            <a:endParaRPr lang="en-US"/>
-          </a:p>
-        </p:txBody>
-      </p:sp>
-    </p:spTree>
-  </p:cSld>
-  <p:clrMapOvr>
-    <a:masterClrMapping/>
-  </p:clrMapOvr>
-</p:sld>
-</file>
-
-<file path=ppt/slides/slide7.xml><?xml version="1.0" encoding="utf-8"?>
-<p:sld xmlns:a="http://schemas.openxmlformats.org/drawingml/2006/main" xmlns:p="http://schemas.openxmlformats.org/presentationml/2006/main" xmlns:r="http://schemas.openxmlformats.org/officeDocument/2006/relationships">
-  <p:cSld>
-    <p:spTree>
-      <p:nvGrpSpPr>
-        <p:cNvPr id="1" name=""/>
-        <p:cNvGrpSpPr/>
-        <p:nvPr/>
-      </p:nvGrpSpPr>
-      <p:grpSpPr/>
-      <p:sp>
-        <p:nvSpPr>
-          <p:cNvPr id="2" name="Title 1"/>
-          <p:cNvSpPr>
-            <a:spLocks noGrp="1"/>
-          </p:cNvSpPr>
-          <p:nvPr>
-            <p:ph type="title"/>
-          </p:nvPr>
-        </p:nvSpPr>
-        <p:spPr/>
-        <p:txBody>
-          <a:bodyPr/>
-          <a:lstStyle/>
-          <a:p>
-            <a:r>
-              <a:rPr sz="3400"/>
-              <a:t>手法④：MCMC（誤差の見積もり）</a:t>
-            </a:r>
-          </a:p>
-        </p:txBody>
-      </p:sp>
-      <p:sp>
-        <p:nvSpPr>
-          <p:cNvPr id="3" name="Content Placeholder 2"/>
-          <p:cNvSpPr>
-            <a:spLocks noGrp="1"/>
-          </p:cNvSpPr>
-          <p:nvPr>
-            <p:ph idx="1"/>
-          </p:nvPr>
-        </p:nvSpPr>
-        <p:spPr>
-          <a:xfrm>
-            <a:off x="841248" y="1463040"/>
-            <a:ext cx="10515600" cy="4114800"/>
-          </a:xfrm>
-        </p:spPr>
-        <p:txBody>
-          <a:bodyPr/>
-          <a:lstStyle/>
-          <a:p>
-            <a:pPr/>
-            <a:r>
-              <a:rPr sz="2400"/>
-              <a:t>最尤の 1 点だけでなく、倍率 f が「どれくらいの範囲にありうるか」を知りたい</a:t>
-            </a:r>
-          </a:p>
-          <a:p>
-            <a:pPr/>
-            <a:r>
-              <a:rPr sz="2400"/>
-              <a:t>MCMC：尤度に比例する確率で、パラメータの空間を歩き回る</a:t>
-            </a:r>
-          </a:p>
-          <a:p>
-            <a:pPr lvl="1"/>
-            <a:r>
-              <a:rPr sz="2000"/>
-              <a:t>歩いた跡の分布 = パラメータの事後分布 → 誤差棒</a:t>
-            </a:r>
-          </a:p>
-          <a:p>
-            <a:pPr/>
-            <a:r>
-              <a:rPr sz="2400"/>
-              <a:t>emcee を使用：32 本の歩行者、最初の 400 歩は捨てる</a:t>
-            </a:r>
-          </a:p>
-          <a:p>
-            <a:pPr lvl="1"/>
-            <a:r>
-              <a:rPr sz="2000"/>
-              <a:t>自己相関時間の 50 倍以上の長さがあるか確認</a:t>
-            </a:r>
-          </a:p>
-          <a:p>
-            <a:pPr/>
-            <a:r>
-              <a:rPr sz="2400"/>
-              <a:t>有意度 σ は Δln L から出すので、MCMC の有無で変わらない</a:t>
-            </a:r>
-          </a:p>
-        </p:txBody>
-      </p:sp>
-      <p:sp>
-        <p:nvSpPr>
-          <p:cNvPr id="8" name="TextBox 7">
-            <a:extLst>
-              <a:ext uri="{FF2B5EF4-FFF2-40B4-BE49-F238E27FC236}">
-                <a16:creationId xmlns:a16="http://schemas.microsoft.com/office/drawing/2014/main" id="{F85CD606-E3CE-F314-B3EE-F3D7028115CB}"/>
-              </a:ext>
-            </a:extLst>
-          </p:cNvPr>
-          <p:cNvSpPr txBox="1"/>
-          <p:nvPr/>
-        </p:nvSpPr>
-        <p:spPr>
-          <a:xfrm>
-            <a:off x="5837182" y="5663239"/>
-            <a:ext cx="6093372" cy="923330"/>
-          </a:xfrm>
-          <a:prstGeom prst="rect">
-            <a:avLst/>
-          </a:prstGeom>
-          <a:noFill/>
-        </p:spPr>
-        <p:txBody>
-          <a:bodyPr wrap="square">
-            <a:spAutoFit/>
-          </a:bodyPr>
-          <a:lstStyle/>
-          <a:p>
-            <a:r>
-              <a:rPr lang="en-US" b="1" sz="1400"/>
+              <a:rPr lang="en-US" sz="1400" b="1"/>
               <a:t>Reference:</a:t>
             </a:r>
             <a:r>
@@ -10634,7 +10847,7 @@
 </file>
 
 <file path=ppt/slides/slide8.xml><?xml version="1.0" encoding="utf-8"?>
-<p:sld xmlns:a="http://schemas.openxmlformats.org/drawingml/2006/main" xmlns:p="http://schemas.openxmlformats.org/presentationml/2006/main" xmlns:r="http://schemas.openxmlformats.org/officeDocument/2006/relationships">
+<p:sld xmlns:a="http://schemas.openxmlformats.org/drawingml/2006/main" xmlns:r="http://schemas.openxmlformats.org/officeDocument/2006/relationships" xmlns:p="http://schemas.openxmlformats.org/presentationml/2006/main">
   <p:cSld>
     <p:spTree>
       <p:nvGrpSpPr>
@@ -10642,7 +10855,14 @@
         <p:cNvGrpSpPr/>
         <p:nvPr/>
       </p:nvGrpSpPr>
-      <p:grpSpPr/>
+      <p:grpSpPr>
+        <a:xfrm>
+          <a:off x="0" y="0"/>
+          <a:ext cx="0" cy="0"/>
+          <a:chOff x="0" y="0"/>
+          <a:chExt cx="0" cy="0"/>
+        </a:xfrm>
+      </p:grpSpPr>
       <p:sp>
         <p:nvSpPr>
           <p:cNvPr id="2" name="Title 1"/>
@@ -10674,7 +10894,7 @@
           <p:nvPr/>
         </p:nvPicPr>
         <p:blipFill>
-          <a:blip r:embed="rId2"/>
+          <a:blip r:embed="rId3"/>
           <a:stretch>
             <a:fillRect/>
           </a:stretch>
@@ -10747,7 +10967,7 @@
           <a:lstStyle/>
           <a:p>
             <a:r>
-              <a:rPr lang="en-US" b="1" sz="1400"/>
+              <a:rPr lang="en-US" sz="1400" b="1"/>
               <a:t>Reference:</a:t>
             </a:r>
             <a:r>
@@ -10767,7 +10987,7 @@
 </file>
 
 <file path=ppt/slides/slide9.xml><?xml version="1.0" encoding="utf-8"?>
-<p:sld xmlns:a="http://schemas.openxmlformats.org/drawingml/2006/main" xmlns:p="http://schemas.openxmlformats.org/presentationml/2006/main" xmlns:r="http://schemas.openxmlformats.org/officeDocument/2006/relationships">
+<p:sld xmlns:a="http://schemas.openxmlformats.org/drawingml/2006/main" xmlns:r="http://schemas.openxmlformats.org/officeDocument/2006/relationships" xmlns:p="http://schemas.openxmlformats.org/presentationml/2006/main">
   <p:cSld>
     <p:spTree>
       <p:nvGrpSpPr>
@@ -10775,7 +10995,14 @@
         <p:cNvGrpSpPr/>
         <p:nvPr/>
       </p:nvGrpSpPr>
-      <p:grpSpPr/>
+      <p:grpSpPr>
+        <a:xfrm>
+          <a:off x="0" y="0"/>
+          <a:ext cx="0" cy="0"/>
+          <a:chOff x="0" y="0"/>
+          <a:chExt cx="0" cy="0"/>
+        </a:xfrm>
+      </p:grpSpPr>
       <p:sp>
         <p:nvSpPr>
           <p:cNvPr id="2" name="Title 1"/>
@@ -10818,7 +11045,6 @@
           <a:bodyPr/>
           <a:lstStyle/>
           <a:p>
-            <a:pPr/>
             <a:r>
               <a:rPr sz="2200"/>
               <a:t>ICS とハローは、空の上での形がよく似ている</a:t>
@@ -10832,14 +11058,12 @@
             </a:r>
           </a:p>
           <a:p>
-            <a:pPr/>
             <a:r>
               <a:rPr sz="2200"/>
               <a:t>違いは「銀河中心の方向に集まっているか」だけ</a:t>
             </a:r>
           </a:p>
           <a:p>
-            <a:pPr/>
             <a:r>
               <a:rPr sz="2200"/>
               <a:t>ハローを入れると、その分 ICS が暗くなる</a:t>
@@ -11212,44 +11436,44 @@
         <a:sysClr val="window" lastClr="FFFFFF"/>
       </a:lt1>
       <a:dk2>
-        <a:srgbClr val="1F497D"/>
+        <a:srgbClr val="0E2841"/>
       </a:dk2>
       <a:lt2>
-        <a:srgbClr val="EEECE1"/>
+        <a:srgbClr val="E8E8E8"/>
       </a:lt2>
       <a:accent1>
-        <a:srgbClr val="4F81BD"/>
+        <a:srgbClr val="156082"/>
       </a:accent1>
       <a:accent2>
-        <a:srgbClr val="C0504D"/>
+        <a:srgbClr val="E97132"/>
       </a:accent2>
       <a:accent3>
-        <a:srgbClr val="9BBB59"/>
+        <a:srgbClr val="196B24"/>
       </a:accent3>
       <a:accent4>
-        <a:srgbClr val="8064A2"/>
+        <a:srgbClr val="0F9ED5"/>
       </a:accent4>
       <a:accent5>
-        <a:srgbClr val="4BACC6"/>
+        <a:srgbClr val="A02B93"/>
       </a:accent5>
       <a:accent6>
-        <a:srgbClr val="F79646"/>
+        <a:srgbClr val="4EA72E"/>
       </a:accent6>
       <a:hlink>
-        <a:srgbClr val="0000FF"/>
+        <a:srgbClr val="467886"/>
       </a:hlink>
       <a:folHlink>
-        <a:srgbClr val="800080"/>
+        <a:srgbClr val="96607D"/>
       </a:folHlink>
     </a:clrScheme>
     <a:fontScheme name="Office">
       <a:majorFont>
-        <a:latin typeface="Calibri"/>
+        <a:latin typeface="Aptos Display" panose="02110004020202020204"/>
         <a:ea typeface=""/>
         <a:cs typeface=""/>
-        <a:font script="Jpan" typeface="ＭＳ Ｐゴシック"/>
+        <a:font script="Jpan" typeface="游ゴシック Light"/>
         <a:font script="Hang" typeface="맑은 고딕"/>
-        <a:font script="Hans" typeface="宋体"/>
+        <a:font script="Hans" typeface="等线 Light"/>
         <a:font script="Hant" typeface="新細明體"/>
         <a:font script="Arab" typeface="Times New Roman"/>
         <a:font script="Hebr" typeface="Times New Roman"/>
@@ -11277,14 +11501,31 @@
         <a:font script="Viet" typeface="Times New Roman"/>
         <a:font script="Uigh" typeface="Microsoft Uighur"/>
         <a:font script="Geor" typeface="Sylfaen"/>
+        <a:font script="Armn" typeface="Arial"/>
+        <a:font script="Bugi" typeface="Leelawadee UI"/>
+        <a:font script="Bopo" typeface="Microsoft JhengHei"/>
+        <a:font script="Java" typeface="Javanese Text"/>
+        <a:font script="Lisu" typeface="Segoe UI"/>
+        <a:font script="Mymr" typeface="Myanmar Text"/>
+        <a:font script="Nkoo" typeface="Ebrima"/>
+        <a:font script="Olck" typeface="Nirmala UI"/>
+        <a:font script="Osma" typeface="Ebrima"/>
+        <a:font script="Phag" typeface="Phagspa"/>
+        <a:font script="Syrn" typeface="Estrangelo Edessa"/>
+        <a:font script="Syrj" typeface="Estrangelo Edessa"/>
+        <a:font script="Syre" typeface="Estrangelo Edessa"/>
+        <a:font script="Sora" typeface="Nirmala UI"/>
+        <a:font script="Tale" typeface="Microsoft Tai Le"/>
+        <a:font script="Talu" typeface="Microsoft New Tai Lue"/>
+        <a:font script="Tfng" typeface="Ebrima"/>
       </a:majorFont>
       <a:minorFont>
-        <a:latin typeface="Calibri"/>
+        <a:latin typeface="Aptos" panose="02110004020202020204"/>
         <a:ea typeface=""/>
         <a:cs typeface=""/>
-        <a:font script="Jpan" typeface="ＭＳ Ｐゴシック"/>
+        <a:font script="Jpan" typeface="游ゴシック"/>
         <a:font script="Hang" typeface="맑은 고딕"/>
-        <a:font script="Hans" typeface="宋体"/>
+        <a:font script="Hans" typeface="等线"/>
         <a:font script="Hant" typeface="新細明體"/>
         <a:font script="Arab" typeface="Arial"/>
         <a:font script="Hebr" typeface="Arial"/>
@@ -11312,6 +11553,23 @@
         <a:font script="Viet" typeface="Arial"/>
         <a:font script="Uigh" typeface="Microsoft Uighur"/>
         <a:font script="Geor" typeface="Sylfaen"/>
+        <a:font script="Armn" typeface="Arial"/>
+        <a:font script="Bugi" typeface="Leelawadee UI"/>
+        <a:font script="Bopo" typeface="Microsoft JhengHei"/>
+        <a:font script="Java" typeface="Javanese Text"/>
+        <a:font script="Lisu" typeface="Segoe UI"/>
+        <a:font script="Mymr" typeface="Myanmar Text"/>
+        <a:font script="Nkoo" typeface="Ebrima"/>
+        <a:font script="Olck" typeface="Nirmala UI"/>
+        <a:font script="Osma" typeface="Ebrima"/>
+        <a:font script="Phag" typeface="Phagspa"/>
+        <a:font script="Syrn" typeface="Estrangelo Edessa"/>
+        <a:font script="Syrj" typeface="Estrangelo Edessa"/>
+        <a:font script="Syre" typeface="Estrangelo Edessa"/>
+        <a:font script="Sora" typeface="Nirmala UI"/>
+        <a:font script="Tale" typeface="Microsoft Tai Le"/>
+        <a:font script="Talu" typeface="Microsoft New Tai Lue"/>
+        <a:font script="Tfng" typeface="Ebrima"/>
       </a:minorFont>
     </a:fontScheme>
     <a:fmtScheme name="Office">
@@ -11323,180 +11581,136 @@
           <a:gsLst>
             <a:gs pos="0">
               <a:schemeClr val="phClr">
-                <a:tint val="50000"/>
-                <a:satMod val="300000"/>
+                <a:lumMod val="110000"/>
+                <a:satMod val="105000"/>
+                <a:tint val="67000"/>
               </a:schemeClr>
             </a:gs>
-            <a:gs pos="35000">
+            <a:gs pos="50000">
               <a:schemeClr val="phClr">
-                <a:tint val="37000"/>
-                <a:satMod val="300000"/>
+                <a:lumMod val="105000"/>
+                <a:satMod val="103000"/>
+                <a:tint val="73000"/>
               </a:schemeClr>
             </a:gs>
             <a:gs pos="100000">
               <a:schemeClr val="phClr">
-                <a:tint val="15000"/>
-                <a:satMod val="350000"/>
+                <a:lumMod val="105000"/>
+                <a:satMod val="109000"/>
+                <a:tint val="81000"/>
               </a:schemeClr>
             </a:gs>
           </a:gsLst>
-          <a:lin ang="16200000" scaled="1"/>
+          <a:lin ang="5400000" scaled="0"/>
         </a:gradFill>
         <a:gradFill rotWithShape="1">
           <a:gsLst>
             <a:gs pos="0">
               <a:schemeClr val="phClr">
-                <a:tint val="100000"/>
+                <a:satMod val="103000"/>
+                <a:lumMod val="102000"/>
+                <a:tint val="94000"/>
+              </a:schemeClr>
+            </a:gs>
+            <a:gs pos="50000">
+              <a:schemeClr val="phClr">
+                <a:satMod val="110000"/>
+                <a:lumMod val="100000"/>
                 <a:shade val="100000"/>
-                <a:satMod val="130000"/>
               </a:schemeClr>
             </a:gs>
             <a:gs pos="100000">
               <a:schemeClr val="phClr">
-                <a:tint val="50000"/>
-                <a:shade val="100000"/>
-                <a:satMod val="350000"/>
+                <a:lumMod val="99000"/>
+                <a:satMod val="120000"/>
+                <a:shade val="78000"/>
               </a:schemeClr>
             </a:gs>
           </a:gsLst>
-          <a:lin ang="16200000" scaled="0"/>
+          <a:lin ang="5400000" scaled="0"/>
         </a:gradFill>
       </a:fillStyleLst>
       <a:lnStyleLst>
-        <a:ln w="9525" cap="flat" cmpd="sng" algn="ctr">
+        <a:ln w="12700" cap="flat" cmpd="sng" algn="ctr">
           <a:solidFill>
-            <a:schemeClr val="phClr">
-              <a:shade val="95000"/>
-              <a:satMod val="105000"/>
-            </a:schemeClr>
+            <a:schemeClr val="phClr"/>
           </a:solidFill>
           <a:prstDash val="solid"/>
+          <a:miter lim="800000"/>
+        </a:ln>
+        <a:ln w="19050" cap="flat" cmpd="sng" algn="ctr">
+          <a:solidFill>
+            <a:schemeClr val="phClr"/>
+          </a:solidFill>
+          <a:prstDash val="solid"/>
+          <a:miter lim="800000"/>
         </a:ln>
         <a:ln w="25400" cap="flat" cmpd="sng" algn="ctr">
           <a:solidFill>
             <a:schemeClr val="phClr"/>
           </a:solidFill>
           <a:prstDash val="solid"/>
-        </a:ln>
-        <a:ln w="38100" cap="flat" cmpd="sng" algn="ctr">
-          <a:solidFill>
-            <a:schemeClr val="phClr"/>
-          </a:solidFill>
-          <a:prstDash val="solid"/>
+          <a:miter lim="800000"/>
         </a:ln>
       </a:lnStyleLst>
       <a:effectStyleLst>
         <a:effectStyle>
+          <a:effectLst/>
+        </a:effectStyle>
+        <a:effectStyle>
+          <a:effectLst/>
+        </a:effectStyle>
+        <a:effectStyle>
           <a:effectLst>
-            <a:outerShdw blurRad="40000" dist="20000" dir="5400000" rotWithShape="0">
+            <a:outerShdw blurRad="57150" dist="19050" dir="5400000" algn="ctr" rotWithShape="0">
               <a:srgbClr val="000000">
-                <a:alpha val="38000"/>
+                <a:alpha val="63000"/>
               </a:srgbClr>
             </a:outerShdw>
           </a:effectLst>
-        </a:effectStyle>
-        <a:effectStyle>
-          <a:effectLst>
-            <a:outerShdw blurRad="40000" dist="23000" dir="5400000" rotWithShape="0">
-              <a:srgbClr val="000000">
-                <a:alpha val="35000"/>
-              </a:srgbClr>
-            </a:outerShdw>
-          </a:effectLst>
-        </a:effectStyle>
-        <a:effectStyle>
-          <a:effectLst>
-            <a:outerShdw blurRad="40000" dist="23000" dir="5400000" rotWithShape="0">
-              <a:srgbClr val="000000">
-                <a:alpha val="35000"/>
-              </a:srgbClr>
-            </a:outerShdw>
-          </a:effectLst>
-          <a:scene3d>
-            <a:camera prst="orthographicFront">
-              <a:rot lat="0" lon="0" rev="0"/>
-            </a:camera>
-            <a:lightRig rig="threePt" dir="t">
-              <a:rot lat="0" lon="0" rev="1200000"/>
-            </a:lightRig>
-          </a:scene3d>
-          <a:sp3d>
-            <a:bevelT w="63500" h="25400"/>
-          </a:sp3d>
         </a:effectStyle>
       </a:effectStyleLst>
       <a:bgFillStyleLst>
         <a:solidFill>
           <a:schemeClr val="phClr"/>
         </a:solidFill>
+        <a:solidFill>
+          <a:schemeClr val="phClr">
+            <a:tint val="95000"/>
+            <a:satMod val="170000"/>
+          </a:schemeClr>
+        </a:solidFill>
         <a:gradFill rotWithShape="1">
           <a:gsLst>
             <a:gs pos="0">
               <a:schemeClr val="phClr">
-                <a:tint val="40000"/>
-                <a:satMod val="350000"/>
+                <a:tint val="93000"/>
+                <a:satMod val="150000"/>
+                <a:shade val="98000"/>
+                <a:lumMod val="102000"/>
               </a:schemeClr>
             </a:gs>
-            <a:gs pos="40000">
+            <a:gs pos="50000">
               <a:schemeClr val="phClr">
-                <a:tint val="45000"/>
-                <a:shade val="99000"/>
-                <a:satMod val="350000"/>
+                <a:tint val="98000"/>
+                <a:satMod val="130000"/>
+                <a:shade val="90000"/>
+                <a:lumMod val="103000"/>
               </a:schemeClr>
             </a:gs>
             <a:gs pos="100000">
               <a:schemeClr val="phClr">
-                <a:shade val="20000"/>
-                <a:satMod val="255000"/>
+                <a:shade val="63000"/>
+                <a:satMod val="120000"/>
               </a:schemeClr>
             </a:gs>
           </a:gsLst>
-          <a:path path="circle">
-            <a:fillToRect l="50000" t="-80000" r="50000" b="180000"/>
-          </a:path>
-        </a:gradFill>
-        <a:gradFill rotWithShape="1">
-          <a:gsLst>
-            <a:gs pos="0">
-              <a:schemeClr val="phClr">
-                <a:tint val="80000"/>
-                <a:satMod val="300000"/>
-              </a:schemeClr>
-            </a:gs>
-            <a:gs pos="100000">
-              <a:schemeClr val="phClr">
-                <a:shade val="30000"/>
-                <a:satMod val="200000"/>
-              </a:schemeClr>
-            </a:gs>
-          </a:gsLst>
-          <a:path path="circle">
-            <a:fillToRect l="50000" t="50000" r="50000" b="50000"/>
-          </a:path>
+          <a:lin ang="5400000" scaled="0"/>
         </a:gradFill>
       </a:bgFillStyleLst>
     </a:fmtScheme>
   </a:themeElements>
   <a:objectDefaults>
-    <a:spDef>
-      <a:spPr/>
-      <a:bodyPr/>
-      <a:lstStyle/>
-      <a:style>
-        <a:lnRef idx="1">
-          <a:schemeClr val="accent1"/>
-        </a:lnRef>
-        <a:fillRef idx="3">
-          <a:schemeClr val="accent1"/>
-        </a:fillRef>
-        <a:effectRef idx="2">
-          <a:schemeClr val="accent1"/>
-        </a:effectRef>
-        <a:fontRef idx="minor">
-          <a:schemeClr val="lt1"/>
-        </a:fontRef>
-      </a:style>
-    </a:spDef>
     <a:lnDef>
       <a:spPr/>
       <a:bodyPr/>
@@ -11518,5 +11732,10 @@
     </a:lnDef>
   </a:objectDefaults>
   <a:extraClrSchemeLst/>
+  <a:extLst>
+    <a:ext uri="{05A4C25C-085E-4340-85A3-A5531E510DB2}">
+      <thm15:themeFamily xmlns:thm15="http://schemas.microsoft.com/office/thememl/2012/main" name="Office Theme" id="{2E142A2C-CD16-42D6-873A-C26D2A0506FA}" vid="{1BDDFF52-6CD6-40A5-AB3C-68EB2F1E4D0A}"/>
+    </a:ext>
+  </a:extLst>
 </a:theme>
 </file>
--- a/slides/2026-10-02_研究進捗報告.pptx
+++ b/slides/2026-10-02_研究進捗報告.pptx
@@ -158,6 +158,58 @@
     </p:ext>
   </p:extLst>
 </p:presentation>
+</file>
+
+<file path=ppt/revisionInfo.xml><?xml version="1.0" encoding="utf-8"?>
+<p1510:revInfo xmlns:a="http://schemas.openxmlformats.org/drawingml/2006/main" xmlns:r="http://schemas.openxmlformats.org/officeDocument/2006/relationships" xmlns:p1510="http://schemas.microsoft.com/office/powerpoint/2015/10/main">
+  <p1510:revLst>
+    <p1510:client id="{0C18A6C4-2C47-4DAD-A1DF-DD0206B853E7}" v="2" dt="2026-10-02T01:15:06.370"/>
+  </p1510:revLst>
+</p1510:revInfo>
+</file>
+
+<file path=ppt/changesInfos/changesInfo1.xml><?xml version="1.0" encoding="utf-8"?>
+<pc:chgInfo xmlns:a="http://schemas.openxmlformats.org/drawingml/2006/main" xmlns:r="http://schemas.openxmlformats.org/officeDocument/2006/relationships" xmlns:ac="http://schemas.microsoft.com/office/drawing/2013/main/command" xmlns:pc="http://schemas.microsoft.com/office/powerpoint/2013/main/command">
+  <pc:docChgLst>
+    <pc:chgData name="202304239" userId="ab1adf7a-b8eb-4038-b404-de23e20d8a3a" providerId="ADAL" clId="{6C0E59ED-D716-49AF-B2FA-B94E7B8E5A8C}"/>
+    <pc:docChg chg="modSld">
+      <pc:chgData name="202304239" userId="ab1adf7a-b8eb-4038-b404-de23e20d8a3a" providerId="ADAL" clId="{6C0E59ED-D716-49AF-B2FA-B94E7B8E5A8C}" dt="2026-10-02T01:15:41.310" v="14" actId="1076"/>
+      <pc:docMkLst>
+        <pc:docMk/>
+      </pc:docMkLst>
+      <pc:sldChg chg="modSp mod">
+        <pc:chgData name="202304239" userId="ab1adf7a-b8eb-4038-b404-de23e20d8a3a" providerId="ADAL" clId="{6C0E59ED-D716-49AF-B2FA-B94E7B8E5A8C}" dt="2026-10-02T01:15:41.310" v="14" actId="1076"/>
+        <pc:sldMkLst>
+          <pc:docMk/>
+          <pc:sldMk cId="0" sldId="258"/>
+        </pc:sldMkLst>
+        <pc:spChg chg="mod">
+          <ac:chgData name="202304239" userId="ab1adf7a-b8eb-4038-b404-de23e20d8a3a" providerId="ADAL" clId="{6C0E59ED-D716-49AF-B2FA-B94E7B8E5A8C}" dt="2026-10-02T01:15:41.310" v="14" actId="1076"/>
+          <ac:spMkLst>
+            <pc:docMk/>
+            <pc:sldMk cId="0" sldId="258"/>
+            <ac:spMk id="7" creationId="{0C0F810D-B137-252F-B137-69AD8335E4B7}"/>
+          </ac:spMkLst>
+        </pc:spChg>
+      </pc:sldChg>
+      <pc:sldChg chg="modSp">
+        <pc:chgData name="202304239" userId="ab1adf7a-b8eb-4038-b404-de23e20d8a3a" providerId="ADAL" clId="{6C0E59ED-D716-49AF-B2FA-B94E7B8E5A8C}" dt="2026-10-02T01:13:59.581" v="0"/>
+        <pc:sldMkLst>
+          <pc:docMk/>
+          <pc:sldMk cId="0" sldId="259"/>
+        </pc:sldMkLst>
+        <pc:spChg chg="mod">
+          <ac:chgData name="202304239" userId="ab1adf7a-b8eb-4038-b404-de23e20d8a3a" providerId="ADAL" clId="{6C0E59ED-D716-49AF-B2FA-B94E7B8E5A8C}" dt="2026-10-02T01:13:59.581" v="0"/>
+          <ac:spMkLst>
+            <pc:docMk/>
+            <pc:sldMk cId="0" sldId="259"/>
+            <ac:spMk id="3" creationId="{00000000-0000-0000-0000-000000000000}"/>
+          </ac:spMkLst>
+        </pc:spChg>
+      </pc:sldChg>
+    </pc:docChg>
+  </pc:docChgLst>
+</pc:chgInfo>
 </file>
 
 <file path=ppt/notesMasters/notesMaster1.xml><?xml version="1.0" encoding="utf-8"?>
@@ -9559,8 +9611,8 @@
         </p:nvSpPr>
         <p:spPr>
           <a:xfrm>
-            <a:off x="9995606" y="4690094"/>
-            <a:ext cx="1753564" cy="707886"/>
+            <a:off x="9496448" y="4625926"/>
+            <a:ext cx="2630772" cy="954107"/>
           </a:xfrm>
           <a:prstGeom prst="rect">
             <a:avLst/>
@@ -9574,13 +9626,24 @@
           <a:lstStyle/>
           <a:p>
             <a:r>
-              <a:rPr lang="ja-JP" altLang="en-US" sz="4000"/>
+              <a:rPr lang="ja-JP" altLang="en-US" sz="2800"/>
               <a:t>６</a:t>
             </a:r>
             <a:r>
-              <a:rPr lang="en-US" altLang="ja-JP" sz="4000"/>
+              <a:rPr lang="en-US" altLang="ja-JP" sz="2800"/>
               <a:t>bin</a:t>
             </a:r>
+            <a:r>
+              <a:rPr lang="en-US" sz="2800"/>
+              <a:t> </a:t>
+            </a:r>
+          </a:p>
+          <a:p>
+            <a:r>
+              <a:rPr lang="en-US" sz="2800"/>
+              <a:t>（20.8 GeV）</a:t>
+            </a:r>
+            <a:endParaRPr lang="en-US" altLang="ja-JP" sz="2800"/>
           </a:p>
         </p:txBody>
       </p:sp>
@@ -10392,7 +10455,23 @@
             </a:r>
             <a:r>
               <a:rPr lang="en-US" sz="2000"/>
-              <a:t>、ICS、</a:t>
+              <a:t>、ICS</a:t>
+            </a:r>
+            <a:r>
+              <a:rPr lang="en-US" sz="1800"/>
+              <a:t> (</a:t>
+            </a:r>
+            <a:r>
+              <a:rPr lang="en-US" sz="2000"/>
+              <a:t>GALPROP)</a:t>
+            </a:r>
+            <a:r>
+              <a:rPr lang="en-US" sz="1800"/>
+              <a:t>、 </a:t>
+            </a:r>
+            <a:r>
+              <a:rPr lang="en-US" sz="2000"/>
+              <a:t>、</a:t>
             </a:r>
             <a:r>
               <a:rPr lang="ja-JP" altLang="en-US" sz="2000"/>

--- a/slides/2026-10-02_研究進捗報告.pptx
+++ b/slides/2026-10-02_研究進捗報告.pptx
@@ -173,10 +173,25 @@
   <pc:docChgLst>
     <pc:chgData name="202304239" userId="ab1adf7a-b8eb-4038-b404-de23e20d8a3a" providerId="ADAL" clId="{6C0E59ED-D716-49AF-B2FA-B94E7B8E5A8C}"/>
     <pc:docChg chg="modSld">
-      <pc:chgData name="202304239" userId="ab1adf7a-b8eb-4038-b404-de23e20d8a3a" providerId="ADAL" clId="{6C0E59ED-D716-49AF-B2FA-B94E7B8E5A8C}" dt="2026-10-02T01:15:41.310" v="14" actId="1076"/>
+      <pc:chgData name="202304239" userId="ab1adf7a-b8eb-4038-b404-de23e20d8a3a" providerId="ADAL" clId="{6C0E59ED-D716-49AF-B2FA-B94E7B8E5A8C}" dt="2026-10-02T01:41:32.636" v="29" actId="20577"/>
       <pc:docMkLst>
         <pc:docMk/>
       </pc:docMkLst>
+      <pc:sldChg chg="modSp mod">
+        <pc:chgData name="202304239" userId="ab1adf7a-b8eb-4038-b404-de23e20d8a3a" providerId="ADAL" clId="{6C0E59ED-D716-49AF-B2FA-B94E7B8E5A8C}" dt="2026-10-02T01:41:32.636" v="29" actId="20577"/>
+        <pc:sldMkLst>
+          <pc:docMk/>
+          <pc:sldMk cId="0" sldId="257"/>
+        </pc:sldMkLst>
+        <pc:spChg chg="mod">
+          <ac:chgData name="202304239" userId="ab1adf7a-b8eb-4038-b404-de23e20d8a3a" providerId="ADAL" clId="{6C0E59ED-D716-49AF-B2FA-B94E7B8E5A8C}" dt="2026-10-02T01:41:32.636" v="29" actId="20577"/>
+          <ac:spMkLst>
+            <pc:docMk/>
+            <pc:sldMk cId="0" sldId="257"/>
+            <ac:spMk id="3" creationId="{00000000-0000-0000-0000-000000000000}"/>
+          </ac:spMkLst>
+        </pc:spChg>
+      </pc:sldChg>
       <pc:sldChg chg="modSp mod">
         <pc:chgData name="202304239" userId="ab1adf7a-b8eb-4038-b404-de23e20d8a3a" providerId="ADAL" clId="{6C0E59ED-D716-49AF-B2FA-B94E7B8E5A8C}" dt="2026-10-02T01:15:41.310" v="14" actId="1076"/>
         <pc:sldMkLst>
@@ -7942,16 +7957,12 @@
           </a:p>
           <a:p>
             <a:r>
-              <a:rPr sz="2400" b="1"/>
-              <a:t>研究</a:t>
-            </a:r>
-            <a:r>
               <a:rPr lang="ja-JP" altLang="en-US" sz="2400" b="1"/>
               <a:t>卒業</a:t>
             </a:r>
             <a:r>
               <a:rPr sz="2400" b="1"/>
-              <a:t>：これを自分で再現し、本物かどうか確かめる</a:t>
+              <a:t>研究：これを自分で再現し、本物かどうか確かめる</a:t>
             </a:r>
             <a:endParaRPr lang="en-US" sz="2400" b="1"/>
           </a:p>
